--- a/Rooted_for_the_Future.pptx
+++ b/Rooted_for_the_Future.pptx
@@ -3488,9 +3488,9 @@
                 <a:solidFill>
                   <a:srgbClr val="F3ECDD"/>
                 </a:solidFill>
-                <a:latin typeface="Century Schoolbook" pitchFamily="34" charset="0"/>
-                <a:ea typeface="Century Schoolbook" pitchFamily="34" charset="-122"/>
-                <a:cs typeface="Century Schoolbook" pitchFamily="34" charset="-120"/>
+                <a:latin typeface="Georgia" pitchFamily="34" charset="0"/>
+                <a:ea typeface="Georgia" pitchFamily="34" charset="-122"/>
+                <a:cs typeface="Georgia" pitchFamily="34" charset="-120"/>
               </a:rPr>
               <a:t>Rooted for the Future</a:t>
             </a:r>
@@ -3640,9 +3640,9 @@
                 <a:solidFill>
                   <a:srgbClr val="1D1A15"/>
                 </a:solidFill>
-                <a:latin typeface="Century Schoolbook" pitchFamily="34" charset="0"/>
-                <a:ea typeface="Century Schoolbook" pitchFamily="34" charset="-122"/>
-                <a:cs typeface="Century Schoolbook" pitchFamily="34" charset="-120"/>
+                <a:latin typeface="Georgia" pitchFamily="34" charset="0"/>
+                <a:ea typeface="Georgia" pitchFamily="34" charset="-122"/>
+                <a:cs typeface="Georgia" pitchFamily="34" charset="-120"/>
               </a:rPr>
               <a:t>A complete Social Media Dashboard</a:t>
             </a:r>
@@ -4211,9 +4211,9 @@
                 <a:solidFill>
                   <a:srgbClr val="1D1A15"/>
                 </a:solidFill>
-                <a:latin typeface="Century Schoolbook" pitchFamily="34" charset="0"/>
-                <a:ea typeface="Century Schoolbook" pitchFamily="34" charset="-122"/>
-                <a:cs typeface="Century Schoolbook" pitchFamily="34" charset="-120"/>
+                <a:latin typeface="Georgia" pitchFamily="34" charset="0"/>
+                <a:ea typeface="Georgia" pitchFamily="34" charset="-122"/>
+                <a:cs typeface="Georgia" pitchFamily="34" charset="-120"/>
               </a:rPr>
               <a:t>12.4k</a:t>
             </a:r>
@@ -4316,9 +4316,9 @@
                 <a:solidFill>
                   <a:srgbClr val="1D1A15"/>
                 </a:solidFill>
-                <a:latin typeface="Century Schoolbook" pitchFamily="34" charset="0"/>
-                <a:ea typeface="Century Schoolbook" pitchFamily="34" charset="-122"/>
-                <a:cs typeface="Century Schoolbook" pitchFamily="34" charset="-120"/>
+                <a:latin typeface="Georgia" pitchFamily="34" charset="0"/>
+                <a:ea typeface="Georgia" pitchFamily="34" charset="-122"/>
+                <a:cs typeface="Georgia" pitchFamily="34" charset="-120"/>
               </a:rPr>
               <a:t>4.8%</a:t>
             </a:r>
@@ -4421,9 +4421,9 @@
                 <a:solidFill>
                   <a:srgbClr val="1D1A15"/>
                 </a:solidFill>
-                <a:latin typeface="Century Schoolbook" pitchFamily="34" charset="0"/>
-                <a:ea typeface="Century Schoolbook" pitchFamily="34" charset="-122"/>
-                <a:cs typeface="Century Schoolbook" pitchFamily="34" charset="-120"/>
+                <a:latin typeface="Georgia" pitchFamily="34" charset="0"/>
+                <a:ea typeface="Georgia" pitchFamily="34" charset="-122"/>
+                <a:cs typeface="Georgia" pitchFamily="34" charset="-120"/>
               </a:rPr>
               <a:t>86k</a:t>
             </a:r>
@@ -5356,9 +5356,9 @@
                 <a:solidFill>
                   <a:srgbClr val="1D1A15"/>
                 </a:solidFill>
-                <a:latin typeface="Century Schoolbook" pitchFamily="34" charset="0"/>
-                <a:ea typeface="Century Schoolbook" pitchFamily="34" charset="-122"/>
-                <a:cs typeface="Century Schoolbook" pitchFamily="34" charset="-120"/>
+                <a:latin typeface="Georgia" pitchFamily="34" charset="0"/>
+                <a:ea typeface="Georgia" pitchFamily="34" charset="-122"/>
+                <a:cs typeface="Georgia" pitchFamily="34" charset="-120"/>
               </a:rPr>
               <a:t>Customer Service hub</a:t>
             </a:r>
@@ -5721,9 +5721,9 @@
                 <a:solidFill>
                   <a:srgbClr val="1D1A15"/>
                 </a:solidFill>
-                <a:latin typeface="Century Schoolbook" pitchFamily="34" charset="0"/>
-                <a:ea typeface="Century Schoolbook" pitchFamily="34" charset="-122"/>
-                <a:cs typeface="Century Schoolbook" pitchFamily="34" charset="-120"/>
+                <a:latin typeface="Georgia" pitchFamily="34" charset="0"/>
+                <a:ea typeface="Georgia" pitchFamily="34" charset="-122"/>
+                <a:cs typeface="Georgia" pitchFamily="34" charset="-120"/>
               </a:rPr>
               <a:t>Inbox &amp; messaging</a:t>
             </a:r>
@@ -6000,9 +6000,9 @@
                 <a:solidFill>
                   <a:srgbClr val="1D1A15"/>
                 </a:solidFill>
-                <a:latin typeface="Century Schoolbook" pitchFamily="34" charset="0"/>
-                <a:ea typeface="Century Schoolbook" pitchFamily="34" charset="-122"/>
-                <a:cs typeface="Century Schoolbook" pitchFamily="34" charset="-120"/>
+                <a:latin typeface="Georgia" pitchFamily="34" charset="0"/>
+                <a:ea typeface="Georgia" pitchFamily="34" charset="-122"/>
+                <a:cs typeface="Georgia" pitchFamily="34" charset="-120"/>
               </a:rPr>
               <a:t>Workflows: the “pizza-tracker” engine</a:t>
             </a:r>
@@ -6365,9 +6365,9 @@
                 <a:solidFill>
                   <a:srgbClr val="1D1A15"/>
                 </a:solidFill>
-                <a:latin typeface="Century Schoolbook" pitchFamily="34" charset="0"/>
-                <a:ea typeface="Century Schoolbook" pitchFamily="34" charset="-122"/>
-                <a:cs typeface="Century Schoolbook" pitchFamily="34" charset="-120"/>
+                <a:latin typeface="Georgia" pitchFamily="34" charset="0"/>
+                <a:ea typeface="Georgia" pitchFamily="34" charset="-122"/>
+                <a:cs typeface="Georgia" pitchFamily="34" charset="-120"/>
               </a:rPr>
               <a:t>Workflow hand-offs</a:t>
             </a:r>
@@ -6730,9 +6730,9 @@
                 <a:solidFill>
                   <a:srgbClr val="1D1A15"/>
                 </a:solidFill>
-                <a:latin typeface="Century Schoolbook" pitchFamily="34" charset="0"/>
-                <a:ea typeface="Century Schoolbook" pitchFamily="34" charset="-122"/>
-                <a:cs typeface="Century Schoolbook" pitchFamily="34" charset="-120"/>
+                <a:latin typeface="Georgia" pitchFamily="34" charset="0"/>
+                <a:ea typeface="Georgia" pitchFamily="34" charset="-122"/>
+                <a:cs typeface="Georgia" pitchFamily="34" charset="-120"/>
               </a:rPr>
               <a:t>People &amp; HR</a:t>
             </a:r>
@@ -7706,9 +7706,9 @@
                 <a:solidFill>
                   <a:srgbClr val="1D1A15"/>
                 </a:solidFill>
-                <a:latin typeface="Century Schoolbook" pitchFamily="34" charset="0"/>
-                <a:ea typeface="Century Schoolbook" pitchFamily="34" charset="-122"/>
-                <a:cs typeface="Century Schoolbook" pitchFamily="34" charset="-120"/>
+                <a:latin typeface="Georgia" pitchFamily="34" charset="0"/>
+                <a:ea typeface="Georgia" pitchFamily="34" charset="-122"/>
+                <a:cs typeface="Georgia" pitchFamily="34" charset="-120"/>
               </a:rPr>
               <a:t>Notepad</a:t>
             </a:r>
@@ -8682,9 +8682,9 @@
                 <a:solidFill>
                   <a:srgbClr val="1D1A15"/>
                 </a:solidFill>
-                <a:latin typeface="Century Schoolbook" pitchFamily="34" charset="0"/>
-                <a:ea typeface="Century Schoolbook" pitchFamily="34" charset="-122"/>
-                <a:cs typeface="Century Schoolbook" pitchFamily="34" charset="-120"/>
+                <a:latin typeface="Georgia" pitchFamily="34" charset="0"/>
+                <a:ea typeface="Georgia" pitchFamily="34" charset="-122"/>
+                <a:cs typeface="Georgia" pitchFamily="34" charset="-120"/>
               </a:rPr>
               <a:t>Connections &amp; Vault</a:t>
             </a:r>
@@ -9618,9 +9618,9 @@
                 <a:solidFill>
                   <a:srgbClr val="F3ECDD"/>
                 </a:solidFill>
-                <a:latin typeface="Century Schoolbook" pitchFamily="34" charset="0"/>
-                <a:ea typeface="Century Schoolbook" pitchFamily="34" charset="-122"/>
-                <a:cs typeface="Century Schoolbook" pitchFamily="34" charset="-120"/>
+                <a:latin typeface="Georgia" pitchFamily="34" charset="0"/>
+                <a:ea typeface="Georgia" pitchFamily="34" charset="-122"/>
+                <a:cs typeface="Georgia" pitchFamily="34" charset="-120"/>
               </a:rPr>
               <a:t>The School Portal</a:t>
             </a:r>
@@ -9773,9 +9773,9 @@
                 <a:solidFill>
                   <a:srgbClr val="1D1A15"/>
                 </a:solidFill>
-                <a:latin typeface="Century Schoolbook" pitchFamily="34" charset="0"/>
-                <a:ea typeface="Century Schoolbook" pitchFamily="34" charset="-122"/>
-                <a:cs typeface="Century Schoolbook" pitchFamily="34" charset="-120"/>
+                <a:latin typeface="Georgia" pitchFamily="34" charset="0"/>
+                <a:ea typeface="Georgia" pitchFamily="34" charset="-122"/>
+                <a:cs typeface="Georgia" pitchFamily="34" charset="-120"/>
               </a:rPr>
               <a:t>Schools directory</a:t>
             </a:r>
@@ -10166,9 +10166,9 @@
                 <a:solidFill>
                   <a:srgbClr val="F3ECDD"/>
                 </a:solidFill>
-                <a:latin typeface="Century Schoolbook" pitchFamily="34" charset="0"/>
-                <a:ea typeface="Century Schoolbook" pitchFamily="34" charset="-122"/>
-                <a:cs typeface="Century Schoolbook" pitchFamily="34" charset="-120"/>
+                <a:latin typeface="Georgia" pitchFamily="34" charset="0"/>
+                <a:ea typeface="Georgia" pitchFamily="34" charset="-122"/>
+                <a:cs typeface="Georgia" pitchFamily="34" charset="-120"/>
               </a:rPr>
               <a:t>What we’d build</a:t>
             </a:r>
@@ -10360,9 +10360,9 @@
                 <a:solidFill>
                   <a:srgbClr val="1D1A15"/>
                 </a:solidFill>
-                <a:latin typeface="Century Schoolbook" pitchFamily="34" charset="0"/>
-                <a:ea typeface="Century Schoolbook" pitchFamily="34" charset="-122"/>
-                <a:cs typeface="Century Schoolbook" pitchFamily="34" charset="-120"/>
+                <a:latin typeface="Georgia" pitchFamily="34" charset="0"/>
+                <a:ea typeface="Georgia" pitchFamily="34" charset="-122"/>
+                <a:cs typeface="Georgia" pitchFamily="34" charset="-120"/>
               </a:rPr>
               <a:t>The school page</a:t>
             </a:r>
@@ -10725,9 +10725,9 @@
                 <a:solidFill>
                   <a:srgbClr val="1D1A15"/>
                 </a:solidFill>
-                <a:latin typeface="Century Schoolbook" pitchFamily="34" charset="0"/>
-                <a:ea typeface="Century Schoolbook" pitchFamily="34" charset="-122"/>
-                <a:cs typeface="Century Schoolbook" pitchFamily="34" charset="-120"/>
+                <a:latin typeface="Georgia" pitchFamily="34" charset="0"/>
+                <a:ea typeface="Georgia" pitchFamily="34" charset="-122"/>
+                <a:cs typeface="Georgia" pitchFamily="34" charset="-120"/>
               </a:rPr>
               <a:t>Schools in onboarding</a:t>
             </a:r>
@@ -11138,9 +11138,9 @@
                 <a:solidFill>
                   <a:srgbClr val="F3ECDD"/>
                 </a:solidFill>
-                <a:latin typeface="Century Schoolbook" pitchFamily="34" charset="0"/>
-                <a:ea typeface="Century Schoolbook" pitchFamily="34" charset="-122"/>
-                <a:cs typeface="Century Schoolbook" pitchFamily="34" charset="-120"/>
+                <a:latin typeface="Georgia" pitchFamily="34" charset="0"/>
+                <a:ea typeface="Georgia" pitchFamily="34" charset="-122"/>
+                <a:cs typeface="Georgia" pitchFamily="34" charset="-120"/>
               </a:rPr>
               <a:t>The optimization track</a:t>
             </a:r>
@@ -11293,9 +11293,9 @@
                 <a:solidFill>
                   <a:srgbClr val="1D1A15"/>
                 </a:solidFill>
-                <a:latin typeface="Century Schoolbook" pitchFamily="34" charset="0"/>
-                <a:ea typeface="Century Schoolbook" pitchFamily="34" charset="-122"/>
-                <a:cs typeface="Century Schoolbook" pitchFamily="34" charset="-120"/>
+                <a:latin typeface="Georgia" pitchFamily="34" charset="0"/>
+                <a:ea typeface="Georgia" pitchFamily="34" charset="-122"/>
+                <a:cs typeface="Georgia" pitchFamily="34" charset="-120"/>
               </a:rPr>
               <a:t>All your Salesforce data in one place</a:t>
             </a:r>
@@ -12391,9 +12391,9 @@
                 <a:solidFill>
                   <a:srgbClr val="1D1A15"/>
                 </a:solidFill>
-                <a:latin typeface="Century Schoolbook" pitchFamily="34" charset="0"/>
-                <a:ea typeface="Century Schoolbook" pitchFamily="34" charset="-122"/>
-                <a:cs typeface="Century Schoolbook" pitchFamily="34" charset="-120"/>
+                <a:latin typeface="Georgia" pitchFamily="34" charset="0"/>
+                <a:ea typeface="Georgia" pitchFamily="34" charset="-122"/>
+                <a:cs typeface="Georgia" pitchFamily="34" charset="-120"/>
               </a:rPr>
               <a:t>All your tools, working together</a:t>
             </a:r>
@@ -13284,9 +13284,9 @@
                 <a:solidFill>
                   <a:srgbClr val="7A5A12"/>
                 </a:solidFill>
-                <a:latin typeface="Century Schoolbook" pitchFamily="34" charset="0"/>
-                <a:ea typeface="Century Schoolbook" pitchFamily="34" charset="-122"/>
-                <a:cs typeface="Century Schoolbook" pitchFamily="34" charset="-120"/>
+                <a:latin typeface="Georgia" pitchFamily="34" charset="0"/>
+                <a:ea typeface="Georgia" pitchFamily="34" charset="-122"/>
+                <a:cs typeface="Georgia" pitchFamily="34" charset="-120"/>
               </a:rPr>
               <a:t>DeepRoots · one platform</a:t>
             </a:r>
@@ -13397,9 +13397,9 @@
                 <a:solidFill>
                   <a:srgbClr val="1D1A15"/>
                 </a:solidFill>
-                <a:latin typeface="Century Schoolbook" pitchFamily="34" charset="0"/>
-                <a:ea typeface="Century Schoolbook" pitchFamily="34" charset="-122"/>
-                <a:cs typeface="Century Schoolbook" pitchFamily="34" charset="-120"/>
+                <a:latin typeface="Georgia" pitchFamily="34" charset="0"/>
+                <a:ea typeface="Georgia" pitchFamily="34" charset="-122"/>
+                <a:cs typeface="Georgia" pitchFamily="34" charset="-120"/>
               </a:rPr>
               <a:t>Data foundation &amp; automation</a:t>
             </a:r>
@@ -14234,9 +14234,9 @@
                 <a:solidFill>
                   <a:srgbClr val="1D1A15"/>
                 </a:solidFill>
-                <a:latin typeface="Century Schoolbook" pitchFamily="34" charset="0"/>
-                <a:ea typeface="Century Schoolbook" pitchFamily="34" charset="-122"/>
-                <a:cs typeface="Century Schoolbook" pitchFamily="34" charset="-120"/>
+                <a:latin typeface="Georgia" pitchFamily="34" charset="0"/>
+                <a:ea typeface="Georgia" pitchFamily="34" charset="-122"/>
+                <a:cs typeface="Georgia" pitchFamily="34" charset="-120"/>
               </a:rPr>
               <a:t>A DeepRoots helper that knows who you are</a:t>
             </a:r>
@@ -15202,9 +15202,9 @@
                 <a:solidFill>
                   <a:srgbClr val="1D1A15"/>
                 </a:solidFill>
-                <a:latin typeface="Century Schoolbook" pitchFamily="34" charset="0"/>
-                <a:ea typeface="Century Schoolbook" pitchFamily="34" charset="-122"/>
-                <a:cs typeface="Century Schoolbook" pitchFamily="34" charset="-120"/>
+                <a:latin typeface="Georgia" pitchFamily="34" charset="0"/>
+                <a:ea typeface="Georgia" pitchFamily="34" charset="-122"/>
+                <a:cs typeface="Georgia" pitchFamily="34" charset="-120"/>
               </a:rPr>
               <a:t>More advanced features, as we go</a:t>
             </a:r>
@@ -16642,9 +16642,9 @@
                 <a:solidFill>
                   <a:srgbClr val="1D1A15"/>
                 </a:solidFill>
-                <a:latin typeface="Century Schoolbook" pitchFamily="34" charset="0"/>
-                <a:ea typeface="Century Schoolbook" pitchFamily="34" charset="-122"/>
-                <a:cs typeface="Century Schoolbook" pitchFamily="34" charset="-120"/>
+                <a:latin typeface="Georgia" pitchFamily="34" charset="0"/>
+                <a:ea typeface="Georgia" pitchFamily="34" charset="-122"/>
+                <a:cs typeface="Georgia" pitchFamily="34" charset="-120"/>
               </a:rPr>
               <a:t>Where it stands and what’s next</a:t>
             </a:r>
@@ -17657,9 +17657,9 @@
                 <a:solidFill>
                   <a:srgbClr val="F3ECDD"/>
                 </a:solidFill>
-                <a:latin typeface="Century Schoolbook" pitchFamily="34" charset="0"/>
-                <a:ea typeface="Century Schoolbook" pitchFamily="34" charset="-122"/>
-                <a:cs typeface="Century Schoolbook" pitchFamily="34" charset="-120"/>
+                <a:latin typeface="Georgia" pitchFamily="34" charset="0"/>
+                <a:ea typeface="Georgia" pitchFamily="34" charset="-122"/>
+                <a:cs typeface="Georgia" pitchFamily="34" charset="-120"/>
               </a:rPr>
               <a:t>What we’d build</a:t>
             </a:r>
@@ -17812,9 +17812,9 @@
                 <a:solidFill>
                   <a:srgbClr val="1D1A15"/>
                 </a:solidFill>
-                <a:latin typeface="Century Schoolbook" pitchFamily="34" charset="0"/>
-                <a:ea typeface="Century Schoolbook" pitchFamily="34" charset="-122"/>
-                <a:cs typeface="Century Schoolbook" pitchFamily="34" charset="-120"/>
+                <a:latin typeface="Georgia" pitchFamily="34" charset="0"/>
+                <a:ea typeface="Georgia" pitchFamily="34" charset="-122"/>
+                <a:cs typeface="Georgia" pitchFamily="34" charset="-120"/>
               </a:rPr>
               <a:t>One system, three surfaces</a:t>
             </a:r>
@@ -18182,9 +18182,9 @@
                 <a:solidFill>
                   <a:srgbClr val="1D1A15"/>
                 </a:solidFill>
-                <a:latin typeface="Century Schoolbook" pitchFamily="34" charset="0"/>
-                <a:ea typeface="Century Schoolbook" pitchFamily="34" charset="-122"/>
-                <a:cs typeface="Century Schoolbook" pitchFamily="34" charset="-120"/>
+                <a:latin typeface="Georgia" pitchFamily="34" charset="0"/>
+                <a:ea typeface="Georgia" pitchFamily="34" charset="-122"/>
+                <a:cs typeface="Georgia" pitchFamily="34" charset="-120"/>
               </a:rPr>
               <a:t>Public site</a:t>
             </a:r>
@@ -18287,9 +18287,9 @@
                 <a:solidFill>
                   <a:srgbClr val="1D1A15"/>
                 </a:solidFill>
-                <a:latin typeface="Century Schoolbook" pitchFamily="34" charset="0"/>
-                <a:ea typeface="Century Schoolbook" pitchFamily="34" charset="-122"/>
-                <a:cs typeface="Century Schoolbook" pitchFamily="34" charset="-120"/>
+                <a:latin typeface="Georgia" pitchFamily="34" charset="0"/>
+                <a:ea typeface="Georgia" pitchFamily="34" charset="-122"/>
+                <a:cs typeface="Georgia" pitchFamily="34" charset="-120"/>
               </a:rPr>
               <a:t>Staff portal</a:t>
             </a:r>
@@ -18392,9 +18392,9 @@
                 <a:solidFill>
                   <a:srgbClr val="1D1A15"/>
                 </a:solidFill>
-                <a:latin typeface="Century Schoolbook" pitchFamily="34" charset="0"/>
-                <a:ea typeface="Century Schoolbook" pitchFamily="34" charset="-122"/>
-                <a:cs typeface="Century Schoolbook" pitchFamily="34" charset="-120"/>
+                <a:latin typeface="Georgia" pitchFamily="34" charset="0"/>
+                <a:ea typeface="Georgia" pitchFamily="34" charset="-122"/>
+                <a:cs typeface="Georgia" pitchFamily="34" charset="-120"/>
               </a:rPr>
               <a:t>School Portal</a:t>
             </a:r>
@@ -18607,9 +18607,9 @@
                 <a:solidFill>
                   <a:srgbClr val="1D1A15"/>
                 </a:solidFill>
-                <a:latin typeface="Century Schoolbook" pitchFamily="34" charset="0"/>
-                <a:ea typeface="Century Schoolbook" pitchFamily="34" charset="-122"/>
-                <a:cs typeface="Century Schoolbook" pitchFamily="34" charset="-120"/>
+                <a:latin typeface="Georgia" pitchFamily="34" charset="0"/>
+                <a:ea typeface="Georgia" pitchFamily="34" charset="-122"/>
+                <a:cs typeface="Georgia" pitchFamily="34" charset="-120"/>
               </a:rPr>
               <a:t>How we’ll build it, in three phases</a:t>
             </a:r>
@@ -18700,9 +18700,9 @@
                 <a:solidFill>
                   <a:srgbClr val="FFFFFF"/>
                 </a:solidFill>
-                <a:latin typeface="Century Schoolbook" pitchFamily="34" charset="0"/>
-                <a:ea typeface="Century Schoolbook" pitchFamily="34" charset="-122"/>
-                <a:cs typeface="Century Schoolbook" pitchFamily="34" charset="-120"/>
+                <a:latin typeface="Georgia" pitchFamily="34" charset="0"/>
+                <a:ea typeface="Georgia" pitchFamily="34" charset="-122"/>
+                <a:cs typeface="Georgia" pitchFamily="34" charset="-120"/>
               </a:rPr>
               <a:t>1</a:t>
             </a:r>
@@ -18844,9 +18844,9 @@
                 <a:solidFill>
                   <a:srgbClr val="1D1A15"/>
                 </a:solidFill>
-                <a:latin typeface="Century Schoolbook" pitchFamily="34" charset="0"/>
-                <a:ea typeface="Century Schoolbook" pitchFamily="34" charset="-122"/>
-                <a:cs typeface="Century Schoolbook" pitchFamily="34" charset="-120"/>
+                <a:latin typeface="Georgia" pitchFamily="34" charset="0"/>
+                <a:ea typeface="Georgia" pitchFamily="34" charset="-122"/>
+                <a:cs typeface="Georgia" pitchFamily="34" charset="-120"/>
               </a:rPr>
               <a:t>The public website</a:t>
             </a:r>
@@ -19215,9 +19215,9 @@
                 <a:solidFill>
                   <a:srgbClr val="FFFFFF"/>
                 </a:solidFill>
-                <a:latin typeface="Century Schoolbook" pitchFamily="34" charset="0"/>
-                <a:ea typeface="Century Schoolbook" pitchFamily="34" charset="-122"/>
-                <a:cs typeface="Century Schoolbook" pitchFamily="34" charset="-120"/>
+                <a:latin typeface="Georgia" pitchFamily="34" charset="0"/>
+                <a:ea typeface="Georgia" pitchFamily="34" charset="-122"/>
+                <a:cs typeface="Georgia" pitchFamily="34" charset="-120"/>
               </a:rPr>
               <a:t>2</a:t>
             </a:r>
@@ -19359,9 +19359,9 @@
                 <a:solidFill>
                   <a:srgbClr val="1D1A15"/>
                 </a:solidFill>
-                <a:latin typeface="Century Schoolbook" pitchFamily="34" charset="0"/>
-                <a:ea typeface="Century Schoolbook" pitchFamily="34" charset="-122"/>
-                <a:cs typeface="Century Schoolbook" pitchFamily="34" charset="-120"/>
+                <a:latin typeface="Georgia" pitchFamily="34" charset="0"/>
+                <a:ea typeface="Georgia" pitchFamily="34" charset="-122"/>
+                <a:cs typeface="Georgia" pitchFamily="34" charset="-120"/>
               </a:rPr>
               <a:t>The operating platform</a:t>
             </a:r>
@@ -19730,9 +19730,9 @@
                 <a:solidFill>
                   <a:srgbClr val="FFFFFF"/>
                 </a:solidFill>
-                <a:latin typeface="Century Schoolbook" pitchFamily="34" charset="0"/>
-                <a:ea typeface="Century Schoolbook" pitchFamily="34" charset="-122"/>
-                <a:cs typeface="Century Schoolbook" pitchFamily="34" charset="-120"/>
+                <a:latin typeface="Georgia" pitchFamily="34" charset="0"/>
+                <a:ea typeface="Georgia" pitchFamily="34" charset="-122"/>
+                <a:cs typeface="Georgia" pitchFamily="34" charset="-120"/>
               </a:rPr>
               <a:t>3</a:t>
             </a:r>
@@ -19874,9 +19874,9 @@
                 <a:solidFill>
                   <a:srgbClr val="1D1A15"/>
                 </a:solidFill>
-                <a:latin typeface="Century Schoolbook" pitchFamily="34" charset="0"/>
-                <a:ea typeface="Century Schoolbook" pitchFamily="34" charset="-122"/>
-                <a:cs typeface="Century Schoolbook" pitchFamily="34" charset="-120"/>
+                <a:latin typeface="Georgia" pitchFamily="34" charset="0"/>
+                <a:ea typeface="Georgia" pitchFamily="34" charset="-122"/>
+                <a:cs typeface="Georgia" pitchFamily="34" charset="-120"/>
               </a:rPr>
               <a:t>Intelligence &amp; scale</a:t>
             </a:r>
@@ -20265,9 +20265,9 @@
                 <a:solidFill>
                   <a:srgbClr val="1D1A15"/>
                 </a:solidFill>
-                <a:latin typeface="Century Schoolbook" pitchFamily="34" charset="0"/>
-                <a:ea typeface="Century Schoolbook" pitchFamily="34" charset="-122"/>
-                <a:cs typeface="Century Schoolbook" pitchFamily="34" charset="-120"/>
+                <a:latin typeface="Georgia" pitchFamily="34" charset="0"/>
+                <a:ea typeface="Georgia" pitchFamily="34" charset="-122"/>
+                <a:cs typeface="Georgia" pitchFamily="34" charset="-120"/>
               </a:rPr>
               <a:t>The marketing website</a:t>
             </a:r>
@@ -20563,9 +20563,9 @@
                 <a:solidFill>
                   <a:srgbClr val="1D1A15"/>
                 </a:solidFill>
-                <a:latin typeface="Century Schoolbook" pitchFamily="34" charset="0"/>
-                <a:ea typeface="Century Schoolbook" pitchFamily="34" charset="-122"/>
-                <a:cs typeface="Century Schoolbook" pitchFamily="34" charset="-120"/>
+                <a:latin typeface="Georgia" pitchFamily="34" charset="0"/>
+                <a:ea typeface="Georgia" pitchFamily="34" charset="-122"/>
+                <a:cs typeface="Georgia" pitchFamily="34" charset="-120"/>
               </a:rPr>
               <a:t>Secure staff sign-in</a:t>
             </a:r>
@@ -20994,9 +20994,9 @@
                 <a:solidFill>
                   <a:srgbClr val="1D1A15"/>
                 </a:solidFill>
-                <a:latin typeface="Century Schoolbook" pitchFamily="34" charset="0"/>
-                <a:ea typeface="Century Schoolbook" pitchFamily="34" charset="-122"/>
-                <a:cs typeface="Century Schoolbook" pitchFamily="34" charset="-120"/>
+                <a:latin typeface="Georgia" pitchFamily="34" charset="0"/>
+                <a:ea typeface="Georgia" pitchFamily="34" charset="-122"/>
+                <a:cs typeface="Georgia" pitchFamily="34" charset="-120"/>
               </a:rPr>
               <a:t>Portal sign-in</a:t>
             </a:r>
@@ -21309,9 +21309,9 @@
                 <a:solidFill>
                   <a:srgbClr val="F3ECDD"/>
                 </a:solidFill>
-                <a:latin typeface="Century Schoolbook" pitchFamily="34" charset="0"/>
-                <a:ea typeface="Century Schoolbook" pitchFamily="34" charset="-122"/>
-                <a:cs typeface="Century Schoolbook" pitchFamily="34" charset="-120"/>
+                <a:latin typeface="Georgia" pitchFamily="34" charset="0"/>
+                <a:ea typeface="Georgia" pitchFamily="34" charset="-122"/>
+                <a:cs typeface="Georgia" pitchFamily="34" charset="-120"/>
               </a:rPr>
               <a:t>The internal portal</a:t>
             </a:r>
@@ -21464,9 +21464,9 @@
                 <a:solidFill>
                   <a:srgbClr val="1D1A15"/>
                 </a:solidFill>
-                <a:latin typeface="Century Schoolbook" pitchFamily="34" charset="0"/>
-                <a:ea typeface="Century Schoolbook" pitchFamily="34" charset="-122"/>
-                <a:cs typeface="Century Schoolbook" pitchFamily="34" charset="-120"/>
+                <a:latin typeface="Georgia" pitchFamily="34" charset="0"/>
+                <a:ea typeface="Georgia" pitchFamily="34" charset="-122"/>
+                <a:cs typeface="Georgia" pitchFamily="34" charset="-120"/>
               </a:rPr>
               <a:t>Overview: the company at a glance</a:t>
             </a:r>
@@ -21829,9 +21829,9 @@
                 <a:solidFill>
                   <a:srgbClr val="1D1A15"/>
                 </a:solidFill>
-                <a:latin typeface="Century Schoolbook" pitchFamily="34" charset="0"/>
-                <a:ea typeface="Century Schoolbook" pitchFamily="34" charset="-122"/>
-                <a:cs typeface="Century Schoolbook" pitchFamily="34" charset="-120"/>
+                <a:latin typeface="Georgia" pitchFamily="34" charset="0"/>
+                <a:ea typeface="Georgia" pitchFamily="34" charset="-122"/>
+                <a:cs typeface="Georgia" pitchFamily="34" charset="-120"/>
               </a:rPr>
               <a:t>Department hubs</a:t>
             </a:r>

--- a/Rooted_for_the_Future.pptx
+++ b/Rooted_for_the_Future.pptx
@@ -7668,7 +7668,7 @@
                 <a:ea typeface="Calibri" pitchFamily="34" charset="-122"/>
                 <a:cs typeface="Calibri" pitchFamily="34" charset="-120"/>
               </a:rPr>
-              <a:t>STAFF PORTAL · EVERY SCREEN</a:t>
+              <a:t>STAFF PORTAL · KNOWLEDGE BASE</a:t>
             </a:r>
             <a:endParaRPr lang="en-US" sz="1100" dirty="0"/>
           </a:p>
@@ -7702,7 +7702,7 @@
               <a:buNone/>
             </a:pPr>
             <a:r>
-              <a:rPr lang="en-US" sz="3200" b="1" dirty="0">
+              <a:rPr lang="en-US" sz="2800" b="1" dirty="0">
                 <a:solidFill>
                   <a:srgbClr val="1D1A15"/>
                 </a:solidFill>
@@ -7710,9 +7710,9 @@
                 <a:ea typeface="Georgia" pitchFamily="34" charset="-122"/>
                 <a:cs typeface="Georgia" pitchFamily="34" charset="-120"/>
               </a:rPr>
-              <a:t>Notepad</a:t>
-            </a:r>
-            <a:endParaRPr lang="en-US" sz="3200" dirty="0"/>
+              <a:t>The Rooted Knowledge Base Wiki</a:t>
+            </a:r>
+            <a:endParaRPr lang="en-US" sz="2800" dirty="0"/>
           </a:p>
         </p:txBody>
       </p:sp>
@@ -7752,7 +7752,7 @@
                 <a:ea typeface="Calibri" pitchFamily="34" charset="-122"/>
                 <a:cs typeface="Calibri" pitchFamily="34" charset="-120"/>
               </a:rPr>
-              <a:t>A floating notepad on every page, a timestamped note log per user, synced across devices, with send-to-teammate (in-app or email) and a “Shared with me” inbox.</a:t>
+              <a:t>One place to capture the company’s tribal knowledge: the how-tos, answers, and hard-won lessons that usually live in people’s heads. Any employee can add an article, search everything, and find the answer fast.</a:t>
             </a:r>
             <a:endParaRPr lang="en-US" sz="1500" dirty="0"/>
           </a:p>
@@ -7760,13 +7760,98 @@
       </p:sp>
       <p:sp>
         <p:nvSpPr>
-          <p:cNvPr id="5" name="Shape 3"/>
-          <p:cNvSpPr/>
+          <p:cNvPr id="5" name="Text 3"/>
+          <p:cNvSpPr txBox="1"/>
           <p:nvPr/>
         </p:nvSpPr>
         <p:spPr>
           <a:xfrm>
             <a:off x="822960" y="3657600"/>
+            <a:ext cx="5760720" cy="1115568"/>
+          </a:xfrm>
+          <a:prstGeom prst="rect">
+            <a:avLst/>
+          </a:prstGeom>
+          <a:noFill/>
+          <a:ln/>
+        </p:spPr>
+        <p:txBody>
+          <a:bodyPr wrap="square" lIns="0" tIns="0" rIns="0" bIns="0" rtlCol="0" anchor="t"/>
+          <a:lstStyle/>
+          <a:p>
+            <a:pPr marL="177800" indent="-177800">
+              <a:spcAft>
+                <a:spcPts val="800"/>
+              </a:spcAft>
+              <a:buSzPct val="100000"/>
+              <a:buChar char="•"/>
+            </a:pPr>
+            <a:r>
+              <a:rPr lang="en-US" sz="1350" dirty="0">
+                <a:solidFill>
+                  <a:srgbClr val="1D1A15"/>
+                </a:solidFill>
+                <a:latin typeface="Calibri" pitchFamily="34" charset="0"/>
+                <a:ea typeface="Calibri" pitchFamily="34" charset="-122"/>
+                <a:cs typeface="Calibri" pitchFamily="34" charset="-120"/>
+              </a:rPr>
+              <a:t>Anyone can add or edit an article</a:t>
+            </a:r>
+            <a:endParaRPr lang="en-US" sz="1350" dirty="0"/>
+          </a:p>
+          <a:p>
+            <a:pPr marL="177800" indent="-177800">
+              <a:spcAft>
+                <a:spcPts val="800"/>
+              </a:spcAft>
+              <a:buSzPct val="100000"/>
+              <a:buChar char="•"/>
+            </a:pPr>
+            <a:r>
+              <a:rPr lang="en-US" sz="1350" dirty="0">
+                <a:solidFill>
+                  <a:srgbClr val="1D1A15"/>
+                </a:solidFill>
+                <a:latin typeface="Calibri" pitchFamily="34" charset="0"/>
+                <a:ea typeface="Calibri" pitchFamily="34" charset="-122"/>
+                <a:cs typeface="Calibri" pitchFamily="34" charset="-120"/>
+              </a:rPr>
+              <a:t>Search across every how-to and answer</a:t>
+            </a:r>
+            <a:endParaRPr lang="en-US" sz="1350" dirty="0"/>
+          </a:p>
+          <a:p>
+            <a:pPr marL="177800" indent="-177800">
+              <a:spcAft>
+                <a:spcPts val="800"/>
+              </a:spcAft>
+              <a:buSzPct val="100000"/>
+              <a:buChar char="•"/>
+            </a:pPr>
+            <a:r>
+              <a:rPr lang="en-US" sz="1350" dirty="0">
+                <a:solidFill>
+                  <a:srgbClr val="1D1A15"/>
+                </a:solidFill>
+                <a:latin typeface="Calibri" pitchFamily="34" charset="0"/>
+                <a:ea typeface="Calibri" pitchFamily="34" charset="-122"/>
+                <a:cs typeface="Calibri" pitchFamily="34" charset="-120"/>
+              </a:rPr>
+              <a:t>Turns tribal knowledge into a shared, searchable library</a:t>
+            </a:r>
+            <a:endParaRPr lang="en-US" sz="1350" dirty="0"/>
+          </a:p>
+        </p:txBody>
+      </p:sp>
+      <p:sp>
+        <p:nvSpPr>
+          <p:cNvPr id="6" name="Shape 4"/>
+          <p:cNvSpPr/>
+          <p:nvPr/>
+        </p:nvSpPr>
+        <p:spPr>
+          <a:xfrm>
+            <a:off x="822960" y="4956048"/>
             <a:ext cx="1883664" cy="384048"/>
           </a:xfrm>
           <a:prstGeom prst="roundRect">
@@ -7787,13 +7872,13 @@
       </p:sp>
       <p:sp>
         <p:nvSpPr>
-          <p:cNvPr id="6" name="Text 4"/>
-          <p:cNvSpPr txBox="1"/>
-          <p:nvPr/>
-        </p:nvSpPr>
-        <p:spPr>
-          <a:xfrm>
-            <a:off x="969264" y="3639312"/>
+          <p:cNvPr id="7" name="Text 5"/>
+          <p:cNvSpPr txBox="1"/>
+          <p:nvPr/>
+        </p:nvSpPr>
+        <p:spPr>
+          <a:xfrm>
+            <a:off x="969264" y="4937760"/>
             <a:ext cx="1609344" cy="420624"/>
           </a:xfrm>
           <a:prstGeom prst="rect">
@@ -7818,7 +7903,7 @@
                 <a:ea typeface="Calibri" pitchFamily="34" charset="-122"/>
                 <a:cs typeface="Calibri" pitchFamily="34" charset="-120"/>
               </a:rPr>
-              <a:t>Private to each user</a:t>
+              <a:t>Everyone contributes</a:t>
             </a:r>
             <a:endParaRPr lang="en-US" sz="1050" dirty="0"/>
           </a:p>
@@ -7826,13 +7911,13 @@
       </p:sp>
       <p:sp>
         <p:nvSpPr>
-          <p:cNvPr id="7" name="Shape 5"/>
-          <p:cNvSpPr/>
-          <p:nvPr/>
-        </p:nvSpPr>
-        <p:spPr>
-          <a:xfrm>
-            <a:off x="2871216" y="3657600"/>
+          <p:cNvPr id="8" name="Shape 6"/>
+          <p:cNvSpPr/>
+          <p:nvPr/>
+        </p:nvSpPr>
+        <p:spPr>
+          <a:xfrm>
+            <a:off x="2871216" y="4956048"/>
             <a:ext cx="1097280" cy="384048"/>
           </a:xfrm>
           <a:prstGeom prst="roundRect">
@@ -7853,13 +7938,13 @@
       </p:sp>
       <p:sp>
         <p:nvSpPr>
-          <p:cNvPr id="8" name="Shape 6"/>
-          <p:cNvSpPr/>
-          <p:nvPr/>
-        </p:nvSpPr>
-        <p:spPr>
-          <a:xfrm>
-            <a:off x="3017520" y="3799332"/>
+          <p:cNvPr id="9" name="Shape 7"/>
+          <p:cNvSpPr/>
+          <p:nvPr/>
+        </p:nvSpPr>
+        <p:spPr>
+          <a:xfrm>
+            <a:off x="3017520" y="5097780"/>
             <a:ext cx="100584" cy="100584"/>
           </a:xfrm>
           <a:prstGeom prst="ellipse">
@@ -7873,13 +7958,13 @@
       </p:sp>
       <p:sp>
         <p:nvSpPr>
-          <p:cNvPr id="9" name="Text 7"/>
-          <p:cNvSpPr txBox="1"/>
-          <p:nvPr/>
-        </p:nvSpPr>
-        <p:spPr>
-          <a:xfrm>
-            <a:off x="3182112" y="3639312"/>
+          <p:cNvPr id="10" name="Text 8"/>
+          <p:cNvSpPr txBox="1"/>
+          <p:nvPr/>
+        </p:nvSpPr>
+        <p:spPr>
+          <a:xfrm>
+            <a:off x="3182112" y="4937760"/>
             <a:ext cx="822960" cy="420624"/>
           </a:xfrm>
           <a:prstGeom prst="rect">
@@ -7904,7 +7989,7 @@
                 <a:ea typeface="Calibri" pitchFamily="34" charset="-122"/>
                 <a:cs typeface="Calibri" pitchFamily="34" charset="-120"/>
               </a:rPr>
-              <a:t>Proposed</a:t>
+              <a:t>Planned</a:t>
             </a:r>
             <a:endParaRPr lang="en-US" sz="1050" dirty="0"/>
           </a:p>
@@ -7912,7 +7997,7 @@
       </p:sp>
       <p:sp>
         <p:nvSpPr>
-          <p:cNvPr id="10" name="Shape 8"/>
+          <p:cNvPr id="11" name="Shape 9"/>
           <p:cNvSpPr/>
           <p:nvPr/>
         </p:nvSpPr>
@@ -7946,7 +8031,7 @@
       </p:sp>
       <p:sp>
         <p:nvSpPr>
-          <p:cNvPr id="11" name="Shape 9"/>
+          <p:cNvPr id="12" name="Shape 10"/>
           <p:cNvSpPr/>
           <p:nvPr/>
         </p:nvSpPr>
@@ -7968,7 +8053,7 @@
       </p:sp>
       <p:sp>
         <p:nvSpPr>
-          <p:cNvPr id="12" name="Shape 10"/>
+          <p:cNvPr id="13" name="Shape 11"/>
           <p:cNvSpPr/>
           <p:nvPr/>
         </p:nvSpPr>
@@ -7988,7 +8073,7 @@
       </p:sp>
       <p:sp>
         <p:nvSpPr>
-          <p:cNvPr id="13" name="Shape 11"/>
+          <p:cNvPr id="14" name="Shape 12"/>
           <p:cNvSpPr/>
           <p:nvPr/>
         </p:nvSpPr>
@@ -8008,7 +8093,7 @@
       </p:sp>
       <p:sp>
         <p:nvSpPr>
-          <p:cNvPr id="14" name="Shape 12"/>
+          <p:cNvPr id="15" name="Shape 13"/>
           <p:cNvSpPr/>
           <p:nvPr/>
         </p:nvSpPr>
@@ -8028,7 +8113,7 @@
       </p:sp>
       <p:sp>
         <p:nvSpPr>
-          <p:cNvPr id="15" name="Shape 13"/>
+          <p:cNvPr id="16" name="Shape 14"/>
           <p:cNvSpPr/>
           <p:nvPr/>
         </p:nvSpPr>
@@ -8048,7 +8133,7 @@
       </p:sp>
       <p:sp>
         <p:nvSpPr>
-          <p:cNvPr id="16" name="Text 14"/>
+          <p:cNvPr id="17" name="Text 15"/>
           <p:cNvSpPr txBox="1"/>
           <p:nvPr/>
         </p:nvSpPr>
@@ -8079,7 +8164,7 @@
                 <a:ea typeface="Calibri" pitchFamily="34" charset="-122"/>
                 <a:cs typeface="Calibri" pitchFamily="34" charset="-120"/>
               </a:rPr>
-              <a:t>📝 Notepad · Overview</a:t>
+              <a:t>Rooted Knowledge Base</a:t>
             </a:r>
             <a:endParaRPr lang="en-US" sz="900" dirty="0"/>
           </a:p>
@@ -8087,7 +8172,7 @@
       </p:sp>
       <p:sp>
         <p:nvSpPr>
-          <p:cNvPr id="17" name="Shape 15"/>
+          <p:cNvPr id="18" name="Shape 16"/>
           <p:cNvSpPr/>
           <p:nvPr/>
         </p:nvSpPr>
@@ -8110,18 +8195,18 @@
       </p:sp>
       <p:sp>
         <p:nvSpPr>
-          <p:cNvPr id="18" name="Shape 16"/>
+          <p:cNvPr id="19" name="Shape 17"/>
           <p:cNvSpPr/>
           <p:nvPr/>
         </p:nvSpPr>
         <p:spPr>
           <a:xfrm>
             <a:off x="7296912" y="2212848"/>
-            <a:ext cx="3968496" cy="566928"/>
+            <a:ext cx="3968496" cy="365760"/>
           </a:xfrm>
           <a:prstGeom prst="roundRect">
             <a:avLst>
-              <a:gd name="adj" fmla="val 8065"/>
+              <a:gd name="adj" fmla="val 50000"/>
             </a:avLst>
           </a:prstGeom>
           <a:solidFill>
@@ -8137,45 +8222,42 @@
       </p:sp>
       <p:sp>
         <p:nvSpPr>
-          <p:cNvPr id="19" name="Shape 17"/>
-          <p:cNvSpPr/>
-          <p:nvPr/>
-        </p:nvSpPr>
-        <p:spPr>
-          <a:xfrm>
-            <a:off x="7443216" y="2446020"/>
-            <a:ext cx="100584" cy="100584"/>
-          </a:xfrm>
-          <a:prstGeom prst="ellipse">
-            <a:avLst/>
-          </a:prstGeom>
-          <a:solidFill>
-            <a:srgbClr val="5B7C46"/>
-          </a:solidFill>
-          <a:ln/>
-        </p:spPr>
-      </p:sp>
-      <p:sp>
-        <p:nvSpPr>
-          <p:cNvPr id="20" name="Shape 18"/>
-          <p:cNvSpPr/>
-          <p:nvPr/>
-        </p:nvSpPr>
-        <p:spPr>
-          <a:xfrm>
-            <a:off x="7680960" y="2455164"/>
-            <a:ext cx="1825508" cy="82296"/>
-          </a:xfrm>
-          <a:prstGeom prst="roundRect">
-            <a:avLst>
-              <a:gd name="adj" fmla="val 50000"/>
-            </a:avLst>
-          </a:prstGeom>
-          <a:solidFill>
-            <a:srgbClr val="E4DCC9"/>
-          </a:solidFill>
-          <a:ln/>
-        </p:spPr>
+          <p:cNvPr id="20" name="Text 18"/>
+          <p:cNvSpPr txBox="1"/>
+          <p:nvPr/>
+        </p:nvSpPr>
+        <p:spPr>
+          <a:xfrm>
+            <a:off x="7461504" y="2212848"/>
+            <a:ext cx="3639312" cy="365760"/>
+          </a:xfrm>
+          <a:prstGeom prst="rect">
+            <a:avLst/>
+          </a:prstGeom>
+          <a:noFill/>
+          <a:ln/>
+        </p:spPr>
+        <p:txBody>
+          <a:bodyPr wrap="square" lIns="0" tIns="0" rIns="0" bIns="0" rtlCol="0" anchor="ctr"/>
+          <a:lstStyle/>
+          <a:p>
+            <a:pPr indent="0" marL="0">
+              <a:buNone/>
+            </a:pPr>
+            <a:r>
+              <a:rPr lang="en-US" sz="850" dirty="0">
+                <a:solidFill>
+                  <a:srgbClr val="7A7266"/>
+                </a:solidFill>
+                <a:latin typeface="Calibri" pitchFamily="34" charset="0"/>
+                <a:ea typeface="Calibri" pitchFamily="34" charset="-122"/>
+                <a:cs typeface="Calibri" pitchFamily="34" charset="-120"/>
+              </a:rPr>
+              <a:t>🔍  Search the knowledge base…</a:t>
+            </a:r>
+            <a:endParaRPr lang="en-US" sz="850" dirty="0"/>
+          </a:p>
+        </p:txBody>
       </p:sp>
       <p:sp>
         <p:nvSpPr>
@@ -8185,30 +8267,8 @@
         </p:nvSpPr>
         <p:spPr>
           <a:xfrm>
-            <a:off x="7680960" y="2455164"/>
-            <a:ext cx="1314366" cy="82296"/>
-          </a:xfrm>
-          <a:prstGeom prst="roundRect">
-            <a:avLst>
-              <a:gd name="adj" fmla="val 50000"/>
-            </a:avLst>
-          </a:prstGeom>
-          <a:solidFill>
-            <a:srgbClr val="9C7C2E"/>
-          </a:solidFill>
-          <a:ln/>
-        </p:spPr>
-      </p:sp>
-      <p:sp>
-        <p:nvSpPr>
-          <p:cNvPr id="22" name="Shape 20"/>
-          <p:cNvSpPr/>
-          <p:nvPr/>
-        </p:nvSpPr>
-        <p:spPr>
-          <a:xfrm>
-            <a:off x="10405872" y="2350008"/>
-            <a:ext cx="731520" cy="292608"/>
+            <a:off x="7296912" y="2688336"/>
+            <a:ext cx="877824" cy="256032"/>
           </a:xfrm>
           <a:prstGeom prst="roundRect">
             <a:avLst>
@@ -8228,14 +8288,14 @@
       </p:sp>
       <p:sp>
         <p:nvSpPr>
-          <p:cNvPr id="23" name="Text 21"/>
-          <p:cNvSpPr txBox="1"/>
-          <p:nvPr/>
-        </p:nvSpPr>
-        <p:spPr>
-          <a:xfrm>
-            <a:off x="10405872" y="2340864"/>
-            <a:ext cx="731520" cy="310896"/>
+          <p:cNvPr id="22" name="Text 20"/>
+          <p:cNvSpPr txBox="1"/>
+          <p:nvPr/>
+        </p:nvSpPr>
+        <p:spPr>
+          <a:xfrm>
+            <a:off x="7296912" y="2679192"/>
+            <a:ext cx="877824" cy="265176"/>
           </a:xfrm>
           <a:prstGeom prst="rect">
             <a:avLst/>
@@ -8251,38 +8311,38 @@
               <a:buNone/>
             </a:pPr>
             <a:r>
-              <a:rPr lang="en-US" sz="850" dirty="0">
-                <a:solidFill>
-                  <a:srgbClr val="7A7266"/>
+              <a:rPr lang="en-US" sz="750" dirty="0">
+                <a:solidFill>
+                  <a:srgbClr val="1D1A15"/>
                 </a:solidFill>
                 <a:latin typeface="Calibri" pitchFamily="34" charset="0"/>
                 <a:ea typeface="Calibri" pitchFamily="34" charset="-122"/>
                 <a:cs typeface="Calibri" pitchFamily="34" charset="-120"/>
               </a:rPr>
-              <a:t>Send →</a:t>
-            </a:r>
-            <a:endParaRPr lang="en-US" sz="850" dirty="0"/>
-          </a:p>
-        </p:txBody>
-      </p:sp>
-      <p:sp>
-        <p:nvSpPr>
-          <p:cNvPr id="24" name="Shape 22"/>
-          <p:cNvSpPr/>
-          <p:nvPr/>
-        </p:nvSpPr>
-        <p:spPr>
-          <a:xfrm>
-            <a:off x="7296912" y="2907792"/>
-            <a:ext cx="3968496" cy="566928"/>
+              <a:t>Onboarding</a:t>
+            </a:r>
+            <a:endParaRPr lang="en-US" sz="750" dirty="0"/>
+          </a:p>
+        </p:txBody>
+      </p:sp>
+      <p:sp>
+        <p:nvSpPr>
+          <p:cNvPr id="23" name="Shape 21"/>
+          <p:cNvSpPr/>
+          <p:nvPr/>
+        </p:nvSpPr>
+        <p:spPr>
+          <a:xfrm>
+            <a:off x="8266176" y="2688336"/>
+            <a:ext cx="594360" cy="256032"/>
           </a:xfrm>
           <a:prstGeom prst="roundRect">
             <a:avLst>
-              <a:gd name="adj" fmla="val 8065"/>
+              <a:gd name="adj" fmla="val 50000"/>
             </a:avLst>
           </a:prstGeom>
           <a:solidFill>
-            <a:srgbClr val="FBFAF6"/>
+            <a:srgbClr val="FFFFFF"/>
           </a:solidFill>
           <a:ln w="12700">
             <a:solidFill>
@@ -8294,78 +8354,53 @@
       </p:sp>
       <p:sp>
         <p:nvSpPr>
+          <p:cNvPr id="24" name="Text 22"/>
+          <p:cNvSpPr txBox="1"/>
+          <p:nvPr/>
+        </p:nvSpPr>
+        <p:spPr>
+          <a:xfrm>
+            <a:off x="8266176" y="2679192"/>
+            <a:ext cx="594360" cy="265176"/>
+          </a:xfrm>
+          <a:prstGeom prst="rect">
+            <a:avLst/>
+          </a:prstGeom>
+          <a:noFill/>
+          <a:ln/>
+        </p:spPr>
+        <p:txBody>
+          <a:bodyPr wrap="square" lIns="0" tIns="0" rIns="0" bIns="0" rtlCol="0" anchor="ctr"/>
+          <a:lstStyle/>
+          <a:p>
+            <a:pPr algn="ctr" indent="0" marL="0">
+              <a:buNone/>
+            </a:pPr>
+            <a:r>
+              <a:rPr lang="en-US" sz="750" dirty="0">
+                <a:solidFill>
+                  <a:srgbClr val="1D1A15"/>
+                </a:solidFill>
+                <a:latin typeface="Calibri" pitchFamily="34" charset="0"/>
+                <a:ea typeface="Calibri" pitchFamily="34" charset="-122"/>
+                <a:cs typeface="Calibri" pitchFamily="34" charset="-120"/>
+              </a:rPr>
+              <a:t>Sales</a:t>
+            </a:r>
+            <a:endParaRPr lang="en-US" sz="750" dirty="0"/>
+          </a:p>
+        </p:txBody>
+      </p:sp>
+      <p:sp>
+        <p:nvSpPr>
           <p:cNvPr id="25" name="Shape 23"/>
           <p:cNvSpPr/>
           <p:nvPr/>
         </p:nvSpPr>
         <p:spPr>
           <a:xfrm>
-            <a:off x="7443216" y="3140964"/>
-            <a:ext cx="100584" cy="100584"/>
-          </a:xfrm>
-          <a:prstGeom prst="ellipse">
-            <a:avLst/>
-          </a:prstGeom>
-          <a:solidFill>
-            <a:srgbClr val="5B7C46"/>
-          </a:solidFill>
-          <a:ln/>
-        </p:spPr>
-      </p:sp>
-      <p:sp>
-        <p:nvSpPr>
-          <p:cNvPr id="26" name="Shape 24"/>
-          <p:cNvSpPr/>
-          <p:nvPr/>
-        </p:nvSpPr>
-        <p:spPr>
-          <a:xfrm>
-            <a:off x="7680960" y="3150108"/>
-            <a:ext cx="1825508" cy="82296"/>
-          </a:xfrm>
-          <a:prstGeom prst="roundRect">
-            <a:avLst>
-              <a:gd name="adj" fmla="val 50000"/>
-            </a:avLst>
-          </a:prstGeom>
-          <a:solidFill>
-            <a:srgbClr val="E4DCC9"/>
-          </a:solidFill>
-          <a:ln/>
-        </p:spPr>
-      </p:sp>
-      <p:sp>
-        <p:nvSpPr>
-          <p:cNvPr id="27" name="Shape 25"/>
-          <p:cNvSpPr/>
-          <p:nvPr/>
-        </p:nvSpPr>
-        <p:spPr>
-          <a:xfrm>
-            <a:off x="7680960" y="3150108"/>
-            <a:ext cx="839734" cy="82296"/>
-          </a:xfrm>
-          <a:prstGeom prst="roundRect">
-            <a:avLst>
-              <a:gd name="adj" fmla="val 50000"/>
-            </a:avLst>
-          </a:prstGeom>
-          <a:solidFill>
-            <a:srgbClr val="9C7C2E"/>
-          </a:solidFill>
-          <a:ln/>
-        </p:spPr>
-      </p:sp>
-      <p:sp>
-        <p:nvSpPr>
-          <p:cNvPr id="28" name="Shape 26"/>
-          <p:cNvSpPr/>
-          <p:nvPr/>
-        </p:nvSpPr>
-        <p:spPr>
-          <a:xfrm>
-            <a:off x="10405872" y="3044952"/>
-            <a:ext cx="731520" cy="292608"/>
+            <a:off x="8951976" y="2688336"/>
+            <a:ext cx="537667" cy="256032"/>
           </a:xfrm>
           <a:prstGeom prst="roundRect">
             <a:avLst>
@@ -8385,14 +8420,14 @@
       </p:sp>
       <p:sp>
         <p:nvSpPr>
-          <p:cNvPr id="29" name="Text 27"/>
-          <p:cNvSpPr txBox="1"/>
-          <p:nvPr/>
-        </p:nvSpPr>
-        <p:spPr>
-          <a:xfrm>
-            <a:off x="10405872" y="3035808"/>
-            <a:ext cx="731520" cy="310896"/>
+          <p:cNvPr id="26" name="Text 24"/>
+          <p:cNvSpPr txBox="1"/>
+          <p:nvPr/>
+        </p:nvSpPr>
+        <p:spPr>
+          <a:xfrm>
+            <a:off x="8951976" y="2679192"/>
+            <a:ext cx="537667" cy="265176"/>
           </a:xfrm>
           <a:prstGeom prst="rect">
             <a:avLst/>
@@ -8408,38 +8443,38 @@
               <a:buNone/>
             </a:pPr>
             <a:r>
-              <a:rPr lang="en-US" sz="850" dirty="0">
-                <a:solidFill>
-                  <a:srgbClr val="7A7266"/>
+              <a:rPr lang="en-US" sz="750" dirty="0">
+                <a:solidFill>
+                  <a:srgbClr val="1D1A15"/>
                 </a:solidFill>
                 <a:latin typeface="Calibri" pitchFamily="34" charset="0"/>
                 <a:ea typeface="Calibri" pitchFamily="34" charset="-122"/>
                 <a:cs typeface="Calibri" pitchFamily="34" charset="-120"/>
               </a:rPr>
-              <a:t>Send →</a:t>
-            </a:r>
-            <a:endParaRPr lang="en-US" sz="850" dirty="0"/>
-          </a:p>
-        </p:txBody>
-      </p:sp>
-      <p:sp>
-        <p:nvSpPr>
-          <p:cNvPr id="30" name="Shape 28"/>
-          <p:cNvSpPr/>
-          <p:nvPr/>
-        </p:nvSpPr>
-        <p:spPr>
-          <a:xfrm>
-            <a:off x="7296912" y="3602736"/>
-            <a:ext cx="3968496" cy="566928"/>
+              <a:t>Tech</a:t>
+            </a:r>
+            <a:endParaRPr lang="en-US" sz="750" dirty="0"/>
+          </a:p>
+        </p:txBody>
+      </p:sp>
+      <p:sp>
+        <p:nvSpPr>
+          <p:cNvPr id="27" name="Shape 25"/>
+          <p:cNvSpPr/>
+          <p:nvPr/>
+        </p:nvSpPr>
+        <p:spPr>
+          <a:xfrm>
+            <a:off x="9581083" y="2688336"/>
+            <a:ext cx="877824" cy="256032"/>
           </a:xfrm>
           <a:prstGeom prst="roundRect">
             <a:avLst>
-              <a:gd name="adj" fmla="val 8065"/>
+              <a:gd name="adj" fmla="val 50000"/>
             </a:avLst>
           </a:prstGeom>
           <a:solidFill>
-            <a:srgbClr val="FBFAF6"/>
+            <a:srgbClr val="FFFFFF"/>
           </a:solidFill>
           <a:ln w="12700">
             <a:solidFill>
@@ -8451,86 +8486,61 @@
       </p:sp>
       <p:sp>
         <p:nvSpPr>
-          <p:cNvPr id="31" name="Shape 29"/>
-          <p:cNvSpPr/>
-          <p:nvPr/>
-        </p:nvSpPr>
-        <p:spPr>
-          <a:xfrm>
-            <a:off x="7443216" y="3835908"/>
-            <a:ext cx="100584" cy="100584"/>
-          </a:xfrm>
-          <a:prstGeom prst="ellipse">
-            <a:avLst/>
-          </a:prstGeom>
-          <a:solidFill>
-            <a:srgbClr val="B0842F"/>
-          </a:solidFill>
-          <a:ln/>
-        </p:spPr>
-      </p:sp>
-      <p:sp>
-        <p:nvSpPr>
-          <p:cNvPr id="32" name="Shape 30"/>
-          <p:cNvSpPr/>
-          <p:nvPr/>
-        </p:nvSpPr>
-        <p:spPr>
-          <a:xfrm>
-            <a:off x="7680960" y="3845052"/>
-            <a:ext cx="1825508" cy="82296"/>
+          <p:cNvPr id="28" name="Text 26"/>
+          <p:cNvSpPr txBox="1"/>
+          <p:nvPr/>
+        </p:nvSpPr>
+        <p:spPr>
+          <a:xfrm>
+            <a:off x="9581083" y="2679192"/>
+            <a:ext cx="877824" cy="265176"/>
+          </a:xfrm>
+          <a:prstGeom prst="rect">
+            <a:avLst/>
+          </a:prstGeom>
+          <a:noFill/>
+          <a:ln/>
+        </p:spPr>
+        <p:txBody>
+          <a:bodyPr wrap="square" lIns="0" tIns="0" rIns="0" bIns="0" rtlCol="0" anchor="ctr"/>
+          <a:lstStyle/>
+          <a:p>
+            <a:pPr algn="ctr" indent="0" marL="0">
+              <a:buNone/>
+            </a:pPr>
+            <a:r>
+              <a:rPr lang="en-US" sz="750" dirty="0">
+                <a:solidFill>
+                  <a:srgbClr val="1D1A15"/>
+                </a:solidFill>
+                <a:latin typeface="Calibri" pitchFamily="34" charset="0"/>
+                <a:ea typeface="Calibri" pitchFamily="34" charset="-122"/>
+                <a:cs typeface="Calibri" pitchFamily="34" charset="-120"/>
+              </a:rPr>
+              <a:t>Curriculum</a:t>
+            </a:r>
+            <a:endParaRPr lang="en-US" sz="750" dirty="0"/>
+          </a:p>
+        </p:txBody>
+      </p:sp>
+      <p:sp>
+        <p:nvSpPr>
+          <p:cNvPr id="29" name="Shape 27"/>
+          <p:cNvSpPr/>
+          <p:nvPr/>
+        </p:nvSpPr>
+        <p:spPr>
+          <a:xfrm>
+            <a:off x="7296912" y="3108960"/>
+            <a:ext cx="3968496" cy="402336"/>
           </a:xfrm>
           <a:prstGeom prst="roundRect">
             <a:avLst>
-              <a:gd name="adj" fmla="val 50000"/>
+              <a:gd name="adj" fmla="val 11364"/>
             </a:avLst>
           </a:prstGeom>
           <a:solidFill>
-            <a:srgbClr val="E4DCC9"/>
-          </a:solidFill>
-          <a:ln/>
-        </p:spPr>
-      </p:sp>
-      <p:sp>
-        <p:nvSpPr>
-          <p:cNvPr id="33" name="Shape 31"/>
-          <p:cNvSpPr/>
-          <p:nvPr/>
-        </p:nvSpPr>
-        <p:spPr>
-          <a:xfrm>
-            <a:off x="7680960" y="3845052"/>
-            <a:ext cx="1606447" cy="82296"/>
-          </a:xfrm>
-          <a:prstGeom prst="roundRect">
-            <a:avLst>
-              <a:gd name="adj" fmla="val 50000"/>
-            </a:avLst>
-          </a:prstGeom>
-          <a:solidFill>
-            <a:srgbClr val="9C7C2E"/>
-          </a:solidFill>
-          <a:ln/>
-        </p:spPr>
-      </p:sp>
-      <p:sp>
-        <p:nvSpPr>
-          <p:cNvPr id="34" name="Shape 32"/>
-          <p:cNvSpPr/>
-          <p:nvPr/>
-        </p:nvSpPr>
-        <p:spPr>
-          <a:xfrm>
-            <a:off x="10405872" y="3739896"/>
-            <a:ext cx="731520" cy="292608"/>
-          </a:xfrm>
-          <a:prstGeom prst="roundRect">
-            <a:avLst>
-              <a:gd name="adj" fmla="val 50000"/>
-            </a:avLst>
-          </a:prstGeom>
-          <a:solidFill>
-            <a:srgbClr val="FFFFFF"/>
+            <a:srgbClr val="FBFAF6"/>
           </a:solidFill>
           <a:ln w="12700">
             <a:solidFill>
@@ -8542,14 +8552,34 @@
       </p:sp>
       <p:sp>
         <p:nvSpPr>
-          <p:cNvPr id="35" name="Text 33"/>
-          <p:cNvSpPr txBox="1"/>
-          <p:nvPr/>
-        </p:nvSpPr>
-        <p:spPr>
-          <a:xfrm>
-            <a:off x="10405872" y="3730752"/>
-            <a:ext cx="731520" cy="310896"/>
+          <p:cNvPr id="30" name="Shape 28"/>
+          <p:cNvSpPr/>
+          <p:nvPr/>
+        </p:nvSpPr>
+        <p:spPr>
+          <a:xfrm>
+            <a:off x="7443216" y="3264408"/>
+            <a:ext cx="91440" cy="91440"/>
+          </a:xfrm>
+          <a:prstGeom prst="ellipse">
+            <a:avLst/>
+          </a:prstGeom>
+          <a:solidFill>
+            <a:srgbClr val="9C7C2E"/>
+          </a:solidFill>
+          <a:ln/>
+        </p:spPr>
+      </p:sp>
+      <p:sp>
+        <p:nvSpPr>
+          <p:cNvPr id="31" name="Text 29"/>
+          <p:cNvSpPr txBox="1"/>
+          <p:nvPr/>
+        </p:nvSpPr>
+        <p:spPr>
+          <a:xfrm>
+            <a:off x="7662672" y="3108960"/>
+            <a:ext cx="2596896" cy="402336"/>
           </a:xfrm>
           <a:prstGeom prst="rect">
             <a:avLst/>
@@ -8561,19 +8591,450 @@
           <a:bodyPr wrap="square" lIns="0" tIns="0" rIns="0" bIns="0" rtlCol="0" anchor="ctr"/>
           <a:lstStyle/>
           <a:p>
-            <a:pPr algn="ctr" indent="0" marL="0">
+            <a:pPr indent="0" marL="0">
               <a:buNone/>
             </a:pPr>
             <a:r>
               <a:rPr lang="en-US" sz="850" dirty="0">
                 <a:solidFill>
-                  <a:srgbClr val="7A7266"/>
+                  <a:srgbClr val="1D1A15"/>
                 </a:solidFill>
                 <a:latin typeface="Calibri" pitchFamily="34" charset="0"/>
                 <a:ea typeface="Calibri" pitchFamily="34" charset="-122"/>
                 <a:cs typeface="Calibri" pitchFamily="34" charset="-120"/>
               </a:rPr>
-              <a:t>shared</a:t>
+              <a:t>Reset a student login</a:t>
+            </a:r>
+            <a:endParaRPr lang="en-US" sz="850" dirty="0"/>
+          </a:p>
+        </p:txBody>
+      </p:sp>
+      <p:sp>
+        <p:nvSpPr>
+          <p:cNvPr id="32" name="Shape 30"/>
+          <p:cNvSpPr/>
+          <p:nvPr/>
+        </p:nvSpPr>
+        <p:spPr>
+          <a:xfrm>
+            <a:off x="10356494" y="3191256"/>
+            <a:ext cx="780898" cy="237744"/>
+          </a:xfrm>
+          <a:prstGeom prst="roundRect">
+            <a:avLst>
+              <a:gd name="adj" fmla="val 50000"/>
+            </a:avLst>
+          </a:prstGeom>
+          <a:solidFill>
+            <a:srgbClr val="FFFFFF"/>
+          </a:solidFill>
+          <a:ln w="12700">
+            <a:solidFill>
+              <a:srgbClr val="E4DCC9"/>
+            </a:solidFill>
+            <a:prstDash val="solid"/>
+          </a:ln>
+        </p:spPr>
+      </p:sp>
+      <p:sp>
+        <p:nvSpPr>
+          <p:cNvPr id="33" name="Text 31"/>
+          <p:cNvSpPr txBox="1"/>
+          <p:nvPr/>
+        </p:nvSpPr>
+        <p:spPr>
+          <a:xfrm>
+            <a:off x="10356494" y="3182112"/>
+            <a:ext cx="780898" cy="246888"/>
+          </a:xfrm>
+          <a:prstGeom prst="rect">
+            <a:avLst/>
+          </a:prstGeom>
+          <a:noFill/>
+          <a:ln/>
+        </p:spPr>
+        <p:txBody>
+          <a:bodyPr wrap="square" lIns="0" tIns="0" rIns="0" bIns="0" rtlCol="0" anchor="ctr"/>
+          <a:lstStyle/>
+          <a:p>
+            <a:pPr algn="ctr" indent="0" marL="0">
+              <a:buNone/>
+            </a:pPr>
+            <a:r>
+              <a:rPr lang="en-US" sz="700" dirty="0">
+                <a:solidFill>
+                  <a:srgbClr val="7A7266"/>
+                </a:solidFill>
+                <a:latin typeface="Calibri" pitchFamily="34" charset="0"/>
+                <a:ea typeface="Calibri" pitchFamily="34" charset="-122"/>
+                <a:cs typeface="Calibri" pitchFamily="34" charset="-120"/>
+              </a:rPr>
+              <a:t>Support</a:t>
+            </a:r>
+            <a:endParaRPr lang="en-US" sz="700" dirty="0"/>
+          </a:p>
+        </p:txBody>
+      </p:sp>
+      <p:sp>
+        <p:nvSpPr>
+          <p:cNvPr id="34" name="Shape 32"/>
+          <p:cNvSpPr/>
+          <p:nvPr/>
+        </p:nvSpPr>
+        <p:spPr>
+          <a:xfrm>
+            <a:off x="7296912" y="3602736"/>
+            <a:ext cx="3968496" cy="402336"/>
+          </a:xfrm>
+          <a:prstGeom prst="roundRect">
+            <a:avLst>
+              <a:gd name="adj" fmla="val 11364"/>
+            </a:avLst>
+          </a:prstGeom>
+          <a:solidFill>
+            <a:srgbClr val="FBFAF6"/>
+          </a:solidFill>
+          <a:ln w="12700">
+            <a:solidFill>
+              <a:srgbClr val="E4DCC9"/>
+            </a:solidFill>
+            <a:prstDash val="solid"/>
+          </a:ln>
+        </p:spPr>
+      </p:sp>
+      <p:sp>
+        <p:nvSpPr>
+          <p:cNvPr id="35" name="Shape 33"/>
+          <p:cNvSpPr/>
+          <p:nvPr/>
+        </p:nvSpPr>
+        <p:spPr>
+          <a:xfrm>
+            <a:off x="7443216" y="3758184"/>
+            <a:ext cx="91440" cy="91440"/>
+          </a:xfrm>
+          <a:prstGeom prst="ellipse">
+            <a:avLst/>
+          </a:prstGeom>
+          <a:solidFill>
+            <a:srgbClr val="9C7C2E"/>
+          </a:solidFill>
+          <a:ln/>
+        </p:spPr>
+      </p:sp>
+      <p:sp>
+        <p:nvSpPr>
+          <p:cNvPr id="36" name="Text 34"/>
+          <p:cNvSpPr txBox="1"/>
+          <p:nvPr/>
+        </p:nvSpPr>
+        <p:spPr>
+          <a:xfrm>
+            <a:off x="7662672" y="3602736"/>
+            <a:ext cx="2596896" cy="402336"/>
+          </a:xfrm>
+          <a:prstGeom prst="rect">
+            <a:avLst/>
+          </a:prstGeom>
+          <a:noFill/>
+          <a:ln/>
+        </p:spPr>
+        <p:txBody>
+          <a:bodyPr wrap="square" lIns="0" tIns="0" rIns="0" bIns="0" rtlCol="0" anchor="ctr"/>
+          <a:lstStyle/>
+          <a:p>
+            <a:pPr indent="0" marL="0">
+              <a:buNone/>
+            </a:pPr>
+            <a:r>
+              <a:rPr lang="en-US" sz="850" dirty="0">
+                <a:solidFill>
+                  <a:srgbClr val="1D1A15"/>
+                </a:solidFill>
+                <a:latin typeface="Calibri" pitchFamily="34" charset="0"/>
+                <a:ea typeface="Calibri" pitchFamily="34" charset="-122"/>
+                <a:cs typeface="Calibri" pitchFamily="34" charset="-120"/>
+              </a:rPr>
+              <a:t>New-school setup checklist</a:t>
+            </a:r>
+            <a:endParaRPr lang="en-US" sz="850" dirty="0"/>
+          </a:p>
+        </p:txBody>
+      </p:sp>
+      <p:sp>
+        <p:nvSpPr>
+          <p:cNvPr id="37" name="Shape 35"/>
+          <p:cNvSpPr/>
+          <p:nvPr/>
+        </p:nvSpPr>
+        <p:spPr>
+          <a:xfrm>
+            <a:off x="10356494" y="3685032"/>
+            <a:ext cx="780898" cy="237744"/>
+          </a:xfrm>
+          <a:prstGeom prst="roundRect">
+            <a:avLst>
+              <a:gd name="adj" fmla="val 50000"/>
+            </a:avLst>
+          </a:prstGeom>
+          <a:solidFill>
+            <a:srgbClr val="FFFFFF"/>
+          </a:solidFill>
+          <a:ln w="12700">
+            <a:solidFill>
+              <a:srgbClr val="E4DCC9"/>
+            </a:solidFill>
+            <a:prstDash val="solid"/>
+          </a:ln>
+        </p:spPr>
+      </p:sp>
+      <p:sp>
+        <p:nvSpPr>
+          <p:cNvPr id="38" name="Text 36"/>
+          <p:cNvSpPr txBox="1"/>
+          <p:nvPr/>
+        </p:nvSpPr>
+        <p:spPr>
+          <a:xfrm>
+            <a:off x="10356494" y="3675888"/>
+            <a:ext cx="780898" cy="246888"/>
+          </a:xfrm>
+          <a:prstGeom prst="rect">
+            <a:avLst/>
+          </a:prstGeom>
+          <a:noFill/>
+          <a:ln/>
+        </p:spPr>
+        <p:txBody>
+          <a:bodyPr wrap="square" lIns="0" tIns="0" rIns="0" bIns="0" rtlCol="0" anchor="ctr"/>
+          <a:lstStyle/>
+          <a:p>
+            <a:pPr algn="ctr" indent="0" marL="0">
+              <a:buNone/>
+            </a:pPr>
+            <a:r>
+              <a:rPr lang="en-US" sz="700" dirty="0">
+                <a:solidFill>
+                  <a:srgbClr val="7A7266"/>
+                </a:solidFill>
+                <a:latin typeface="Calibri" pitchFamily="34" charset="0"/>
+                <a:ea typeface="Calibri" pitchFamily="34" charset="-122"/>
+                <a:cs typeface="Calibri" pitchFamily="34" charset="-120"/>
+              </a:rPr>
+              <a:t>Success</a:t>
+            </a:r>
+            <a:endParaRPr lang="en-US" sz="700" dirty="0"/>
+          </a:p>
+        </p:txBody>
+      </p:sp>
+      <p:sp>
+        <p:nvSpPr>
+          <p:cNvPr id="39" name="Shape 37"/>
+          <p:cNvSpPr/>
+          <p:nvPr/>
+        </p:nvSpPr>
+        <p:spPr>
+          <a:xfrm>
+            <a:off x="7296912" y="4096512"/>
+            <a:ext cx="3968496" cy="402336"/>
+          </a:xfrm>
+          <a:prstGeom prst="roundRect">
+            <a:avLst>
+              <a:gd name="adj" fmla="val 11364"/>
+            </a:avLst>
+          </a:prstGeom>
+          <a:solidFill>
+            <a:srgbClr val="FBFAF6"/>
+          </a:solidFill>
+          <a:ln w="12700">
+            <a:solidFill>
+              <a:srgbClr val="E4DCC9"/>
+            </a:solidFill>
+            <a:prstDash val="solid"/>
+          </a:ln>
+        </p:spPr>
+      </p:sp>
+      <p:sp>
+        <p:nvSpPr>
+          <p:cNvPr id="40" name="Shape 38"/>
+          <p:cNvSpPr/>
+          <p:nvPr/>
+        </p:nvSpPr>
+        <p:spPr>
+          <a:xfrm>
+            <a:off x="7443216" y="4251960"/>
+            <a:ext cx="91440" cy="91440"/>
+          </a:xfrm>
+          <a:prstGeom prst="ellipse">
+            <a:avLst/>
+          </a:prstGeom>
+          <a:solidFill>
+            <a:srgbClr val="9C7C2E"/>
+          </a:solidFill>
+          <a:ln/>
+        </p:spPr>
+      </p:sp>
+      <p:sp>
+        <p:nvSpPr>
+          <p:cNvPr id="41" name="Text 39"/>
+          <p:cNvSpPr txBox="1"/>
+          <p:nvPr/>
+        </p:nvSpPr>
+        <p:spPr>
+          <a:xfrm>
+            <a:off x="7662672" y="4096512"/>
+            <a:ext cx="2596896" cy="402336"/>
+          </a:xfrm>
+          <a:prstGeom prst="rect">
+            <a:avLst/>
+          </a:prstGeom>
+          <a:noFill/>
+          <a:ln/>
+        </p:spPr>
+        <p:txBody>
+          <a:bodyPr wrap="square" lIns="0" tIns="0" rIns="0" bIns="0" rtlCol="0" anchor="ctr"/>
+          <a:lstStyle/>
+          <a:p>
+            <a:pPr indent="0" marL="0">
+              <a:buNone/>
+            </a:pPr>
+            <a:r>
+              <a:rPr lang="en-US" sz="850" dirty="0">
+                <a:solidFill>
+                  <a:srgbClr val="1D1A15"/>
+                </a:solidFill>
+                <a:latin typeface="Calibri" pitchFamily="34" charset="0"/>
+                <a:ea typeface="Calibri" pitchFamily="34" charset="-122"/>
+                <a:cs typeface="Calibri" pitchFamily="34" charset="-120"/>
+              </a:rPr>
+              <a:t>Refund &amp; billing policy</a:t>
+            </a:r>
+            <a:endParaRPr lang="en-US" sz="850" dirty="0"/>
+          </a:p>
+        </p:txBody>
+      </p:sp>
+      <p:sp>
+        <p:nvSpPr>
+          <p:cNvPr id="42" name="Shape 40"/>
+          <p:cNvSpPr/>
+          <p:nvPr/>
+        </p:nvSpPr>
+        <p:spPr>
+          <a:xfrm>
+            <a:off x="10356494" y="4178808"/>
+            <a:ext cx="780898" cy="237744"/>
+          </a:xfrm>
+          <a:prstGeom prst="roundRect">
+            <a:avLst>
+              <a:gd name="adj" fmla="val 50000"/>
+            </a:avLst>
+          </a:prstGeom>
+          <a:solidFill>
+            <a:srgbClr val="FFFFFF"/>
+          </a:solidFill>
+          <a:ln w="12700">
+            <a:solidFill>
+              <a:srgbClr val="E4DCC9"/>
+            </a:solidFill>
+            <a:prstDash val="solid"/>
+          </a:ln>
+        </p:spPr>
+      </p:sp>
+      <p:sp>
+        <p:nvSpPr>
+          <p:cNvPr id="43" name="Text 41"/>
+          <p:cNvSpPr txBox="1"/>
+          <p:nvPr/>
+        </p:nvSpPr>
+        <p:spPr>
+          <a:xfrm>
+            <a:off x="10356494" y="4169664"/>
+            <a:ext cx="780898" cy="246888"/>
+          </a:xfrm>
+          <a:prstGeom prst="rect">
+            <a:avLst/>
+          </a:prstGeom>
+          <a:noFill/>
+          <a:ln/>
+        </p:spPr>
+        <p:txBody>
+          <a:bodyPr wrap="square" lIns="0" tIns="0" rIns="0" bIns="0" rtlCol="0" anchor="ctr"/>
+          <a:lstStyle/>
+          <a:p>
+            <a:pPr algn="ctr" indent="0" marL="0">
+              <a:buNone/>
+            </a:pPr>
+            <a:r>
+              <a:rPr lang="en-US" sz="700" dirty="0">
+                <a:solidFill>
+                  <a:srgbClr val="7A7266"/>
+                </a:solidFill>
+                <a:latin typeface="Calibri" pitchFamily="34" charset="0"/>
+                <a:ea typeface="Calibri" pitchFamily="34" charset="-122"/>
+                <a:cs typeface="Calibri" pitchFamily="34" charset="-120"/>
+              </a:rPr>
+              <a:t>Finance</a:t>
+            </a:r>
+            <a:endParaRPr lang="en-US" sz="700" dirty="0"/>
+          </a:p>
+        </p:txBody>
+      </p:sp>
+      <p:sp>
+        <p:nvSpPr>
+          <p:cNvPr id="44" name="Shape 42"/>
+          <p:cNvSpPr/>
+          <p:nvPr/>
+        </p:nvSpPr>
+        <p:spPr>
+          <a:xfrm>
+            <a:off x="7296912" y="4590288"/>
+            <a:ext cx="1417320" cy="347472"/>
+          </a:xfrm>
+          <a:prstGeom prst="roundRect">
+            <a:avLst>
+              <a:gd name="adj" fmla="val 50000"/>
+            </a:avLst>
+          </a:prstGeom>
+          <a:solidFill>
+            <a:srgbClr val="9C7C2E"/>
+          </a:solidFill>
+          <a:ln/>
+        </p:spPr>
+      </p:sp>
+      <p:sp>
+        <p:nvSpPr>
+          <p:cNvPr id="45" name="Text 43"/>
+          <p:cNvSpPr txBox="1"/>
+          <p:nvPr/>
+        </p:nvSpPr>
+        <p:spPr>
+          <a:xfrm>
+            <a:off x="7296912" y="4581144"/>
+            <a:ext cx="1417320" cy="356616"/>
+          </a:xfrm>
+          <a:prstGeom prst="rect">
+            <a:avLst/>
+          </a:prstGeom>
+          <a:noFill/>
+          <a:ln/>
+        </p:spPr>
+        <p:txBody>
+          <a:bodyPr wrap="square" lIns="0" tIns="0" rIns="0" bIns="0" rtlCol="0" anchor="ctr"/>
+          <a:lstStyle/>
+          <a:p>
+            <a:pPr algn="ctr" indent="0" marL="0">
+              <a:buNone/>
+            </a:pPr>
+            <a:r>
+              <a:rPr lang="en-US" sz="850" b="1" dirty="0">
+                <a:solidFill>
+                  <a:srgbClr val="FFFFFF"/>
+                </a:solidFill>
+                <a:latin typeface="Calibri" pitchFamily="34" charset="0"/>
+                <a:ea typeface="Calibri" pitchFamily="34" charset="-122"/>
+                <a:cs typeface="Calibri" pitchFamily="34" charset="-120"/>
+              </a:rPr>
+              <a:t>+ Add article</a:t>
             </a:r>
             <a:endParaRPr lang="en-US" sz="850" dirty="0"/>
           </a:p>

--- a/Rooted_for_the_Future.pptx
+++ b/Rooted_for_the_Future.pptx
@@ -7767,7 +7767,7 @@
         <p:spPr>
           <a:xfrm>
             <a:off x="822960" y="3657600"/>
-            <a:ext cx="5760720" cy="1115568"/>
+            <a:ext cx="5760720" cy="1426464"/>
           </a:xfrm>
           <a:prstGeom prst="rect">
             <a:avLst/>
@@ -7837,6 +7837,27 @@
                 <a:ea typeface="Calibri" pitchFamily="34" charset="-122"/>
                 <a:cs typeface="Calibri" pitchFamily="34" charset="-120"/>
               </a:rPr>
+              <a:t>Seeded with your existing team Q&amp;A and FAQ content</a:t>
+            </a:r>
+            <a:endParaRPr lang="en-US" sz="1350" dirty="0"/>
+          </a:p>
+          <a:p>
+            <a:pPr marL="177800" indent="-177800">
+              <a:spcAft>
+                <a:spcPts val="800"/>
+              </a:spcAft>
+              <a:buSzPct val="100000"/>
+              <a:buChar char="•"/>
+            </a:pPr>
+            <a:r>
+              <a:rPr lang="en-US" sz="1350" dirty="0">
+                <a:solidFill>
+                  <a:srgbClr val="1D1A15"/>
+                </a:solidFill>
+                <a:latin typeface="Calibri" pitchFamily="34" charset="0"/>
+                <a:ea typeface="Calibri" pitchFamily="34" charset="-122"/>
+                <a:cs typeface="Calibri" pitchFamily="34" charset="-120"/>
+              </a:rPr>
               <a:t>Turns tribal knowledge into a shared, searchable library</a:t>
             </a:r>
             <a:endParaRPr lang="en-US" sz="1350" dirty="0"/>
@@ -7851,7 +7872,7 @@
         </p:nvSpPr>
         <p:spPr>
           <a:xfrm>
-            <a:off x="822960" y="4956048"/>
+            <a:off x="822960" y="5266944"/>
             <a:ext cx="1883664" cy="384048"/>
           </a:xfrm>
           <a:prstGeom prst="roundRect">
@@ -7878,7 +7899,7 @@
         </p:nvSpPr>
         <p:spPr>
           <a:xfrm>
-            <a:off x="969264" y="4937760"/>
+            <a:off x="969264" y="5248656"/>
             <a:ext cx="1609344" cy="420624"/>
           </a:xfrm>
           <a:prstGeom prst="rect">
@@ -7917,7 +7938,7 @@
         </p:nvSpPr>
         <p:spPr>
           <a:xfrm>
-            <a:off x="2871216" y="4956048"/>
+            <a:off x="2871216" y="5266944"/>
             <a:ext cx="1097280" cy="384048"/>
           </a:xfrm>
           <a:prstGeom prst="roundRect">
@@ -7944,7 +7965,7 @@
         </p:nvSpPr>
         <p:spPr>
           <a:xfrm>
-            <a:off x="3017520" y="5097780"/>
+            <a:off x="3017520" y="5408676"/>
             <a:ext cx="100584" cy="100584"/>
           </a:xfrm>
           <a:prstGeom prst="ellipse">
@@ -7964,7 +7985,7 @@
         </p:nvSpPr>
         <p:spPr>
           <a:xfrm>
-            <a:off x="3182112" y="4937760"/>
+            <a:off x="3182112" y="5248656"/>
             <a:ext cx="822960" cy="420624"/>
           </a:xfrm>
           <a:prstGeom prst="rect">

--- a/Rooted_for_the_Future.pptx
+++ b/Rooted_for_the_Future.pptx
@@ -8243,14 +8243,59 @@
       </p:sp>
       <p:sp>
         <p:nvSpPr>
-          <p:cNvPr id="20" name="Text 18"/>
-          <p:cNvSpPr txBox="1"/>
-          <p:nvPr/>
-        </p:nvSpPr>
-        <p:spPr>
-          <a:xfrm>
-            <a:off x="7461504" y="2212848"/>
-            <a:ext cx="3639312" cy="365760"/>
+          <p:cNvPr id="20" name="Shape 18"/>
+          <p:cNvSpPr/>
+          <p:nvPr/>
+        </p:nvSpPr>
+        <p:spPr>
+          <a:xfrm>
+            <a:off x="7479792" y="2322576"/>
+            <a:ext cx="137160" cy="137160"/>
+          </a:xfrm>
+          <a:prstGeom prst="ellipse">
+            <a:avLst/>
+          </a:prstGeom>
+          <a:ln w="15875">
+            <a:solidFill>
+              <a:srgbClr val="7A7266"/>
+            </a:solidFill>
+            <a:prstDash val="solid"/>
+          </a:ln>
+        </p:spPr>
+      </p:sp>
+      <p:sp>
+        <p:nvSpPr>
+          <p:cNvPr id="21" name="Shape 19"/>
+          <p:cNvSpPr/>
+          <p:nvPr/>
+        </p:nvSpPr>
+        <p:spPr>
+          <a:xfrm>
+            <a:off x="7589520" y="2432304"/>
+            <a:ext cx="54864" cy="54864"/>
+          </a:xfrm>
+          <a:prstGeom prst="line">
+            <a:avLst/>
+          </a:prstGeom>
+          <a:noFill/>
+          <a:ln w="15875">
+            <a:solidFill>
+              <a:srgbClr val="7A7266"/>
+            </a:solidFill>
+            <a:prstDash val="solid"/>
+          </a:ln>
+        </p:spPr>
+      </p:sp>
+      <p:sp>
+        <p:nvSpPr>
+          <p:cNvPr id="22" name="Text 20"/>
+          <p:cNvSpPr txBox="1"/>
+          <p:nvPr/>
+        </p:nvSpPr>
+        <p:spPr>
+          <a:xfrm>
+            <a:off x="7717536" y="2212848"/>
+            <a:ext cx="3419856" cy="365760"/>
           </a:xfrm>
           <a:prstGeom prst="rect">
             <a:avLst/>
@@ -8274,7 +8319,7 @@
                 <a:ea typeface="Calibri" pitchFamily="34" charset="-122"/>
                 <a:cs typeface="Calibri" pitchFamily="34" charset="-120"/>
               </a:rPr>
-              <a:t>🔍  Search the knowledge base…</a:t>
+              <a:t>Search the knowledge base…</a:t>
             </a:r>
             <a:endParaRPr lang="en-US" sz="850" dirty="0"/>
           </a:p>
@@ -8282,7 +8327,7 @@
       </p:sp>
       <p:sp>
         <p:nvSpPr>
-          <p:cNvPr id="21" name="Shape 19"/>
+          <p:cNvPr id="23" name="Shape 21"/>
           <p:cNvSpPr/>
           <p:nvPr/>
         </p:nvSpPr>
@@ -8309,7 +8354,7 @@
       </p:sp>
       <p:sp>
         <p:nvSpPr>
-          <p:cNvPr id="22" name="Text 20"/>
+          <p:cNvPr id="24" name="Text 22"/>
           <p:cNvSpPr txBox="1"/>
           <p:nvPr/>
         </p:nvSpPr>
@@ -8348,7 +8393,7 @@
       </p:sp>
       <p:sp>
         <p:nvSpPr>
-          <p:cNvPr id="23" name="Shape 21"/>
+          <p:cNvPr id="25" name="Shape 23"/>
           <p:cNvSpPr/>
           <p:nvPr/>
         </p:nvSpPr>
@@ -8375,7 +8420,7 @@
       </p:sp>
       <p:sp>
         <p:nvSpPr>
-          <p:cNvPr id="24" name="Text 22"/>
+          <p:cNvPr id="26" name="Text 24"/>
           <p:cNvSpPr txBox="1"/>
           <p:nvPr/>
         </p:nvSpPr>
@@ -8414,7 +8459,7 @@
       </p:sp>
       <p:sp>
         <p:nvSpPr>
-          <p:cNvPr id="25" name="Shape 23"/>
+          <p:cNvPr id="27" name="Shape 25"/>
           <p:cNvSpPr/>
           <p:nvPr/>
         </p:nvSpPr>
@@ -8441,7 +8486,7 @@
       </p:sp>
       <p:sp>
         <p:nvSpPr>
-          <p:cNvPr id="26" name="Text 24"/>
+          <p:cNvPr id="28" name="Text 26"/>
           <p:cNvSpPr txBox="1"/>
           <p:nvPr/>
         </p:nvSpPr>
@@ -8480,7 +8525,7 @@
       </p:sp>
       <p:sp>
         <p:nvSpPr>
-          <p:cNvPr id="27" name="Shape 25"/>
+          <p:cNvPr id="29" name="Shape 27"/>
           <p:cNvSpPr/>
           <p:nvPr/>
         </p:nvSpPr>
@@ -8507,7 +8552,7 @@
       </p:sp>
       <p:sp>
         <p:nvSpPr>
-          <p:cNvPr id="28" name="Text 26"/>
+          <p:cNvPr id="30" name="Text 28"/>
           <p:cNvSpPr txBox="1"/>
           <p:nvPr/>
         </p:nvSpPr>
@@ -8546,7 +8591,7 @@
       </p:sp>
       <p:sp>
         <p:nvSpPr>
-          <p:cNvPr id="29" name="Shape 27"/>
+          <p:cNvPr id="31" name="Shape 29"/>
           <p:cNvSpPr/>
           <p:nvPr/>
         </p:nvSpPr>
@@ -8573,7 +8618,7 @@
       </p:sp>
       <p:sp>
         <p:nvSpPr>
-          <p:cNvPr id="30" name="Shape 28"/>
+          <p:cNvPr id="32" name="Shape 30"/>
           <p:cNvSpPr/>
           <p:nvPr/>
         </p:nvSpPr>
@@ -8593,7 +8638,7 @@
       </p:sp>
       <p:sp>
         <p:nvSpPr>
-          <p:cNvPr id="31" name="Text 29"/>
+          <p:cNvPr id="33" name="Text 31"/>
           <p:cNvSpPr txBox="1"/>
           <p:nvPr/>
         </p:nvSpPr>
@@ -8632,7 +8677,7 @@
       </p:sp>
       <p:sp>
         <p:nvSpPr>
-          <p:cNvPr id="32" name="Shape 30"/>
+          <p:cNvPr id="34" name="Shape 32"/>
           <p:cNvSpPr/>
           <p:nvPr/>
         </p:nvSpPr>
@@ -8659,7 +8704,7 @@
       </p:sp>
       <p:sp>
         <p:nvSpPr>
-          <p:cNvPr id="33" name="Text 31"/>
+          <p:cNvPr id="35" name="Text 33"/>
           <p:cNvSpPr txBox="1"/>
           <p:nvPr/>
         </p:nvSpPr>
@@ -8698,7 +8743,7 @@
       </p:sp>
       <p:sp>
         <p:nvSpPr>
-          <p:cNvPr id="34" name="Shape 32"/>
+          <p:cNvPr id="36" name="Shape 34"/>
           <p:cNvSpPr/>
           <p:nvPr/>
         </p:nvSpPr>
@@ -8725,7 +8770,7 @@
       </p:sp>
       <p:sp>
         <p:nvSpPr>
-          <p:cNvPr id="35" name="Shape 33"/>
+          <p:cNvPr id="37" name="Shape 35"/>
           <p:cNvSpPr/>
           <p:nvPr/>
         </p:nvSpPr>
@@ -8745,7 +8790,7 @@
       </p:sp>
       <p:sp>
         <p:nvSpPr>
-          <p:cNvPr id="36" name="Text 34"/>
+          <p:cNvPr id="38" name="Text 36"/>
           <p:cNvSpPr txBox="1"/>
           <p:nvPr/>
         </p:nvSpPr>
@@ -8784,7 +8829,7 @@
       </p:sp>
       <p:sp>
         <p:nvSpPr>
-          <p:cNvPr id="37" name="Shape 35"/>
+          <p:cNvPr id="39" name="Shape 37"/>
           <p:cNvSpPr/>
           <p:nvPr/>
         </p:nvSpPr>
@@ -8811,7 +8856,7 @@
       </p:sp>
       <p:sp>
         <p:nvSpPr>
-          <p:cNvPr id="38" name="Text 36"/>
+          <p:cNvPr id="40" name="Text 38"/>
           <p:cNvSpPr txBox="1"/>
           <p:nvPr/>
         </p:nvSpPr>
@@ -8850,7 +8895,7 @@
       </p:sp>
       <p:sp>
         <p:nvSpPr>
-          <p:cNvPr id="39" name="Shape 37"/>
+          <p:cNvPr id="41" name="Shape 39"/>
           <p:cNvSpPr/>
           <p:nvPr/>
         </p:nvSpPr>
@@ -8877,7 +8922,7 @@
       </p:sp>
       <p:sp>
         <p:nvSpPr>
-          <p:cNvPr id="40" name="Shape 38"/>
+          <p:cNvPr id="42" name="Shape 40"/>
           <p:cNvSpPr/>
           <p:nvPr/>
         </p:nvSpPr>
@@ -8897,7 +8942,7 @@
       </p:sp>
       <p:sp>
         <p:nvSpPr>
-          <p:cNvPr id="41" name="Text 39"/>
+          <p:cNvPr id="43" name="Text 41"/>
           <p:cNvSpPr txBox="1"/>
           <p:nvPr/>
         </p:nvSpPr>
@@ -8936,7 +8981,7 @@
       </p:sp>
       <p:sp>
         <p:nvSpPr>
-          <p:cNvPr id="42" name="Shape 40"/>
+          <p:cNvPr id="44" name="Shape 42"/>
           <p:cNvSpPr/>
           <p:nvPr/>
         </p:nvSpPr>
@@ -8963,7 +9008,7 @@
       </p:sp>
       <p:sp>
         <p:nvSpPr>
-          <p:cNvPr id="43" name="Text 41"/>
+          <p:cNvPr id="45" name="Text 43"/>
           <p:cNvSpPr txBox="1"/>
           <p:nvPr/>
         </p:nvSpPr>
@@ -9002,7 +9047,7 @@
       </p:sp>
       <p:sp>
         <p:nvSpPr>
-          <p:cNvPr id="44" name="Shape 42"/>
+          <p:cNvPr id="46" name="Shape 44"/>
           <p:cNvSpPr/>
           <p:nvPr/>
         </p:nvSpPr>
@@ -9024,7 +9069,7 @@
       </p:sp>
       <p:sp>
         <p:nvSpPr>
-          <p:cNvPr id="45" name="Text 43"/>
+          <p:cNvPr id="47" name="Text 45"/>
           <p:cNvSpPr txBox="1"/>
           <p:nvPr/>
         </p:nvSpPr>
@@ -9891,8 +9936,8 @@
         </p:nvSpPr>
         <p:spPr>
           <a:xfrm>
-            <a:off x="10268712" y="3739896"/>
-            <a:ext cx="868680" cy="292608"/>
+            <a:off x="10474452" y="3739896"/>
+            <a:ext cx="662940" cy="292608"/>
           </a:xfrm>
           <a:prstGeom prst="roundRect">
             <a:avLst>
@@ -9918,8 +9963,8 @@
         </p:nvSpPr>
         <p:spPr>
           <a:xfrm>
-            <a:off x="10268712" y="3730752"/>
-            <a:ext cx="868680" cy="310896"/>
+            <a:off x="10474452" y="3730752"/>
+            <a:ext cx="662940" cy="310896"/>
           </a:xfrm>
           <a:prstGeom prst="rect">
             <a:avLst/>
@@ -9943,7 +9988,7 @@
                 <a:ea typeface="Calibri" pitchFamily="34" charset="-122"/>
                 <a:cs typeface="Calibri" pitchFamily="34" charset="-120"/>
               </a:rPr>
-              <a:t>🔒 vault</a:t>
+              <a:t>vault</a:t>
             </a:r>
             <a:endParaRPr lang="en-US" sz="850" dirty="0"/>
           </a:p>
@@ -15252,7 +15297,7 @@
                 <a:ea typeface="Calibri" pitchFamily="34" charset="-122"/>
                 <a:cs typeface="Calibri" pitchFamily="34" charset="-120"/>
               </a:rPr>
-              <a:t>Hi! I can help — what do you need?</a:t>
+              <a:t>Hi! I can help. What do you need?</a:t>
             </a:r>
             <a:endParaRPr lang="en-US" sz="900" dirty="0"/>
           </a:p>
@@ -15384,7 +15429,7 @@
                 <a:ea typeface="Calibri" pitchFamily="34" charset="-122"/>
                 <a:cs typeface="Calibri" pitchFamily="34" charset="-120"/>
               </a:rPr>
-              <a:t>Here it is — plus your first-week checklist:</a:t>
+              <a:t>Here it is, plus your first-week checklist:</a:t>
             </a:r>
             <a:endParaRPr lang="en-US" sz="900" dirty="0"/>
           </a:p>
@@ -15419,14 +15464,87 @@
       </p:sp>
       <p:sp>
         <p:nvSpPr>
-          <p:cNvPr id="26" name="Text 24"/>
-          <p:cNvSpPr txBox="1"/>
-          <p:nvPr/>
-        </p:nvSpPr>
-        <p:spPr>
-          <a:xfrm>
-            <a:off x="7424928" y="3904488"/>
-            <a:ext cx="1783080" cy="292608"/>
+          <p:cNvPr id="26" name="Shape 24"/>
+          <p:cNvSpPr/>
+          <p:nvPr/>
+        </p:nvSpPr>
+        <p:spPr>
+          <a:xfrm>
+            <a:off x="7534656" y="3968496"/>
+            <a:ext cx="118872" cy="155448"/>
+          </a:xfrm>
+          <a:prstGeom prst="roundRect">
+            <a:avLst>
+              <a:gd name="adj" fmla="val 15385"/>
+            </a:avLst>
+          </a:prstGeom>
+          <a:solidFill>
+            <a:srgbClr val="FFFFFF"/>
+          </a:solidFill>
+          <a:ln w="12700">
+            <a:solidFill>
+              <a:srgbClr val="9C7C2E"/>
+            </a:solidFill>
+            <a:prstDash val="solid"/>
+          </a:ln>
+        </p:spPr>
+      </p:sp>
+      <p:sp>
+        <p:nvSpPr>
+          <p:cNvPr id="27" name="Shape 25"/>
+          <p:cNvSpPr/>
+          <p:nvPr/>
+        </p:nvSpPr>
+        <p:spPr>
+          <a:xfrm>
+            <a:off x="7562088" y="4023360"/>
+            <a:ext cx="64008" cy="0"/>
+          </a:xfrm>
+          <a:prstGeom prst="line">
+            <a:avLst/>
+          </a:prstGeom>
+          <a:noFill/>
+          <a:ln w="9525">
+            <a:solidFill>
+              <a:srgbClr val="9C7C2E"/>
+            </a:solidFill>
+            <a:prstDash val="solid"/>
+          </a:ln>
+        </p:spPr>
+      </p:sp>
+      <p:sp>
+        <p:nvSpPr>
+          <p:cNvPr id="28" name="Shape 26"/>
+          <p:cNvSpPr/>
+          <p:nvPr/>
+        </p:nvSpPr>
+        <p:spPr>
+          <a:xfrm>
+            <a:off x="7562088" y="4059936"/>
+            <a:ext cx="64008" cy="0"/>
+          </a:xfrm>
+          <a:prstGeom prst="line">
+            <a:avLst/>
+          </a:prstGeom>
+          <a:noFill/>
+          <a:ln w="9525">
+            <a:solidFill>
+              <a:srgbClr val="9C7C2E"/>
+            </a:solidFill>
+            <a:prstDash val="solid"/>
+          </a:ln>
+        </p:spPr>
+      </p:sp>
+      <p:sp>
+        <p:nvSpPr>
+          <p:cNvPr id="29" name="Text 27"/>
+          <p:cNvSpPr txBox="1"/>
+          <p:nvPr/>
+        </p:nvSpPr>
+        <p:spPr>
+          <a:xfrm>
+            <a:off x="7717536" y="3904488"/>
+            <a:ext cx="1463040" cy="292608"/>
           </a:xfrm>
           <a:prstGeom prst="rect">
             <a:avLst/>
@@ -15438,7 +15556,7 @@
           <a:bodyPr wrap="square" lIns="0" tIns="0" rIns="0" bIns="0" rtlCol="0" anchor="ctr"/>
           <a:lstStyle/>
           <a:p>
-            <a:pPr algn="ctr" indent="0" marL="0">
+            <a:pPr indent="0" marL="0">
               <a:buNone/>
             </a:pPr>
             <a:r>
@@ -15450,7 +15568,7 @@
                 <a:ea typeface="Calibri" pitchFamily="34" charset="-122"/>
                 <a:cs typeface="Calibri" pitchFamily="34" charset="-120"/>
               </a:rPr>
-              <a:t>📄 Employee Handbook</a:t>
+              <a:t>Employee Handbook</a:t>
             </a:r>
             <a:endParaRPr lang="en-US" sz="750" dirty="0"/>
           </a:p>
@@ -15458,7 +15576,7 @@
       </p:sp>
       <p:sp>
         <p:nvSpPr>
-          <p:cNvPr id="27" name="Shape 25"/>
+          <p:cNvPr id="30" name="Shape 28"/>
           <p:cNvSpPr/>
           <p:nvPr/>
         </p:nvSpPr>
@@ -15485,7 +15603,7 @@
       </p:sp>
       <p:sp>
         <p:nvSpPr>
-          <p:cNvPr id="28" name="Text 26"/>
+          <p:cNvPr id="31" name="Text 29"/>
           <p:cNvSpPr txBox="1"/>
           <p:nvPr/>
         </p:nvSpPr>
@@ -15524,7 +15642,7 @@
       </p:sp>
       <p:sp>
         <p:nvSpPr>
-          <p:cNvPr id="29" name="Shape 27"/>
+          <p:cNvPr id="32" name="Shape 30"/>
           <p:cNvSpPr/>
           <p:nvPr/>
         </p:nvSpPr>
@@ -15544,7 +15662,7 @@
       </p:sp>
       <p:sp>
         <p:nvSpPr>
-          <p:cNvPr id="30" name="Text 28"/>
+          <p:cNvPr id="33" name="Text 31"/>
           <p:cNvSpPr txBox="1"/>
           <p:nvPr/>
         </p:nvSpPr>
@@ -17213,7 +17331,7 @@
                 <a:ea typeface="Calibri" pitchFamily="34" charset="-122"/>
                 <a:cs typeface="Calibri" pitchFamily="34" charset="-120"/>
               </a:rPr>
-              <a:t>Started, ~10% complete; only the mockups are live so far.</a:t>
+              <a:t>Today: mockups and workflow processes documented.</a:t>
             </a:r>
             <a:endParaRPr lang="en-US" sz="1350" dirty="0"/>
           </a:p>
@@ -17234,7 +17352,7 @@
                 <a:ea typeface="Calibri" pitchFamily="34" charset="-122"/>
                 <a:cs typeface="Calibri" pitchFamily="34" charset="-120"/>
               </a:rPr>
-              <a:t>Next: a ~10-week build to connect the real data sources.</a:t>
+              <a:t>Next: connect the real data sources, aiming for an end-of-March go-live.</a:t>
             </a:r>
             <a:endParaRPr lang="en-US" sz="1350" dirty="0"/>
           </a:p>

--- a/Rooted_for_the_Future.pptx
+++ b/Rooted_for_the_Future.pptx
@@ -3610,7 +3610,73 @@
       </p:sp>
       <p:sp>
         <p:nvSpPr>
-          <p:cNvPr id="3" name="Text 1"/>
+          <p:cNvPr id="3" name="Shape 1"/>
+          <p:cNvSpPr/>
+          <p:nvPr/>
+        </p:nvSpPr>
+        <p:spPr>
+          <a:xfrm>
+            <a:off x="10314432" y="731520"/>
+            <a:ext cx="1051560" cy="310896"/>
+          </a:xfrm>
+          <a:prstGeom prst="roundRect">
+            <a:avLst>
+              <a:gd name="adj" fmla="val 50000"/>
+            </a:avLst>
+          </a:prstGeom>
+          <a:solidFill>
+            <a:srgbClr val="F3E7C8"/>
+          </a:solidFill>
+          <a:ln w="9525">
+            <a:solidFill>
+              <a:srgbClr val="9C7C2E"/>
+            </a:solidFill>
+            <a:prstDash val="solid"/>
+          </a:ln>
+        </p:spPr>
+      </p:sp>
+      <p:sp>
+        <p:nvSpPr>
+          <p:cNvPr id="4" name="Text 2"/>
+          <p:cNvSpPr txBox="1"/>
+          <p:nvPr/>
+        </p:nvSpPr>
+        <p:spPr>
+          <a:xfrm>
+            <a:off x="10314432" y="722376"/>
+            <a:ext cx="1051560" cy="320040"/>
+          </a:xfrm>
+          <a:prstGeom prst="rect">
+            <a:avLst/>
+          </a:prstGeom>
+          <a:noFill/>
+          <a:ln/>
+        </p:spPr>
+        <p:txBody>
+          <a:bodyPr wrap="square" lIns="0" tIns="0" rIns="0" bIns="0" rtlCol="0" anchor="ctr"/>
+          <a:lstStyle/>
+          <a:p>
+            <a:pPr algn="ctr" indent="0" marL="0">
+              <a:buNone/>
+            </a:pPr>
+            <a:r>
+              <a:rPr lang="en-US" sz="850" b="1" spc="100" kern="0" dirty="0">
+                <a:solidFill>
+                  <a:srgbClr val="7A5A12"/>
+                </a:solidFill>
+                <a:latin typeface="Calibri" pitchFamily="34" charset="0"/>
+                <a:ea typeface="Calibri" pitchFamily="34" charset="-122"/>
+                <a:cs typeface="Calibri" pitchFamily="34" charset="-120"/>
+              </a:rPr>
+              <a:t>PHASE 2</a:t>
+            </a:r>
+            <a:endParaRPr lang="en-US" sz="850" dirty="0"/>
+          </a:p>
+        </p:txBody>
+      </p:sp>
+      <p:sp>
+        <p:nvSpPr>
+          <p:cNvPr id="5" name="Text 3"/>
           <p:cNvSpPr txBox="1"/>
           <p:nvPr/>
         </p:nvSpPr>
@@ -3652,7 +3718,7 @@
       </p:sp>
       <p:sp>
         <p:nvSpPr>
-          <p:cNvPr id="4" name="Text 2"/>
+          <p:cNvPr id="6" name="Text 4"/>
           <p:cNvSpPr txBox="1"/>
           <p:nvPr/>
         </p:nvSpPr>
@@ -3694,7 +3760,7 @@
       </p:sp>
       <p:sp>
         <p:nvSpPr>
-          <p:cNvPr id="5" name="Text 3"/>
+          <p:cNvPr id="7" name="Text 5"/>
           <p:cNvSpPr txBox="1"/>
           <p:nvPr/>
         </p:nvSpPr>
@@ -3779,7 +3845,7 @@
       </p:sp>
       <p:sp>
         <p:nvSpPr>
-          <p:cNvPr id="6" name="Shape 4"/>
+          <p:cNvPr id="8" name="Shape 6"/>
           <p:cNvSpPr/>
           <p:nvPr/>
         </p:nvSpPr>
@@ -3806,7 +3872,7 @@
       </p:sp>
       <p:sp>
         <p:nvSpPr>
-          <p:cNvPr id="7" name="Text 5"/>
+          <p:cNvPr id="9" name="Text 7"/>
           <p:cNvSpPr txBox="1"/>
           <p:nvPr/>
         </p:nvSpPr>
@@ -3845,7 +3911,7 @@
       </p:sp>
       <p:sp>
         <p:nvSpPr>
-          <p:cNvPr id="8" name="Shape 6"/>
+          <p:cNvPr id="10" name="Shape 8"/>
           <p:cNvSpPr/>
           <p:nvPr/>
         </p:nvSpPr>
@@ -3872,7 +3938,7 @@
       </p:sp>
       <p:sp>
         <p:nvSpPr>
-          <p:cNvPr id="9" name="Shape 7"/>
+          <p:cNvPr id="11" name="Shape 9"/>
           <p:cNvSpPr/>
           <p:nvPr/>
         </p:nvSpPr>
@@ -3892,7 +3958,7 @@
       </p:sp>
       <p:sp>
         <p:nvSpPr>
-          <p:cNvPr id="10" name="Text 8"/>
+          <p:cNvPr id="12" name="Text 10"/>
           <p:cNvSpPr txBox="1"/>
           <p:nvPr/>
         </p:nvSpPr>
@@ -3931,7 +3997,7 @@
       </p:sp>
       <p:sp>
         <p:nvSpPr>
-          <p:cNvPr id="11" name="Shape 9"/>
+          <p:cNvPr id="13" name="Shape 11"/>
           <p:cNvSpPr/>
           <p:nvPr/>
         </p:nvSpPr>
@@ -3965,7 +4031,7 @@
       </p:sp>
       <p:sp>
         <p:nvSpPr>
-          <p:cNvPr id="12" name="Shape 10"/>
+          <p:cNvPr id="14" name="Shape 12"/>
           <p:cNvSpPr/>
           <p:nvPr/>
         </p:nvSpPr>
@@ -3987,7 +4053,7 @@
       </p:sp>
       <p:sp>
         <p:nvSpPr>
-          <p:cNvPr id="13" name="Shape 11"/>
+          <p:cNvPr id="15" name="Shape 13"/>
           <p:cNvSpPr/>
           <p:nvPr/>
         </p:nvSpPr>
@@ -4007,7 +4073,7 @@
       </p:sp>
       <p:sp>
         <p:nvSpPr>
-          <p:cNvPr id="14" name="Shape 12"/>
+          <p:cNvPr id="16" name="Shape 14"/>
           <p:cNvSpPr/>
           <p:nvPr/>
         </p:nvSpPr>
@@ -4027,7 +4093,7 @@
       </p:sp>
       <p:sp>
         <p:nvSpPr>
-          <p:cNvPr id="15" name="Shape 13"/>
+          <p:cNvPr id="17" name="Shape 15"/>
           <p:cNvSpPr/>
           <p:nvPr/>
         </p:nvSpPr>
@@ -4047,7 +4113,7 @@
       </p:sp>
       <p:sp>
         <p:nvSpPr>
-          <p:cNvPr id="16" name="Shape 14"/>
+          <p:cNvPr id="18" name="Shape 16"/>
           <p:cNvSpPr/>
           <p:nvPr/>
         </p:nvSpPr>
@@ -4067,7 +4133,7 @@
       </p:sp>
       <p:sp>
         <p:nvSpPr>
-          <p:cNvPr id="17" name="Text 15"/>
+          <p:cNvPr id="19" name="Text 17"/>
           <p:cNvSpPr txBox="1"/>
           <p:nvPr/>
         </p:nvSpPr>
@@ -4095,7 +4161,7 @@
       </p:sp>
       <p:sp>
         <p:nvSpPr>
-          <p:cNvPr id="18" name="Shape 16"/>
+          <p:cNvPr id="20" name="Shape 18"/>
           <p:cNvSpPr/>
           <p:nvPr/>
         </p:nvSpPr>
@@ -4118,7 +4184,7 @@
       </p:sp>
       <p:sp>
         <p:nvSpPr>
-          <p:cNvPr id="19" name="Shape 17"/>
+          <p:cNvPr id="21" name="Shape 19"/>
           <p:cNvSpPr/>
           <p:nvPr/>
         </p:nvSpPr>
@@ -4145,7 +4211,7 @@
       </p:sp>
       <p:sp>
         <p:nvSpPr>
-          <p:cNvPr id="20" name="Text 18"/>
+          <p:cNvPr id="22" name="Text 20"/>
           <p:cNvSpPr txBox="1"/>
           <p:nvPr/>
         </p:nvSpPr>
@@ -4184,7 +4250,7 @@
       </p:sp>
       <p:sp>
         <p:nvSpPr>
-          <p:cNvPr id="21" name="Text 19"/>
+          <p:cNvPr id="23" name="Text 21"/>
           <p:cNvSpPr txBox="1"/>
           <p:nvPr/>
         </p:nvSpPr>
@@ -4223,7 +4289,7 @@
       </p:sp>
       <p:sp>
         <p:nvSpPr>
-          <p:cNvPr id="22" name="Shape 20"/>
+          <p:cNvPr id="24" name="Shape 22"/>
           <p:cNvSpPr/>
           <p:nvPr/>
         </p:nvSpPr>
@@ -4250,7 +4316,7 @@
       </p:sp>
       <p:sp>
         <p:nvSpPr>
-          <p:cNvPr id="23" name="Text 21"/>
+          <p:cNvPr id="25" name="Text 23"/>
           <p:cNvSpPr txBox="1"/>
           <p:nvPr/>
         </p:nvSpPr>
@@ -4289,7 +4355,7 @@
       </p:sp>
       <p:sp>
         <p:nvSpPr>
-          <p:cNvPr id="24" name="Text 22"/>
+          <p:cNvPr id="26" name="Text 24"/>
           <p:cNvSpPr txBox="1"/>
           <p:nvPr/>
         </p:nvSpPr>
@@ -4328,7 +4394,7 @@
       </p:sp>
       <p:sp>
         <p:nvSpPr>
-          <p:cNvPr id="25" name="Shape 23"/>
+          <p:cNvPr id="27" name="Shape 25"/>
           <p:cNvSpPr/>
           <p:nvPr/>
         </p:nvSpPr>
@@ -4355,7 +4421,7 @@
       </p:sp>
       <p:sp>
         <p:nvSpPr>
-          <p:cNvPr id="26" name="Text 24"/>
+          <p:cNvPr id="28" name="Text 26"/>
           <p:cNvSpPr txBox="1"/>
           <p:nvPr/>
         </p:nvSpPr>
@@ -4394,7 +4460,7 @@
       </p:sp>
       <p:sp>
         <p:nvSpPr>
-          <p:cNvPr id="27" name="Text 25"/>
+          <p:cNvPr id="29" name="Text 27"/>
           <p:cNvSpPr txBox="1"/>
           <p:nvPr/>
         </p:nvSpPr>
@@ -4433,7 +4499,7 @@
       </p:sp>
       <p:sp>
         <p:nvSpPr>
-          <p:cNvPr id="28" name="Shape 26"/>
+          <p:cNvPr id="30" name="Shape 28"/>
           <p:cNvSpPr/>
           <p:nvPr/>
         </p:nvSpPr>
@@ -4455,7 +4521,7 @@
       </p:sp>
       <p:sp>
         <p:nvSpPr>
-          <p:cNvPr id="29" name="Text 27"/>
+          <p:cNvPr id="31" name="Text 29"/>
           <p:cNvSpPr txBox="1"/>
           <p:nvPr/>
         </p:nvSpPr>
@@ -4494,7 +4560,7 @@
       </p:sp>
       <p:sp>
         <p:nvSpPr>
-          <p:cNvPr id="30" name="Shape 28"/>
+          <p:cNvPr id="32" name="Shape 30"/>
           <p:cNvSpPr/>
           <p:nvPr/>
         </p:nvSpPr>
@@ -4516,7 +4582,7 @@
       </p:sp>
       <p:sp>
         <p:nvSpPr>
-          <p:cNvPr id="31" name="Text 29"/>
+          <p:cNvPr id="33" name="Text 31"/>
           <p:cNvSpPr txBox="1"/>
           <p:nvPr/>
         </p:nvSpPr>
@@ -4555,7 +4621,7 @@
       </p:sp>
       <p:sp>
         <p:nvSpPr>
-          <p:cNvPr id="32" name="Shape 30"/>
+          <p:cNvPr id="34" name="Shape 32"/>
           <p:cNvSpPr/>
           <p:nvPr/>
         </p:nvSpPr>
@@ -4577,7 +4643,7 @@
       </p:sp>
       <p:sp>
         <p:nvSpPr>
-          <p:cNvPr id="33" name="Text 31"/>
+          <p:cNvPr id="35" name="Text 33"/>
           <p:cNvSpPr txBox="1"/>
           <p:nvPr/>
         </p:nvSpPr>
@@ -4616,7 +4682,7 @@
       </p:sp>
       <p:sp>
         <p:nvSpPr>
-          <p:cNvPr id="34" name="Shape 32"/>
+          <p:cNvPr id="36" name="Shape 34"/>
           <p:cNvSpPr/>
           <p:nvPr/>
         </p:nvSpPr>
@@ -4638,7 +4704,7 @@
       </p:sp>
       <p:sp>
         <p:nvSpPr>
-          <p:cNvPr id="35" name="Text 33"/>
+          <p:cNvPr id="37" name="Text 35"/>
           <p:cNvSpPr txBox="1"/>
           <p:nvPr/>
         </p:nvSpPr>
@@ -4677,7 +4743,7 @@
       </p:sp>
       <p:sp>
         <p:nvSpPr>
-          <p:cNvPr id="36" name="Shape 34"/>
+          <p:cNvPr id="38" name="Shape 36"/>
           <p:cNvSpPr/>
           <p:nvPr/>
         </p:nvSpPr>
@@ -4699,7 +4765,7 @@
       </p:sp>
       <p:sp>
         <p:nvSpPr>
-          <p:cNvPr id="37" name="Text 35"/>
+          <p:cNvPr id="39" name="Text 37"/>
           <p:cNvSpPr txBox="1"/>
           <p:nvPr/>
         </p:nvSpPr>
@@ -4738,7 +4804,7 @@
       </p:sp>
       <p:sp>
         <p:nvSpPr>
-          <p:cNvPr id="38" name="Shape 36"/>
+          <p:cNvPr id="40" name="Shape 38"/>
           <p:cNvSpPr/>
           <p:nvPr/>
         </p:nvSpPr>
@@ -4760,7 +4826,7 @@
       </p:sp>
       <p:sp>
         <p:nvSpPr>
-          <p:cNvPr id="39" name="Text 37"/>
+          <p:cNvPr id="41" name="Text 39"/>
           <p:cNvSpPr txBox="1"/>
           <p:nvPr/>
         </p:nvSpPr>
@@ -4799,7 +4865,7 @@
       </p:sp>
       <p:sp>
         <p:nvSpPr>
-          <p:cNvPr id="40" name="Shape 38"/>
+          <p:cNvPr id="42" name="Shape 40"/>
           <p:cNvSpPr/>
           <p:nvPr/>
         </p:nvSpPr>
@@ -4826,7 +4892,7 @@
       </p:sp>
       <p:sp>
         <p:nvSpPr>
-          <p:cNvPr id="41" name="Shape 39"/>
+          <p:cNvPr id="43" name="Shape 41"/>
           <p:cNvSpPr/>
           <p:nvPr/>
         </p:nvSpPr>
@@ -4846,7 +4912,7 @@
       </p:sp>
       <p:sp>
         <p:nvSpPr>
-          <p:cNvPr id="42" name="Text 40"/>
+          <p:cNvPr id="44" name="Text 42"/>
           <p:cNvSpPr txBox="1"/>
           <p:nvPr/>
         </p:nvSpPr>
@@ -4885,7 +4951,7 @@
       </p:sp>
       <p:sp>
         <p:nvSpPr>
-          <p:cNvPr id="43" name="Shape 41"/>
+          <p:cNvPr id="45" name="Shape 43"/>
           <p:cNvSpPr/>
           <p:nvPr/>
         </p:nvSpPr>
@@ -4912,7 +4978,7 @@
       </p:sp>
       <p:sp>
         <p:nvSpPr>
-          <p:cNvPr id="44" name="Text 42"/>
+          <p:cNvPr id="46" name="Text 44"/>
           <p:cNvSpPr txBox="1"/>
           <p:nvPr/>
         </p:nvSpPr>
@@ -4951,7 +5017,7 @@
       </p:sp>
       <p:sp>
         <p:nvSpPr>
-          <p:cNvPr id="45" name="Shape 43"/>
+          <p:cNvPr id="47" name="Shape 45"/>
           <p:cNvSpPr/>
           <p:nvPr/>
         </p:nvSpPr>
@@ -4978,7 +5044,7 @@
       </p:sp>
       <p:sp>
         <p:nvSpPr>
-          <p:cNvPr id="46" name="Shape 44"/>
+          <p:cNvPr id="48" name="Shape 46"/>
           <p:cNvSpPr/>
           <p:nvPr/>
         </p:nvSpPr>
@@ -4998,7 +5064,7 @@
       </p:sp>
       <p:sp>
         <p:nvSpPr>
-          <p:cNvPr id="47" name="Text 45"/>
+          <p:cNvPr id="49" name="Text 47"/>
           <p:cNvSpPr txBox="1"/>
           <p:nvPr/>
         </p:nvSpPr>
@@ -5037,7 +5103,7 @@
       </p:sp>
       <p:sp>
         <p:nvSpPr>
-          <p:cNvPr id="48" name="Shape 46"/>
+          <p:cNvPr id="50" name="Shape 48"/>
           <p:cNvSpPr/>
           <p:nvPr/>
         </p:nvSpPr>
@@ -5064,7 +5130,7 @@
       </p:sp>
       <p:sp>
         <p:nvSpPr>
-          <p:cNvPr id="49" name="Text 47"/>
+          <p:cNvPr id="51" name="Text 49"/>
           <p:cNvSpPr txBox="1"/>
           <p:nvPr/>
         </p:nvSpPr>
@@ -5103,7 +5169,7 @@
       </p:sp>
       <p:sp>
         <p:nvSpPr>
-          <p:cNvPr id="50" name="Shape 48"/>
+          <p:cNvPr id="52" name="Shape 50"/>
           <p:cNvSpPr/>
           <p:nvPr/>
         </p:nvSpPr>
@@ -5130,7 +5196,7 @@
       </p:sp>
       <p:sp>
         <p:nvSpPr>
-          <p:cNvPr id="51" name="Shape 49"/>
+          <p:cNvPr id="53" name="Shape 51"/>
           <p:cNvSpPr/>
           <p:nvPr/>
         </p:nvSpPr>
@@ -5150,7 +5216,7 @@
       </p:sp>
       <p:sp>
         <p:nvSpPr>
-          <p:cNvPr id="52" name="Text 50"/>
+          <p:cNvPr id="54" name="Text 52"/>
           <p:cNvSpPr txBox="1"/>
           <p:nvPr/>
         </p:nvSpPr>
@@ -5189,7 +5255,7 @@
       </p:sp>
       <p:sp>
         <p:nvSpPr>
-          <p:cNvPr id="53" name="Shape 51"/>
+          <p:cNvPr id="55" name="Shape 53"/>
           <p:cNvSpPr/>
           <p:nvPr/>
         </p:nvSpPr>
@@ -5216,7 +5282,7 @@
       </p:sp>
       <p:sp>
         <p:nvSpPr>
-          <p:cNvPr id="54" name="Text 52"/>
+          <p:cNvPr id="56" name="Text 54"/>
           <p:cNvSpPr txBox="1"/>
           <p:nvPr/>
         </p:nvSpPr>
@@ -5326,7 +5392,73 @@
       </p:sp>
       <p:sp>
         <p:nvSpPr>
-          <p:cNvPr id="3" name="Text 1"/>
+          <p:cNvPr id="3" name="Shape 1"/>
+          <p:cNvSpPr/>
+          <p:nvPr/>
+        </p:nvSpPr>
+        <p:spPr>
+          <a:xfrm>
+            <a:off x="10314432" y="731520"/>
+            <a:ext cx="1051560" cy="310896"/>
+          </a:xfrm>
+          <a:prstGeom prst="roundRect">
+            <a:avLst>
+              <a:gd name="adj" fmla="val 50000"/>
+            </a:avLst>
+          </a:prstGeom>
+          <a:solidFill>
+            <a:srgbClr val="F3E7C8"/>
+          </a:solidFill>
+          <a:ln w="9525">
+            <a:solidFill>
+              <a:srgbClr val="9C7C2E"/>
+            </a:solidFill>
+            <a:prstDash val="solid"/>
+          </a:ln>
+        </p:spPr>
+      </p:sp>
+      <p:sp>
+        <p:nvSpPr>
+          <p:cNvPr id="4" name="Text 2"/>
+          <p:cNvSpPr txBox="1"/>
+          <p:nvPr/>
+        </p:nvSpPr>
+        <p:spPr>
+          <a:xfrm>
+            <a:off x="10314432" y="722376"/>
+            <a:ext cx="1051560" cy="320040"/>
+          </a:xfrm>
+          <a:prstGeom prst="rect">
+            <a:avLst/>
+          </a:prstGeom>
+          <a:noFill/>
+          <a:ln/>
+        </p:spPr>
+        <p:txBody>
+          <a:bodyPr wrap="square" lIns="0" tIns="0" rIns="0" bIns="0" rtlCol="0" anchor="ctr"/>
+          <a:lstStyle/>
+          <a:p>
+            <a:pPr algn="ctr" indent="0" marL="0">
+              <a:buNone/>
+            </a:pPr>
+            <a:r>
+              <a:rPr lang="en-US" sz="850" b="1" spc="100" kern="0" dirty="0">
+                <a:solidFill>
+                  <a:srgbClr val="7A5A12"/>
+                </a:solidFill>
+                <a:latin typeface="Calibri" pitchFamily="34" charset="0"/>
+                <a:ea typeface="Calibri" pitchFamily="34" charset="-122"/>
+                <a:cs typeface="Calibri" pitchFamily="34" charset="-120"/>
+              </a:rPr>
+              <a:t>PHASE 2</a:t>
+            </a:r>
+            <a:endParaRPr lang="en-US" sz="850" dirty="0"/>
+          </a:p>
+        </p:txBody>
+      </p:sp>
+      <p:sp>
+        <p:nvSpPr>
+          <p:cNvPr id="5" name="Text 3"/>
           <p:cNvSpPr txBox="1"/>
           <p:nvPr/>
         </p:nvSpPr>
@@ -5368,7 +5500,7 @@
       </p:sp>
       <p:sp>
         <p:nvSpPr>
-          <p:cNvPr id="4" name="Text 2"/>
+          <p:cNvPr id="6" name="Text 4"/>
           <p:cNvSpPr txBox="1"/>
           <p:nvPr/>
         </p:nvSpPr>
@@ -5410,7 +5542,7 @@
       </p:sp>
       <p:sp>
         <p:nvSpPr>
-          <p:cNvPr id="5" name="Shape 3"/>
+          <p:cNvPr id="7" name="Shape 5"/>
           <p:cNvSpPr/>
           <p:nvPr/>
         </p:nvSpPr>
@@ -5437,7 +5569,7 @@
       </p:sp>
       <p:sp>
         <p:nvSpPr>
-          <p:cNvPr id="6" name="Text 4"/>
+          <p:cNvPr id="8" name="Text 6"/>
           <p:cNvSpPr txBox="1"/>
           <p:nvPr/>
         </p:nvSpPr>
@@ -5476,7 +5608,7 @@
       </p:sp>
       <p:sp>
         <p:nvSpPr>
-          <p:cNvPr id="7" name="Shape 5"/>
+          <p:cNvPr id="9" name="Shape 7"/>
           <p:cNvSpPr/>
           <p:nvPr/>
         </p:nvSpPr>
@@ -5503,7 +5635,7 @@
       </p:sp>
       <p:sp>
         <p:nvSpPr>
-          <p:cNvPr id="8" name="Shape 6"/>
+          <p:cNvPr id="10" name="Shape 8"/>
           <p:cNvSpPr/>
           <p:nvPr/>
         </p:nvSpPr>
@@ -5523,7 +5655,7 @@
       </p:sp>
       <p:sp>
         <p:nvSpPr>
-          <p:cNvPr id="9" name="Text 7"/>
+          <p:cNvPr id="11" name="Text 9"/>
           <p:cNvSpPr txBox="1"/>
           <p:nvPr/>
         </p:nvSpPr>
@@ -5562,7 +5694,7 @@
       </p:sp>
       <p:sp>
         <p:nvSpPr>
-          <p:cNvPr id="10" name="Shape 8"/>
+          <p:cNvPr id="12" name="Shape 10"/>
           <p:cNvSpPr/>
           <p:nvPr/>
         </p:nvSpPr>
@@ -5596,7 +5728,7 @@
       </p:sp>
       <p:pic>
         <p:nvPicPr>
-          <p:cNvPr id="11" name="Image 0" descr="/private/tmp/claude-502/-Users-DRBTroy-Documents-Projects-DeepRoots/3b403855-4530-4100-a3e2-ac51fe60ce6e/scratchpad/screens/support.png">    </p:cNvPr>
+          <p:cNvPr id="13" name="Image 0" descr="/private/tmp/claude-502/-Users-DRBTroy-Documents-Projects-DeepRoots/3b403855-4530-4100-a3e2-ac51fe60ce6e/scratchpad/screens/support.png">    </p:cNvPr>
           <p:cNvPicPr>
             <a:picLocks noChangeAspect="1"/>
           </p:cNvPicPr>
@@ -5691,7 +5823,73 @@
       </p:sp>
       <p:sp>
         <p:nvSpPr>
-          <p:cNvPr id="3" name="Text 1"/>
+          <p:cNvPr id="3" name="Shape 1"/>
+          <p:cNvSpPr/>
+          <p:nvPr/>
+        </p:nvSpPr>
+        <p:spPr>
+          <a:xfrm>
+            <a:off x="10314432" y="731520"/>
+            <a:ext cx="1051560" cy="310896"/>
+          </a:xfrm>
+          <a:prstGeom prst="roundRect">
+            <a:avLst>
+              <a:gd name="adj" fmla="val 50000"/>
+            </a:avLst>
+          </a:prstGeom>
+          <a:solidFill>
+            <a:srgbClr val="F3E7C8"/>
+          </a:solidFill>
+          <a:ln w="9525">
+            <a:solidFill>
+              <a:srgbClr val="9C7C2E"/>
+            </a:solidFill>
+            <a:prstDash val="solid"/>
+          </a:ln>
+        </p:spPr>
+      </p:sp>
+      <p:sp>
+        <p:nvSpPr>
+          <p:cNvPr id="4" name="Text 2"/>
+          <p:cNvSpPr txBox="1"/>
+          <p:nvPr/>
+        </p:nvSpPr>
+        <p:spPr>
+          <a:xfrm>
+            <a:off x="10314432" y="722376"/>
+            <a:ext cx="1051560" cy="320040"/>
+          </a:xfrm>
+          <a:prstGeom prst="rect">
+            <a:avLst/>
+          </a:prstGeom>
+          <a:noFill/>
+          <a:ln/>
+        </p:spPr>
+        <p:txBody>
+          <a:bodyPr wrap="square" lIns="0" tIns="0" rIns="0" bIns="0" rtlCol="0" anchor="ctr"/>
+          <a:lstStyle/>
+          <a:p>
+            <a:pPr algn="ctr" indent="0" marL="0">
+              <a:buNone/>
+            </a:pPr>
+            <a:r>
+              <a:rPr lang="en-US" sz="850" b="1" spc="100" kern="0" dirty="0">
+                <a:solidFill>
+                  <a:srgbClr val="7A5A12"/>
+                </a:solidFill>
+                <a:latin typeface="Calibri" pitchFamily="34" charset="0"/>
+                <a:ea typeface="Calibri" pitchFamily="34" charset="-122"/>
+                <a:cs typeface="Calibri" pitchFamily="34" charset="-120"/>
+              </a:rPr>
+              <a:t>PHASE 2</a:t>
+            </a:r>
+            <a:endParaRPr lang="en-US" sz="850" dirty="0"/>
+          </a:p>
+        </p:txBody>
+      </p:sp>
+      <p:sp>
+        <p:nvSpPr>
+          <p:cNvPr id="5" name="Text 3"/>
           <p:cNvSpPr txBox="1"/>
           <p:nvPr/>
         </p:nvSpPr>
@@ -5733,7 +5931,7 @@
       </p:sp>
       <p:sp>
         <p:nvSpPr>
-          <p:cNvPr id="4" name="Text 2"/>
+          <p:cNvPr id="6" name="Text 4"/>
           <p:cNvSpPr txBox="1"/>
           <p:nvPr/>
         </p:nvSpPr>
@@ -5775,7 +5973,7 @@
       </p:sp>
       <p:sp>
         <p:nvSpPr>
-          <p:cNvPr id="5" name="Shape 3"/>
+          <p:cNvPr id="7" name="Shape 5"/>
           <p:cNvSpPr/>
           <p:nvPr/>
         </p:nvSpPr>
@@ -5802,7 +6000,7 @@
       </p:sp>
       <p:sp>
         <p:nvSpPr>
-          <p:cNvPr id="6" name="Text 4"/>
+          <p:cNvPr id="8" name="Text 6"/>
           <p:cNvSpPr txBox="1"/>
           <p:nvPr/>
         </p:nvSpPr>
@@ -5841,7 +6039,7 @@
       </p:sp>
       <p:sp>
         <p:nvSpPr>
-          <p:cNvPr id="7" name="Shape 5"/>
+          <p:cNvPr id="9" name="Shape 7"/>
           <p:cNvSpPr/>
           <p:nvPr/>
         </p:nvSpPr>
@@ -5875,7 +6073,7 @@
       </p:sp>
       <p:pic>
         <p:nvPicPr>
-          <p:cNvPr id="8" name="Image 0" descr="/private/tmp/claude-502/-Users-DRBTroy-Documents-Projects-DeepRoots/3b403855-4530-4100-a3e2-ac51fe60ce6e/scratchpad/screens/inbox.png">    </p:cNvPr>
+          <p:cNvPr id="10" name="Image 0" descr="/private/tmp/claude-502/-Users-DRBTroy-Documents-Projects-DeepRoots/3b403855-4530-4100-a3e2-ac51fe60ce6e/scratchpad/screens/inbox.png">    </p:cNvPr>
           <p:cNvPicPr>
             <a:picLocks noChangeAspect="1"/>
           </p:cNvPicPr>
@@ -5970,7 +6168,73 @@
       </p:sp>
       <p:sp>
         <p:nvSpPr>
-          <p:cNvPr id="3" name="Text 1"/>
+          <p:cNvPr id="3" name="Shape 1"/>
+          <p:cNvSpPr/>
+          <p:nvPr/>
+        </p:nvSpPr>
+        <p:spPr>
+          <a:xfrm>
+            <a:off x="10314432" y="731520"/>
+            <a:ext cx="1051560" cy="310896"/>
+          </a:xfrm>
+          <a:prstGeom prst="roundRect">
+            <a:avLst>
+              <a:gd name="adj" fmla="val 50000"/>
+            </a:avLst>
+          </a:prstGeom>
+          <a:solidFill>
+            <a:srgbClr val="F3E7C8"/>
+          </a:solidFill>
+          <a:ln w="9525">
+            <a:solidFill>
+              <a:srgbClr val="9C7C2E"/>
+            </a:solidFill>
+            <a:prstDash val="solid"/>
+          </a:ln>
+        </p:spPr>
+      </p:sp>
+      <p:sp>
+        <p:nvSpPr>
+          <p:cNvPr id="4" name="Text 2"/>
+          <p:cNvSpPr txBox="1"/>
+          <p:nvPr/>
+        </p:nvSpPr>
+        <p:spPr>
+          <a:xfrm>
+            <a:off x="10314432" y="722376"/>
+            <a:ext cx="1051560" cy="320040"/>
+          </a:xfrm>
+          <a:prstGeom prst="rect">
+            <a:avLst/>
+          </a:prstGeom>
+          <a:noFill/>
+          <a:ln/>
+        </p:spPr>
+        <p:txBody>
+          <a:bodyPr wrap="square" lIns="0" tIns="0" rIns="0" bIns="0" rtlCol="0" anchor="ctr"/>
+          <a:lstStyle/>
+          <a:p>
+            <a:pPr algn="ctr" indent="0" marL="0">
+              <a:buNone/>
+            </a:pPr>
+            <a:r>
+              <a:rPr lang="en-US" sz="850" b="1" spc="100" kern="0" dirty="0">
+                <a:solidFill>
+                  <a:srgbClr val="7A5A12"/>
+                </a:solidFill>
+                <a:latin typeface="Calibri" pitchFamily="34" charset="0"/>
+                <a:ea typeface="Calibri" pitchFamily="34" charset="-122"/>
+                <a:cs typeface="Calibri" pitchFamily="34" charset="-120"/>
+              </a:rPr>
+              <a:t>PHASE 2</a:t>
+            </a:r>
+            <a:endParaRPr lang="en-US" sz="850" dirty="0"/>
+          </a:p>
+        </p:txBody>
+      </p:sp>
+      <p:sp>
+        <p:nvSpPr>
+          <p:cNvPr id="5" name="Text 3"/>
           <p:cNvSpPr txBox="1"/>
           <p:nvPr/>
         </p:nvSpPr>
@@ -6012,7 +6276,7 @@
       </p:sp>
       <p:sp>
         <p:nvSpPr>
-          <p:cNvPr id="4" name="Text 2"/>
+          <p:cNvPr id="6" name="Text 4"/>
           <p:cNvSpPr txBox="1"/>
           <p:nvPr/>
         </p:nvSpPr>
@@ -6054,7 +6318,7 @@
       </p:sp>
       <p:sp>
         <p:nvSpPr>
-          <p:cNvPr id="5" name="Shape 3"/>
+          <p:cNvPr id="7" name="Shape 5"/>
           <p:cNvSpPr/>
           <p:nvPr/>
         </p:nvSpPr>
@@ -6081,7 +6345,7 @@
       </p:sp>
       <p:sp>
         <p:nvSpPr>
-          <p:cNvPr id="6" name="Text 4"/>
+          <p:cNvPr id="8" name="Text 6"/>
           <p:cNvSpPr txBox="1"/>
           <p:nvPr/>
         </p:nvSpPr>
@@ -6120,7 +6384,7 @@
       </p:sp>
       <p:sp>
         <p:nvSpPr>
-          <p:cNvPr id="7" name="Shape 5"/>
+          <p:cNvPr id="9" name="Shape 7"/>
           <p:cNvSpPr/>
           <p:nvPr/>
         </p:nvSpPr>
@@ -6147,7 +6411,7 @@
       </p:sp>
       <p:sp>
         <p:nvSpPr>
-          <p:cNvPr id="8" name="Shape 6"/>
+          <p:cNvPr id="10" name="Shape 8"/>
           <p:cNvSpPr/>
           <p:nvPr/>
         </p:nvSpPr>
@@ -6167,7 +6431,7 @@
       </p:sp>
       <p:sp>
         <p:nvSpPr>
-          <p:cNvPr id="9" name="Text 7"/>
+          <p:cNvPr id="11" name="Text 9"/>
           <p:cNvSpPr txBox="1"/>
           <p:nvPr/>
         </p:nvSpPr>
@@ -6206,7 +6470,7 @@
       </p:sp>
       <p:sp>
         <p:nvSpPr>
-          <p:cNvPr id="10" name="Shape 8"/>
+          <p:cNvPr id="12" name="Shape 10"/>
           <p:cNvSpPr/>
           <p:nvPr/>
         </p:nvSpPr>
@@ -6240,7 +6504,7 @@
       </p:sp>
       <p:pic>
         <p:nvPicPr>
-          <p:cNvPr id="11" name="Image 0" descr="/private/tmp/claude-502/-Users-DRBTroy-Documents-Projects-DeepRoots/3b403855-4530-4100-a3e2-ac51fe60ce6e/scratchpad/screens/workflow-tracker.png">    </p:cNvPr>
+          <p:cNvPr id="13" name="Image 0" descr="/private/tmp/claude-502/-Users-DRBTroy-Documents-Projects-DeepRoots/3b403855-4530-4100-a3e2-ac51fe60ce6e/scratchpad/screens/workflow-tracker.png">    </p:cNvPr>
           <p:cNvPicPr>
             <a:picLocks noChangeAspect="1"/>
           </p:cNvPicPr>
@@ -6335,7 +6599,73 @@
       </p:sp>
       <p:sp>
         <p:nvSpPr>
-          <p:cNvPr id="3" name="Text 1"/>
+          <p:cNvPr id="3" name="Shape 1"/>
+          <p:cNvSpPr/>
+          <p:nvPr/>
+        </p:nvSpPr>
+        <p:spPr>
+          <a:xfrm>
+            <a:off x="10314432" y="731520"/>
+            <a:ext cx="1051560" cy="310896"/>
+          </a:xfrm>
+          <a:prstGeom prst="roundRect">
+            <a:avLst>
+              <a:gd name="adj" fmla="val 50000"/>
+            </a:avLst>
+          </a:prstGeom>
+          <a:solidFill>
+            <a:srgbClr val="F3E7C8"/>
+          </a:solidFill>
+          <a:ln w="9525">
+            <a:solidFill>
+              <a:srgbClr val="9C7C2E"/>
+            </a:solidFill>
+            <a:prstDash val="solid"/>
+          </a:ln>
+        </p:spPr>
+      </p:sp>
+      <p:sp>
+        <p:nvSpPr>
+          <p:cNvPr id="4" name="Text 2"/>
+          <p:cNvSpPr txBox="1"/>
+          <p:nvPr/>
+        </p:nvSpPr>
+        <p:spPr>
+          <a:xfrm>
+            <a:off x="10314432" y="722376"/>
+            <a:ext cx="1051560" cy="320040"/>
+          </a:xfrm>
+          <a:prstGeom prst="rect">
+            <a:avLst/>
+          </a:prstGeom>
+          <a:noFill/>
+          <a:ln/>
+        </p:spPr>
+        <p:txBody>
+          <a:bodyPr wrap="square" lIns="0" tIns="0" rIns="0" bIns="0" rtlCol="0" anchor="ctr"/>
+          <a:lstStyle/>
+          <a:p>
+            <a:pPr algn="ctr" indent="0" marL="0">
+              <a:buNone/>
+            </a:pPr>
+            <a:r>
+              <a:rPr lang="en-US" sz="850" b="1" spc="100" kern="0" dirty="0">
+                <a:solidFill>
+                  <a:srgbClr val="7A5A12"/>
+                </a:solidFill>
+                <a:latin typeface="Calibri" pitchFamily="34" charset="0"/>
+                <a:ea typeface="Calibri" pitchFamily="34" charset="-122"/>
+                <a:cs typeface="Calibri" pitchFamily="34" charset="-120"/>
+              </a:rPr>
+              <a:t>PHASE 2</a:t>
+            </a:r>
+            <a:endParaRPr lang="en-US" sz="850" dirty="0"/>
+          </a:p>
+        </p:txBody>
+      </p:sp>
+      <p:sp>
+        <p:nvSpPr>
+          <p:cNvPr id="5" name="Text 3"/>
           <p:cNvSpPr txBox="1"/>
           <p:nvPr/>
         </p:nvSpPr>
@@ -6377,7 +6707,7 @@
       </p:sp>
       <p:sp>
         <p:nvSpPr>
-          <p:cNvPr id="4" name="Text 2"/>
+          <p:cNvPr id="6" name="Text 4"/>
           <p:cNvSpPr txBox="1"/>
           <p:nvPr/>
         </p:nvSpPr>
@@ -6419,7 +6749,7 @@
       </p:sp>
       <p:sp>
         <p:nvSpPr>
-          <p:cNvPr id="5" name="Shape 3"/>
+          <p:cNvPr id="7" name="Shape 5"/>
           <p:cNvSpPr/>
           <p:nvPr/>
         </p:nvSpPr>
@@ -6446,7 +6776,7 @@
       </p:sp>
       <p:sp>
         <p:nvSpPr>
-          <p:cNvPr id="6" name="Text 4"/>
+          <p:cNvPr id="8" name="Text 6"/>
           <p:cNvSpPr txBox="1"/>
           <p:nvPr/>
         </p:nvSpPr>
@@ -6485,7 +6815,7 @@
       </p:sp>
       <p:sp>
         <p:nvSpPr>
-          <p:cNvPr id="7" name="Shape 5"/>
+          <p:cNvPr id="9" name="Shape 7"/>
           <p:cNvSpPr/>
           <p:nvPr/>
         </p:nvSpPr>
@@ -6512,7 +6842,7 @@
       </p:sp>
       <p:sp>
         <p:nvSpPr>
-          <p:cNvPr id="8" name="Shape 6"/>
+          <p:cNvPr id="10" name="Shape 8"/>
           <p:cNvSpPr/>
           <p:nvPr/>
         </p:nvSpPr>
@@ -6532,7 +6862,7 @@
       </p:sp>
       <p:sp>
         <p:nvSpPr>
-          <p:cNvPr id="9" name="Text 7"/>
+          <p:cNvPr id="11" name="Text 9"/>
           <p:cNvSpPr txBox="1"/>
           <p:nvPr/>
         </p:nvSpPr>
@@ -6571,7 +6901,7 @@
       </p:sp>
       <p:sp>
         <p:nvSpPr>
-          <p:cNvPr id="10" name="Shape 8"/>
+          <p:cNvPr id="12" name="Shape 10"/>
           <p:cNvSpPr/>
           <p:nvPr/>
         </p:nvSpPr>
@@ -6605,7 +6935,7 @@
       </p:sp>
       <p:pic>
         <p:nvPicPr>
-          <p:cNvPr id="11" name="Image 0" descr="/private/tmp/claude-502/-Users-DRBTroy-Documents-Projects-DeepRoots/3b403855-4530-4100-a3e2-ac51fe60ce6e/scratchpad/screens/handoffs.png">    </p:cNvPr>
+          <p:cNvPr id="13" name="Image 0" descr="/private/tmp/claude-502/-Users-DRBTroy-Documents-Projects-DeepRoots/3b403855-4530-4100-a3e2-ac51fe60ce6e/scratchpad/screens/handoffs.png">    </p:cNvPr>
           <p:cNvPicPr>
             <a:picLocks noChangeAspect="1"/>
           </p:cNvPicPr>
@@ -6700,7 +7030,73 @@
       </p:sp>
       <p:sp>
         <p:nvSpPr>
-          <p:cNvPr id="3" name="Text 1"/>
+          <p:cNvPr id="3" name="Shape 1"/>
+          <p:cNvSpPr/>
+          <p:nvPr/>
+        </p:nvSpPr>
+        <p:spPr>
+          <a:xfrm>
+            <a:off x="10314432" y="731520"/>
+            <a:ext cx="1051560" cy="310896"/>
+          </a:xfrm>
+          <a:prstGeom prst="roundRect">
+            <a:avLst>
+              <a:gd name="adj" fmla="val 50000"/>
+            </a:avLst>
+          </a:prstGeom>
+          <a:solidFill>
+            <a:srgbClr val="F3E7C8"/>
+          </a:solidFill>
+          <a:ln w="9525">
+            <a:solidFill>
+              <a:srgbClr val="9C7C2E"/>
+            </a:solidFill>
+            <a:prstDash val="solid"/>
+          </a:ln>
+        </p:spPr>
+      </p:sp>
+      <p:sp>
+        <p:nvSpPr>
+          <p:cNvPr id="4" name="Text 2"/>
+          <p:cNvSpPr txBox="1"/>
+          <p:nvPr/>
+        </p:nvSpPr>
+        <p:spPr>
+          <a:xfrm>
+            <a:off x="10314432" y="722376"/>
+            <a:ext cx="1051560" cy="320040"/>
+          </a:xfrm>
+          <a:prstGeom prst="rect">
+            <a:avLst/>
+          </a:prstGeom>
+          <a:noFill/>
+          <a:ln/>
+        </p:spPr>
+        <p:txBody>
+          <a:bodyPr wrap="square" lIns="0" tIns="0" rIns="0" bIns="0" rtlCol="0" anchor="ctr"/>
+          <a:lstStyle/>
+          <a:p>
+            <a:pPr algn="ctr" indent="0" marL="0">
+              <a:buNone/>
+            </a:pPr>
+            <a:r>
+              <a:rPr lang="en-US" sz="850" b="1" spc="100" kern="0" dirty="0">
+                <a:solidFill>
+                  <a:srgbClr val="7A5A12"/>
+                </a:solidFill>
+                <a:latin typeface="Calibri" pitchFamily="34" charset="0"/>
+                <a:ea typeface="Calibri" pitchFamily="34" charset="-122"/>
+                <a:cs typeface="Calibri" pitchFamily="34" charset="-120"/>
+              </a:rPr>
+              <a:t>PHASE 2</a:t>
+            </a:r>
+            <a:endParaRPr lang="en-US" sz="850" dirty="0"/>
+          </a:p>
+        </p:txBody>
+      </p:sp>
+      <p:sp>
+        <p:nvSpPr>
+          <p:cNvPr id="5" name="Text 3"/>
           <p:cNvSpPr txBox="1"/>
           <p:nvPr/>
         </p:nvSpPr>
@@ -6742,7 +7138,7 @@
       </p:sp>
       <p:sp>
         <p:nvSpPr>
-          <p:cNvPr id="4" name="Text 2"/>
+          <p:cNvPr id="6" name="Text 4"/>
           <p:cNvSpPr txBox="1"/>
           <p:nvPr/>
         </p:nvSpPr>
@@ -6784,7 +7180,7 @@
       </p:sp>
       <p:sp>
         <p:nvSpPr>
-          <p:cNvPr id="5" name="Shape 3"/>
+          <p:cNvPr id="7" name="Shape 5"/>
           <p:cNvSpPr/>
           <p:nvPr/>
         </p:nvSpPr>
@@ -6811,7 +7207,7 @@
       </p:sp>
       <p:sp>
         <p:nvSpPr>
-          <p:cNvPr id="6" name="Text 4"/>
+          <p:cNvPr id="8" name="Text 6"/>
           <p:cNvSpPr txBox="1"/>
           <p:nvPr/>
         </p:nvSpPr>
@@ -6850,7 +7246,7 @@
       </p:sp>
       <p:sp>
         <p:nvSpPr>
-          <p:cNvPr id="7" name="Shape 5"/>
+          <p:cNvPr id="9" name="Shape 7"/>
           <p:cNvSpPr/>
           <p:nvPr/>
         </p:nvSpPr>
@@ -6877,7 +7273,7 @@
       </p:sp>
       <p:sp>
         <p:nvSpPr>
-          <p:cNvPr id="8" name="Shape 6"/>
+          <p:cNvPr id="10" name="Shape 8"/>
           <p:cNvSpPr/>
           <p:nvPr/>
         </p:nvSpPr>
@@ -6897,7 +7293,7 @@
       </p:sp>
       <p:sp>
         <p:nvSpPr>
-          <p:cNvPr id="9" name="Text 7"/>
+          <p:cNvPr id="11" name="Text 9"/>
           <p:cNvSpPr txBox="1"/>
           <p:nvPr/>
         </p:nvSpPr>
@@ -6936,7 +7332,7 @@
       </p:sp>
       <p:sp>
         <p:nvSpPr>
-          <p:cNvPr id="10" name="Shape 8"/>
+          <p:cNvPr id="12" name="Shape 10"/>
           <p:cNvSpPr/>
           <p:nvPr/>
         </p:nvSpPr>
@@ -6970,7 +7366,7 @@
       </p:sp>
       <p:sp>
         <p:nvSpPr>
-          <p:cNvPr id="11" name="Shape 9"/>
+          <p:cNvPr id="13" name="Shape 11"/>
           <p:cNvSpPr/>
           <p:nvPr/>
         </p:nvSpPr>
@@ -6992,7 +7388,7 @@
       </p:sp>
       <p:sp>
         <p:nvSpPr>
-          <p:cNvPr id="12" name="Shape 10"/>
+          <p:cNvPr id="14" name="Shape 12"/>
           <p:cNvSpPr/>
           <p:nvPr/>
         </p:nvSpPr>
@@ -7012,7 +7408,7 @@
       </p:sp>
       <p:sp>
         <p:nvSpPr>
-          <p:cNvPr id="13" name="Shape 11"/>
+          <p:cNvPr id="15" name="Shape 13"/>
           <p:cNvSpPr/>
           <p:nvPr/>
         </p:nvSpPr>
@@ -7032,7 +7428,7 @@
       </p:sp>
       <p:sp>
         <p:nvSpPr>
-          <p:cNvPr id="14" name="Shape 12"/>
+          <p:cNvPr id="16" name="Shape 14"/>
           <p:cNvSpPr/>
           <p:nvPr/>
         </p:nvSpPr>
@@ -7052,7 +7448,7 @@
       </p:sp>
       <p:sp>
         <p:nvSpPr>
-          <p:cNvPr id="15" name="Shape 13"/>
+          <p:cNvPr id="17" name="Shape 15"/>
           <p:cNvSpPr/>
           <p:nvPr/>
         </p:nvSpPr>
@@ -7072,7 +7468,7 @@
       </p:sp>
       <p:sp>
         <p:nvSpPr>
-          <p:cNvPr id="16" name="Text 14"/>
+          <p:cNvPr id="18" name="Text 16"/>
           <p:cNvSpPr txBox="1"/>
           <p:nvPr/>
         </p:nvSpPr>
@@ -7111,7 +7507,7 @@
       </p:sp>
       <p:sp>
         <p:nvSpPr>
-          <p:cNvPr id="17" name="Shape 15"/>
+          <p:cNvPr id="19" name="Shape 17"/>
           <p:cNvSpPr/>
           <p:nvPr/>
         </p:nvSpPr>
@@ -7134,7 +7530,7 @@
       </p:sp>
       <p:sp>
         <p:nvSpPr>
-          <p:cNvPr id="18" name="Shape 16"/>
+          <p:cNvPr id="20" name="Shape 18"/>
           <p:cNvSpPr/>
           <p:nvPr/>
         </p:nvSpPr>
@@ -7161,7 +7557,7 @@
       </p:sp>
       <p:sp>
         <p:nvSpPr>
-          <p:cNvPr id="19" name="Shape 17"/>
+          <p:cNvPr id="21" name="Shape 19"/>
           <p:cNvSpPr/>
           <p:nvPr/>
         </p:nvSpPr>
@@ -7181,7 +7577,7 @@
       </p:sp>
       <p:sp>
         <p:nvSpPr>
-          <p:cNvPr id="20" name="Shape 18"/>
+          <p:cNvPr id="22" name="Shape 20"/>
           <p:cNvSpPr/>
           <p:nvPr/>
         </p:nvSpPr>
@@ -7203,7 +7599,7 @@
       </p:sp>
       <p:sp>
         <p:nvSpPr>
-          <p:cNvPr id="21" name="Shape 19"/>
+          <p:cNvPr id="23" name="Shape 21"/>
           <p:cNvSpPr/>
           <p:nvPr/>
         </p:nvSpPr>
@@ -7225,7 +7621,7 @@
       </p:sp>
       <p:sp>
         <p:nvSpPr>
-          <p:cNvPr id="22" name="Shape 20"/>
+          <p:cNvPr id="24" name="Shape 22"/>
           <p:cNvSpPr/>
           <p:nvPr/>
         </p:nvSpPr>
@@ -7252,7 +7648,7 @@
       </p:sp>
       <p:sp>
         <p:nvSpPr>
-          <p:cNvPr id="23" name="Text 21"/>
+          <p:cNvPr id="25" name="Text 23"/>
           <p:cNvSpPr txBox="1"/>
           <p:nvPr/>
         </p:nvSpPr>
@@ -7291,7 +7687,7 @@
       </p:sp>
       <p:sp>
         <p:nvSpPr>
-          <p:cNvPr id="24" name="Shape 22"/>
+          <p:cNvPr id="26" name="Shape 24"/>
           <p:cNvSpPr/>
           <p:nvPr/>
         </p:nvSpPr>
@@ -7318,7 +7714,7 @@
       </p:sp>
       <p:sp>
         <p:nvSpPr>
-          <p:cNvPr id="25" name="Shape 23"/>
+          <p:cNvPr id="27" name="Shape 25"/>
           <p:cNvSpPr/>
           <p:nvPr/>
         </p:nvSpPr>
@@ -7338,7 +7734,7 @@
       </p:sp>
       <p:sp>
         <p:nvSpPr>
-          <p:cNvPr id="26" name="Shape 24"/>
+          <p:cNvPr id="28" name="Shape 26"/>
           <p:cNvSpPr/>
           <p:nvPr/>
         </p:nvSpPr>
@@ -7360,7 +7756,7 @@
       </p:sp>
       <p:sp>
         <p:nvSpPr>
-          <p:cNvPr id="27" name="Shape 25"/>
+          <p:cNvPr id="29" name="Shape 27"/>
           <p:cNvSpPr/>
           <p:nvPr/>
         </p:nvSpPr>
@@ -7382,7 +7778,7 @@
       </p:sp>
       <p:sp>
         <p:nvSpPr>
-          <p:cNvPr id="28" name="Shape 26"/>
+          <p:cNvPr id="30" name="Shape 28"/>
           <p:cNvSpPr/>
           <p:nvPr/>
         </p:nvSpPr>
@@ -7409,7 +7805,7 @@
       </p:sp>
       <p:sp>
         <p:nvSpPr>
-          <p:cNvPr id="29" name="Text 27"/>
+          <p:cNvPr id="31" name="Text 29"/>
           <p:cNvSpPr txBox="1"/>
           <p:nvPr/>
         </p:nvSpPr>
@@ -7448,7 +7844,7 @@
       </p:sp>
       <p:sp>
         <p:nvSpPr>
-          <p:cNvPr id="30" name="Shape 28"/>
+          <p:cNvPr id="32" name="Shape 30"/>
           <p:cNvSpPr/>
           <p:nvPr/>
         </p:nvSpPr>
@@ -7475,7 +7871,7 @@
       </p:sp>
       <p:sp>
         <p:nvSpPr>
-          <p:cNvPr id="31" name="Shape 29"/>
+          <p:cNvPr id="33" name="Shape 31"/>
           <p:cNvSpPr/>
           <p:nvPr/>
         </p:nvSpPr>
@@ -7495,7 +7891,7 @@
       </p:sp>
       <p:sp>
         <p:nvSpPr>
-          <p:cNvPr id="32" name="Shape 30"/>
+          <p:cNvPr id="34" name="Shape 32"/>
           <p:cNvSpPr/>
           <p:nvPr/>
         </p:nvSpPr>
@@ -7517,7 +7913,7 @@
       </p:sp>
       <p:sp>
         <p:nvSpPr>
-          <p:cNvPr id="33" name="Shape 31"/>
+          <p:cNvPr id="35" name="Shape 33"/>
           <p:cNvSpPr/>
           <p:nvPr/>
         </p:nvSpPr>
@@ -7539,7 +7935,7 @@
       </p:sp>
       <p:sp>
         <p:nvSpPr>
-          <p:cNvPr id="34" name="Shape 32"/>
+          <p:cNvPr id="36" name="Shape 34"/>
           <p:cNvSpPr/>
           <p:nvPr/>
         </p:nvSpPr>
@@ -7566,7 +7962,7 @@
       </p:sp>
       <p:sp>
         <p:nvSpPr>
-          <p:cNvPr id="35" name="Text 33"/>
+          <p:cNvPr id="37" name="Text 35"/>
           <p:cNvSpPr txBox="1"/>
           <p:nvPr/>
         </p:nvSpPr>
@@ -7676,7 +8072,73 @@
       </p:sp>
       <p:sp>
         <p:nvSpPr>
-          <p:cNvPr id="3" name="Text 1"/>
+          <p:cNvPr id="3" name="Shape 1"/>
+          <p:cNvSpPr/>
+          <p:nvPr/>
+        </p:nvSpPr>
+        <p:spPr>
+          <a:xfrm>
+            <a:off x="10314432" y="731520"/>
+            <a:ext cx="1051560" cy="310896"/>
+          </a:xfrm>
+          <a:prstGeom prst="roundRect">
+            <a:avLst>
+              <a:gd name="adj" fmla="val 50000"/>
+            </a:avLst>
+          </a:prstGeom>
+          <a:solidFill>
+            <a:srgbClr val="F3E7C8"/>
+          </a:solidFill>
+          <a:ln w="9525">
+            <a:solidFill>
+              <a:srgbClr val="9C7C2E"/>
+            </a:solidFill>
+            <a:prstDash val="solid"/>
+          </a:ln>
+        </p:spPr>
+      </p:sp>
+      <p:sp>
+        <p:nvSpPr>
+          <p:cNvPr id="4" name="Text 2"/>
+          <p:cNvSpPr txBox="1"/>
+          <p:nvPr/>
+        </p:nvSpPr>
+        <p:spPr>
+          <a:xfrm>
+            <a:off x="10314432" y="722376"/>
+            <a:ext cx="1051560" cy="320040"/>
+          </a:xfrm>
+          <a:prstGeom prst="rect">
+            <a:avLst/>
+          </a:prstGeom>
+          <a:noFill/>
+          <a:ln/>
+        </p:spPr>
+        <p:txBody>
+          <a:bodyPr wrap="square" lIns="0" tIns="0" rIns="0" bIns="0" rtlCol="0" anchor="ctr"/>
+          <a:lstStyle/>
+          <a:p>
+            <a:pPr algn="ctr" indent="0" marL="0">
+              <a:buNone/>
+            </a:pPr>
+            <a:r>
+              <a:rPr lang="en-US" sz="850" b="1" spc="100" kern="0" dirty="0">
+                <a:solidFill>
+                  <a:srgbClr val="7A5A12"/>
+                </a:solidFill>
+                <a:latin typeface="Calibri" pitchFamily="34" charset="0"/>
+                <a:ea typeface="Calibri" pitchFamily="34" charset="-122"/>
+                <a:cs typeface="Calibri" pitchFamily="34" charset="-120"/>
+              </a:rPr>
+              <a:t>PHASE 2</a:t>
+            </a:r>
+            <a:endParaRPr lang="en-US" sz="850" dirty="0"/>
+          </a:p>
+        </p:txBody>
+      </p:sp>
+      <p:sp>
+        <p:nvSpPr>
+          <p:cNvPr id="5" name="Text 3"/>
           <p:cNvSpPr txBox="1"/>
           <p:nvPr/>
         </p:nvSpPr>
@@ -7718,7 +8180,7 @@
       </p:sp>
       <p:sp>
         <p:nvSpPr>
-          <p:cNvPr id="4" name="Text 2"/>
+          <p:cNvPr id="6" name="Text 4"/>
           <p:cNvSpPr txBox="1"/>
           <p:nvPr/>
         </p:nvSpPr>
@@ -7760,7 +8222,7 @@
       </p:sp>
       <p:sp>
         <p:nvSpPr>
-          <p:cNvPr id="5" name="Text 3"/>
+          <p:cNvPr id="7" name="Text 5"/>
           <p:cNvSpPr txBox="1"/>
           <p:nvPr/>
         </p:nvSpPr>
@@ -7866,7 +8328,7 @@
       </p:sp>
       <p:sp>
         <p:nvSpPr>
-          <p:cNvPr id="6" name="Shape 4"/>
+          <p:cNvPr id="8" name="Shape 6"/>
           <p:cNvSpPr/>
           <p:nvPr/>
         </p:nvSpPr>
@@ -7893,7 +8355,7 @@
       </p:sp>
       <p:sp>
         <p:nvSpPr>
-          <p:cNvPr id="7" name="Text 5"/>
+          <p:cNvPr id="9" name="Text 7"/>
           <p:cNvSpPr txBox="1"/>
           <p:nvPr/>
         </p:nvSpPr>
@@ -7932,7 +8394,7 @@
       </p:sp>
       <p:sp>
         <p:nvSpPr>
-          <p:cNvPr id="8" name="Shape 6"/>
+          <p:cNvPr id="10" name="Shape 8"/>
           <p:cNvSpPr/>
           <p:nvPr/>
         </p:nvSpPr>
@@ -7959,7 +8421,7 @@
       </p:sp>
       <p:sp>
         <p:nvSpPr>
-          <p:cNvPr id="9" name="Shape 7"/>
+          <p:cNvPr id="11" name="Shape 9"/>
           <p:cNvSpPr/>
           <p:nvPr/>
         </p:nvSpPr>
@@ -7979,7 +8441,7 @@
       </p:sp>
       <p:sp>
         <p:nvSpPr>
-          <p:cNvPr id="10" name="Text 8"/>
+          <p:cNvPr id="12" name="Text 10"/>
           <p:cNvSpPr txBox="1"/>
           <p:nvPr/>
         </p:nvSpPr>
@@ -8018,7 +8480,7 @@
       </p:sp>
       <p:sp>
         <p:nvSpPr>
-          <p:cNvPr id="11" name="Shape 9"/>
+          <p:cNvPr id="13" name="Shape 11"/>
           <p:cNvSpPr/>
           <p:nvPr/>
         </p:nvSpPr>
@@ -8052,7 +8514,7 @@
       </p:sp>
       <p:sp>
         <p:nvSpPr>
-          <p:cNvPr id="12" name="Shape 10"/>
+          <p:cNvPr id="14" name="Shape 12"/>
           <p:cNvSpPr/>
           <p:nvPr/>
         </p:nvSpPr>
@@ -8074,7 +8536,7 @@
       </p:sp>
       <p:sp>
         <p:nvSpPr>
-          <p:cNvPr id="13" name="Shape 11"/>
+          <p:cNvPr id="15" name="Shape 13"/>
           <p:cNvSpPr/>
           <p:nvPr/>
         </p:nvSpPr>
@@ -8094,7 +8556,7 @@
       </p:sp>
       <p:sp>
         <p:nvSpPr>
-          <p:cNvPr id="14" name="Shape 12"/>
+          <p:cNvPr id="16" name="Shape 14"/>
           <p:cNvSpPr/>
           <p:nvPr/>
         </p:nvSpPr>
@@ -8114,7 +8576,7 @@
       </p:sp>
       <p:sp>
         <p:nvSpPr>
-          <p:cNvPr id="15" name="Shape 13"/>
+          <p:cNvPr id="17" name="Shape 15"/>
           <p:cNvSpPr/>
           <p:nvPr/>
         </p:nvSpPr>
@@ -8134,7 +8596,7 @@
       </p:sp>
       <p:sp>
         <p:nvSpPr>
-          <p:cNvPr id="16" name="Shape 14"/>
+          <p:cNvPr id="18" name="Shape 16"/>
           <p:cNvSpPr/>
           <p:nvPr/>
         </p:nvSpPr>
@@ -8154,7 +8616,7 @@
       </p:sp>
       <p:sp>
         <p:nvSpPr>
-          <p:cNvPr id="17" name="Text 15"/>
+          <p:cNvPr id="19" name="Text 17"/>
           <p:cNvSpPr txBox="1"/>
           <p:nvPr/>
         </p:nvSpPr>
@@ -8193,7 +8655,7 @@
       </p:sp>
       <p:sp>
         <p:nvSpPr>
-          <p:cNvPr id="18" name="Shape 16"/>
+          <p:cNvPr id="20" name="Shape 18"/>
           <p:cNvSpPr/>
           <p:nvPr/>
         </p:nvSpPr>
@@ -8216,7 +8678,7 @@
       </p:sp>
       <p:sp>
         <p:nvSpPr>
-          <p:cNvPr id="19" name="Shape 17"/>
+          <p:cNvPr id="21" name="Shape 19"/>
           <p:cNvSpPr/>
           <p:nvPr/>
         </p:nvSpPr>
@@ -8243,7 +8705,7 @@
       </p:sp>
       <p:sp>
         <p:nvSpPr>
-          <p:cNvPr id="20" name="Shape 18"/>
+          <p:cNvPr id="22" name="Shape 20"/>
           <p:cNvSpPr/>
           <p:nvPr/>
         </p:nvSpPr>
@@ -8265,7 +8727,7 @@
       </p:sp>
       <p:sp>
         <p:nvSpPr>
-          <p:cNvPr id="21" name="Shape 19"/>
+          <p:cNvPr id="23" name="Shape 21"/>
           <p:cNvSpPr/>
           <p:nvPr/>
         </p:nvSpPr>
@@ -8288,7 +8750,7 @@
       </p:sp>
       <p:sp>
         <p:nvSpPr>
-          <p:cNvPr id="22" name="Text 20"/>
+          <p:cNvPr id="24" name="Text 22"/>
           <p:cNvSpPr txBox="1"/>
           <p:nvPr/>
         </p:nvSpPr>
@@ -8327,7 +8789,7 @@
       </p:sp>
       <p:sp>
         <p:nvSpPr>
-          <p:cNvPr id="23" name="Shape 21"/>
+          <p:cNvPr id="25" name="Shape 23"/>
           <p:cNvSpPr/>
           <p:nvPr/>
         </p:nvSpPr>
@@ -8354,7 +8816,7 @@
       </p:sp>
       <p:sp>
         <p:nvSpPr>
-          <p:cNvPr id="24" name="Text 22"/>
+          <p:cNvPr id="26" name="Text 24"/>
           <p:cNvSpPr txBox="1"/>
           <p:nvPr/>
         </p:nvSpPr>
@@ -8393,7 +8855,7 @@
       </p:sp>
       <p:sp>
         <p:nvSpPr>
-          <p:cNvPr id="25" name="Shape 23"/>
+          <p:cNvPr id="27" name="Shape 25"/>
           <p:cNvSpPr/>
           <p:nvPr/>
         </p:nvSpPr>
@@ -8420,7 +8882,7 @@
       </p:sp>
       <p:sp>
         <p:nvSpPr>
-          <p:cNvPr id="26" name="Text 24"/>
+          <p:cNvPr id="28" name="Text 26"/>
           <p:cNvSpPr txBox="1"/>
           <p:nvPr/>
         </p:nvSpPr>
@@ -8459,7 +8921,7 @@
       </p:sp>
       <p:sp>
         <p:nvSpPr>
-          <p:cNvPr id="27" name="Shape 25"/>
+          <p:cNvPr id="29" name="Shape 27"/>
           <p:cNvSpPr/>
           <p:nvPr/>
         </p:nvSpPr>
@@ -8486,7 +8948,7 @@
       </p:sp>
       <p:sp>
         <p:nvSpPr>
-          <p:cNvPr id="28" name="Text 26"/>
+          <p:cNvPr id="30" name="Text 28"/>
           <p:cNvSpPr txBox="1"/>
           <p:nvPr/>
         </p:nvSpPr>
@@ -8525,7 +8987,7 @@
       </p:sp>
       <p:sp>
         <p:nvSpPr>
-          <p:cNvPr id="29" name="Shape 27"/>
+          <p:cNvPr id="31" name="Shape 29"/>
           <p:cNvSpPr/>
           <p:nvPr/>
         </p:nvSpPr>
@@ -8552,7 +9014,7 @@
       </p:sp>
       <p:sp>
         <p:nvSpPr>
-          <p:cNvPr id="30" name="Text 28"/>
+          <p:cNvPr id="32" name="Text 30"/>
           <p:cNvSpPr txBox="1"/>
           <p:nvPr/>
         </p:nvSpPr>
@@ -8591,7 +9053,7 @@
       </p:sp>
       <p:sp>
         <p:nvSpPr>
-          <p:cNvPr id="31" name="Shape 29"/>
+          <p:cNvPr id="33" name="Shape 31"/>
           <p:cNvSpPr/>
           <p:nvPr/>
         </p:nvSpPr>
@@ -8618,7 +9080,7 @@
       </p:sp>
       <p:sp>
         <p:nvSpPr>
-          <p:cNvPr id="32" name="Shape 30"/>
+          <p:cNvPr id="34" name="Shape 32"/>
           <p:cNvSpPr/>
           <p:nvPr/>
         </p:nvSpPr>
@@ -8638,7 +9100,7 @@
       </p:sp>
       <p:sp>
         <p:nvSpPr>
-          <p:cNvPr id="33" name="Text 31"/>
+          <p:cNvPr id="35" name="Text 33"/>
           <p:cNvSpPr txBox="1"/>
           <p:nvPr/>
         </p:nvSpPr>
@@ -8677,7 +9139,7 @@
       </p:sp>
       <p:sp>
         <p:nvSpPr>
-          <p:cNvPr id="34" name="Shape 32"/>
+          <p:cNvPr id="36" name="Shape 34"/>
           <p:cNvSpPr/>
           <p:nvPr/>
         </p:nvSpPr>
@@ -8704,7 +9166,7 @@
       </p:sp>
       <p:sp>
         <p:nvSpPr>
-          <p:cNvPr id="35" name="Text 33"/>
+          <p:cNvPr id="37" name="Text 35"/>
           <p:cNvSpPr txBox="1"/>
           <p:nvPr/>
         </p:nvSpPr>
@@ -8743,7 +9205,7 @@
       </p:sp>
       <p:sp>
         <p:nvSpPr>
-          <p:cNvPr id="36" name="Shape 34"/>
+          <p:cNvPr id="38" name="Shape 36"/>
           <p:cNvSpPr/>
           <p:nvPr/>
         </p:nvSpPr>
@@ -8770,7 +9232,7 @@
       </p:sp>
       <p:sp>
         <p:nvSpPr>
-          <p:cNvPr id="37" name="Shape 35"/>
+          <p:cNvPr id="39" name="Shape 37"/>
           <p:cNvSpPr/>
           <p:nvPr/>
         </p:nvSpPr>
@@ -8790,7 +9252,7 @@
       </p:sp>
       <p:sp>
         <p:nvSpPr>
-          <p:cNvPr id="38" name="Text 36"/>
+          <p:cNvPr id="40" name="Text 38"/>
           <p:cNvSpPr txBox="1"/>
           <p:nvPr/>
         </p:nvSpPr>
@@ -8829,7 +9291,7 @@
       </p:sp>
       <p:sp>
         <p:nvSpPr>
-          <p:cNvPr id="39" name="Shape 37"/>
+          <p:cNvPr id="41" name="Shape 39"/>
           <p:cNvSpPr/>
           <p:nvPr/>
         </p:nvSpPr>
@@ -8856,7 +9318,7 @@
       </p:sp>
       <p:sp>
         <p:nvSpPr>
-          <p:cNvPr id="40" name="Text 38"/>
+          <p:cNvPr id="42" name="Text 40"/>
           <p:cNvSpPr txBox="1"/>
           <p:nvPr/>
         </p:nvSpPr>
@@ -8895,7 +9357,7 @@
       </p:sp>
       <p:sp>
         <p:nvSpPr>
-          <p:cNvPr id="41" name="Shape 39"/>
+          <p:cNvPr id="43" name="Shape 41"/>
           <p:cNvSpPr/>
           <p:nvPr/>
         </p:nvSpPr>
@@ -8922,7 +9384,7 @@
       </p:sp>
       <p:sp>
         <p:nvSpPr>
-          <p:cNvPr id="42" name="Shape 40"/>
+          <p:cNvPr id="44" name="Shape 42"/>
           <p:cNvSpPr/>
           <p:nvPr/>
         </p:nvSpPr>
@@ -8942,7 +9404,7 @@
       </p:sp>
       <p:sp>
         <p:nvSpPr>
-          <p:cNvPr id="43" name="Text 41"/>
+          <p:cNvPr id="45" name="Text 43"/>
           <p:cNvSpPr txBox="1"/>
           <p:nvPr/>
         </p:nvSpPr>
@@ -8981,7 +9443,7 @@
       </p:sp>
       <p:sp>
         <p:nvSpPr>
-          <p:cNvPr id="44" name="Shape 42"/>
+          <p:cNvPr id="46" name="Shape 44"/>
           <p:cNvSpPr/>
           <p:nvPr/>
         </p:nvSpPr>
@@ -9008,7 +9470,7 @@
       </p:sp>
       <p:sp>
         <p:nvSpPr>
-          <p:cNvPr id="45" name="Text 43"/>
+          <p:cNvPr id="47" name="Text 45"/>
           <p:cNvSpPr txBox="1"/>
           <p:nvPr/>
         </p:nvSpPr>
@@ -9047,7 +9509,7 @@
       </p:sp>
       <p:sp>
         <p:nvSpPr>
-          <p:cNvPr id="46" name="Shape 44"/>
+          <p:cNvPr id="48" name="Shape 46"/>
           <p:cNvSpPr/>
           <p:nvPr/>
         </p:nvSpPr>
@@ -9069,7 +9531,7 @@
       </p:sp>
       <p:sp>
         <p:nvSpPr>
-          <p:cNvPr id="47" name="Text 45"/>
+          <p:cNvPr id="49" name="Text 47"/>
           <p:cNvSpPr txBox="1"/>
           <p:nvPr/>
         </p:nvSpPr>
@@ -9179,7 +9641,73 @@
       </p:sp>
       <p:sp>
         <p:nvSpPr>
-          <p:cNvPr id="3" name="Text 1"/>
+          <p:cNvPr id="3" name="Shape 1"/>
+          <p:cNvSpPr/>
+          <p:nvPr/>
+        </p:nvSpPr>
+        <p:spPr>
+          <a:xfrm>
+            <a:off x="10314432" y="731520"/>
+            <a:ext cx="1051560" cy="310896"/>
+          </a:xfrm>
+          <a:prstGeom prst="roundRect">
+            <a:avLst>
+              <a:gd name="adj" fmla="val 50000"/>
+            </a:avLst>
+          </a:prstGeom>
+          <a:solidFill>
+            <a:srgbClr val="F3E7C8"/>
+          </a:solidFill>
+          <a:ln w="9525">
+            <a:solidFill>
+              <a:srgbClr val="9C7C2E"/>
+            </a:solidFill>
+            <a:prstDash val="solid"/>
+          </a:ln>
+        </p:spPr>
+      </p:sp>
+      <p:sp>
+        <p:nvSpPr>
+          <p:cNvPr id="4" name="Text 2"/>
+          <p:cNvSpPr txBox="1"/>
+          <p:nvPr/>
+        </p:nvSpPr>
+        <p:spPr>
+          <a:xfrm>
+            <a:off x="10314432" y="722376"/>
+            <a:ext cx="1051560" cy="320040"/>
+          </a:xfrm>
+          <a:prstGeom prst="rect">
+            <a:avLst/>
+          </a:prstGeom>
+          <a:noFill/>
+          <a:ln/>
+        </p:spPr>
+        <p:txBody>
+          <a:bodyPr wrap="square" lIns="0" tIns="0" rIns="0" bIns="0" rtlCol="0" anchor="ctr"/>
+          <a:lstStyle/>
+          <a:p>
+            <a:pPr algn="ctr" indent="0" marL="0">
+              <a:buNone/>
+            </a:pPr>
+            <a:r>
+              <a:rPr lang="en-US" sz="850" b="1" spc="100" kern="0" dirty="0">
+                <a:solidFill>
+                  <a:srgbClr val="7A5A12"/>
+                </a:solidFill>
+                <a:latin typeface="Calibri" pitchFamily="34" charset="0"/>
+                <a:ea typeface="Calibri" pitchFamily="34" charset="-122"/>
+                <a:cs typeface="Calibri" pitchFamily="34" charset="-120"/>
+              </a:rPr>
+              <a:t>PHASE 2</a:t>
+            </a:r>
+            <a:endParaRPr lang="en-US" sz="850" dirty="0"/>
+          </a:p>
+        </p:txBody>
+      </p:sp>
+      <p:sp>
+        <p:nvSpPr>
+          <p:cNvPr id="5" name="Text 3"/>
           <p:cNvSpPr txBox="1"/>
           <p:nvPr/>
         </p:nvSpPr>
@@ -9221,7 +9749,7 @@
       </p:sp>
       <p:sp>
         <p:nvSpPr>
-          <p:cNvPr id="4" name="Text 2"/>
+          <p:cNvPr id="6" name="Text 4"/>
           <p:cNvSpPr txBox="1"/>
           <p:nvPr/>
         </p:nvSpPr>
@@ -9263,7 +9791,7 @@
       </p:sp>
       <p:sp>
         <p:nvSpPr>
-          <p:cNvPr id="5" name="Text 3"/>
+          <p:cNvPr id="7" name="Text 5"/>
           <p:cNvSpPr txBox="1"/>
           <p:nvPr/>
         </p:nvSpPr>
@@ -9327,7 +9855,7 @@
       </p:sp>
       <p:sp>
         <p:nvSpPr>
-          <p:cNvPr id="6" name="Shape 4"/>
+          <p:cNvPr id="8" name="Shape 6"/>
           <p:cNvSpPr/>
           <p:nvPr/>
         </p:nvSpPr>
@@ -9361,7 +9889,7 @@
       </p:sp>
       <p:sp>
         <p:nvSpPr>
-          <p:cNvPr id="7" name="Shape 5"/>
+          <p:cNvPr id="9" name="Shape 7"/>
           <p:cNvSpPr/>
           <p:nvPr/>
         </p:nvSpPr>
@@ -9383,7 +9911,7 @@
       </p:sp>
       <p:sp>
         <p:nvSpPr>
-          <p:cNvPr id="8" name="Shape 6"/>
+          <p:cNvPr id="10" name="Shape 8"/>
           <p:cNvSpPr/>
           <p:nvPr/>
         </p:nvSpPr>
@@ -9403,7 +9931,7 @@
       </p:sp>
       <p:sp>
         <p:nvSpPr>
-          <p:cNvPr id="9" name="Shape 7"/>
+          <p:cNvPr id="11" name="Shape 9"/>
           <p:cNvSpPr/>
           <p:nvPr/>
         </p:nvSpPr>
@@ -9423,7 +9951,7 @@
       </p:sp>
       <p:sp>
         <p:nvSpPr>
-          <p:cNvPr id="10" name="Shape 8"/>
+          <p:cNvPr id="12" name="Shape 10"/>
           <p:cNvSpPr/>
           <p:nvPr/>
         </p:nvSpPr>
@@ -9443,7 +9971,7 @@
       </p:sp>
       <p:sp>
         <p:nvSpPr>
-          <p:cNvPr id="11" name="Shape 9"/>
+          <p:cNvPr id="13" name="Shape 11"/>
           <p:cNvSpPr/>
           <p:nvPr/>
         </p:nvSpPr>
@@ -9463,7 +9991,7 @@
       </p:sp>
       <p:sp>
         <p:nvSpPr>
-          <p:cNvPr id="12" name="Text 10"/>
+          <p:cNvPr id="14" name="Text 12"/>
           <p:cNvSpPr txBox="1"/>
           <p:nvPr/>
         </p:nvSpPr>
@@ -9502,7 +10030,7 @@
       </p:sp>
       <p:sp>
         <p:nvSpPr>
-          <p:cNvPr id="13" name="Shape 11"/>
+          <p:cNvPr id="15" name="Shape 13"/>
           <p:cNvSpPr/>
           <p:nvPr/>
         </p:nvSpPr>
@@ -9525,7 +10053,7 @@
       </p:sp>
       <p:sp>
         <p:nvSpPr>
-          <p:cNvPr id="14" name="Shape 12"/>
+          <p:cNvPr id="16" name="Shape 14"/>
           <p:cNvSpPr/>
           <p:nvPr/>
         </p:nvSpPr>
@@ -9552,7 +10080,7 @@
       </p:sp>
       <p:sp>
         <p:nvSpPr>
-          <p:cNvPr id="15" name="Shape 13"/>
+          <p:cNvPr id="17" name="Shape 15"/>
           <p:cNvSpPr/>
           <p:nvPr/>
         </p:nvSpPr>
@@ -9572,7 +10100,7 @@
       </p:sp>
       <p:sp>
         <p:nvSpPr>
-          <p:cNvPr id="16" name="Shape 14"/>
+          <p:cNvPr id="18" name="Shape 16"/>
           <p:cNvSpPr/>
           <p:nvPr/>
         </p:nvSpPr>
@@ -9594,7 +10122,7 @@
       </p:sp>
       <p:sp>
         <p:nvSpPr>
-          <p:cNvPr id="17" name="Shape 15"/>
+          <p:cNvPr id="19" name="Shape 17"/>
           <p:cNvSpPr/>
           <p:nvPr/>
         </p:nvSpPr>
@@ -9616,7 +10144,7 @@
       </p:sp>
       <p:sp>
         <p:nvSpPr>
-          <p:cNvPr id="18" name="Shape 16"/>
+          <p:cNvPr id="20" name="Shape 18"/>
           <p:cNvSpPr/>
           <p:nvPr/>
         </p:nvSpPr>
@@ -9643,7 +10171,7 @@
       </p:sp>
       <p:sp>
         <p:nvSpPr>
-          <p:cNvPr id="19" name="Text 17"/>
+          <p:cNvPr id="21" name="Text 19"/>
           <p:cNvSpPr txBox="1"/>
           <p:nvPr/>
         </p:nvSpPr>
@@ -9682,7 +10210,7 @@
       </p:sp>
       <p:sp>
         <p:nvSpPr>
-          <p:cNvPr id="20" name="Shape 18"/>
+          <p:cNvPr id="22" name="Shape 20"/>
           <p:cNvSpPr/>
           <p:nvPr/>
         </p:nvSpPr>
@@ -9709,7 +10237,7 @@
       </p:sp>
       <p:sp>
         <p:nvSpPr>
-          <p:cNvPr id="21" name="Shape 19"/>
+          <p:cNvPr id="23" name="Shape 21"/>
           <p:cNvSpPr/>
           <p:nvPr/>
         </p:nvSpPr>
@@ -9729,7 +10257,7 @@
       </p:sp>
       <p:sp>
         <p:nvSpPr>
-          <p:cNvPr id="22" name="Shape 20"/>
+          <p:cNvPr id="24" name="Shape 22"/>
           <p:cNvSpPr/>
           <p:nvPr/>
         </p:nvSpPr>
@@ -9751,7 +10279,7 @@
       </p:sp>
       <p:sp>
         <p:nvSpPr>
-          <p:cNvPr id="23" name="Shape 21"/>
+          <p:cNvPr id="25" name="Shape 23"/>
           <p:cNvSpPr/>
           <p:nvPr/>
         </p:nvSpPr>
@@ -9773,7 +10301,7 @@
       </p:sp>
       <p:sp>
         <p:nvSpPr>
-          <p:cNvPr id="24" name="Shape 22"/>
+          <p:cNvPr id="26" name="Shape 24"/>
           <p:cNvSpPr/>
           <p:nvPr/>
         </p:nvSpPr>
@@ -9800,7 +10328,7 @@
       </p:sp>
       <p:sp>
         <p:nvSpPr>
-          <p:cNvPr id="25" name="Text 23"/>
+          <p:cNvPr id="27" name="Text 25"/>
           <p:cNvSpPr txBox="1"/>
           <p:nvPr/>
         </p:nvSpPr>
@@ -9839,7 +10367,7 @@
       </p:sp>
       <p:sp>
         <p:nvSpPr>
-          <p:cNvPr id="26" name="Shape 24"/>
+          <p:cNvPr id="28" name="Shape 26"/>
           <p:cNvSpPr/>
           <p:nvPr/>
         </p:nvSpPr>
@@ -9866,7 +10394,7 @@
       </p:sp>
       <p:sp>
         <p:nvSpPr>
-          <p:cNvPr id="27" name="Shape 25"/>
+          <p:cNvPr id="29" name="Shape 27"/>
           <p:cNvSpPr/>
           <p:nvPr/>
         </p:nvSpPr>
@@ -9886,7 +10414,7 @@
       </p:sp>
       <p:sp>
         <p:nvSpPr>
-          <p:cNvPr id="28" name="Shape 26"/>
+          <p:cNvPr id="30" name="Shape 28"/>
           <p:cNvSpPr/>
           <p:nvPr/>
         </p:nvSpPr>
@@ -9908,7 +10436,7 @@
       </p:sp>
       <p:sp>
         <p:nvSpPr>
-          <p:cNvPr id="29" name="Shape 27"/>
+          <p:cNvPr id="31" name="Shape 29"/>
           <p:cNvSpPr/>
           <p:nvPr/>
         </p:nvSpPr>
@@ -9930,7 +10458,7 @@
       </p:sp>
       <p:sp>
         <p:nvSpPr>
-          <p:cNvPr id="30" name="Shape 28"/>
+          <p:cNvPr id="32" name="Shape 30"/>
           <p:cNvSpPr/>
           <p:nvPr/>
         </p:nvSpPr>
@@ -9957,7 +10485,7 @@
       </p:sp>
       <p:sp>
         <p:nvSpPr>
-          <p:cNvPr id="31" name="Text 29"/>
+          <p:cNvPr id="33" name="Text 31"/>
           <p:cNvSpPr txBox="1"/>
           <p:nvPr/>
         </p:nvSpPr>
@@ -10270,7 +10798,73 @@
       </p:sp>
       <p:sp>
         <p:nvSpPr>
-          <p:cNvPr id="3" name="Text 1"/>
+          <p:cNvPr id="3" name="Shape 1"/>
+          <p:cNvSpPr/>
+          <p:nvPr/>
+        </p:nvSpPr>
+        <p:spPr>
+          <a:xfrm>
+            <a:off x="10314432" y="731520"/>
+            <a:ext cx="1051560" cy="310896"/>
+          </a:xfrm>
+          <a:prstGeom prst="roundRect">
+            <a:avLst>
+              <a:gd name="adj" fmla="val 50000"/>
+            </a:avLst>
+          </a:prstGeom>
+          <a:solidFill>
+            <a:srgbClr val="F3E7C8"/>
+          </a:solidFill>
+          <a:ln w="9525">
+            <a:solidFill>
+              <a:srgbClr val="9C7C2E"/>
+            </a:solidFill>
+            <a:prstDash val="solid"/>
+          </a:ln>
+        </p:spPr>
+      </p:sp>
+      <p:sp>
+        <p:nvSpPr>
+          <p:cNvPr id="4" name="Text 2"/>
+          <p:cNvSpPr txBox="1"/>
+          <p:nvPr/>
+        </p:nvSpPr>
+        <p:spPr>
+          <a:xfrm>
+            <a:off x="10314432" y="722376"/>
+            <a:ext cx="1051560" cy="320040"/>
+          </a:xfrm>
+          <a:prstGeom prst="rect">
+            <a:avLst/>
+          </a:prstGeom>
+          <a:noFill/>
+          <a:ln/>
+        </p:spPr>
+        <p:txBody>
+          <a:bodyPr wrap="square" lIns="0" tIns="0" rIns="0" bIns="0" rtlCol="0" anchor="ctr"/>
+          <a:lstStyle/>
+          <a:p>
+            <a:pPr algn="ctr" indent="0" marL="0">
+              <a:buNone/>
+            </a:pPr>
+            <a:r>
+              <a:rPr lang="en-US" sz="850" b="1" spc="100" kern="0" dirty="0">
+                <a:solidFill>
+                  <a:srgbClr val="7A5A12"/>
+                </a:solidFill>
+                <a:latin typeface="Calibri" pitchFamily="34" charset="0"/>
+                <a:ea typeface="Calibri" pitchFamily="34" charset="-122"/>
+                <a:cs typeface="Calibri" pitchFamily="34" charset="-120"/>
+              </a:rPr>
+              <a:t>PHASE 2</a:t>
+            </a:r>
+            <a:endParaRPr lang="en-US" sz="850" dirty="0"/>
+          </a:p>
+        </p:txBody>
+      </p:sp>
+      <p:sp>
+        <p:nvSpPr>
+          <p:cNvPr id="5" name="Text 3"/>
           <p:cNvSpPr txBox="1"/>
           <p:nvPr/>
         </p:nvSpPr>
@@ -10312,7 +10906,7 @@
       </p:sp>
       <p:sp>
         <p:nvSpPr>
-          <p:cNvPr id="4" name="Text 2"/>
+          <p:cNvPr id="6" name="Text 4"/>
           <p:cNvSpPr txBox="1"/>
           <p:nvPr/>
         </p:nvSpPr>
@@ -10354,7 +10948,7 @@
       </p:sp>
       <p:sp>
         <p:nvSpPr>
-          <p:cNvPr id="5" name="Shape 3"/>
+          <p:cNvPr id="7" name="Shape 5"/>
           <p:cNvSpPr/>
           <p:nvPr/>
         </p:nvSpPr>
@@ -10381,7 +10975,7 @@
       </p:sp>
       <p:sp>
         <p:nvSpPr>
-          <p:cNvPr id="6" name="Text 4"/>
+          <p:cNvPr id="8" name="Text 6"/>
           <p:cNvSpPr txBox="1"/>
           <p:nvPr/>
         </p:nvSpPr>
@@ -10420,7 +11014,7 @@
       </p:sp>
       <p:sp>
         <p:nvSpPr>
-          <p:cNvPr id="7" name="Shape 5"/>
+          <p:cNvPr id="9" name="Shape 7"/>
           <p:cNvSpPr/>
           <p:nvPr/>
         </p:nvSpPr>
@@ -10447,7 +11041,7 @@
       </p:sp>
       <p:sp>
         <p:nvSpPr>
-          <p:cNvPr id="8" name="Text 6"/>
+          <p:cNvPr id="10" name="Text 8"/>
           <p:cNvSpPr txBox="1"/>
           <p:nvPr/>
         </p:nvSpPr>
@@ -10486,7 +11080,7 @@
       </p:sp>
       <p:sp>
         <p:nvSpPr>
-          <p:cNvPr id="9" name="Shape 7"/>
+          <p:cNvPr id="11" name="Shape 9"/>
           <p:cNvSpPr/>
           <p:nvPr/>
         </p:nvSpPr>
@@ -10520,7 +11114,7 @@
       </p:sp>
       <p:pic>
         <p:nvPicPr>
-          <p:cNvPr id="10" name="Image 0" descr="/private/tmp/claude-502/-Users-DRBTroy-Documents-Projects-DeepRoots/3b403855-4530-4100-a3e2-ac51fe60ce6e/scratchpad/screens/schools-directory.png">    </p:cNvPr>
+          <p:cNvPr id="12" name="Image 0" descr="/private/tmp/claude-502/-Users-DRBTroy-Documents-Projects-DeepRoots/3b403855-4530-4100-a3e2-ac51fe60ce6e/scratchpad/screens/schools-directory.png">    </p:cNvPr>
           <p:cNvPicPr>
             <a:picLocks noChangeAspect="1"/>
           </p:cNvPicPr>
@@ -10857,7 +11451,73 @@
       </p:sp>
       <p:sp>
         <p:nvSpPr>
-          <p:cNvPr id="3" name="Text 1"/>
+          <p:cNvPr id="3" name="Shape 1"/>
+          <p:cNvSpPr/>
+          <p:nvPr/>
+        </p:nvSpPr>
+        <p:spPr>
+          <a:xfrm>
+            <a:off x="10314432" y="731520"/>
+            <a:ext cx="1051560" cy="310896"/>
+          </a:xfrm>
+          <a:prstGeom prst="roundRect">
+            <a:avLst>
+              <a:gd name="adj" fmla="val 50000"/>
+            </a:avLst>
+          </a:prstGeom>
+          <a:solidFill>
+            <a:srgbClr val="F3E7C8"/>
+          </a:solidFill>
+          <a:ln w="9525">
+            <a:solidFill>
+              <a:srgbClr val="9C7C2E"/>
+            </a:solidFill>
+            <a:prstDash val="solid"/>
+          </a:ln>
+        </p:spPr>
+      </p:sp>
+      <p:sp>
+        <p:nvSpPr>
+          <p:cNvPr id="4" name="Text 2"/>
+          <p:cNvSpPr txBox="1"/>
+          <p:nvPr/>
+        </p:nvSpPr>
+        <p:spPr>
+          <a:xfrm>
+            <a:off x="10314432" y="722376"/>
+            <a:ext cx="1051560" cy="320040"/>
+          </a:xfrm>
+          <a:prstGeom prst="rect">
+            <a:avLst/>
+          </a:prstGeom>
+          <a:noFill/>
+          <a:ln/>
+        </p:spPr>
+        <p:txBody>
+          <a:bodyPr wrap="square" lIns="0" tIns="0" rIns="0" bIns="0" rtlCol="0" anchor="ctr"/>
+          <a:lstStyle/>
+          <a:p>
+            <a:pPr algn="ctr" indent="0" marL="0">
+              <a:buNone/>
+            </a:pPr>
+            <a:r>
+              <a:rPr lang="en-US" sz="850" b="1" spc="100" kern="0" dirty="0">
+                <a:solidFill>
+                  <a:srgbClr val="7A5A12"/>
+                </a:solidFill>
+                <a:latin typeface="Calibri" pitchFamily="34" charset="0"/>
+                <a:ea typeface="Calibri" pitchFamily="34" charset="-122"/>
+                <a:cs typeface="Calibri" pitchFamily="34" charset="-120"/>
+              </a:rPr>
+              <a:t>PHASE 2</a:t>
+            </a:r>
+            <a:endParaRPr lang="en-US" sz="850" dirty="0"/>
+          </a:p>
+        </p:txBody>
+      </p:sp>
+      <p:sp>
+        <p:nvSpPr>
+          <p:cNvPr id="5" name="Text 3"/>
           <p:cNvSpPr txBox="1"/>
           <p:nvPr/>
         </p:nvSpPr>
@@ -10899,7 +11559,7 @@
       </p:sp>
       <p:sp>
         <p:nvSpPr>
-          <p:cNvPr id="4" name="Text 2"/>
+          <p:cNvPr id="6" name="Text 4"/>
           <p:cNvSpPr txBox="1"/>
           <p:nvPr/>
         </p:nvSpPr>
@@ -10941,7 +11601,7 @@
       </p:sp>
       <p:sp>
         <p:nvSpPr>
-          <p:cNvPr id="5" name="Shape 3"/>
+          <p:cNvPr id="7" name="Shape 5"/>
           <p:cNvSpPr/>
           <p:nvPr/>
         </p:nvSpPr>
@@ -10968,7 +11628,7 @@
       </p:sp>
       <p:sp>
         <p:nvSpPr>
-          <p:cNvPr id="6" name="Text 4"/>
+          <p:cNvPr id="8" name="Text 6"/>
           <p:cNvSpPr txBox="1"/>
           <p:nvPr/>
         </p:nvSpPr>
@@ -11007,7 +11667,7 @@
       </p:sp>
       <p:sp>
         <p:nvSpPr>
-          <p:cNvPr id="7" name="Shape 5"/>
+          <p:cNvPr id="9" name="Shape 7"/>
           <p:cNvSpPr/>
           <p:nvPr/>
         </p:nvSpPr>
@@ -11034,7 +11694,7 @@
       </p:sp>
       <p:sp>
         <p:nvSpPr>
-          <p:cNvPr id="8" name="Shape 6"/>
+          <p:cNvPr id="10" name="Shape 8"/>
           <p:cNvSpPr/>
           <p:nvPr/>
         </p:nvSpPr>
@@ -11054,7 +11714,7 @@
       </p:sp>
       <p:sp>
         <p:nvSpPr>
-          <p:cNvPr id="9" name="Text 7"/>
+          <p:cNvPr id="11" name="Text 9"/>
           <p:cNvSpPr txBox="1"/>
           <p:nvPr/>
         </p:nvSpPr>
@@ -11093,7 +11753,7 @@
       </p:sp>
       <p:sp>
         <p:nvSpPr>
-          <p:cNvPr id="10" name="Shape 8"/>
+          <p:cNvPr id="12" name="Shape 10"/>
           <p:cNvSpPr/>
           <p:nvPr/>
         </p:nvSpPr>
@@ -11127,7 +11787,7 @@
       </p:sp>
       <p:pic>
         <p:nvPicPr>
-          <p:cNvPr id="11" name="Image 0" descr="/private/tmp/claude-502/-Users-DRBTroy-Documents-Projects-DeepRoots/3b403855-4530-4100-a3e2-ac51fe60ce6e/scratchpad/screens/school-page.png">    </p:cNvPr>
+          <p:cNvPr id="13" name="Image 0" descr="/private/tmp/claude-502/-Users-DRBTroy-Documents-Projects-DeepRoots/3b403855-4530-4100-a3e2-ac51fe60ce6e/scratchpad/screens/school-page.png">    </p:cNvPr>
           <p:cNvPicPr>
             <a:picLocks noChangeAspect="1"/>
           </p:cNvPicPr>
@@ -11222,7 +11882,73 @@
       </p:sp>
       <p:sp>
         <p:nvSpPr>
-          <p:cNvPr id="3" name="Text 1"/>
+          <p:cNvPr id="3" name="Shape 1"/>
+          <p:cNvSpPr/>
+          <p:nvPr/>
+        </p:nvSpPr>
+        <p:spPr>
+          <a:xfrm>
+            <a:off x="10314432" y="731520"/>
+            <a:ext cx="1051560" cy="310896"/>
+          </a:xfrm>
+          <a:prstGeom prst="roundRect">
+            <a:avLst>
+              <a:gd name="adj" fmla="val 50000"/>
+            </a:avLst>
+          </a:prstGeom>
+          <a:solidFill>
+            <a:srgbClr val="F3E7C8"/>
+          </a:solidFill>
+          <a:ln w="9525">
+            <a:solidFill>
+              <a:srgbClr val="9C7C2E"/>
+            </a:solidFill>
+            <a:prstDash val="solid"/>
+          </a:ln>
+        </p:spPr>
+      </p:sp>
+      <p:sp>
+        <p:nvSpPr>
+          <p:cNvPr id="4" name="Text 2"/>
+          <p:cNvSpPr txBox="1"/>
+          <p:nvPr/>
+        </p:nvSpPr>
+        <p:spPr>
+          <a:xfrm>
+            <a:off x="10314432" y="722376"/>
+            <a:ext cx="1051560" cy="320040"/>
+          </a:xfrm>
+          <a:prstGeom prst="rect">
+            <a:avLst/>
+          </a:prstGeom>
+          <a:noFill/>
+          <a:ln/>
+        </p:spPr>
+        <p:txBody>
+          <a:bodyPr wrap="square" lIns="0" tIns="0" rIns="0" bIns="0" rtlCol="0" anchor="ctr"/>
+          <a:lstStyle/>
+          <a:p>
+            <a:pPr algn="ctr" indent="0" marL="0">
+              <a:buNone/>
+            </a:pPr>
+            <a:r>
+              <a:rPr lang="en-US" sz="850" b="1" spc="100" kern="0" dirty="0">
+                <a:solidFill>
+                  <a:srgbClr val="7A5A12"/>
+                </a:solidFill>
+                <a:latin typeface="Calibri" pitchFamily="34" charset="0"/>
+                <a:ea typeface="Calibri" pitchFamily="34" charset="-122"/>
+                <a:cs typeface="Calibri" pitchFamily="34" charset="-120"/>
+              </a:rPr>
+              <a:t>PHASE 2</a:t>
+            </a:r>
+            <a:endParaRPr lang="en-US" sz="850" dirty="0"/>
+          </a:p>
+        </p:txBody>
+      </p:sp>
+      <p:sp>
+        <p:nvSpPr>
+          <p:cNvPr id="5" name="Text 3"/>
           <p:cNvSpPr txBox="1"/>
           <p:nvPr/>
         </p:nvSpPr>
@@ -11264,7 +11990,7 @@
       </p:sp>
       <p:sp>
         <p:nvSpPr>
-          <p:cNvPr id="4" name="Text 2"/>
+          <p:cNvPr id="6" name="Text 4"/>
           <p:cNvSpPr txBox="1"/>
           <p:nvPr/>
         </p:nvSpPr>
@@ -11306,7 +12032,7 @@
       </p:sp>
       <p:sp>
         <p:nvSpPr>
-          <p:cNvPr id="5" name="Shape 3"/>
+          <p:cNvPr id="7" name="Shape 5"/>
           <p:cNvSpPr/>
           <p:nvPr/>
         </p:nvSpPr>
@@ -11333,7 +12059,7 @@
       </p:sp>
       <p:sp>
         <p:nvSpPr>
-          <p:cNvPr id="6" name="Text 4"/>
+          <p:cNvPr id="8" name="Text 6"/>
           <p:cNvSpPr txBox="1"/>
           <p:nvPr/>
         </p:nvSpPr>
@@ -11372,7 +12098,7 @@
       </p:sp>
       <p:sp>
         <p:nvSpPr>
-          <p:cNvPr id="7" name="Shape 5"/>
+          <p:cNvPr id="9" name="Shape 7"/>
           <p:cNvSpPr/>
           <p:nvPr/>
         </p:nvSpPr>
@@ -11399,7 +12125,7 @@
       </p:sp>
       <p:sp>
         <p:nvSpPr>
-          <p:cNvPr id="8" name="Shape 6"/>
+          <p:cNvPr id="10" name="Shape 8"/>
           <p:cNvSpPr/>
           <p:nvPr/>
         </p:nvSpPr>
@@ -11419,7 +12145,7 @@
       </p:sp>
       <p:sp>
         <p:nvSpPr>
-          <p:cNvPr id="9" name="Text 7"/>
+          <p:cNvPr id="11" name="Text 9"/>
           <p:cNvSpPr txBox="1"/>
           <p:nvPr/>
         </p:nvSpPr>
@@ -11458,7 +12184,7 @@
       </p:sp>
       <p:sp>
         <p:nvSpPr>
-          <p:cNvPr id="10" name="Shape 8"/>
+          <p:cNvPr id="12" name="Shape 10"/>
           <p:cNvSpPr/>
           <p:nvPr/>
         </p:nvSpPr>
@@ -11492,7 +12218,7 @@
       </p:sp>
       <p:pic>
         <p:nvPicPr>
-          <p:cNvPr id="11" name="Image 0" descr="/private/tmp/claude-502/-Users-DRBTroy-Documents-Projects-DeepRoots/3b403855-4530-4100-a3e2-ac51fe60ce6e/scratchpad/screens/onboarding.png">    </p:cNvPr>
+          <p:cNvPr id="13" name="Image 0" descr="/private/tmp/claude-502/-Users-DRBTroy-Documents-Projects-DeepRoots/3b403855-4530-4100-a3e2-ac51fe60ce6e/scratchpad/screens/onboarding.png">    </p:cNvPr>
           <p:cNvPicPr>
             <a:picLocks noChangeAspect="1"/>
           </p:cNvPicPr>
@@ -11790,7 +12516,73 @@
       </p:sp>
       <p:sp>
         <p:nvSpPr>
-          <p:cNvPr id="3" name="Text 1"/>
+          <p:cNvPr id="3" name="Shape 1"/>
+          <p:cNvSpPr/>
+          <p:nvPr/>
+        </p:nvSpPr>
+        <p:spPr>
+          <a:xfrm>
+            <a:off x="10314432" y="731520"/>
+            <a:ext cx="1051560" cy="310896"/>
+          </a:xfrm>
+          <a:prstGeom prst="roundRect">
+            <a:avLst>
+              <a:gd name="adj" fmla="val 50000"/>
+            </a:avLst>
+          </a:prstGeom>
+          <a:solidFill>
+            <a:srgbClr val="F3E7C8"/>
+          </a:solidFill>
+          <a:ln w="9525">
+            <a:solidFill>
+              <a:srgbClr val="9C7C2E"/>
+            </a:solidFill>
+            <a:prstDash val="solid"/>
+          </a:ln>
+        </p:spPr>
+      </p:sp>
+      <p:sp>
+        <p:nvSpPr>
+          <p:cNvPr id="4" name="Text 2"/>
+          <p:cNvSpPr txBox="1"/>
+          <p:nvPr/>
+        </p:nvSpPr>
+        <p:spPr>
+          <a:xfrm>
+            <a:off x="10314432" y="722376"/>
+            <a:ext cx="1051560" cy="320040"/>
+          </a:xfrm>
+          <a:prstGeom prst="rect">
+            <a:avLst/>
+          </a:prstGeom>
+          <a:noFill/>
+          <a:ln/>
+        </p:spPr>
+        <p:txBody>
+          <a:bodyPr wrap="square" lIns="0" tIns="0" rIns="0" bIns="0" rtlCol="0" anchor="ctr"/>
+          <a:lstStyle/>
+          <a:p>
+            <a:pPr algn="ctr" indent="0" marL="0">
+              <a:buNone/>
+            </a:pPr>
+            <a:r>
+              <a:rPr lang="en-US" sz="850" b="1" spc="100" kern="0" dirty="0">
+                <a:solidFill>
+                  <a:srgbClr val="7A5A12"/>
+                </a:solidFill>
+                <a:latin typeface="Calibri" pitchFamily="34" charset="0"/>
+                <a:ea typeface="Calibri" pitchFamily="34" charset="-122"/>
+                <a:cs typeface="Calibri" pitchFamily="34" charset="-120"/>
+              </a:rPr>
+              <a:t>PHASE 3</a:t>
+            </a:r>
+            <a:endParaRPr lang="en-US" sz="850" dirty="0"/>
+          </a:p>
+        </p:txBody>
+      </p:sp>
+      <p:sp>
+        <p:nvSpPr>
+          <p:cNvPr id="5" name="Text 3"/>
           <p:cNvSpPr txBox="1"/>
           <p:nvPr/>
         </p:nvSpPr>
@@ -11832,7 +12624,7 @@
       </p:sp>
       <p:sp>
         <p:nvSpPr>
-          <p:cNvPr id="4" name="Text 2"/>
+          <p:cNvPr id="6" name="Text 4"/>
           <p:cNvSpPr txBox="1"/>
           <p:nvPr/>
         </p:nvSpPr>
@@ -11874,7 +12666,7 @@
       </p:sp>
       <p:sp>
         <p:nvSpPr>
-          <p:cNvPr id="5" name="Shape 3"/>
+          <p:cNvPr id="7" name="Shape 5"/>
           <p:cNvSpPr/>
           <p:nvPr/>
         </p:nvSpPr>
@@ -11901,7 +12693,7 @@
       </p:sp>
       <p:sp>
         <p:nvSpPr>
-          <p:cNvPr id="6" name="Text 4"/>
+          <p:cNvPr id="8" name="Text 6"/>
           <p:cNvSpPr txBox="1"/>
           <p:nvPr/>
         </p:nvSpPr>
@@ -11940,7 +12732,7 @@
       </p:sp>
       <p:sp>
         <p:nvSpPr>
-          <p:cNvPr id="7" name="Shape 5"/>
+          <p:cNvPr id="9" name="Shape 7"/>
           <p:cNvSpPr/>
           <p:nvPr/>
         </p:nvSpPr>
@@ -11967,7 +12759,7 @@
       </p:sp>
       <p:sp>
         <p:nvSpPr>
-          <p:cNvPr id="8" name="Shape 6"/>
+          <p:cNvPr id="10" name="Shape 8"/>
           <p:cNvSpPr/>
           <p:nvPr/>
         </p:nvSpPr>
@@ -11987,7 +12779,7 @@
       </p:sp>
       <p:sp>
         <p:nvSpPr>
-          <p:cNvPr id="9" name="Text 7"/>
+          <p:cNvPr id="11" name="Text 9"/>
           <p:cNvSpPr txBox="1"/>
           <p:nvPr/>
         </p:nvSpPr>
@@ -12026,7 +12818,7 @@
       </p:sp>
       <p:sp>
         <p:nvSpPr>
-          <p:cNvPr id="10" name="Shape 8"/>
+          <p:cNvPr id="12" name="Shape 10"/>
           <p:cNvSpPr/>
           <p:nvPr/>
         </p:nvSpPr>
@@ -12060,7 +12852,7 @@
       </p:sp>
       <p:sp>
         <p:nvSpPr>
-          <p:cNvPr id="11" name="Shape 9"/>
+          <p:cNvPr id="13" name="Shape 11"/>
           <p:cNvSpPr/>
           <p:nvPr/>
         </p:nvSpPr>
@@ -12082,7 +12874,7 @@
       </p:sp>
       <p:sp>
         <p:nvSpPr>
-          <p:cNvPr id="12" name="Shape 10"/>
+          <p:cNvPr id="14" name="Shape 12"/>
           <p:cNvSpPr/>
           <p:nvPr/>
         </p:nvSpPr>
@@ -12102,7 +12894,7 @@
       </p:sp>
       <p:sp>
         <p:nvSpPr>
-          <p:cNvPr id="13" name="Shape 11"/>
+          <p:cNvPr id="15" name="Shape 13"/>
           <p:cNvSpPr/>
           <p:nvPr/>
         </p:nvSpPr>
@@ -12122,7 +12914,7 @@
       </p:sp>
       <p:sp>
         <p:nvSpPr>
-          <p:cNvPr id="14" name="Shape 12"/>
+          <p:cNvPr id="16" name="Shape 14"/>
           <p:cNvSpPr/>
           <p:nvPr/>
         </p:nvSpPr>
@@ -12142,7 +12934,7 @@
       </p:sp>
       <p:sp>
         <p:nvSpPr>
-          <p:cNvPr id="15" name="Shape 13"/>
+          <p:cNvPr id="17" name="Shape 15"/>
           <p:cNvSpPr/>
           <p:nvPr/>
         </p:nvSpPr>
@@ -12162,7 +12954,7 @@
       </p:sp>
       <p:sp>
         <p:nvSpPr>
-          <p:cNvPr id="16" name="Text 14"/>
+          <p:cNvPr id="18" name="Text 16"/>
           <p:cNvSpPr txBox="1"/>
           <p:nvPr/>
         </p:nvSpPr>
@@ -12201,7 +12993,7 @@
       </p:sp>
       <p:sp>
         <p:nvSpPr>
-          <p:cNvPr id="17" name="Shape 15"/>
+          <p:cNvPr id="19" name="Shape 17"/>
           <p:cNvSpPr/>
           <p:nvPr/>
         </p:nvSpPr>
@@ -12224,7 +13016,7 @@
       </p:sp>
       <p:sp>
         <p:nvSpPr>
-          <p:cNvPr id="18" name="Shape 16"/>
+          <p:cNvPr id="20" name="Shape 18"/>
           <p:cNvSpPr/>
           <p:nvPr/>
         </p:nvSpPr>
@@ -12247,7 +13039,7 @@
       </p:sp>
       <p:sp>
         <p:nvSpPr>
-          <p:cNvPr id="19" name="Shape 17"/>
+          <p:cNvPr id="21" name="Shape 19"/>
           <p:cNvSpPr/>
           <p:nvPr/>
         </p:nvSpPr>
@@ -12272,7 +13064,7 @@
       </p:sp>
       <p:sp>
         <p:nvSpPr>
-          <p:cNvPr id="20" name="Text 18"/>
+          <p:cNvPr id="22" name="Text 20"/>
           <p:cNvSpPr txBox="1"/>
           <p:nvPr/>
         </p:nvSpPr>
@@ -12311,7 +13103,7 @@
       </p:sp>
       <p:sp>
         <p:nvSpPr>
-          <p:cNvPr id="21" name="Shape 19"/>
+          <p:cNvPr id="23" name="Shape 21"/>
           <p:cNvSpPr/>
           <p:nvPr/>
         </p:nvSpPr>
@@ -12336,7 +13128,7 @@
       </p:sp>
       <p:sp>
         <p:nvSpPr>
-          <p:cNvPr id="22" name="Text 20"/>
+          <p:cNvPr id="24" name="Text 22"/>
           <p:cNvSpPr txBox="1"/>
           <p:nvPr/>
         </p:nvSpPr>
@@ -12375,7 +13167,7 @@
       </p:sp>
       <p:sp>
         <p:nvSpPr>
-          <p:cNvPr id="23" name="Shape 21"/>
+          <p:cNvPr id="25" name="Shape 23"/>
           <p:cNvSpPr/>
           <p:nvPr/>
         </p:nvSpPr>
@@ -12400,7 +13192,7 @@
       </p:sp>
       <p:sp>
         <p:nvSpPr>
-          <p:cNvPr id="24" name="Text 22"/>
+          <p:cNvPr id="26" name="Text 24"/>
           <p:cNvSpPr txBox="1"/>
           <p:nvPr/>
         </p:nvSpPr>
@@ -12439,7 +13231,7 @@
       </p:sp>
       <p:sp>
         <p:nvSpPr>
-          <p:cNvPr id="25" name="Shape 23"/>
+          <p:cNvPr id="27" name="Shape 25"/>
           <p:cNvSpPr/>
           <p:nvPr/>
         </p:nvSpPr>
@@ -12464,7 +13256,7 @@
       </p:sp>
       <p:sp>
         <p:nvSpPr>
-          <p:cNvPr id="26" name="Text 24"/>
+          <p:cNvPr id="28" name="Text 26"/>
           <p:cNvSpPr txBox="1"/>
           <p:nvPr/>
         </p:nvSpPr>
@@ -12503,7 +13295,7 @@
       </p:sp>
       <p:sp>
         <p:nvSpPr>
-          <p:cNvPr id="27" name="Shape 25"/>
+          <p:cNvPr id="29" name="Shape 27"/>
           <p:cNvSpPr/>
           <p:nvPr/>
         </p:nvSpPr>
@@ -12530,7 +13322,7 @@
       </p:sp>
       <p:sp>
         <p:nvSpPr>
-          <p:cNvPr id="28" name="Shape 26"/>
+          <p:cNvPr id="30" name="Shape 28"/>
           <p:cNvSpPr/>
           <p:nvPr/>
         </p:nvSpPr>
@@ -12550,7 +13342,7 @@
       </p:sp>
       <p:sp>
         <p:nvSpPr>
-          <p:cNvPr id="29" name="Shape 27"/>
+          <p:cNvPr id="31" name="Shape 29"/>
           <p:cNvSpPr/>
           <p:nvPr/>
         </p:nvSpPr>
@@ -12572,7 +13364,7 @@
       </p:sp>
       <p:sp>
         <p:nvSpPr>
-          <p:cNvPr id="30" name="Shape 28"/>
+          <p:cNvPr id="32" name="Shape 30"/>
           <p:cNvSpPr/>
           <p:nvPr/>
         </p:nvSpPr>
@@ -12594,7 +13386,7 @@
       </p:sp>
       <p:sp>
         <p:nvSpPr>
-          <p:cNvPr id="31" name="Shape 29"/>
+          <p:cNvPr id="33" name="Shape 31"/>
           <p:cNvSpPr/>
           <p:nvPr/>
         </p:nvSpPr>
@@ -12621,7 +13413,7 @@
       </p:sp>
       <p:sp>
         <p:nvSpPr>
-          <p:cNvPr id="32" name="Text 30"/>
+          <p:cNvPr id="34" name="Text 32"/>
           <p:cNvSpPr txBox="1"/>
           <p:nvPr/>
         </p:nvSpPr>
@@ -12660,7 +13452,7 @@
       </p:sp>
       <p:sp>
         <p:nvSpPr>
-          <p:cNvPr id="33" name="Shape 31"/>
+          <p:cNvPr id="35" name="Shape 33"/>
           <p:cNvSpPr/>
           <p:nvPr/>
         </p:nvSpPr>
@@ -12687,7 +13479,7 @@
       </p:sp>
       <p:sp>
         <p:nvSpPr>
-          <p:cNvPr id="34" name="Shape 32"/>
+          <p:cNvPr id="36" name="Shape 34"/>
           <p:cNvSpPr/>
           <p:nvPr/>
         </p:nvSpPr>
@@ -12707,7 +13499,7 @@
       </p:sp>
       <p:sp>
         <p:nvSpPr>
-          <p:cNvPr id="35" name="Shape 33"/>
+          <p:cNvPr id="37" name="Shape 35"/>
           <p:cNvSpPr/>
           <p:nvPr/>
         </p:nvSpPr>
@@ -12729,7 +13521,7 @@
       </p:sp>
       <p:sp>
         <p:nvSpPr>
-          <p:cNvPr id="36" name="Shape 34"/>
+          <p:cNvPr id="38" name="Shape 36"/>
           <p:cNvSpPr/>
           <p:nvPr/>
         </p:nvSpPr>
@@ -12751,7 +13543,7 @@
       </p:sp>
       <p:sp>
         <p:nvSpPr>
-          <p:cNvPr id="37" name="Shape 35"/>
+          <p:cNvPr id="39" name="Shape 37"/>
           <p:cNvSpPr/>
           <p:nvPr/>
         </p:nvSpPr>
@@ -12778,7 +13570,7 @@
       </p:sp>
       <p:sp>
         <p:nvSpPr>
-          <p:cNvPr id="38" name="Text 36"/>
+          <p:cNvPr id="40" name="Text 38"/>
           <p:cNvSpPr txBox="1"/>
           <p:nvPr/>
         </p:nvSpPr>
@@ -12888,7 +13680,73 @@
       </p:sp>
       <p:sp>
         <p:nvSpPr>
-          <p:cNvPr id="3" name="Text 1"/>
+          <p:cNvPr id="3" name="Shape 1"/>
+          <p:cNvSpPr/>
+          <p:nvPr/>
+        </p:nvSpPr>
+        <p:spPr>
+          <a:xfrm>
+            <a:off x="10314432" y="731520"/>
+            <a:ext cx="1051560" cy="310896"/>
+          </a:xfrm>
+          <a:prstGeom prst="roundRect">
+            <a:avLst>
+              <a:gd name="adj" fmla="val 50000"/>
+            </a:avLst>
+          </a:prstGeom>
+          <a:solidFill>
+            <a:srgbClr val="F3E7C8"/>
+          </a:solidFill>
+          <a:ln w="9525">
+            <a:solidFill>
+              <a:srgbClr val="9C7C2E"/>
+            </a:solidFill>
+            <a:prstDash val="solid"/>
+          </a:ln>
+        </p:spPr>
+      </p:sp>
+      <p:sp>
+        <p:nvSpPr>
+          <p:cNvPr id="4" name="Text 2"/>
+          <p:cNvSpPr txBox="1"/>
+          <p:nvPr/>
+        </p:nvSpPr>
+        <p:spPr>
+          <a:xfrm>
+            <a:off x="10314432" y="722376"/>
+            <a:ext cx="1051560" cy="320040"/>
+          </a:xfrm>
+          <a:prstGeom prst="rect">
+            <a:avLst/>
+          </a:prstGeom>
+          <a:noFill/>
+          <a:ln/>
+        </p:spPr>
+        <p:txBody>
+          <a:bodyPr wrap="square" lIns="0" tIns="0" rIns="0" bIns="0" rtlCol="0" anchor="ctr"/>
+          <a:lstStyle/>
+          <a:p>
+            <a:pPr algn="ctr" indent="0" marL="0">
+              <a:buNone/>
+            </a:pPr>
+            <a:r>
+              <a:rPr lang="en-US" sz="850" b="1" spc="100" kern="0" dirty="0">
+                <a:solidFill>
+                  <a:srgbClr val="7A5A12"/>
+                </a:solidFill>
+                <a:latin typeface="Calibri" pitchFamily="34" charset="0"/>
+                <a:ea typeface="Calibri" pitchFamily="34" charset="-122"/>
+                <a:cs typeface="Calibri" pitchFamily="34" charset="-120"/>
+              </a:rPr>
+              <a:t>PHASE 3</a:t>
+            </a:r>
+            <a:endParaRPr lang="en-US" sz="850" dirty="0"/>
+          </a:p>
+        </p:txBody>
+      </p:sp>
+      <p:sp>
+        <p:nvSpPr>
+          <p:cNvPr id="5" name="Text 3"/>
           <p:cNvSpPr txBox="1"/>
           <p:nvPr/>
         </p:nvSpPr>
@@ -12930,7 +13788,7 @@
       </p:sp>
       <p:sp>
         <p:nvSpPr>
-          <p:cNvPr id="4" name="Text 2"/>
+          <p:cNvPr id="6" name="Text 4"/>
           <p:cNvSpPr txBox="1"/>
           <p:nvPr/>
         </p:nvSpPr>
@@ -12972,7 +13830,7 @@
       </p:sp>
       <p:sp>
         <p:nvSpPr>
-          <p:cNvPr id="5" name="Shape 3"/>
+          <p:cNvPr id="7" name="Shape 5"/>
           <p:cNvSpPr/>
           <p:nvPr/>
         </p:nvSpPr>
@@ -12999,7 +13857,7 @@
       </p:sp>
       <p:sp>
         <p:nvSpPr>
-          <p:cNvPr id="6" name="Text 4"/>
+          <p:cNvPr id="8" name="Text 6"/>
           <p:cNvSpPr txBox="1"/>
           <p:nvPr/>
         </p:nvSpPr>
@@ -13038,7 +13896,7 @@
       </p:sp>
       <p:sp>
         <p:nvSpPr>
-          <p:cNvPr id="7" name="Shape 5"/>
+          <p:cNvPr id="9" name="Shape 7"/>
           <p:cNvSpPr/>
           <p:nvPr/>
         </p:nvSpPr>
@@ -13065,7 +13923,7 @@
       </p:sp>
       <p:sp>
         <p:nvSpPr>
-          <p:cNvPr id="8" name="Shape 6"/>
+          <p:cNvPr id="10" name="Shape 8"/>
           <p:cNvSpPr/>
           <p:nvPr/>
         </p:nvSpPr>
@@ -13085,7 +13943,7 @@
       </p:sp>
       <p:sp>
         <p:nvSpPr>
-          <p:cNvPr id="9" name="Text 7"/>
+          <p:cNvPr id="11" name="Text 9"/>
           <p:cNvSpPr txBox="1"/>
           <p:nvPr/>
         </p:nvSpPr>
@@ -13124,7 +13982,7 @@
       </p:sp>
       <p:sp>
         <p:nvSpPr>
-          <p:cNvPr id="10" name="Shape 8"/>
+          <p:cNvPr id="12" name="Shape 10"/>
           <p:cNvSpPr/>
           <p:nvPr/>
         </p:nvSpPr>
@@ -13158,7 +14016,7 @@
       </p:sp>
       <p:sp>
         <p:nvSpPr>
-          <p:cNvPr id="11" name="Shape 9"/>
+          <p:cNvPr id="13" name="Shape 11"/>
           <p:cNvSpPr/>
           <p:nvPr/>
         </p:nvSpPr>
@@ -13180,7 +14038,7 @@
       </p:sp>
       <p:sp>
         <p:nvSpPr>
-          <p:cNvPr id="12" name="Shape 10"/>
+          <p:cNvPr id="14" name="Shape 12"/>
           <p:cNvSpPr/>
           <p:nvPr/>
         </p:nvSpPr>
@@ -13200,7 +14058,7 @@
       </p:sp>
       <p:sp>
         <p:nvSpPr>
-          <p:cNvPr id="13" name="Shape 11"/>
+          <p:cNvPr id="15" name="Shape 13"/>
           <p:cNvSpPr/>
           <p:nvPr/>
         </p:nvSpPr>
@@ -13220,7 +14078,7 @@
       </p:sp>
       <p:sp>
         <p:nvSpPr>
-          <p:cNvPr id="14" name="Shape 12"/>
+          <p:cNvPr id="16" name="Shape 14"/>
           <p:cNvSpPr/>
           <p:nvPr/>
         </p:nvSpPr>
@@ -13240,7 +14098,7 @@
       </p:sp>
       <p:sp>
         <p:nvSpPr>
-          <p:cNvPr id="15" name="Shape 13"/>
+          <p:cNvPr id="17" name="Shape 15"/>
           <p:cNvSpPr/>
           <p:nvPr/>
         </p:nvSpPr>
@@ -13260,7 +14118,7 @@
       </p:sp>
       <p:sp>
         <p:nvSpPr>
-          <p:cNvPr id="16" name="Text 14"/>
+          <p:cNvPr id="18" name="Text 16"/>
           <p:cNvSpPr txBox="1"/>
           <p:nvPr/>
         </p:nvSpPr>
@@ -13299,7 +14157,7 @@
       </p:sp>
       <p:sp>
         <p:nvSpPr>
-          <p:cNvPr id="17" name="Shape 15"/>
+          <p:cNvPr id="19" name="Shape 17"/>
           <p:cNvSpPr/>
           <p:nvPr/>
         </p:nvSpPr>
@@ -13322,7 +14180,7 @@
       </p:sp>
       <p:sp>
         <p:nvSpPr>
-          <p:cNvPr id="18" name="Shape 16"/>
+          <p:cNvPr id="20" name="Shape 18"/>
           <p:cNvSpPr/>
           <p:nvPr/>
         </p:nvSpPr>
@@ -13349,7 +14207,7 @@
       </p:sp>
       <p:sp>
         <p:nvSpPr>
-          <p:cNvPr id="19" name="Text 17"/>
+          <p:cNvPr id="21" name="Text 19"/>
           <p:cNvSpPr txBox="1"/>
           <p:nvPr/>
         </p:nvSpPr>
@@ -13388,7 +14246,7 @@
       </p:sp>
       <p:sp>
         <p:nvSpPr>
-          <p:cNvPr id="20" name="Shape 18"/>
+          <p:cNvPr id="22" name="Shape 20"/>
           <p:cNvSpPr/>
           <p:nvPr/>
         </p:nvSpPr>
@@ -13415,7 +14273,7 @@
       </p:sp>
       <p:sp>
         <p:nvSpPr>
-          <p:cNvPr id="21" name="Text 19"/>
+          <p:cNvPr id="23" name="Text 21"/>
           <p:cNvSpPr txBox="1"/>
           <p:nvPr/>
         </p:nvSpPr>
@@ -13454,7 +14312,7 @@
       </p:sp>
       <p:sp>
         <p:nvSpPr>
-          <p:cNvPr id="22" name="Shape 20"/>
+          <p:cNvPr id="24" name="Shape 22"/>
           <p:cNvSpPr/>
           <p:nvPr/>
         </p:nvSpPr>
@@ -13481,7 +14339,7 @@
       </p:sp>
       <p:sp>
         <p:nvSpPr>
-          <p:cNvPr id="23" name="Text 21"/>
+          <p:cNvPr id="25" name="Text 23"/>
           <p:cNvSpPr txBox="1"/>
           <p:nvPr/>
         </p:nvSpPr>
@@ -13520,7 +14378,7 @@
       </p:sp>
       <p:sp>
         <p:nvSpPr>
-          <p:cNvPr id="24" name="Shape 22"/>
+          <p:cNvPr id="26" name="Shape 24"/>
           <p:cNvSpPr/>
           <p:nvPr/>
         </p:nvSpPr>
@@ -13547,7 +14405,7 @@
       </p:sp>
       <p:sp>
         <p:nvSpPr>
-          <p:cNvPr id="25" name="Text 23"/>
+          <p:cNvPr id="27" name="Text 25"/>
           <p:cNvSpPr txBox="1"/>
           <p:nvPr/>
         </p:nvSpPr>
@@ -13586,7 +14444,7 @@
       </p:sp>
       <p:sp>
         <p:nvSpPr>
-          <p:cNvPr id="26" name="Shape 24"/>
+          <p:cNvPr id="28" name="Shape 26"/>
           <p:cNvSpPr/>
           <p:nvPr/>
         </p:nvSpPr>
@@ -13613,7 +14471,7 @@
       </p:sp>
       <p:sp>
         <p:nvSpPr>
-          <p:cNvPr id="27" name="Text 25"/>
+          <p:cNvPr id="29" name="Text 27"/>
           <p:cNvSpPr txBox="1"/>
           <p:nvPr/>
         </p:nvSpPr>
@@ -13652,7 +14510,7 @@
       </p:sp>
       <p:sp>
         <p:nvSpPr>
-          <p:cNvPr id="28" name="Shape 26"/>
+          <p:cNvPr id="30" name="Shape 28"/>
           <p:cNvSpPr/>
           <p:nvPr/>
         </p:nvSpPr>
@@ -13679,7 +14537,7 @@
       </p:sp>
       <p:sp>
         <p:nvSpPr>
-          <p:cNvPr id="29" name="Text 27"/>
+          <p:cNvPr id="31" name="Text 29"/>
           <p:cNvSpPr txBox="1"/>
           <p:nvPr/>
         </p:nvSpPr>
@@ -13718,7 +14576,7 @@
       </p:sp>
       <p:sp>
         <p:nvSpPr>
-          <p:cNvPr id="30" name="Text 28"/>
+          <p:cNvPr id="32" name="Text 30"/>
           <p:cNvSpPr txBox="1"/>
           <p:nvPr/>
         </p:nvSpPr>
@@ -13757,7 +14615,7 @@
       </p:sp>
       <p:sp>
         <p:nvSpPr>
-          <p:cNvPr id="31" name="Shape 29"/>
+          <p:cNvPr id="33" name="Shape 31"/>
           <p:cNvSpPr/>
           <p:nvPr/>
         </p:nvSpPr>
@@ -13784,7 +14642,7 @@
       </p:sp>
       <p:sp>
         <p:nvSpPr>
-          <p:cNvPr id="32" name="Text 30"/>
+          <p:cNvPr id="34" name="Text 32"/>
           <p:cNvSpPr txBox="1"/>
           <p:nvPr/>
         </p:nvSpPr>
@@ -13894,7 +14752,73 @@
       </p:sp>
       <p:sp>
         <p:nvSpPr>
-          <p:cNvPr id="3" name="Text 1"/>
+          <p:cNvPr id="3" name="Shape 1"/>
+          <p:cNvSpPr/>
+          <p:nvPr/>
+        </p:nvSpPr>
+        <p:spPr>
+          <a:xfrm>
+            <a:off x="10314432" y="731520"/>
+            <a:ext cx="1051560" cy="310896"/>
+          </a:xfrm>
+          <a:prstGeom prst="roundRect">
+            <a:avLst>
+              <a:gd name="adj" fmla="val 50000"/>
+            </a:avLst>
+          </a:prstGeom>
+          <a:solidFill>
+            <a:srgbClr val="F3E7C8"/>
+          </a:solidFill>
+          <a:ln w="9525">
+            <a:solidFill>
+              <a:srgbClr val="9C7C2E"/>
+            </a:solidFill>
+            <a:prstDash val="solid"/>
+          </a:ln>
+        </p:spPr>
+      </p:sp>
+      <p:sp>
+        <p:nvSpPr>
+          <p:cNvPr id="4" name="Text 2"/>
+          <p:cNvSpPr txBox="1"/>
+          <p:nvPr/>
+        </p:nvSpPr>
+        <p:spPr>
+          <a:xfrm>
+            <a:off x="10314432" y="722376"/>
+            <a:ext cx="1051560" cy="320040"/>
+          </a:xfrm>
+          <a:prstGeom prst="rect">
+            <a:avLst/>
+          </a:prstGeom>
+          <a:noFill/>
+          <a:ln/>
+        </p:spPr>
+        <p:txBody>
+          <a:bodyPr wrap="square" lIns="0" tIns="0" rIns="0" bIns="0" rtlCol="0" anchor="ctr"/>
+          <a:lstStyle/>
+          <a:p>
+            <a:pPr algn="ctr" indent="0" marL="0">
+              <a:buNone/>
+            </a:pPr>
+            <a:r>
+              <a:rPr lang="en-US" sz="850" b="1" spc="100" kern="0" dirty="0">
+                <a:solidFill>
+                  <a:srgbClr val="7A5A12"/>
+                </a:solidFill>
+                <a:latin typeface="Calibri" pitchFamily="34" charset="0"/>
+                <a:ea typeface="Calibri" pitchFamily="34" charset="-122"/>
+                <a:cs typeface="Calibri" pitchFamily="34" charset="-120"/>
+              </a:rPr>
+              <a:t>PHASE 3</a:t>
+            </a:r>
+            <a:endParaRPr lang="en-US" sz="850" dirty="0"/>
+          </a:p>
+        </p:txBody>
+      </p:sp>
+      <p:sp>
+        <p:nvSpPr>
+          <p:cNvPr id="5" name="Text 3"/>
           <p:cNvSpPr txBox="1"/>
           <p:nvPr/>
         </p:nvSpPr>
@@ -13936,7 +14860,7 @@
       </p:sp>
       <p:sp>
         <p:nvSpPr>
-          <p:cNvPr id="4" name="Text 2"/>
+          <p:cNvPr id="6" name="Text 4"/>
           <p:cNvSpPr txBox="1"/>
           <p:nvPr/>
         </p:nvSpPr>
@@ -13978,7 +14902,7 @@
       </p:sp>
       <p:sp>
         <p:nvSpPr>
-          <p:cNvPr id="5" name="Text 3"/>
+          <p:cNvPr id="7" name="Text 5"/>
           <p:cNvSpPr txBox="1"/>
           <p:nvPr/>
         </p:nvSpPr>
@@ -14042,7 +14966,7 @@
       </p:sp>
       <p:sp>
         <p:nvSpPr>
-          <p:cNvPr id="6" name="Shape 4"/>
+          <p:cNvPr id="8" name="Shape 6"/>
           <p:cNvSpPr/>
           <p:nvPr/>
         </p:nvSpPr>
@@ -14076,7 +15000,7 @@
       </p:sp>
       <p:sp>
         <p:nvSpPr>
-          <p:cNvPr id="7" name="Shape 5"/>
+          <p:cNvPr id="9" name="Shape 7"/>
           <p:cNvSpPr/>
           <p:nvPr/>
         </p:nvSpPr>
@@ -14098,7 +15022,7 @@
       </p:sp>
       <p:sp>
         <p:nvSpPr>
-          <p:cNvPr id="8" name="Shape 6"/>
+          <p:cNvPr id="10" name="Shape 8"/>
           <p:cNvSpPr/>
           <p:nvPr/>
         </p:nvSpPr>
@@ -14118,7 +15042,7 @@
       </p:sp>
       <p:sp>
         <p:nvSpPr>
-          <p:cNvPr id="9" name="Shape 7"/>
+          <p:cNvPr id="11" name="Shape 9"/>
           <p:cNvSpPr/>
           <p:nvPr/>
         </p:nvSpPr>
@@ -14138,7 +15062,7 @@
       </p:sp>
       <p:sp>
         <p:nvSpPr>
-          <p:cNvPr id="10" name="Shape 8"/>
+          <p:cNvPr id="12" name="Shape 10"/>
           <p:cNvSpPr/>
           <p:nvPr/>
         </p:nvSpPr>
@@ -14158,7 +15082,7 @@
       </p:sp>
       <p:sp>
         <p:nvSpPr>
-          <p:cNvPr id="11" name="Shape 9"/>
+          <p:cNvPr id="13" name="Shape 11"/>
           <p:cNvSpPr/>
           <p:nvPr/>
         </p:nvSpPr>
@@ -14178,7 +15102,7 @@
       </p:sp>
       <p:sp>
         <p:nvSpPr>
-          <p:cNvPr id="12" name="Text 10"/>
+          <p:cNvPr id="14" name="Text 12"/>
           <p:cNvSpPr txBox="1"/>
           <p:nvPr/>
         </p:nvSpPr>
@@ -14217,7 +15141,7 @@
       </p:sp>
       <p:sp>
         <p:nvSpPr>
-          <p:cNvPr id="13" name="Shape 11"/>
+          <p:cNvPr id="15" name="Shape 13"/>
           <p:cNvSpPr/>
           <p:nvPr/>
         </p:nvSpPr>
@@ -14240,7 +15164,7 @@
       </p:sp>
       <p:sp>
         <p:nvSpPr>
-          <p:cNvPr id="14" name="Shape 12"/>
+          <p:cNvPr id="16" name="Shape 14"/>
           <p:cNvSpPr/>
           <p:nvPr/>
         </p:nvSpPr>
@@ -14267,7 +15191,7 @@
       </p:sp>
       <p:sp>
         <p:nvSpPr>
-          <p:cNvPr id="15" name="Text 13"/>
+          <p:cNvPr id="17" name="Text 15"/>
           <p:cNvSpPr txBox="1"/>
           <p:nvPr/>
         </p:nvSpPr>
@@ -14306,7 +15230,7 @@
       </p:sp>
       <p:sp>
         <p:nvSpPr>
-          <p:cNvPr id="16" name="Text 14"/>
+          <p:cNvPr id="18" name="Text 16"/>
           <p:cNvSpPr txBox="1"/>
           <p:nvPr/>
         </p:nvSpPr>
@@ -14345,7 +15269,7 @@
       </p:sp>
       <p:sp>
         <p:nvSpPr>
-          <p:cNvPr id="17" name="Shape 15"/>
+          <p:cNvPr id="19" name="Shape 17"/>
           <p:cNvSpPr/>
           <p:nvPr/>
         </p:nvSpPr>
@@ -14372,7 +15296,7 @@
       </p:sp>
       <p:sp>
         <p:nvSpPr>
-          <p:cNvPr id="18" name="Text 16"/>
+          <p:cNvPr id="20" name="Text 18"/>
           <p:cNvSpPr txBox="1"/>
           <p:nvPr/>
         </p:nvSpPr>
@@ -14411,7 +15335,7 @@
       </p:sp>
       <p:sp>
         <p:nvSpPr>
-          <p:cNvPr id="19" name="Text 17"/>
+          <p:cNvPr id="21" name="Text 19"/>
           <p:cNvSpPr txBox="1"/>
           <p:nvPr/>
         </p:nvSpPr>
@@ -14450,7 +15374,7 @@
       </p:sp>
       <p:sp>
         <p:nvSpPr>
-          <p:cNvPr id="20" name="Shape 18"/>
+          <p:cNvPr id="22" name="Shape 20"/>
           <p:cNvSpPr/>
           <p:nvPr/>
         </p:nvSpPr>
@@ -14477,7 +15401,7 @@
       </p:sp>
       <p:sp>
         <p:nvSpPr>
-          <p:cNvPr id="21" name="Text 19"/>
+          <p:cNvPr id="23" name="Text 21"/>
           <p:cNvSpPr txBox="1"/>
           <p:nvPr/>
         </p:nvSpPr>
@@ -14516,7 +15440,7 @@
       </p:sp>
       <p:sp>
         <p:nvSpPr>
-          <p:cNvPr id="22" name="Text 20"/>
+          <p:cNvPr id="24" name="Text 22"/>
           <p:cNvSpPr txBox="1"/>
           <p:nvPr/>
         </p:nvSpPr>
@@ -14555,7 +15479,7 @@
       </p:sp>
       <p:sp>
         <p:nvSpPr>
-          <p:cNvPr id="23" name="Shape 21"/>
+          <p:cNvPr id="25" name="Shape 23"/>
           <p:cNvSpPr/>
           <p:nvPr/>
         </p:nvSpPr>
@@ -14582,7 +15506,7 @@
       </p:sp>
       <p:sp>
         <p:nvSpPr>
-          <p:cNvPr id="24" name="Text 22"/>
+          <p:cNvPr id="26" name="Text 24"/>
           <p:cNvSpPr txBox="1"/>
           <p:nvPr/>
         </p:nvSpPr>
@@ -14621,7 +15545,7 @@
       </p:sp>
       <p:sp>
         <p:nvSpPr>
-          <p:cNvPr id="25" name="Text 23"/>
+          <p:cNvPr id="27" name="Text 25"/>
           <p:cNvSpPr txBox="1"/>
           <p:nvPr/>
         </p:nvSpPr>
@@ -14731,7 +15655,73 @@
       </p:sp>
       <p:sp>
         <p:nvSpPr>
-          <p:cNvPr id="3" name="Text 1"/>
+          <p:cNvPr id="3" name="Shape 1"/>
+          <p:cNvSpPr/>
+          <p:nvPr/>
+        </p:nvSpPr>
+        <p:spPr>
+          <a:xfrm>
+            <a:off x="10314432" y="731520"/>
+            <a:ext cx="1051560" cy="310896"/>
+          </a:xfrm>
+          <a:prstGeom prst="roundRect">
+            <a:avLst>
+              <a:gd name="adj" fmla="val 50000"/>
+            </a:avLst>
+          </a:prstGeom>
+          <a:solidFill>
+            <a:srgbClr val="F3E7C8"/>
+          </a:solidFill>
+          <a:ln w="9525">
+            <a:solidFill>
+              <a:srgbClr val="9C7C2E"/>
+            </a:solidFill>
+            <a:prstDash val="solid"/>
+          </a:ln>
+        </p:spPr>
+      </p:sp>
+      <p:sp>
+        <p:nvSpPr>
+          <p:cNvPr id="4" name="Text 2"/>
+          <p:cNvSpPr txBox="1"/>
+          <p:nvPr/>
+        </p:nvSpPr>
+        <p:spPr>
+          <a:xfrm>
+            <a:off x="10314432" y="722376"/>
+            <a:ext cx="1051560" cy="320040"/>
+          </a:xfrm>
+          <a:prstGeom prst="rect">
+            <a:avLst/>
+          </a:prstGeom>
+          <a:noFill/>
+          <a:ln/>
+        </p:spPr>
+        <p:txBody>
+          <a:bodyPr wrap="square" lIns="0" tIns="0" rIns="0" bIns="0" rtlCol="0" anchor="ctr"/>
+          <a:lstStyle/>
+          <a:p>
+            <a:pPr algn="ctr" indent="0" marL="0">
+              <a:buNone/>
+            </a:pPr>
+            <a:r>
+              <a:rPr lang="en-US" sz="850" b="1" spc="100" kern="0" dirty="0">
+                <a:solidFill>
+                  <a:srgbClr val="7A5A12"/>
+                </a:solidFill>
+                <a:latin typeface="Calibri" pitchFamily="34" charset="0"/>
+                <a:ea typeface="Calibri" pitchFamily="34" charset="-122"/>
+                <a:cs typeface="Calibri" pitchFamily="34" charset="-120"/>
+              </a:rPr>
+              <a:t>PHASE 3</a:t>
+            </a:r>
+            <a:endParaRPr lang="en-US" sz="850" dirty="0"/>
+          </a:p>
+        </p:txBody>
+      </p:sp>
+      <p:sp>
+        <p:nvSpPr>
+          <p:cNvPr id="5" name="Text 3"/>
           <p:cNvSpPr txBox="1"/>
           <p:nvPr/>
         </p:nvSpPr>
@@ -14773,7 +15763,7 @@
       </p:sp>
       <p:sp>
         <p:nvSpPr>
-          <p:cNvPr id="4" name="Text 2"/>
+          <p:cNvPr id="6" name="Text 4"/>
           <p:cNvSpPr txBox="1"/>
           <p:nvPr/>
         </p:nvSpPr>
@@ -14815,7 +15805,7 @@
       </p:sp>
       <p:sp>
         <p:nvSpPr>
-          <p:cNvPr id="5" name="Text 3"/>
+          <p:cNvPr id="7" name="Text 5"/>
           <p:cNvSpPr txBox="1"/>
           <p:nvPr/>
         </p:nvSpPr>
@@ -14900,7 +15890,7 @@
       </p:sp>
       <p:sp>
         <p:nvSpPr>
-          <p:cNvPr id="6" name="Shape 4"/>
+          <p:cNvPr id="8" name="Shape 6"/>
           <p:cNvSpPr/>
           <p:nvPr/>
         </p:nvSpPr>
@@ -14927,7 +15917,7 @@
       </p:sp>
       <p:sp>
         <p:nvSpPr>
-          <p:cNvPr id="7" name="Text 5"/>
+          <p:cNvPr id="9" name="Text 7"/>
           <p:cNvSpPr txBox="1"/>
           <p:nvPr/>
         </p:nvSpPr>
@@ -14966,7 +15956,7 @@
       </p:sp>
       <p:sp>
         <p:nvSpPr>
-          <p:cNvPr id="8" name="Shape 6"/>
+          <p:cNvPr id="10" name="Shape 8"/>
           <p:cNvSpPr/>
           <p:nvPr/>
         </p:nvSpPr>
@@ -14993,7 +15983,7 @@
       </p:sp>
       <p:sp>
         <p:nvSpPr>
-          <p:cNvPr id="9" name="Shape 7"/>
+          <p:cNvPr id="11" name="Shape 9"/>
           <p:cNvSpPr/>
           <p:nvPr/>
         </p:nvSpPr>
@@ -15013,7 +16003,7 @@
       </p:sp>
       <p:sp>
         <p:nvSpPr>
-          <p:cNvPr id="10" name="Text 8"/>
+          <p:cNvPr id="12" name="Text 10"/>
           <p:cNvSpPr txBox="1"/>
           <p:nvPr/>
         </p:nvSpPr>
@@ -15052,7 +16042,7 @@
       </p:sp>
       <p:sp>
         <p:nvSpPr>
-          <p:cNvPr id="11" name="Shape 9"/>
+          <p:cNvPr id="13" name="Shape 11"/>
           <p:cNvSpPr/>
           <p:nvPr/>
         </p:nvSpPr>
@@ -15086,7 +16076,7 @@
       </p:sp>
       <p:sp>
         <p:nvSpPr>
-          <p:cNvPr id="12" name="Shape 10"/>
+          <p:cNvPr id="14" name="Shape 12"/>
           <p:cNvSpPr/>
           <p:nvPr/>
         </p:nvSpPr>
@@ -15108,7 +16098,7 @@
       </p:sp>
       <p:sp>
         <p:nvSpPr>
-          <p:cNvPr id="13" name="Shape 11"/>
+          <p:cNvPr id="15" name="Shape 13"/>
           <p:cNvSpPr/>
           <p:nvPr/>
         </p:nvSpPr>
@@ -15128,7 +16118,7 @@
       </p:sp>
       <p:sp>
         <p:nvSpPr>
-          <p:cNvPr id="14" name="Shape 12"/>
+          <p:cNvPr id="16" name="Shape 14"/>
           <p:cNvSpPr/>
           <p:nvPr/>
         </p:nvSpPr>
@@ -15148,7 +16138,7 @@
       </p:sp>
       <p:sp>
         <p:nvSpPr>
-          <p:cNvPr id="15" name="Shape 13"/>
+          <p:cNvPr id="17" name="Shape 15"/>
           <p:cNvSpPr/>
           <p:nvPr/>
         </p:nvSpPr>
@@ -15168,7 +16158,7 @@
       </p:sp>
       <p:sp>
         <p:nvSpPr>
-          <p:cNvPr id="16" name="Shape 14"/>
+          <p:cNvPr id="18" name="Shape 16"/>
           <p:cNvSpPr/>
           <p:nvPr/>
         </p:nvSpPr>
@@ -15188,7 +16178,7 @@
       </p:sp>
       <p:sp>
         <p:nvSpPr>
-          <p:cNvPr id="17" name="Text 15"/>
+          <p:cNvPr id="19" name="Text 17"/>
           <p:cNvSpPr txBox="1"/>
           <p:nvPr/>
         </p:nvSpPr>
@@ -15216,7 +16206,7 @@
       </p:sp>
       <p:sp>
         <p:nvSpPr>
-          <p:cNvPr id="18" name="Shape 16"/>
+          <p:cNvPr id="20" name="Shape 18"/>
           <p:cNvSpPr/>
           <p:nvPr/>
         </p:nvSpPr>
@@ -15239,7 +16229,7 @@
       </p:sp>
       <p:sp>
         <p:nvSpPr>
-          <p:cNvPr id="19" name="Shape 17"/>
+          <p:cNvPr id="21" name="Shape 19"/>
           <p:cNvSpPr/>
           <p:nvPr/>
         </p:nvSpPr>
@@ -15266,7 +16256,7 @@
       </p:sp>
       <p:sp>
         <p:nvSpPr>
-          <p:cNvPr id="20" name="Text 18"/>
+          <p:cNvPr id="22" name="Text 20"/>
           <p:cNvSpPr txBox="1"/>
           <p:nvPr/>
         </p:nvSpPr>
@@ -15305,7 +16295,7 @@
       </p:sp>
       <p:sp>
         <p:nvSpPr>
-          <p:cNvPr id="21" name="Shape 19"/>
+          <p:cNvPr id="23" name="Shape 21"/>
           <p:cNvSpPr/>
           <p:nvPr/>
         </p:nvSpPr>
@@ -15332,7 +16322,7 @@
       </p:sp>
       <p:sp>
         <p:nvSpPr>
-          <p:cNvPr id="22" name="Text 20"/>
+          <p:cNvPr id="24" name="Text 22"/>
           <p:cNvSpPr txBox="1"/>
           <p:nvPr/>
         </p:nvSpPr>
@@ -15371,7 +16361,7 @@
       </p:sp>
       <p:sp>
         <p:nvSpPr>
-          <p:cNvPr id="23" name="Shape 21"/>
+          <p:cNvPr id="25" name="Shape 23"/>
           <p:cNvSpPr/>
           <p:nvPr/>
         </p:nvSpPr>
@@ -15398,7 +16388,7 @@
       </p:sp>
       <p:sp>
         <p:nvSpPr>
-          <p:cNvPr id="24" name="Text 22"/>
+          <p:cNvPr id="26" name="Text 24"/>
           <p:cNvSpPr txBox="1"/>
           <p:nvPr/>
         </p:nvSpPr>
@@ -15437,7 +16427,7 @@
       </p:sp>
       <p:sp>
         <p:nvSpPr>
-          <p:cNvPr id="25" name="Shape 23"/>
+          <p:cNvPr id="27" name="Shape 25"/>
           <p:cNvSpPr/>
           <p:nvPr/>
         </p:nvSpPr>
@@ -15464,7 +16454,7 @@
       </p:sp>
       <p:sp>
         <p:nvSpPr>
-          <p:cNvPr id="26" name="Shape 24"/>
+          <p:cNvPr id="28" name="Shape 26"/>
           <p:cNvSpPr/>
           <p:nvPr/>
         </p:nvSpPr>
@@ -15491,7 +16481,7 @@
       </p:sp>
       <p:sp>
         <p:nvSpPr>
-          <p:cNvPr id="27" name="Shape 25"/>
+          <p:cNvPr id="29" name="Shape 27"/>
           <p:cNvSpPr/>
           <p:nvPr/>
         </p:nvSpPr>
@@ -15514,7 +16504,7 @@
       </p:sp>
       <p:sp>
         <p:nvSpPr>
-          <p:cNvPr id="28" name="Shape 26"/>
+          <p:cNvPr id="30" name="Shape 28"/>
           <p:cNvSpPr/>
           <p:nvPr/>
         </p:nvSpPr>
@@ -15537,7 +16527,7 @@
       </p:sp>
       <p:sp>
         <p:nvSpPr>
-          <p:cNvPr id="29" name="Text 27"/>
+          <p:cNvPr id="31" name="Text 29"/>
           <p:cNvSpPr txBox="1"/>
           <p:nvPr/>
         </p:nvSpPr>
@@ -15576,7 +16566,7 @@
       </p:sp>
       <p:sp>
         <p:nvSpPr>
-          <p:cNvPr id="30" name="Shape 28"/>
+          <p:cNvPr id="32" name="Shape 30"/>
           <p:cNvSpPr/>
           <p:nvPr/>
         </p:nvSpPr>
@@ -15603,7 +16593,7 @@
       </p:sp>
       <p:sp>
         <p:nvSpPr>
-          <p:cNvPr id="31" name="Text 29"/>
+          <p:cNvPr id="33" name="Text 31"/>
           <p:cNvSpPr txBox="1"/>
           <p:nvPr/>
         </p:nvSpPr>
@@ -15642,7 +16632,7 @@
       </p:sp>
       <p:sp>
         <p:nvSpPr>
-          <p:cNvPr id="32" name="Shape 30"/>
+          <p:cNvPr id="34" name="Shape 32"/>
           <p:cNvSpPr/>
           <p:nvPr/>
         </p:nvSpPr>
@@ -15662,7 +16652,7 @@
       </p:sp>
       <p:sp>
         <p:nvSpPr>
-          <p:cNvPr id="33" name="Text 31"/>
+          <p:cNvPr id="35" name="Text 33"/>
           <p:cNvSpPr txBox="1"/>
           <p:nvPr/>
         </p:nvSpPr>
@@ -15772,7 +16762,73 @@
       </p:sp>
       <p:sp>
         <p:nvSpPr>
-          <p:cNvPr id="3" name="Text 1"/>
+          <p:cNvPr id="3" name="Shape 1"/>
+          <p:cNvSpPr/>
+          <p:nvPr/>
+        </p:nvSpPr>
+        <p:spPr>
+          <a:xfrm>
+            <a:off x="10314432" y="731520"/>
+            <a:ext cx="1051560" cy="310896"/>
+          </a:xfrm>
+          <a:prstGeom prst="roundRect">
+            <a:avLst>
+              <a:gd name="adj" fmla="val 50000"/>
+            </a:avLst>
+          </a:prstGeom>
+          <a:solidFill>
+            <a:srgbClr val="F3E7C8"/>
+          </a:solidFill>
+          <a:ln w="9525">
+            <a:solidFill>
+              <a:srgbClr val="9C7C2E"/>
+            </a:solidFill>
+            <a:prstDash val="solid"/>
+          </a:ln>
+        </p:spPr>
+      </p:sp>
+      <p:sp>
+        <p:nvSpPr>
+          <p:cNvPr id="4" name="Text 2"/>
+          <p:cNvSpPr txBox="1"/>
+          <p:nvPr/>
+        </p:nvSpPr>
+        <p:spPr>
+          <a:xfrm>
+            <a:off x="10314432" y="722376"/>
+            <a:ext cx="1051560" cy="320040"/>
+          </a:xfrm>
+          <a:prstGeom prst="rect">
+            <a:avLst/>
+          </a:prstGeom>
+          <a:noFill/>
+          <a:ln/>
+        </p:spPr>
+        <p:txBody>
+          <a:bodyPr wrap="square" lIns="0" tIns="0" rIns="0" bIns="0" rtlCol="0" anchor="ctr"/>
+          <a:lstStyle/>
+          <a:p>
+            <a:pPr algn="ctr" indent="0" marL="0">
+              <a:buNone/>
+            </a:pPr>
+            <a:r>
+              <a:rPr lang="en-US" sz="850" b="1" spc="100" kern="0" dirty="0">
+                <a:solidFill>
+                  <a:srgbClr val="7A5A12"/>
+                </a:solidFill>
+                <a:latin typeface="Calibri" pitchFamily="34" charset="0"/>
+                <a:ea typeface="Calibri" pitchFamily="34" charset="-122"/>
+                <a:cs typeface="Calibri" pitchFamily="34" charset="-120"/>
+              </a:rPr>
+              <a:t>PHASE 3</a:t>
+            </a:r>
+            <a:endParaRPr lang="en-US" sz="850" dirty="0"/>
+          </a:p>
+        </p:txBody>
+      </p:sp>
+      <p:sp>
+        <p:nvSpPr>
+          <p:cNvPr id="5" name="Text 3"/>
           <p:cNvSpPr txBox="1"/>
           <p:nvPr/>
         </p:nvSpPr>
@@ -15814,7 +16870,7 @@
       </p:sp>
       <p:sp>
         <p:nvSpPr>
-          <p:cNvPr id="4" name="Text 2"/>
+          <p:cNvPr id="6" name="Text 4"/>
           <p:cNvSpPr txBox="1"/>
           <p:nvPr/>
         </p:nvSpPr>
@@ -15856,7 +16912,7 @@
       </p:sp>
       <p:sp>
         <p:nvSpPr>
-          <p:cNvPr id="5" name="Shape 3"/>
+          <p:cNvPr id="7" name="Shape 5"/>
           <p:cNvSpPr/>
           <p:nvPr/>
         </p:nvSpPr>
@@ -15883,7 +16939,7 @@
       </p:sp>
       <p:sp>
         <p:nvSpPr>
-          <p:cNvPr id="6" name="Text 4"/>
+          <p:cNvPr id="8" name="Text 6"/>
           <p:cNvSpPr txBox="1"/>
           <p:nvPr/>
         </p:nvSpPr>
@@ -15922,7 +16978,7 @@
       </p:sp>
       <p:sp>
         <p:nvSpPr>
-          <p:cNvPr id="7" name="Shape 5"/>
+          <p:cNvPr id="9" name="Shape 7"/>
           <p:cNvSpPr/>
           <p:nvPr/>
         </p:nvSpPr>
@@ -15949,7 +17005,7 @@
       </p:sp>
       <p:sp>
         <p:nvSpPr>
-          <p:cNvPr id="8" name="Shape 6"/>
+          <p:cNvPr id="10" name="Shape 8"/>
           <p:cNvSpPr/>
           <p:nvPr/>
         </p:nvSpPr>
@@ -15969,7 +17025,7 @@
       </p:sp>
       <p:sp>
         <p:nvSpPr>
-          <p:cNvPr id="9" name="Text 7"/>
+          <p:cNvPr id="11" name="Text 9"/>
           <p:cNvSpPr txBox="1"/>
           <p:nvPr/>
         </p:nvSpPr>
@@ -16008,7 +17064,7 @@
       </p:sp>
       <p:sp>
         <p:nvSpPr>
-          <p:cNvPr id="10" name="Shape 8"/>
+          <p:cNvPr id="12" name="Shape 10"/>
           <p:cNvSpPr/>
           <p:nvPr/>
         </p:nvSpPr>
@@ -16042,7 +17098,7 @@
       </p:sp>
       <p:sp>
         <p:nvSpPr>
-          <p:cNvPr id="11" name="Shape 9"/>
+          <p:cNvPr id="13" name="Shape 11"/>
           <p:cNvSpPr/>
           <p:nvPr/>
         </p:nvSpPr>
@@ -16064,7 +17120,7 @@
       </p:sp>
       <p:sp>
         <p:nvSpPr>
-          <p:cNvPr id="12" name="Shape 10"/>
+          <p:cNvPr id="14" name="Shape 12"/>
           <p:cNvSpPr/>
           <p:nvPr/>
         </p:nvSpPr>
@@ -16084,7 +17140,7 @@
       </p:sp>
       <p:sp>
         <p:nvSpPr>
-          <p:cNvPr id="13" name="Shape 11"/>
+          <p:cNvPr id="15" name="Shape 13"/>
           <p:cNvSpPr/>
           <p:nvPr/>
         </p:nvSpPr>
@@ -16104,7 +17160,7 @@
       </p:sp>
       <p:sp>
         <p:nvSpPr>
-          <p:cNvPr id="14" name="Shape 12"/>
+          <p:cNvPr id="16" name="Shape 14"/>
           <p:cNvSpPr/>
           <p:nvPr/>
         </p:nvSpPr>
@@ -16124,7 +17180,7 @@
       </p:sp>
       <p:sp>
         <p:nvSpPr>
-          <p:cNvPr id="15" name="Shape 13"/>
+          <p:cNvPr id="17" name="Shape 15"/>
           <p:cNvSpPr/>
           <p:nvPr/>
         </p:nvSpPr>
@@ -16144,7 +17200,7 @@
       </p:sp>
       <p:sp>
         <p:nvSpPr>
-          <p:cNvPr id="16" name="Text 14"/>
+          <p:cNvPr id="18" name="Text 16"/>
           <p:cNvSpPr txBox="1"/>
           <p:nvPr/>
         </p:nvSpPr>
@@ -16172,7 +17228,7 @@
       </p:sp>
       <p:sp>
         <p:nvSpPr>
-          <p:cNvPr id="17" name="Shape 15"/>
+          <p:cNvPr id="19" name="Shape 17"/>
           <p:cNvSpPr/>
           <p:nvPr/>
         </p:nvSpPr>
@@ -16195,7 +17251,7 @@
       </p:sp>
       <p:sp>
         <p:nvSpPr>
-          <p:cNvPr id="18" name="Shape 16"/>
+          <p:cNvPr id="20" name="Shape 18"/>
           <p:cNvSpPr/>
           <p:nvPr/>
         </p:nvSpPr>
@@ -16222,7 +17278,7 @@
       </p:sp>
       <p:sp>
         <p:nvSpPr>
-          <p:cNvPr id="19" name="Shape 17"/>
+          <p:cNvPr id="21" name="Shape 19"/>
           <p:cNvSpPr/>
           <p:nvPr/>
         </p:nvSpPr>
@@ -16242,7 +17298,7 @@
       </p:sp>
       <p:sp>
         <p:nvSpPr>
-          <p:cNvPr id="20" name="Text 18"/>
+          <p:cNvPr id="22" name="Text 20"/>
           <p:cNvSpPr txBox="1"/>
           <p:nvPr/>
         </p:nvSpPr>
@@ -16281,7 +17337,7 @@
       </p:sp>
       <p:sp>
         <p:nvSpPr>
-          <p:cNvPr id="21" name="Shape 19"/>
+          <p:cNvPr id="23" name="Shape 21"/>
           <p:cNvSpPr/>
           <p:nvPr/>
         </p:nvSpPr>
@@ -16308,7 +17364,7 @@
       </p:sp>
       <p:sp>
         <p:nvSpPr>
-          <p:cNvPr id="22" name="Shape 20"/>
+          <p:cNvPr id="24" name="Shape 22"/>
           <p:cNvSpPr/>
           <p:nvPr/>
         </p:nvSpPr>
@@ -16328,7 +17384,7 @@
       </p:sp>
       <p:sp>
         <p:nvSpPr>
-          <p:cNvPr id="23" name="Text 21"/>
+          <p:cNvPr id="25" name="Text 23"/>
           <p:cNvSpPr txBox="1"/>
           <p:nvPr/>
         </p:nvSpPr>
@@ -16367,7 +17423,7 @@
       </p:sp>
       <p:sp>
         <p:nvSpPr>
-          <p:cNvPr id="24" name="Shape 22"/>
+          <p:cNvPr id="26" name="Shape 24"/>
           <p:cNvSpPr/>
           <p:nvPr/>
         </p:nvSpPr>
@@ -16394,7 +17450,7 @@
       </p:sp>
       <p:sp>
         <p:nvSpPr>
-          <p:cNvPr id="25" name="Shape 23"/>
+          <p:cNvPr id="27" name="Shape 25"/>
           <p:cNvSpPr/>
           <p:nvPr/>
         </p:nvSpPr>
@@ -16414,7 +17470,7 @@
       </p:sp>
       <p:sp>
         <p:nvSpPr>
-          <p:cNvPr id="26" name="Text 24"/>
+          <p:cNvPr id="28" name="Text 26"/>
           <p:cNvSpPr txBox="1"/>
           <p:nvPr/>
         </p:nvSpPr>
@@ -16453,7 +17509,7 @@
       </p:sp>
       <p:sp>
         <p:nvSpPr>
-          <p:cNvPr id="27" name="Shape 25"/>
+          <p:cNvPr id="29" name="Shape 27"/>
           <p:cNvSpPr/>
           <p:nvPr/>
         </p:nvSpPr>
@@ -16480,7 +17536,7 @@
       </p:sp>
       <p:sp>
         <p:nvSpPr>
-          <p:cNvPr id="28" name="Shape 26"/>
+          <p:cNvPr id="30" name="Shape 28"/>
           <p:cNvSpPr/>
           <p:nvPr/>
         </p:nvSpPr>
@@ -16500,7 +17556,7 @@
       </p:sp>
       <p:sp>
         <p:nvSpPr>
-          <p:cNvPr id="29" name="Text 27"/>
+          <p:cNvPr id="31" name="Text 29"/>
           <p:cNvSpPr txBox="1"/>
           <p:nvPr/>
         </p:nvSpPr>
@@ -16539,7 +17595,7 @@
       </p:sp>
       <p:sp>
         <p:nvSpPr>
-          <p:cNvPr id="30" name="Shape 28"/>
+          <p:cNvPr id="32" name="Shape 30"/>
           <p:cNvSpPr/>
           <p:nvPr/>
         </p:nvSpPr>
@@ -16566,7 +17622,7 @@
       </p:sp>
       <p:sp>
         <p:nvSpPr>
-          <p:cNvPr id="31" name="Shape 29"/>
+          <p:cNvPr id="33" name="Shape 31"/>
           <p:cNvSpPr/>
           <p:nvPr/>
         </p:nvSpPr>
@@ -16586,7 +17642,7 @@
       </p:sp>
       <p:sp>
         <p:nvSpPr>
-          <p:cNvPr id="32" name="Text 30"/>
+          <p:cNvPr id="34" name="Text 32"/>
           <p:cNvSpPr txBox="1"/>
           <p:nvPr/>
         </p:nvSpPr>
@@ -16625,7 +17681,7 @@
       </p:sp>
       <p:sp>
         <p:nvSpPr>
-          <p:cNvPr id="33" name="Shape 31"/>
+          <p:cNvPr id="35" name="Shape 33"/>
           <p:cNvSpPr/>
           <p:nvPr/>
         </p:nvSpPr>
@@ -16652,7 +17708,7 @@
       </p:sp>
       <p:sp>
         <p:nvSpPr>
-          <p:cNvPr id="34" name="Shape 32"/>
+          <p:cNvPr id="36" name="Shape 34"/>
           <p:cNvSpPr/>
           <p:nvPr/>
         </p:nvSpPr>
@@ -16672,7 +17728,7 @@
       </p:sp>
       <p:sp>
         <p:nvSpPr>
-          <p:cNvPr id="35" name="Text 33"/>
+          <p:cNvPr id="37" name="Text 35"/>
           <p:cNvSpPr txBox="1"/>
           <p:nvPr/>
         </p:nvSpPr>
@@ -16711,7 +17767,7 @@
       </p:sp>
       <p:sp>
         <p:nvSpPr>
-          <p:cNvPr id="36" name="Shape 34"/>
+          <p:cNvPr id="38" name="Shape 36"/>
           <p:cNvSpPr/>
           <p:nvPr/>
         </p:nvSpPr>
@@ -16738,7 +17794,7 @@
       </p:sp>
       <p:sp>
         <p:nvSpPr>
-          <p:cNvPr id="37" name="Shape 35"/>
+          <p:cNvPr id="39" name="Shape 37"/>
           <p:cNvSpPr/>
           <p:nvPr/>
         </p:nvSpPr>
@@ -16758,7 +17814,7 @@
       </p:sp>
       <p:sp>
         <p:nvSpPr>
-          <p:cNvPr id="38" name="Text 36"/>
+          <p:cNvPr id="40" name="Text 38"/>
           <p:cNvSpPr txBox="1"/>
           <p:nvPr/>
         </p:nvSpPr>
@@ -16797,7 +17853,7 @@
       </p:sp>
       <p:sp>
         <p:nvSpPr>
-          <p:cNvPr id="39" name="Shape 37"/>
+          <p:cNvPr id="41" name="Shape 39"/>
           <p:cNvSpPr/>
           <p:nvPr/>
         </p:nvSpPr>
@@ -16824,7 +17880,7 @@
       </p:sp>
       <p:sp>
         <p:nvSpPr>
-          <p:cNvPr id="40" name="Shape 38"/>
+          <p:cNvPr id="42" name="Shape 40"/>
           <p:cNvSpPr/>
           <p:nvPr/>
         </p:nvSpPr>
@@ -16844,7 +17900,7 @@
       </p:sp>
       <p:sp>
         <p:nvSpPr>
-          <p:cNvPr id="41" name="Text 39"/>
+          <p:cNvPr id="43" name="Text 41"/>
           <p:cNvSpPr txBox="1"/>
           <p:nvPr/>
         </p:nvSpPr>
@@ -16883,7 +17939,7 @@
       </p:sp>
       <p:sp>
         <p:nvSpPr>
-          <p:cNvPr id="42" name="Shape 40"/>
+          <p:cNvPr id="44" name="Shape 42"/>
           <p:cNvSpPr/>
           <p:nvPr/>
         </p:nvSpPr>
@@ -16910,7 +17966,7 @@
       </p:sp>
       <p:sp>
         <p:nvSpPr>
-          <p:cNvPr id="43" name="Shape 41"/>
+          <p:cNvPr id="45" name="Shape 43"/>
           <p:cNvSpPr/>
           <p:nvPr/>
         </p:nvSpPr>
@@ -16930,7 +17986,7 @@
       </p:sp>
       <p:sp>
         <p:nvSpPr>
-          <p:cNvPr id="44" name="Text 42"/>
+          <p:cNvPr id="46" name="Text 44"/>
           <p:cNvSpPr txBox="1"/>
           <p:nvPr/>
         </p:nvSpPr>
@@ -16969,7 +18025,7 @@
       </p:sp>
       <p:sp>
         <p:nvSpPr>
-          <p:cNvPr id="45" name="Shape 43"/>
+          <p:cNvPr id="47" name="Shape 45"/>
           <p:cNvSpPr/>
           <p:nvPr/>
         </p:nvSpPr>
@@ -16996,7 +18052,7 @@
       </p:sp>
       <p:sp>
         <p:nvSpPr>
-          <p:cNvPr id="46" name="Shape 44"/>
+          <p:cNvPr id="48" name="Shape 46"/>
           <p:cNvSpPr/>
           <p:nvPr/>
         </p:nvSpPr>
@@ -17016,7 +18072,7 @@
       </p:sp>
       <p:sp>
         <p:nvSpPr>
-          <p:cNvPr id="47" name="Text 45"/>
+          <p:cNvPr id="49" name="Text 47"/>
           <p:cNvSpPr txBox="1"/>
           <p:nvPr/>
         </p:nvSpPr>
@@ -17055,7 +18111,7 @@
       </p:sp>
       <p:sp>
         <p:nvSpPr>
-          <p:cNvPr id="48" name="Shape 46"/>
+          <p:cNvPr id="50" name="Shape 48"/>
           <p:cNvSpPr/>
           <p:nvPr/>
         </p:nvSpPr>
@@ -17082,7 +18138,7 @@
       </p:sp>
       <p:sp>
         <p:nvSpPr>
-          <p:cNvPr id="49" name="Shape 47"/>
+          <p:cNvPr id="51" name="Shape 49"/>
           <p:cNvSpPr/>
           <p:nvPr/>
         </p:nvSpPr>
@@ -17102,7 +18158,7 @@
       </p:sp>
       <p:sp>
         <p:nvSpPr>
-          <p:cNvPr id="50" name="Text 48"/>
+          <p:cNvPr id="52" name="Text 50"/>
           <p:cNvSpPr txBox="1"/>
           <p:nvPr/>
         </p:nvSpPr>
@@ -18309,6 +19365,106 @@
           </a:p>
         </p:txBody>
       </p:sp>
+      <p:sp>
+        <p:nvSpPr>
+          <p:cNvPr id="7" name="Shape 5"/>
+          <p:cNvSpPr/>
+          <p:nvPr/>
+        </p:nvSpPr>
+        <p:spPr>
+          <a:xfrm>
+            <a:off x="822960" y="5120640"/>
+            <a:ext cx="3291840" cy="512064"/>
+          </a:xfrm>
+          <a:prstGeom prst="roundRect">
+            <a:avLst>
+              <a:gd name="adj" fmla="val 50000"/>
+            </a:avLst>
+          </a:prstGeom>
+          <a:solidFill>
+            <a:srgbClr val="9C7C2E"/>
+          </a:solidFill>
+          <a:ln/>
+        </p:spPr>
+      </p:sp>
+      <p:sp>
+        <p:nvSpPr>
+          <p:cNvPr id="8" name="Text 6"/>
+          <p:cNvSpPr txBox="1"/>
+          <p:nvPr/>
+        </p:nvSpPr>
+        <p:spPr>
+          <a:xfrm>
+            <a:off x="822960" y="5111496"/>
+            <a:ext cx="3291840" cy="530352"/>
+          </a:xfrm>
+          <a:prstGeom prst="rect">
+            <a:avLst/>
+          </a:prstGeom>
+          <a:noFill/>
+          <a:ln/>
+        </p:spPr>
+        <p:txBody>
+          <a:bodyPr wrap="square" lIns="0" tIns="0" rIns="0" bIns="0" rtlCol="0" anchor="ctr"/>
+          <a:lstStyle/>
+          <a:p>
+            <a:pPr algn="ctr" indent="0" marL="0">
+              <a:buNone/>
+            </a:pPr>
+            <a:r>
+              <a:rPr lang="en-US" sz="1200" b="1" dirty="0">
+                <a:solidFill>
+                  <a:srgbClr val="FFFFFF"/>
+                </a:solidFill>
+                <a:latin typeface="Calibri" pitchFamily="34" charset="0"/>
+                <a:ea typeface="Calibri" pitchFamily="34" charset="-122"/>
+                <a:cs typeface="Calibri" pitchFamily="34" charset="-120"/>
+              </a:rPr>
+              <a:t>Approve Phase 1 to begin</a:t>
+            </a:r>
+            <a:endParaRPr lang="en-US" sz="1200" dirty="0"/>
+          </a:p>
+        </p:txBody>
+      </p:sp>
+      <p:sp>
+        <p:nvSpPr>
+          <p:cNvPr id="9" name="Text 7"/>
+          <p:cNvSpPr txBox="1"/>
+          <p:nvPr/>
+        </p:nvSpPr>
+        <p:spPr>
+          <a:xfrm>
+            <a:off x="822960" y="5806440"/>
+            <a:ext cx="8686800" cy="365760"/>
+          </a:xfrm>
+          <a:prstGeom prst="rect">
+            <a:avLst/>
+          </a:prstGeom>
+          <a:noFill/>
+          <a:ln/>
+        </p:spPr>
+        <p:txBody>
+          <a:bodyPr wrap="square" lIns="0" tIns="0" rIns="0" bIns="0" rtlCol="0" anchor="ctr"/>
+          <a:lstStyle/>
+          <a:p>
+            <a:pPr indent="0" marL="0">
+              <a:buNone/>
+            </a:pPr>
+            <a:r>
+              <a:rPr lang="en-US" sz="1100" dirty="0">
+                <a:solidFill>
+                  <a:srgbClr val="B7AE9E"/>
+                </a:solidFill>
+                <a:latin typeface="Calibri" pitchFamily="34" charset="0"/>
+                <a:ea typeface="Calibri" pitchFamily="34" charset="-122"/>
+                <a:cs typeface="Calibri" pitchFamily="34" charset="-120"/>
+              </a:rPr>
+              <a:t>Targeting an end-of-March go-live   ·   tdwinkler@deeprootsbible.com</a:t>
+            </a:r>
+            <a:endParaRPr lang="en-US" sz="1100" dirty="0"/>
+          </a:p>
+        </p:txBody>
+      </p:sp>
     </p:spTree>
   </p:cSld>
   <p:clrMapOvr>
@@ -20835,7 +21991,73 @@
       </p:sp>
       <p:sp>
         <p:nvSpPr>
-          <p:cNvPr id="3" name="Text 1"/>
+          <p:cNvPr id="3" name="Shape 1"/>
+          <p:cNvSpPr/>
+          <p:nvPr/>
+        </p:nvSpPr>
+        <p:spPr>
+          <a:xfrm>
+            <a:off x="10314432" y="731520"/>
+            <a:ext cx="1051560" cy="310896"/>
+          </a:xfrm>
+          <a:prstGeom prst="roundRect">
+            <a:avLst>
+              <a:gd name="adj" fmla="val 50000"/>
+            </a:avLst>
+          </a:prstGeom>
+          <a:solidFill>
+            <a:srgbClr val="F3E7C8"/>
+          </a:solidFill>
+          <a:ln w="9525">
+            <a:solidFill>
+              <a:srgbClr val="9C7C2E"/>
+            </a:solidFill>
+            <a:prstDash val="solid"/>
+          </a:ln>
+        </p:spPr>
+      </p:sp>
+      <p:sp>
+        <p:nvSpPr>
+          <p:cNvPr id="4" name="Text 2"/>
+          <p:cNvSpPr txBox="1"/>
+          <p:nvPr/>
+        </p:nvSpPr>
+        <p:spPr>
+          <a:xfrm>
+            <a:off x="10314432" y="722376"/>
+            <a:ext cx="1051560" cy="320040"/>
+          </a:xfrm>
+          <a:prstGeom prst="rect">
+            <a:avLst/>
+          </a:prstGeom>
+          <a:noFill/>
+          <a:ln/>
+        </p:spPr>
+        <p:txBody>
+          <a:bodyPr wrap="square" lIns="0" tIns="0" rIns="0" bIns="0" rtlCol="0" anchor="ctr"/>
+          <a:lstStyle/>
+          <a:p>
+            <a:pPr algn="ctr" indent="0" marL="0">
+              <a:buNone/>
+            </a:pPr>
+            <a:r>
+              <a:rPr lang="en-US" sz="850" b="1" spc="100" kern="0" dirty="0">
+                <a:solidFill>
+                  <a:srgbClr val="7A5A12"/>
+                </a:solidFill>
+                <a:latin typeface="Calibri" pitchFamily="34" charset="0"/>
+                <a:ea typeface="Calibri" pitchFamily="34" charset="-122"/>
+                <a:cs typeface="Calibri" pitchFamily="34" charset="-120"/>
+              </a:rPr>
+              <a:t>PHASE 1</a:t>
+            </a:r>
+            <a:endParaRPr lang="en-US" sz="850" dirty="0"/>
+          </a:p>
+        </p:txBody>
+      </p:sp>
+      <p:sp>
+        <p:nvSpPr>
+          <p:cNvPr id="5" name="Text 3"/>
           <p:cNvSpPr txBox="1"/>
           <p:nvPr/>
         </p:nvSpPr>
@@ -20877,7 +22099,7 @@
       </p:sp>
       <p:sp>
         <p:nvSpPr>
-          <p:cNvPr id="4" name="Text 2"/>
+          <p:cNvPr id="6" name="Text 4"/>
           <p:cNvSpPr txBox="1"/>
           <p:nvPr/>
         </p:nvSpPr>
@@ -20919,7 +22141,7 @@
       </p:sp>
       <p:sp>
         <p:nvSpPr>
-          <p:cNvPr id="5" name="Text 3"/>
+          <p:cNvPr id="7" name="Text 5"/>
           <p:cNvSpPr txBox="1"/>
           <p:nvPr/>
         </p:nvSpPr>
@@ -21004,7 +22226,7 @@
       </p:sp>
       <p:sp>
         <p:nvSpPr>
-          <p:cNvPr id="6" name="Shape 4"/>
+          <p:cNvPr id="8" name="Shape 6"/>
           <p:cNvSpPr/>
           <p:nvPr/>
         </p:nvSpPr>
@@ -21038,7 +22260,7 @@
       </p:sp>
       <p:pic>
         <p:nvPicPr>
-          <p:cNvPr id="7" name="Image 0" descr="/private/tmp/claude-502/-Users-DRBTroy-Documents-Projects-DeepRoots/3b403855-4530-4100-a3e2-ac51fe60ce6e/scratchpad/screens/marketing-home.jpg">    </p:cNvPr>
+          <p:cNvPr id="9" name="Image 0" descr="/private/tmp/claude-502/-Users-DRBTroy-Documents-Projects-DeepRoots/3b403855-4530-4100-a3e2-ac51fe60ce6e/scratchpad/screens/marketing-home.jpg">    </p:cNvPr>
           <p:cNvPicPr>
             <a:picLocks noChangeAspect="1"/>
           </p:cNvPicPr>
@@ -21133,7 +22355,73 @@
       </p:sp>
       <p:sp>
         <p:nvSpPr>
-          <p:cNvPr id="3" name="Text 1"/>
+          <p:cNvPr id="3" name="Shape 1"/>
+          <p:cNvSpPr/>
+          <p:nvPr/>
+        </p:nvSpPr>
+        <p:spPr>
+          <a:xfrm>
+            <a:off x="10314432" y="731520"/>
+            <a:ext cx="1051560" cy="310896"/>
+          </a:xfrm>
+          <a:prstGeom prst="roundRect">
+            <a:avLst>
+              <a:gd name="adj" fmla="val 50000"/>
+            </a:avLst>
+          </a:prstGeom>
+          <a:solidFill>
+            <a:srgbClr val="F3E7C8"/>
+          </a:solidFill>
+          <a:ln w="9525">
+            <a:solidFill>
+              <a:srgbClr val="9C7C2E"/>
+            </a:solidFill>
+            <a:prstDash val="solid"/>
+          </a:ln>
+        </p:spPr>
+      </p:sp>
+      <p:sp>
+        <p:nvSpPr>
+          <p:cNvPr id="4" name="Text 2"/>
+          <p:cNvSpPr txBox="1"/>
+          <p:nvPr/>
+        </p:nvSpPr>
+        <p:spPr>
+          <a:xfrm>
+            <a:off x="10314432" y="722376"/>
+            <a:ext cx="1051560" cy="320040"/>
+          </a:xfrm>
+          <a:prstGeom prst="rect">
+            <a:avLst/>
+          </a:prstGeom>
+          <a:noFill/>
+          <a:ln/>
+        </p:spPr>
+        <p:txBody>
+          <a:bodyPr wrap="square" lIns="0" tIns="0" rIns="0" bIns="0" rtlCol="0" anchor="ctr"/>
+          <a:lstStyle/>
+          <a:p>
+            <a:pPr algn="ctr" indent="0" marL="0">
+              <a:buNone/>
+            </a:pPr>
+            <a:r>
+              <a:rPr lang="en-US" sz="850" b="1" spc="100" kern="0" dirty="0">
+                <a:solidFill>
+                  <a:srgbClr val="7A5A12"/>
+                </a:solidFill>
+                <a:latin typeface="Calibri" pitchFamily="34" charset="0"/>
+                <a:ea typeface="Calibri" pitchFamily="34" charset="-122"/>
+                <a:cs typeface="Calibri" pitchFamily="34" charset="-120"/>
+              </a:rPr>
+              <a:t>PHASE 2</a:t>
+            </a:r>
+            <a:endParaRPr lang="en-US" sz="850" dirty="0"/>
+          </a:p>
+        </p:txBody>
+      </p:sp>
+      <p:sp>
+        <p:nvSpPr>
+          <p:cNvPr id="5" name="Text 3"/>
           <p:cNvSpPr txBox="1"/>
           <p:nvPr/>
         </p:nvSpPr>
@@ -21175,7 +22463,7 @@
       </p:sp>
       <p:sp>
         <p:nvSpPr>
-          <p:cNvPr id="4" name="Text 2"/>
+          <p:cNvPr id="6" name="Text 4"/>
           <p:cNvSpPr txBox="1"/>
           <p:nvPr/>
         </p:nvSpPr>
@@ -21217,7 +22505,7 @@
       </p:sp>
       <p:sp>
         <p:nvSpPr>
-          <p:cNvPr id="5" name="Shape 3"/>
+          <p:cNvPr id="7" name="Shape 5"/>
           <p:cNvSpPr/>
           <p:nvPr/>
         </p:nvSpPr>
@@ -21244,7 +22532,7 @@
       </p:sp>
       <p:sp>
         <p:nvSpPr>
-          <p:cNvPr id="6" name="Text 4"/>
+          <p:cNvPr id="8" name="Text 6"/>
           <p:cNvSpPr txBox="1"/>
           <p:nvPr/>
         </p:nvSpPr>
@@ -21283,7 +22571,7 @@
       </p:sp>
       <p:sp>
         <p:nvSpPr>
-          <p:cNvPr id="7" name="Shape 5"/>
+          <p:cNvPr id="9" name="Shape 7"/>
           <p:cNvSpPr/>
           <p:nvPr/>
         </p:nvSpPr>
@@ -21310,7 +22598,7 @@
       </p:sp>
       <p:sp>
         <p:nvSpPr>
-          <p:cNvPr id="8" name="Shape 6"/>
+          <p:cNvPr id="10" name="Shape 8"/>
           <p:cNvSpPr/>
           <p:nvPr/>
         </p:nvSpPr>
@@ -21330,7 +22618,7 @@
       </p:sp>
       <p:sp>
         <p:nvSpPr>
-          <p:cNvPr id="9" name="Text 7"/>
+          <p:cNvPr id="11" name="Text 9"/>
           <p:cNvSpPr txBox="1"/>
           <p:nvPr/>
         </p:nvSpPr>
@@ -21369,7 +22657,7 @@
       </p:sp>
       <p:sp>
         <p:nvSpPr>
-          <p:cNvPr id="10" name="Shape 8"/>
+          <p:cNvPr id="12" name="Shape 10"/>
           <p:cNvSpPr/>
           <p:nvPr/>
         </p:nvSpPr>
@@ -21403,7 +22691,7 @@
       </p:sp>
       <p:sp>
         <p:nvSpPr>
-          <p:cNvPr id="11" name="Shape 9"/>
+          <p:cNvPr id="13" name="Shape 11"/>
           <p:cNvSpPr/>
           <p:nvPr/>
         </p:nvSpPr>
@@ -21425,7 +22713,7 @@
       </p:sp>
       <p:sp>
         <p:nvSpPr>
-          <p:cNvPr id="12" name="Shape 10"/>
+          <p:cNvPr id="14" name="Shape 12"/>
           <p:cNvSpPr/>
           <p:nvPr/>
         </p:nvSpPr>
@@ -21445,7 +22733,7 @@
       </p:sp>
       <p:sp>
         <p:nvSpPr>
-          <p:cNvPr id="13" name="Shape 11"/>
+          <p:cNvPr id="15" name="Shape 13"/>
           <p:cNvSpPr/>
           <p:nvPr/>
         </p:nvSpPr>
@@ -21465,7 +22753,7 @@
       </p:sp>
       <p:sp>
         <p:nvSpPr>
-          <p:cNvPr id="14" name="Shape 12"/>
+          <p:cNvPr id="16" name="Shape 14"/>
           <p:cNvSpPr/>
           <p:nvPr/>
         </p:nvSpPr>
@@ -21485,7 +22773,7 @@
       </p:sp>
       <p:sp>
         <p:nvSpPr>
-          <p:cNvPr id="15" name="Shape 13"/>
+          <p:cNvPr id="17" name="Shape 15"/>
           <p:cNvSpPr/>
           <p:nvPr/>
         </p:nvSpPr>
@@ -21505,7 +22793,7 @@
       </p:sp>
       <p:sp>
         <p:nvSpPr>
-          <p:cNvPr id="16" name="Text 14"/>
+          <p:cNvPr id="18" name="Text 16"/>
           <p:cNvSpPr txBox="1"/>
           <p:nvPr/>
         </p:nvSpPr>
@@ -21544,7 +22832,7 @@
       </p:sp>
       <p:sp>
         <p:nvSpPr>
-          <p:cNvPr id="17" name="Shape 15"/>
+          <p:cNvPr id="19" name="Shape 17"/>
           <p:cNvSpPr/>
           <p:nvPr/>
         </p:nvSpPr>
@@ -21567,7 +22855,7 @@
       </p:sp>
       <p:sp>
         <p:nvSpPr>
-          <p:cNvPr id="18" name="Text 16"/>
+          <p:cNvPr id="20" name="Text 18"/>
           <p:cNvSpPr txBox="1"/>
           <p:nvPr/>
         </p:nvSpPr>
@@ -21606,7 +22894,7 @@
       </p:sp>
       <p:sp>
         <p:nvSpPr>
-          <p:cNvPr id="19" name="Shape 17"/>
+          <p:cNvPr id="21" name="Shape 19"/>
           <p:cNvSpPr/>
           <p:nvPr/>
         </p:nvSpPr>
@@ -21633,7 +22921,7 @@
       </p:sp>
       <p:sp>
         <p:nvSpPr>
-          <p:cNvPr id="20" name="Shape 18"/>
+          <p:cNvPr id="22" name="Shape 20"/>
           <p:cNvSpPr/>
           <p:nvPr/>
         </p:nvSpPr>
@@ -21655,7 +22943,7 @@
       </p:sp>
       <p:sp>
         <p:nvSpPr>
-          <p:cNvPr id="21" name="Text 19"/>
+          <p:cNvPr id="23" name="Text 21"/>
           <p:cNvSpPr txBox="1"/>
           <p:nvPr/>
         </p:nvSpPr>
@@ -21694,7 +22982,7 @@
       </p:sp>
       <p:sp>
         <p:nvSpPr>
-          <p:cNvPr id="22" name="Shape 20"/>
+          <p:cNvPr id="24" name="Shape 22"/>
           <p:cNvSpPr/>
           <p:nvPr/>
         </p:nvSpPr>
@@ -21721,7 +23009,7 @@
       </p:sp>
       <p:sp>
         <p:nvSpPr>
-          <p:cNvPr id="23" name="Text 21"/>
+          <p:cNvPr id="25" name="Text 23"/>
           <p:cNvSpPr txBox="1"/>
           <p:nvPr/>
         </p:nvSpPr>
@@ -22034,7 +23322,73 @@
       </p:sp>
       <p:sp>
         <p:nvSpPr>
-          <p:cNvPr id="3" name="Text 1"/>
+          <p:cNvPr id="3" name="Shape 1"/>
+          <p:cNvSpPr/>
+          <p:nvPr/>
+        </p:nvSpPr>
+        <p:spPr>
+          <a:xfrm>
+            <a:off x="10314432" y="731520"/>
+            <a:ext cx="1051560" cy="310896"/>
+          </a:xfrm>
+          <a:prstGeom prst="roundRect">
+            <a:avLst>
+              <a:gd name="adj" fmla="val 50000"/>
+            </a:avLst>
+          </a:prstGeom>
+          <a:solidFill>
+            <a:srgbClr val="F3E7C8"/>
+          </a:solidFill>
+          <a:ln w="9525">
+            <a:solidFill>
+              <a:srgbClr val="9C7C2E"/>
+            </a:solidFill>
+            <a:prstDash val="solid"/>
+          </a:ln>
+        </p:spPr>
+      </p:sp>
+      <p:sp>
+        <p:nvSpPr>
+          <p:cNvPr id="4" name="Text 2"/>
+          <p:cNvSpPr txBox="1"/>
+          <p:nvPr/>
+        </p:nvSpPr>
+        <p:spPr>
+          <a:xfrm>
+            <a:off x="10314432" y="722376"/>
+            <a:ext cx="1051560" cy="320040"/>
+          </a:xfrm>
+          <a:prstGeom prst="rect">
+            <a:avLst/>
+          </a:prstGeom>
+          <a:noFill/>
+          <a:ln/>
+        </p:spPr>
+        <p:txBody>
+          <a:bodyPr wrap="square" lIns="0" tIns="0" rIns="0" bIns="0" rtlCol="0" anchor="ctr"/>
+          <a:lstStyle/>
+          <a:p>
+            <a:pPr algn="ctr" indent="0" marL="0">
+              <a:buNone/>
+            </a:pPr>
+            <a:r>
+              <a:rPr lang="en-US" sz="850" b="1" spc="100" kern="0" dirty="0">
+                <a:solidFill>
+                  <a:srgbClr val="7A5A12"/>
+                </a:solidFill>
+                <a:latin typeface="Calibri" pitchFamily="34" charset="0"/>
+                <a:ea typeface="Calibri" pitchFamily="34" charset="-122"/>
+                <a:cs typeface="Calibri" pitchFamily="34" charset="-120"/>
+              </a:rPr>
+              <a:t>PHASE 2</a:t>
+            </a:r>
+            <a:endParaRPr lang="en-US" sz="850" dirty="0"/>
+          </a:p>
+        </p:txBody>
+      </p:sp>
+      <p:sp>
+        <p:nvSpPr>
+          <p:cNvPr id="5" name="Text 3"/>
           <p:cNvSpPr txBox="1"/>
           <p:nvPr/>
         </p:nvSpPr>
@@ -22076,7 +23430,7 @@
       </p:sp>
       <p:sp>
         <p:nvSpPr>
-          <p:cNvPr id="4" name="Text 2"/>
+          <p:cNvPr id="6" name="Text 4"/>
           <p:cNvSpPr txBox="1"/>
           <p:nvPr/>
         </p:nvSpPr>
@@ -22118,7 +23472,7 @@
       </p:sp>
       <p:sp>
         <p:nvSpPr>
-          <p:cNvPr id="5" name="Shape 3"/>
+          <p:cNvPr id="7" name="Shape 5"/>
           <p:cNvSpPr/>
           <p:nvPr/>
         </p:nvSpPr>
@@ -22145,7 +23499,7 @@
       </p:sp>
       <p:sp>
         <p:nvSpPr>
-          <p:cNvPr id="6" name="Text 4"/>
+          <p:cNvPr id="8" name="Text 6"/>
           <p:cNvSpPr txBox="1"/>
           <p:nvPr/>
         </p:nvSpPr>
@@ -22184,7 +23538,7 @@
       </p:sp>
       <p:sp>
         <p:nvSpPr>
-          <p:cNvPr id="7" name="Shape 5"/>
+          <p:cNvPr id="9" name="Shape 7"/>
           <p:cNvSpPr/>
           <p:nvPr/>
         </p:nvSpPr>
@@ -22211,7 +23565,7 @@
       </p:sp>
       <p:sp>
         <p:nvSpPr>
-          <p:cNvPr id="8" name="Shape 6"/>
+          <p:cNvPr id="10" name="Shape 8"/>
           <p:cNvSpPr/>
           <p:nvPr/>
         </p:nvSpPr>
@@ -22231,7 +23585,7 @@
       </p:sp>
       <p:sp>
         <p:nvSpPr>
-          <p:cNvPr id="9" name="Text 7"/>
+          <p:cNvPr id="11" name="Text 9"/>
           <p:cNvSpPr txBox="1"/>
           <p:nvPr/>
         </p:nvSpPr>
@@ -22270,7 +23624,7 @@
       </p:sp>
       <p:sp>
         <p:nvSpPr>
-          <p:cNvPr id="10" name="Shape 8"/>
+          <p:cNvPr id="12" name="Shape 10"/>
           <p:cNvSpPr/>
           <p:nvPr/>
         </p:nvSpPr>
@@ -22304,7 +23658,7 @@
       </p:sp>
       <p:pic>
         <p:nvPicPr>
-          <p:cNvPr id="11" name="Image 0" descr="/private/tmp/claude-502/-Users-DRBTroy-Documents-Projects-DeepRoots/3b403855-4530-4100-a3e2-ac51fe60ce6e/scratchpad/screens/main-dash.png">    </p:cNvPr>
+          <p:cNvPr id="13" name="Image 0" descr="/private/tmp/claude-502/-Users-DRBTroy-Documents-Projects-DeepRoots/3b403855-4530-4100-a3e2-ac51fe60ce6e/scratchpad/screens/main-dash.png">    </p:cNvPr>
           <p:cNvPicPr>
             <a:picLocks noChangeAspect="1"/>
           </p:cNvPicPr>
@@ -22399,7 +23753,73 @@
       </p:sp>
       <p:sp>
         <p:nvSpPr>
-          <p:cNvPr id="3" name="Text 1"/>
+          <p:cNvPr id="3" name="Shape 1"/>
+          <p:cNvSpPr/>
+          <p:nvPr/>
+        </p:nvSpPr>
+        <p:spPr>
+          <a:xfrm>
+            <a:off x="10314432" y="731520"/>
+            <a:ext cx="1051560" cy="310896"/>
+          </a:xfrm>
+          <a:prstGeom prst="roundRect">
+            <a:avLst>
+              <a:gd name="adj" fmla="val 50000"/>
+            </a:avLst>
+          </a:prstGeom>
+          <a:solidFill>
+            <a:srgbClr val="F3E7C8"/>
+          </a:solidFill>
+          <a:ln w="9525">
+            <a:solidFill>
+              <a:srgbClr val="9C7C2E"/>
+            </a:solidFill>
+            <a:prstDash val="solid"/>
+          </a:ln>
+        </p:spPr>
+      </p:sp>
+      <p:sp>
+        <p:nvSpPr>
+          <p:cNvPr id="4" name="Text 2"/>
+          <p:cNvSpPr txBox="1"/>
+          <p:nvPr/>
+        </p:nvSpPr>
+        <p:spPr>
+          <a:xfrm>
+            <a:off x="10314432" y="722376"/>
+            <a:ext cx="1051560" cy="320040"/>
+          </a:xfrm>
+          <a:prstGeom prst="rect">
+            <a:avLst/>
+          </a:prstGeom>
+          <a:noFill/>
+          <a:ln/>
+        </p:spPr>
+        <p:txBody>
+          <a:bodyPr wrap="square" lIns="0" tIns="0" rIns="0" bIns="0" rtlCol="0" anchor="ctr"/>
+          <a:lstStyle/>
+          <a:p>
+            <a:pPr algn="ctr" indent="0" marL="0">
+              <a:buNone/>
+            </a:pPr>
+            <a:r>
+              <a:rPr lang="en-US" sz="850" b="1" spc="100" kern="0" dirty="0">
+                <a:solidFill>
+                  <a:srgbClr val="7A5A12"/>
+                </a:solidFill>
+                <a:latin typeface="Calibri" pitchFamily="34" charset="0"/>
+                <a:ea typeface="Calibri" pitchFamily="34" charset="-122"/>
+                <a:cs typeface="Calibri" pitchFamily="34" charset="-120"/>
+              </a:rPr>
+              <a:t>PHASE 2</a:t>
+            </a:r>
+            <a:endParaRPr lang="en-US" sz="850" dirty="0"/>
+          </a:p>
+        </p:txBody>
+      </p:sp>
+      <p:sp>
+        <p:nvSpPr>
+          <p:cNvPr id="5" name="Text 3"/>
           <p:cNvSpPr txBox="1"/>
           <p:nvPr/>
         </p:nvSpPr>
@@ -22441,7 +23861,7 @@
       </p:sp>
       <p:sp>
         <p:nvSpPr>
-          <p:cNvPr id="4" name="Text 2"/>
+          <p:cNvPr id="6" name="Text 4"/>
           <p:cNvSpPr txBox="1"/>
           <p:nvPr/>
         </p:nvSpPr>
@@ -22483,7 +23903,7 @@
       </p:sp>
       <p:sp>
         <p:nvSpPr>
-          <p:cNvPr id="5" name="Text 3"/>
+          <p:cNvPr id="7" name="Text 5"/>
           <p:cNvSpPr txBox="1"/>
           <p:nvPr/>
         </p:nvSpPr>
@@ -22547,7 +23967,7 @@
       </p:sp>
       <p:sp>
         <p:nvSpPr>
-          <p:cNvPr id="6" name="Shape 4"/>
+          <p:cNvPr id="8" name="Shape 6"/>
           <p:cNvSpPr/>
           <p:nvPr/>
         </p:nvSpPr>
@@ -22574,7 +23994,7 @@
       </p:sp>
       <p:sp>
         <p:nvSpPr>
-          <p:cNvPr id="7" name="Text 5"/>
+          <p:cNvPr id="9" name="Text 7"/>
           <p:cNvSpPr txBox="1"/>
           <p:nvPr/>
         </p:nvSpPr>
@@ -22613,7 +24033,7 @@
       </p:sp>
       <p:sp>
         <p:nvSpPr>
-          <p:cNvPr id="8" name="Shape 6"/>
+          <p:cNvPr id="10" name="Shape 8"/>
           <p:cNvSpPr/>
           <p:nvPr/>
         </p:nvSpPr>
@@ -22647,7 +24067,7 @@
       </p:sp>
       <p:pic>
         <p:nvPicPr>
-          <p:cNvPr id="9" name="Image 0" descr="/private/tmp/claude-502/-Users-DRBTroy-Documents-Projects-DeepRoots/3b403855-4530-4100-a3e2-ac51fe60ce6e/scratchpad/screens/sales.png">    </p:cNvPr>
+          <p:cNvPr id="11" name="Image 0" descr="/private/tmp/claude-502/-Users-DRBTroy-Documents-Projects-DeepRoots/3b403855-4530-4100-a3e2-ac51fe60ce6e/scratchpad/screens/sales.png">    </p:cNvPr>
           <p:cNvPicPr>
             <a:picLocks noChangeAspect="1"/>
           </p:cNvPicPr>

--- a/Rooted_for_the_Future.pptx
+++ b/Rooted_for_the_Future.pptx
@@ -23895,7 +23895,7 @@
                 <a:ea typeface="Calibri" pitchFamily="34" charset="-122"/>
                 <a:cs typeface="Calibri" pitchFamily="34" charset="-120"/>
               </a:rPr>
-              <a:t>Every team would get the same operating view, metrics, signals, and tasks, in one shared look, never restyled per department.</a:t>
+              <a:t>Every team would get the same operating view, metrics, signals, and tasks, in one shared look, not reinvented for each team.</a:t>
             </a:r>
             <a:endParaRPr lang="en-US" sz="1500" dirty="0"/>
           </a:p>

--- a/Rooted_for_the_Future.pptx
+++ b/Rooted_for_the_Future.pptx
@@ -34,10 +34,9 @@
     <p:sldId id="282" r:id="rId28"/>
     <p:sldId id="283" r:id="rId29"/>
     <p:sldId id="284" r:id="rId30"/>
-    <p:sldId id="285" r:id="rId31"/>
   </p:sldIdLst>
   <p:notesMasterIdLst>
-    <p:notesMasterId r:id="rId32"/>
+    <p:notesMasterId r:id="rId31"/>
   </p:notesMasterIdLst>
   <p:sldSz cx="12192000" cy="6858000"/>
   <p:notesSz cx="6858000" cy="12192000"/>
@@ -2379,7 +2378,7 @@
           <a:p>
             <a:r>
               <a:rPr lang="en-US" dirty="0"/>
-              <a:t/>
+              <a:t>Close: the proposed system, three surfaces over one data backbone. This is what we would build.</a:t>
             </a:r>
             <a:endParaRPr lang="en-US" dirty="0"/>
           </a:p>
@@ -2491,94 +2490,6 @@
             <a:fld id="{F7021451-1387-4CA6-816F-3879F97B5CBC}" type="slidenum">
               <a:rPr lang="en-US"/>
               <a:t>3</a:t>
-            </a:fld>
-            <a:endParaRPr lang="en-US"/>
-          </a:p>
-        </p:txBody>
-      </p:sp>
-    </p:spTree>
-    <p:extLst>
-      <p:ext uri="{BB962C8B-B14F-4D97-AF65-F5344CB8AC3E}">
-        <p14:creationId xmlns:p14="http://schemas.microsoft.com/office/powerpoint/2010/main" val="1024086991"/>
-      </p:ext>
-    </p:extLst>
-  </p:cSld>
-  <p:clrMapOvr>
-    <a:masterClrMapping/>
-  </p:clrMapOvr>
-</p:notes>
-</file>
-
-<file path=ppt/notesSlides/notesSlide30.xml><?xml version="1.0" encoding="utf-8"?>
-<p:notes xmlns:a="http://schemas.openxmlformats.org/drawingml/2006/main" xmlns:r="http://schemas.openxmlformats.org/officeDocument/2006/relationships" xmlns:p="http://schemas.openxmlformats.org/presentationml/2006/main">
-  <p:cSld>
-    <p:spTree>
-      <p:nvGrpSpPr>
-        <p:cNvPr id="1" name=""/>
-        <p:cNvGrpSpPr/>
-        <p:nvPr/>
-      </p:nvGrpSpPr>
-      <p:grpSpPr>
-        <a:xfrm>
-          <a:off x="0" y="0"/>
-          <a:ext cx="0" cy="0"/>
-          <a:chOff x="0" y="0"/>
-          <a:chExt cx="0" cy="0"/>
-        </a:xfrm>
-      </p:grpSpPr>
-      <p:sp>
-        <p:nvSpPr>
-          <p:cNvPr id="2" name="Slide Image Placeholder 1"/>
-          <p:cNvSpPr>
-            <a:spLocks noGrp="1" noRot="1" noChangeAspect="1"/>
-          </p:cNvSpPr>
-          <p:nvPr>
-            <p:ph type="sldImg"/>
-          </p:nvPr>
-        </p:nvSpPr>
-        <p:spPr/>
-      </p:sp>
-      <p:sp>
-        <p:nvSpPr>
-          <p:cNvPr id="3" name="Notes Placeholder 2"/>
-          <p:cNvSpPr>
-            <a:spLocks noGrp="1"/>
-          </p:cNvSpPr>
-          <p:nvPr>
-            <p:ph type="body" idx="1"/>
-          </p:nvPr>
-        </p:nvSpPr>
-        <p:spPr/>
-        <p:txBody>
-          <a:bodyPr/>
-          <a:lstStyle/>
-          <a:p>
-            <a:r>
-              <a:rPr lang="en-US" dirty="0"/>
-              <a:t>Close: the proposed system, three surfaces over one data backbone. This is what we would build.</a:t>
-            </a:r>
-            <a:endParaRPr lang="en-US" dirty="0"/>
-          </a:p>
-        </p:txBody>
-      </p:sp>
-      <p:sp>
-        <p:nvSpPr>
-          <p:cNvPr id="4" name="Slide Number Placeholder 3"/>
-          <p:cNvSpPr>
-            <a:spLocks noGrp="1"/>
-          </p:cNvSpPr>
-          <p:nvPr>
-            <p:ph type="sldNum" sz="quarter" idx="10"/>
-          </p:nvPr>
-        </p:nvSpPr>
-        <p:spPr/>
-        <p:txBody>
-          <a:bodyPr/>
-          <a:lstStyle/>
-          <a:p>
-            <a:fld id="{F7021451-1387-4CA6-816F-3879F97B5CBC}" type="slidenum">
-              <a:rPr lang="en-US"/>
-              <a:t>30</a:t>
             </a:fld>
             <a:endParaRPr lang="en-US"/>
           </a:p>
@@ -12343,6 +12254,209 @@
     <p:bg>
       <p:bgPr>
         <a:solidFill>
+          <a:srgbClr val="211B12"/>
+        </a:solidFill>
+      </p:bgPr>
+    </p:bg>
+    <p:spTree>
+      <p:nvGrpSpPr>
+        <p:cNvPr id="1" name=""/>
+        <p:cNvGrpSpPr/>
+        <p:nvPr/>
+      </p:nvGrpSpPr>
+      <p:grpSpPr>
+        <a:xfrm>
+          <a:off x="0" y="0"/>
+          <a:ext cx="0" cy="0"/>
+          <a:chOff x="0" y="0"/>
+          <a:chExt cx="0" cy="0"/>
+        </a:xfrm>
+      </p:grpSpPr>
+      <p:sp>
+        <p:nvSpPr>
+          <p:cNvPr id="2" name="Shape 0"/>
+          <p:cNvSpPr/>
+          <p:nvPr/>
+        </p:nvSpPr>
+        <p:spPr>
+          <a:xfrm>
+            <a:off x="9079992" y="-1463040"/>
+            <a:ext cx="4206240" cy="4206240"/>
+          </a:xfrm>
+          <a:prstGeom prst="ellipse">
+            <a:avLst/>
+          </a:prstGeom>
+          <a:ln w="15875">
+            <a:solidFill>
+              <a:srgbClr val="9C7C2E">
+                <a:alpha val="45000"/>
+              </a:srgbClr>
+            </a:solidFill>
+            <a:prstDash val="solid"/>
+          </a:ln>
+        </p:spPr>
+      </p:sp>
+      <p:sp>
+        <p:nvSpPr>
+          <p:cNvPr id="3" name="Shape 1"/>
+          <p:cNvSpPr/>
+          <p:nvPr/>
+        </p:nvSpPr>
+        <p:spPr>
+          <a:xfrm>
+            <a:off x="10085832" y="4846320"/>
+            <a:ext cx="3108960" cy="3108960"/>
+          </a:xfrm>
+          <a:prstGeom prst="ellipse">
+            <a:avLst/>
+          </a:prstGeom>
+          <a:ln w="12700">
+            <a:solidFill>
+              <a:srgbClr val="9C7C2E">
+                <a:alpha val="30000"/>
+              </a:srgbClr>
+            </a:solidFill>
+            <a:prstDash val="solid"/>
+          </a:ln>
+        </p:spPr>
+      </p:sp>
+      <p:sp>
+        <p:nvSpPr>
+          <p:cNvPr id="4" name="Text 2"/>
+          <p:cNvSpPr txBox="1"/>
+          <p:nvPr/>
+        </p:nvSpPr>
+        <p:spPr>
+          <a:xfrm>
+            <a:off x="822960" y="2194560"/>
+            <a:ext cx="7315200" cy="274320"/>
+          </a:xfrm>
+          <a:prstGeom prst="rect">
+            <a:avLst/>
+          </a:prstGeom>
+          <a:noFill/>
+          <a:ln/>
+        </p:spPr>
+        <p:txBody>
+          <a:bodyPr wrap="square" lIns="0" tIns="0" rIns="0" bIns="0" rtlCol="0" anchor="ctr"/>
+          <a:lstStyle/>
+          <a:p>
+            <a:pPr indent="0" marL="0">
+              <a:buNone/>
+            </a:pPr>
+            <a:r>
+              <a:rPr lang="en-US" sz="1100" b="1" spc="300" kern="0" dirty="0">
+                <a:solidFill>
+                  <a:srgbClr val="C4A24E"/>
+                </a:solidFill>
+                <a:latin typeface="Calibri" pitchFamily="34" charset="0"/>
+                <a:ea typeface="Calibri" pitchFamily="34" charset="-122"/>
+                <a:cs typeface="Calibri" pitchFamily="34" charset="-120"/>
+              </a:rPr>
+              <a:t>PART THREE</a:t>
+            </a:r>
+            <a:endParaRPr lang="en-US" sz="1100" dirty="0"/>
+          </a:p>
+        </p:txBody>
+      </p:sp>
+      <p:sp>
+        <p:nvSpPr>
+          <p:cNvPr id="5" name="Text 3"/>
+          <p:cNvSpPr txBox="1"/>
+          <p:nvPr/>
+        </p:nvSpPr>
+        <p:spPr>
+          <a:xfrm>
+            <a:off x="822960" y="2514600"/>
+            <a:ext cx="9601200" cy="1828800"/>
+          </a:xfrm>
+          <a:prstGeom prst="rect">
+            <a:avLst/>
+          </a:prstGeom>
+          <a:noFill/>
+          <a:ln/>
+        </p:spPr>
+        <p:txBody>
+          <a:bodyPr wrap="square" lIns="0" tIns="0" rIns="0" bIns="0" rtlCol="0" anchor="ctr"/>
+          <a:lstStyle/>
+          <a:p>
+            <a:pPr indent="0" marL="0">
+              <a:lnSpc>
+                <a:spcPct val="98000"/>
+              </a:lnSpc>
+              <a:buNone/>
+            </a:pPr>
+            <a:r>
+              <a:rPr lang="en-US" sz="4000" b="1" dirty="0">
+                <a:solidFill>
+                  <a:srgbClr val="F3ECDD"/>
+                </a:solidFill>
+                <a:latin typeface="Georgia" pitchFamily="34" charset="0"/>
+                <a:ea typeface="Georgia" pitchFamily="34" charset="-122"/>
+                <a:cs typeface="Georgia" pitchFamily="34" charset="-120"/>
+              </a:rPr>
+              <a:t>The optimization track</a:t>
+            </a:r>
+            <a:endParaRPr lang="en-US" sz="4000" dirty="0"/>
+          </a:p>
+        </p:txBody>
+      </p:sp>
+      <p:sp>
+        <p:nvSpPr>
+          <p:cNvPr id="6" name="Text 4"/>
+          <p:cNvSpPr txBox="1"/>
+          <p:nvPr/>
+        </p:nvSpPr>
+        <p:spPr>
+          <a:xfrm>
+            <a:off x="822960" y="4114800"/>
+            <a:ext cx="8686800" cy="1280160"/>
+          </a:xfrm>
+          <a:prstGeom prst="rect">
+            <a:avLst/>
+          </a:prstGeom>
+          <a:noFill/>
+          <a:ln/>
+        </p:spPr>
+        <p:txBody>
+          <a:bodyPr wrap="square" lIns="0" tIns="0" rIns="0" bIns="0" rtlCol="0" anchor="ctr"/>
+          <a:lstStyle/>
+          <a:p>
+            <a:pPr indent="0" marL="0">
+              <a:lnSpc>
+                <a:spcPct val="120000"/>
+              </a:lnSpc>
+              <a:buNone/>
+            </a:pPr>
+            <a:r>
+              <a:rPr lang="en-US" sz="1500" dirty="0">
+                <a:solidFill>
+                  <a:srgbClr val="B7AE9E"/>
+                </a:solidFill>
+                <a:latin typeface="Calibri" pitchFamily="34" charset="0"/>
+                <a:ea typeface="Calibri" pitchFamily="34" charset="-122"/>
+                <a:cs typeface="Calibri" pitchFamily="34" charset="-120"/>
+              </a:rPr>
+              <a:t>Behind the scenes: bringing in the real data, and moving DeepRoots off outdated systems.</a:t>
+            </a:r>
+            <a:endParaRPr lang="en-US" sz="1500" dirty="0"/>
+          </a:p>
+        </p:txBody>
+      </p:sp>
+    </p:spTree>
+  </p:cSld>
+  <p:clrMapOvr>
+    <a:masterClrMapping/>
+  </p:clrMapOvr>
+</p:sld>
+</file>
+
+<file path=ppt/slides/slide23.xml><?xml version="1.0" encoding="utf-8"?>
+<p:sld xmlns:a="http://schemas.openxmlformats.org/drawingml/2006/main" xmlns:r="http://schemas.openxmlformats.org/officeDocument/2006/relationships" xmlns:p="http://schemas.openxmlformats.org/presentationml/2006/main">
+  <p:cSld name="Slide 23">
+    <p:bg>
+      <p:bgPr>
+        <a:solidFill>
           <a:srgbClr val="FBFAF6"/>
         </a:solidFill>
       </p:bgPr>
@@ -12394,7 +12508,7 @@
                 <a:ea typeface="Calibri" pitchFamily="34" charset="-122"/>
                 <a:cs typeface="Calibri" pitchFamily="34" charset="-120"/>
               </a:rPr>
-              <a:t>SCHOOL PORTAL · HELPER</a:t>
+              <a:t>BEHIND THE SCENES · THE DATA</a:t>
             </a:r>
             <a:endParaRPr lang="en-US" sz="1100" dirty="0"/>
           </a:p>
@@ -12460,7 +12574,7 @@
                 <a:ea typeface="Calibri" pitchFamily="34" charset="-122"/>
                 <a:cs typeface="Calibri" pitchFamily="34" charset="-120"/>
               </a:rPr>
-              <a:t>PHASE 2</a:t>
+              <a:t>PHASE 3</a:t>
             </a:r>
             <a:endParaRPr lang="en-US" sz="850" dirty="0"/>
           </a:p>
@@ -12494,7 +12608,7 @@
               <a:buNone/>
             </a:pPr>
             <a:r>
-              <a:rPr lang="en-US" sz="2600" b="1" dirty="0">
+              <a:rPr lang="en-US" sz="3200" b="1" dirty="0">
                 <a:solidFill>
                   <a:srgbClr val="1D1A15"/>
                 </a:solidFill>
@@ -12502,9 +12616,9 @@
                 <a:ea typeface="Georgia" pitchFamily="34" charset="-122"/>
                 <a:cs typeface="Georgia" pitchFamily="34" charset="-120"/>
               </a:rPr>
-              <a:t>The School Walk-through Helper</a:t>
-            </a:r>
-            <a:endParaRPr lang="en-US" sz="2600" dirty="0"/>
+              <a:t>All your Salesforce data in one place</a:t>
+            </a:r>
+            <a:endParaRPr lang="en-US" sz="3200" dirty="0"/>
           </a:p>
         </p:txBody>
       </p:sp>
@@ -12544,7 +12658,7 @@
                 <a:ea typeface="Calibri" pitchFamily="34" charset="-122"/>
                 <a:cs typeface="Calibri" pitchFamily="34" charset="-120"/>
               </a:rPr>
-              <a:t>A built-in helper that guides teachers, admins, and heads of school through setup, day-to-day tasks, and finding their way around the curriculum. Ask a question, get a step-by-step answer.</a:t>
+              <a:t>A complete, always-updating copy of your Salesforce records, pulled in safely and kept current so the dashboards run on real numbers.</a:t>
             </a:r>
             <a:endParaRPr lang="en-US" sz="1500" dirty="0"/>
           </a:p>
@@ -12552,120 +12666,14 @@
       </p:sp>
       <p:sp>
         <p:nvSpPr>
-          <p:cNvPr id="7" name="Text 5"/>
-          <p:cNvSpPr txBox="1"/>
+          <p:cNvPr id="7" name="Shape 5"/>
+          <p:cNvSpPr/>
           <p:nvPr/>
         </p:nvSpPr>
         <p:spPr>
           <a:xfrm>
             <a:off x="822960" y="3657600"/>
-            <a:ext cx="5760720" cy="1426464"/>
-          </a:xfrm>
-          <a:prstGeom prst="rect">
-            <a:avLst/>
-          </a:prstGeom>
-          <a:noFill/>
-          <a:ln/>
-        </p:spPr>
-        <p:txBody>
-          <a:bodyPr wrap="square" lIns="0" tIns="0" rIns="0" bIns="0" rtlCol="0" anchor="t"/>
-          <a:lstStyle/>
-          <a:p>
-            <a:pPr marL="177800" indent="-177800">
-              <a:spcAft>
-                <a:spcPts val="800"/>
-              </a:spcAft>
-              <a:buSzPct val="100000"/>
-              <a:buChar char="•"/>
-            </a:pPr>
-            <a:r>
-              <a:rPr lang="en-US" sz="1350" dirty="0">
-                <a:solidFill>
-                  <a:srgbClr val="1D1A15"/>
-                </a:solidFill>
-                <a:latin typeface="Calibri" pitchFamily="34" charset="0"/>
-                <a:ea typeface="Calibri" pitchFamily="34" charset="-122"/>
-                <a:cs typeface="Calibri" pitchFamily="34" charset="-120"/>
-              </a:rPr>
-              <a:t>How do I fill out our roster?</a:t>
-            </a:r>
-            <a:endParaRPr lang="en-US" sz="1350" dirty="0"/>
-          </a:p>
-          <a:p>
-            <a:pPr marL="177800" indent="-177800">
-              <a:spcAft>
-                <a:spcPts val="800"/>
-              </a:spcAft>
-              <a:buSzPct val="100000"/>
-              <a:buChar char="•"/>
-            </a:pPr>
-            <a:r>
-              <a:rPr lang="en-US" sz="1350" dirty="0">
-                <a:solidFill>
-                  <a:srgbClr val="1D1A15"/>
-                </a:solidFill>
-                <a:latin typeface="Calibri" pitchFamily="34" charset="0"/>
-                <a:ea typeface="Calibri" pitchFamily="34" charset="-122"/>
-                <a:cs typeface="Calibri" pitchFamily="34" charset="-120"/>
-              </a:rPr>
-              <a:t>How do I reset a student’s password?</a:t>
-            </a:r>
-            <a:endParaRPr lang="en-US" sz="1350" dirty="0"/>
-          </a:p>
-          <a:p>
-            <a:pPr marL="177800" indent="-177800">
-              <a:spcAft>
-                <a:spcPts val="800"/>
-              </a:spcAft>
-              <a:buSzPct val="100000"/>
-              <a:buChar char="•"/>
-            </a:pPr>
-            <a:r>
-              <a:rPr lang="en-US" sz="1350" dirty="0">
-                <a:solidFill>
-                  <a:srgbClr val="1D1A15"/>
-                </a:solidFill>
-                <a:latin typeface="Calibri" pitchFamily="34" charset="0"/>
-                <a:ea typeface="Calibri" pitchFamily="34" charset="-122"/>
-                <a:cs typeface="Calibri" pitchFamily="34" charset="-120"/>
-              </a:rPr>
-              <a:t>Can my students’ parents get a login?</a:t>
-            </a:r>
-            <a:endParaRPr lang="en-US" sz="1350" dirty="0"/>
-          </a:p>
-          <a:p>
-            <a:pPr marL="177800" indent="-177800">
-              <a:spcAft>
-                <a:spcPts val="800"/>
-              </a:spcAft>
-              <a:buSzPct val="100000"/>
-              <a:buChar char="•"/>
-            </a:pPr>
-            <a:r>
-              <a:rPr lang="en-US" sz="1350" dirty="0">
-                <a:solidFill>
-                  <a:srgbClr val="1D1A15"/>
-                </a:solidFill>
-                <a:latin typeface="Calibri" pitchFamily="34" charset="0"/>
-                <a:ea typeface="Calibri" pitchFamily="34" charset="-122"/>
-                <a:cs typeface="Calibri" pitchFamily="34" charset="-120"/>
-              </a:rPr>
-              <a:t>Where do I find this in the curriculum?</a:t>
-            </a:r>
-            <a:endParaRPr lang="en-US" sz="1350" dirty="0"/>
-          </a:p>
-        </p:txBody>
-      </p:sp>
-      <p:sp>
-        <p:nvSpPr>
-          <p:cNvPr id="8" name="Shape 6"/>
-          <p:cNvSpPr/>
-          <p:nvPr/>
-        </p:nvSpPr>
-        <p:spPr>
-          <a:xfrm>
-            <a:off x="822960" y="5266944"/>
-            <a:ext cx="2933395" cy="384048"/>
+            <a:ext cx="3008376" cy="384048"/>
           </a:xfrm>
           <a:prstGeom prst="roundRect">
             <a:avLst>
@@ -12685,14 +12693,14 @@
       </p:sp>
       <p:sp>
         <p:nvSpPr>
-          <p:cNvPr id="9" name="Text 7"/>
-          <p:cNvSpPr txBox="1"/>
-          <p:nvPr/>
-        </p:nvSpPr>
-        <p:spPr>
-          <a:xfrm>
-            <a:off x="969264" y="5248656"/>
-            <a:ext cx="2659075" cy="420624"/>
+          <p:cNvPr id="8" name="Text 6"/>
+          <p:cNvSpPr txBox="1"/>
+          <p:nvPr/>
+        </p:nvSpPr>
+        <p:spPr>
+          <a:xfrm>
+            <a:off x="969264" y="3639312"/>
+            <a:ext cx="2734056" cy="420624"/>
           </a:xfrm>
           <a:prstGeom prst="rect">
             <a:avLst/>
@@ -12716,7 +12724,7 @@
                 <a:ea typeface="Calibri" pitchFamily="34" charset="-122"/>
                 <a:cs typeface="Calibri" pitchFamily="34" charset="-120"/>
               </a:rPr>
-              <a:t>Teachers, admins &amp; heads of school</a:t>
+              <a:t>A full copy of your Salesforce data</a:t>
             </a:r>
             <a:endParaRPr lang="en-US" sz="1050" dirty="0"/>
           </a:p>
@@ -12724,13 +12732,13 @@
       </p:sp>
       <p:sp>
         <p:nvSpPr>
-          <p:cNvPr id="10" name="Shape 8"/>
-          <p:cNvSpPr/>
-          <p:nvPr/>
-        </p:nvSpPr>
-        <p:spPr>
-          <a:xfrm>
-            <a:off x="3920947" y="5266944"/>
+          <p:cNvPr id="9" name="Shape 7"/>
+          <p:cNvSpPr/>
+          <p:nvPr/>
+        </p:nvSpPr>
+        <p:spPr>
+          <a:xfrm>
+            <a:off x="3995928" y="3657600"/>
             <a:ext cx="1097280" cy="384048"/>
           </a:xfrm>
           <a:prstGeom prst="roundRect">
@@ -12751,13 +12759,13 @@
       </p:sp>
       <p:sp>
         <p:nvSpPr>
-          <p:cNvPr id="11" name="Shape 9"/>
-          <p:cNvSpPr/>
-          <p:nvPr/>
-        </p:nvSpPr>
-        <p:spPr>
-          <a:xfrm>
-            <a:off x="4067251" y="5408676"/>
+          <p:cNvPr id="10" name="Shape 8"/>
+          <p:cNvSpPr/>
+          <p:nvPr/>
+        </p:nvSpPr>
+        <p:spPr>
+          <a:xfrm>
+            <a:off x="4142232" y="3799332"/>
             <a:ext cx="100584" cy="100584"/>
           </a:xfrm>
           <a:prstGeom prst="ellipse">
@@ -12771,13 +12779,13 @@
       </p:sp>
       <p:sp>
         <p:nvSpPr>
-          <p:cNvPr id="12" name="Text 10"/>
-          <p:cNvSpPr txBox="1"/>
-          <p:nvPr/>
-        </p:nvSpPr>
-        <p:spPr>
-          <a:xfrm>
-            <a:off x="4231843" y="5248656"/>
+          <p:cNvPr id="11" name="Text 9"/>
+          <p:cNvSpPr txBox="1"/>
+          <p:nvPr/>
+        </p:nvSpPr>
+        <p:spPr>
+          <a:xfrm>
+            <a:off x="4306824" y="3639312"/>
             <a:ext cx="822960" cy="420624"/>
           </a:xfrm>
           <a:prstGeom prst="rect">
@@ -12810,7 +12818,7 @@
       </p:sp>
       <p:sp>
         <p:nvSpPr>
-          <p:cNvPr id="13" name="Shape 11"/>
+          <p:cNvPr id="12" name="Shape 10"/>
           <p:cNvSpPr/>
           <p:nvPr/>
         </p:nvSpPr>
@@ -12844,7 +12852,7 @@
       </p:sp>
       <p:sp>
         <p:nvSpPr>
-          <p:cNvPr id="14" name="Shape 12"/>
+          <p:cNvPr id="13" name="Shape 11"/>
           <p:cNvSpPr/>
           <p:nvPr/>
         </p:nvSpPr>
@@ -12866,7 +12874,7 @@
       </p:sp>
       <p:sp>
         <p:nvSpPr>
-          <p:cNvPr id="15" name="Shape 13"/>
+          <p:cNvPr id="14" name="Shape 12"/>
           <p:cNvSpPr/>
           <p:nvPr/>
         </p:nvSpPr>
@@ -12886,7 +12894,7 @@
       </p:sp>
       <p:sp>
         <p:nvSpPr>
-          <p:cNvPr id="16" name="Shape 14"/>
+          <p:cNvPr id="15" name="Shape 13"/>
           <p:cNvSpPr/>
           <p:nvPr/>
         </p:nvSpPr>
@@ -12906,7 +12914,7 @@
       </p:sp>
       <p:sp>
         <p:nvSpPr>
-          <p:cNvPr id="17" name="Shape 15"/>
+          <p:cNvPr id="16" name="Shape 14"/>
           <p:cNvSpPr/>
           <p:nvPr/>
         </p:nvSpPr>
@@ -12926,7 +12934,7 @@
       </p:sp>
       <p:sp>
         <p:nvSpPr>
-          <p:cNvPr id="18" name="Shape 16"/>
+          <p:cNvPr id="17" name="Shape 15"/>
           <p:cNvSpPr/>
           <p:nvPr/>
         </p:nvSpPr>
@@ -12946,7 +12954,7 @@
       </p:sp>
       <p:sp>
         <p:nvSpPr>
-          <p:cNvPr id="19" name="Text 17"/>
+          <p:cNvPr id="18" name="Text 16"/>
           <p:cNvSpPr txBox="1"/>
           <p:nvPr/>
         </p:nvSpPr>
@@ -12968,13 +12976,24 @@
             <a:pPr indent="0" marL="0">
               <a:buNone/>
             </a:pPr>
+            <a:r>
+              <a:rPr lang="en-US" sz="900" dirty="0">
+                <a:solidFill>
+                  <a:srgbClr val="7A7266"/>
+                </a:solidFill>
+                <a:latin typeface="Calibri" pitchFamily="34" charset="0"/>
+                <a:ea typeface="Calibri" pitchFamily="34" charset="-122"/>
+                <a:cs typeface="Calibri" pitchFamily="34" charset="-120"/>
+              </a:rPr>
+              <a:t>Salesforce sync</a:t>
+            </a:r>
             <a:endParaRPr lang="en-US" sz="900" dirty="0"/>
           </a:p>
         </p:txBody>
       </p:sp>
       <p:sp>
         <p:nvSpPr>
-          <p:cNvPr id="20" name="Shape 18"/>
+          <p:cNvPr id="19" name="Shape 17"/>
           <p:cNvSpPr/>
           <p:nvPr/>
         </p:nvSpPr>
@@ -12997,18 +13016,297 @@
       </p:sp>
       <p:sp>
         <p:nvSpPr>
+          <p:cNvPr id="20" name="Shape 18"/>
+          <p:cNvSpPr/>
+          <p:nvPr/>
+        </p:nvSpPr>
+        <p:spPr>
+          <a:xfrm>
+            <a:off x="7516368" y="2615184"/>
+            <a:ext cx="3529584" cy="0"/>
+          </a:xfrm>
+          <a:prstGeom prst="line">
+            <a:avLst/>
+          </a:prstGeom>
+          <a:noFill/>
+          <a:ln w="25400">
+            <a:solidFill>
+              <a:srgbClr val="E4DCC9"/>
+            </a:solidFill>
+            <a:prstDash val="solid"/>
+          </a:ln>
+        </p:spPr>
+      </p:sp>
+      <p:sp>
+        <p:nvSpPr>
           <p:cNvPr id="21" name="Shape 19"/>
           <p:cNvSpPr/>
           <p:nvPr/>
         </p:nvSpPr>
         <p:spPr>
           <a:xfrm>
-            <a:off x="7296912" y="2212848"/>
-            <a:ext cx="3254167" cy="566928"/>
+            <a:off x="7296912" y="2395728"/>
+            <a:ext cx="438912" cy="438912"/>
+          </a:xfrm>
+          <a:prstGeom prst="ellipse">
+            <a:avLst/>
+          </a:prstGeom>
+          <a:solidFill>
+            <a:srgbClr val="9C7C2E"/>
+          </a:solidFill>
+          <a:ln w="25400">
+            <a:solidFill>
+              <a:srgbClr val="9C7C2E"/>
+            </a:solidFill>
+            <a:prstDash val="solid"/>
+          </a:ln>
+        </p:spPr>
+      </p:sp>
+      <p:sp>
+        <p:nvSpPr>
+          <p:cNvPr id="22" name="Text 20"/>
+          <p:cNvSpPr txBox="1"/>
+          <p:nvPr/>
+        </p:nvSpPr>
+        <p:spPr>
+          <a:xfrm>
+            <a:off x="7296912" y="2386584"/>
+            <a:ext cx="438912" cy="438912"/>
+          </a:xfrm>
+          <a:prstGeom prst="rect">
+            <a:avLst/>
+          </a:prstGeom>
+          <a:noFill/>
+          <a:ln/>
+        </p:spPr>
+        <p:txBody>
+          <a:bodyPr wrap="square" lIns="0" tIns="0" rIns="0" bIns="0" rtlCol="0" anchor="ctr"/>
+          <a:lstStyle/>
+          <a:p>
+            <a:pPr algn="ctr" indent="0" marL="0">
+              <a:buNone/>
+            </a:pPr>
+            <a:r>
+              <a:rPr lang="en-US" sz="1100" b="1" dirty="0">
+                <a:solidFill>
+                  <a:srgbClr val="FFFFFF"/>
+                </a:solidFill>
+                <a:latin typeface="Calibri" pitchFamily="34" charset="0"/>
+                <a:ea typeface="Calibri" pitchFamily="34" charset="-122"/>
+                <a:cs typeface="Calibri" pitchFamily="34" charset="-120"/>
+              </a:rPr>
+              <a:t>✓</a:t>
+            </a:r>
+            <a:endParaRPr lang="en-US" sz="1100" dirty="0"/>
+          </a:p>
+        </p:txBody>
+      </p:sp>
+      <p:sp>
+        <p:nvSpPr>
+          <p:cNvPr id="23" name="Shape 21"/>
+          <p:cNvSpPr/>
+          <p:nvPr/>
+        </p:nvSpPr>
+        <p:spPr>
+          <a:xfrm>
+            <a:off x="8473440" y="2395728"/>
+            <a:ext cx="438912" cy="438912"/>
+          </a:xfrm>
+          <a:prstGeom prst="ellipse">
+            <a:avLst/>
+          </a:prstGeom>
+          <a:solidFill>
+            <a:srgbClr val="9C7C2E"/>
+          </a:solidFill>
+          <a:ln w="25400">
+            <a:solidFill>
+              <a:srgbClr val="9C7C2E"/>
+            </a:solidFill>
+            <a:prstDash val="solid"/>
+          </a:ln>
+        </p:spPr>
+      </p:sp>
+      <p:sp>
+        <p:nvSpPr>
+          <p:cNvPr id="24" name="Text 22"/>
+          <p:cNvSpPr txBox="1"/>
+          <p:nvPr/>
+        </p:nvSpPr>
+        <p:spPr>
+          <a:xfrm>
+            <a:off x="8473440" y="2386584"/>
+            <a:ext cx="438912" cy="438912"/>
+          </a:xfrm>
+          <a:prstGeom prst="rect">
+            <a:avLst/>
+          </a:prstGeom>
+          <a:noFill/>
+          <a:ln/>
+        </p:spPr>
+        <p:txBody>
+          <a:bodyPr wrap="square" lIns="0" tIns="0" rIns="0" bIns="0" rtlCol="0" anchor="ctr"/>
+          <a:lstStyle/>
+          <a:p>
+            <a:pPr algn="ctr" indent="0" marL="0">
+              <a:buNone/>
+            </a:pPr>
+            <a:r>
+              <a:rPr lang="en-US" sz="1100" b="1" dirty="0">
+                <a:solidFill>
+                  <a:srgbClr val="FFFFFF"/>
+                </a:solidFill>
+                <a:latin typeface="Calibri" pitchFamily="34" charset="0"/>
+                <a:ea typeface="Calibri" pitchFamily="34" charset="-122"/>
+                <a:cs typeface="Calibri" pitchFamily="34" charset="-120"/>
+              </a:rPr>
+              <a:t>✓</a:t>
+            </a:r>
+            <a:endParaRPr lang="en-US" sz="1100" dirty="0"/>
+          </a:p>
+        </p:txBody>
+      </p:sp>
+      <p:sp>
+        <p:nvSpPr>
+          <p:cNvPr id="25" name="Shape 23"/>
+          <p:cNvSpPr/>
+          <p:nvPr/>
+        </p:nvSpPr>
+        <p:spPr>
+          <a:xfrm>
+            <a:off x="9649968" y="2395728"/>
+            <a:ext cx="438912" cy="438912"/>
+          </a:xfrm>
+          <a:prstGeom prst="ellipse">
+            <a:avLst/>
+          </a:prstGeom>
+          <a:solidFill>
+            <a:srgbClr val="FFFFFF"/>
+          </a:solidFill>
+          <a:ln w="25400">
+            <a:solidFill>
+              <a:srgbClr val="9C7C2E"/>
+            </a:solidFill>
+            <a:prstDash val="solid"/>
+          </a:ln>
+        </p:spPr>
+      </p:sp>
+      <p:sp>
+        <p:nvSpPr>
+          <p:cNvPr id="26" name="Text 24"/>
+          <p:cNvSpPr txBox="1"/>
+          <p:nvPr/>
+        </p:nvSpPr>
+        <p:spPr>
+          <a:xfrm>
+            <a:off x="9649968" y="2386584"/>
+            <a:ext cx="438912" cy="438912"/>
+          </a:xfrm>
+          <a:prstGeom prst="rect">
+            <a:avLst/>
+          </a:prstGeom>
+          <a:noFill/>
+          <a:ln/>
+        </p:spPr>
+        <p:txBody>
+          <a:bodyPr wrap="square" lIns="0" tIns="0" rIns="0" bIns="0" rtlCol="0" anchor="ctr"/>
+          <a:lstStyle/>
+          <a:p>
+            <a:pPr algn="ctr" indent="0" marL="0">
+              <a:buNone/>
+            </a:pPr>
+            <a:r>
+              <a:rPr lang="en-US" sz="1100" b="1" dirty="0">
+                <a:solidFill>
+                  <a:srgbClr val="9C7C2E"/>
+                </a:solidFill>
+                <a:latin typeface="Calibri" pitchFamily="34" charset="0"/>
+                <a:ea typeface="Calibri" pitchFamily="34" charset="-122"/>
+                <a:cs typeface="Calibri" pitchFamily="34" charset="-120"/>
+              </a:rPr>
+              <a:t>3</a:t>
+            </a:r>
+            <a:endParaRPr lang="en-US" sz="1100" dirty="0"/>
+          </a:p>
+        </p:txBody>
+      </p:sp>
+      <p:sp>
+        <p:nvSpPr>
+          <p:cNvPr id="27" name="Shape 25"/>
+          <p:cNvSpPr/>
+          <p:nvPr/>
+        </p:nvSpPr>
+        <p:spPr>
+          <a:xfrm>
+            <a:off x="10826496" y="2395728"/>
+            <a:ext cx="438912" cy="438912"/>
+          </a:xfrm>
+          <a:prstGeom prst="ellipse">
+            <a:avLst/>
+          </a:prstGeom>
+          <a:solidFill>
+            <a:srgbClr val="FFFFFF"/>
+          </a:solidFill>
+          <a:ln w="25400">
+            <a:solidFill>
+              <a:srgbClr val="9C7C2E"/>
+            </a:solidFill>
+            <a:prstDash val="solid"/>
+          </a:ln>
+        </p:spPr>
+      </p:sp>
+      <p:sp>
+        <p:nvSpPr>
+          <p:cNvPr id="28" name="Text 26"/>
+          <p:cNvSpPr txBox="1"/>
+          <p:nvPr/>
+        </p:nvSpPr>
+        <p:spPr>
+          <a:xfrm>
+            <a:off x="10826496" y="2386584"/>
+            <a:ext cx="438912" cy="438912"/>
+          </a:xfrm>
+          <a:prstGeom prst="rect">
+            <a:avLst/>
+          </a:prstGeom>
+          <a:noFill/>
+          <a:ln/>
+        </p:spPr>
+        <p:txBody>
+          <a:bodyPr wrap="square" lIns="0" tIns="0" rIns="0" bIns="0" rtlCol="0" anchor="ctr"/>
+          <a:lstStyle/>
+          <a:p>
+            <a:pPr algn="ctr" indent="0" marL="0">
+              <a:buNone/>
+            </a:pPr>
+            <a:r>
+              <a:rPr lang="en-US" sz="1100" b="1" dirty="0">
+                <a:solidFill>
+                  <a:srgbClr val="9C7C2E"/>
+                </a:solidFill>
+                <a:latin typeface="Calibri" pitchFamily="34" charset="0"/>
+                <a:ea typeface="Calibri" pitchFamily="34" charset="-122"/>
+                <a:cs typeface="Calibri" pitchFamily="34" charset="-120"/>
+              </a:rPr>
+              <a:t>4</a:t>
+            </a:r>
+            <a:endParaRPr lang="en-US" sz="1100" dirty="0"/>
+          </a:p>
+        </p:txBody>
+      </p:sp>
+      <p:sp>
+        <p:nvSpPr>
+          <p:cNvPr id="29" name="Shape 27"/>
+          <p:cNvSpPr/>
+          <p:nvPr/>
+        </p:nvSpPr>
+        <p:spPr>
+          <a:xfrm>
+            <a:off x="7296912" y="3154680"/>
+            <a:ext cx="3968496" cy="566928"/>
           </a:xfrm>
           <a:prstGeom prst="roundRect">
             <a:avLst>
-              <a:gd name="adj" fmla="val 19355"/>
+              <a:gd name="adj" fmla="val 8065"/>
             </a:avLst>
           </a:prstGeom>
           <a:solidFill>
@@ -13024,127 +13322,86 @@
       </p:sp>
       <p:sp>
         <p:nvSpPr>
-          <p:cNvPr id="22" name="Text 20"/>
-          <p:cNvSpPr txBox="1"/>
-          <p:nvPr/>
-        </p:nvSpPr>
-        <p:spPr>
-          <a:xfrm>
-            <a:off x="7424928" y="2212848"/>
-            <a:ext cx="2998135" cy="566928"/>
-          </a:xfrm>
-          <a:prstGeom prst="rect">
-            <a:avLst/>
-          </a:prstGeom>
-          <a:noFill/>
-          <a:ln/>
-        </p:spPr>
-        <p:txBody>
-          <a:bodyPr wrap="square" lIns="0" tIns="0" rIns="0" bIns="0" rtlCol="0" anchor="ctr"/>
-          <a:lstStyle/>
-          <a:p>
-            <a:pPr indent="0" marL="0">
-              <a:buNone/>
-            </a:pPr>
-            <a:r>
-              <a:rPr lang="en-US" sz="900" dirty="0">
-                <a:solidFill>
-                  <a:srgbClr val="1D1A15"/>
-                </a:solidFill>
-                <a:latin typeface="Calibri" pitchFamily="34" charset="0"/>
-                <a:ea typeface="Calibri" pitchFamily="34" charset="-122"/>
-                <a:cs typeface="Calibri" pitchFamily="34" charset="-120"/>
-              </a:rPr>
-              <a:t>Hi! I can help with setup and day-to-day. What do you need?</a:t>
-            </a:r>
-            <a:endParaRPr lang="en-US" sz="900" dirty="0"/>
-          </a:p>
-        </p:txBody>
-      </p:sp>
-      <p:sp>
-        <p:nvSpPr>
-          <p:cNvPr id="23" name="Shape 21"/>
-          <p:cNvSpPr/>
-          <p:nvPr/>
-        </p:nvSpPr>
-        <p:spPr>
-          <a:xfrm>
-            <a:off x="8408091" y="2907792"/>
-            <a:ext cx="2857317" cy="457200"/>
+          <p:cNvPr id="30" name="Shape 28"/>
+          <p:cNvSpPr/>
+          <p:nvPr/>
+        </p:nvSpPr>
+        <p:spPr>
+          <a:xfrm>
+            <a:off x="7443216" y="3387852"/>
+            <a:ext cx="100584" cy="100584"/>
+          </a:xfrm>
+          <a:prstGeom prst="ellipse">
+            <a:avLst/>
+          </a:prstGeom>
+          <a:solidFill>
+            <a:srgbClr val="5B7C46"/>
+          </a:solidFill>
+          <a:ln/>
+        </p:spPr>
+      </p:sp>
+      <p:sp>
+        <p:nvSpPr>
+          <p:cNvPr id="31" name="Shape 29"/>
+          <p:cNvSpPr/>
+          <p:nvPr/>
+        </p:nvSpPr>
+        <p:spPr>
+          <a:xfrm>
+            <a:off x="7680960" y="3396996"/>
+            <a:ext cx="1825508" cy="82296"/>
           </a:xfrm>
           <a:prstGeom prst="roundRect">
             <a:avLst>
-              <a:gd name="adj" fmla="val 24000"/>
+              <a:gd name="adj" fmla="val 50000"/>
             </a:avLst>
           </a:prstGeom>
           <a:solidFill>
-            <a:srgbClr val="F3E7C8"/>
-          </a:solidFill>
-          <a:ln w="9525">
-            <a:solidFill>
-              <a:srgbClr val="9C7C2E"/>
-            </a:solidFill>
-            <a:prstDash val="solid"/>
-          </a:ln>
-        </p:spPr>
-      </p:sp>
-      <p:sp>
-        <p:nvSpPr>
-          <p:cNvPr id="24" name="Text 22"/>
-          <p:cNvSpPr txBox="1"/>
-          <p:nvPr/>
-        </p:nvSpPr>
-        <p:spPr>
-          <a:xfrm>
-            <a:off x="8536107" y="2907792"/>
-            <a:ext cx="2601285" cy="457200"/>
-          </a:xfrm>
-          <a:prstGeom prst="rect">
-            <a:avLst/>
-          </a:prstGeom>
-          <a:noFill/>
-          <a:ln/>
-        </p:spPr>
-        <p:txBody>
-          <a:bodyPr wrap="square" lIns="0" tIns="0" rIns="0" bIns="0" rtlCol="0" anchor="ctr"/>
-          <a:lstStyle/>
-          <a:p>
-            <a:pPr indent="0" marL="0">
-              <a:buNone/>
-            </a:pPr>
-            <a:r>
-              <a:rPr lang="en-US" sz="900" dirty="0">
-                <a:solidFill>
-                  <a:srgbClr val="7A5A12"/>
-                </a:solidFill>
-                <a:latin typeface="Calibri" pitchFamily="34" charset="0"/>
-                <a:ea typeface="Calibri" pitchFamily="34" charset="-122"/>
-                <a:cs typeface="Calibri" pitchFamily="34" charset="-120"/>
-              </a:rPr>
-              <a:t>How do I fill out our roster?</a:t>
-            </a:r>
-            <a:endParaRPr lang="en-US" sz="900" dirty="0"/>
-          </a:p>
-        </p:txBody>
-      </p:sp>
-      <p:sp>
-        <p:nvSpPr>
-          <p:cNvPr id="25" name="Shape 23"/>
-          <p:cNvSpPr/>
-          <p:nvPr/>
-        </p:nvSpPr>
-        <p:spPr>
-          <a:xfrm>
-            <a:off x="7296912" y="3493008"/>
-            <a:ext cx="3412907" cy="786384"/>
+            <a:srgbClr val="E4DCC9"/>
+          </a:solidFill>
+          <a:ln/>
+        </p:spPr>
+      </p:sp>
+      <p:sp>
+        <p:nvSpPr>
+          <p:cNvPr id="32" name="Shape 30"/>
+          <p:cNvSpPr/>
+          <p:nvPr/>
+        </p:nvSpPr>
+        <p:spPr>
+          <a:xfrm>
+            <a:off x="7680960" y="3396996"/>
+            <a:ext cx="1314366" cy="82296"/>
           </a:xfrm>
           <a:prstGeom prst="roundRect">
             <a:avLst>
-              <a:gd name="adj" fmla="val 13953"/>
+              <a:gd name="adj" fmla="val 50000"/>
             </a:avLst>
           </a:prstGeom>
           <a:solidFill>
-            <a:srgbClr val="FBFAF6"/>
+            <a:srgbClr val="9C7C2E"/>
+          </a:solidFill>
+          <a:ln/>
+        </p:spPr>
+      </p:sp>
+      <p:sp>
+        <p:nvSpPr>
+          <p:cNvPr id="33" name="Shape 31"/>
+          <p:cNvSpPr/>
+          <p:nvPr/>
+        </p:nvSpPr>
+        <p:spPr>
+          <a:xfrm>
+            <a:off x="10543032" y="3291840"/>
+            <a:ext cx="594360" cy="292608"/>
+          </a:xfrm>
+          <a:prstGeom prst="roundRect">
+            <a:avLst>
+              <a:gd name="adj" fmla="val 50000"/>
+            </a:avLst>
+          </a:prstGeom>
+          <a:solidFill>
+            <a:srgbClr val="FFFFFF"/>
           </a:solidFill>
           <a:ln w="12700">
             <a:solidFill>
@@ -13156,14 +13413,14 @@
       </p:sp>
       <p:sp>
         <p:nvSpPr>
-          <p:cNvPr id="26" name="Text 24"/>
-          <p:cNvSpPr txBox="1"/>
-          <p:nvPr/>
-        </p:nvSpPr>
-        <p:spPr>
-          <a:xfrm>
-            <a:off x="7424928" y="3566160"/>
-            <a:ext cx="3156875" cy="329184"/>
+          <p:cNvPr id="34" name="Text 32"/>
+          <p:cNvSpPr txBox="1"/>
+          <p:nvPr/>
+        </p:nvSpPr>
+        <p:spPr>
+          <a:xfrm>
+            <a:off x="10543032" y="3282696"/>
+            <a:ext cx="594360" cy="310896"/>
           </a:xfrm>
           <a:prstGeom prst="rect">
             <a:avLst/>
@@ -13175,181 +13432,42 @@
           <a:bodyPr wrap="square" lIns="0" tIns="0" rIns="0" bIns="0" rtlCol="0" anchor="ctr"/>
           <a:lstStyle/>
           <a:p>
-            <a:pPr indent="0" marL="0">
-              <a:buNone/>
-            </a:pPr>
-            <a:r>
-              <a:rPr lang="en-US" sz="900" dirty="0">
-                <a:solidFill>
-                  <a:srgbClr val="1D1A15"/>
-                </a:solidFill>
-                <a:latin typeface="Calibri" pitchFamily="34" charset="0"/>
-                <a:ea typeface="Calibri" pitchFamily="34" charset="-122"/>
-                <a:cs typeface="Calibri" pitchFamily="34" charset="-120"/>
-              </a:rPr>
-              <a:t>Add students by hand or import a spreadsheet, here’s the guide:</a:t>
-            </a:r>
-            <a:endParaRPr lang="en-US" sz="900" dirty="0"/>
-          </a:p>
-        </p:txBody>
-      </p:sp>
-      <p:sp>
-        <p:nvSpPr>
-          <p:cNvPr id="27" name="Shape 25"/>
-          <p:cNvSpPr/>
-          <p:nvPr/>
-        </p:nvSpPr>
-        <p:spPr>
-          <a:xfrm>
-            <a:off x="7424928" y="3913632"/>
-            <a:ext cx="1783080" cy="274320"/>
+            <a:pPr algn="ctr" indent="0" marL="0">
+              <a:buNone/>
+            </a:pPr>
+            <a:r>
+              <a:rPr lang="en-US" sz="850" dirty="0">
+                <a:solidFill>
+                  <a:srgbClr val="7A7266"/>
+                </a:solidFill>
+                <a:latin typeface="Calibri" pitchFamily="34" charset="0"/>
+                <a:ea typeface="Calibri" pitchFamily="34" charset="-122"/>
+                <a:cs typeface="Calibri" pitchFamily="34" charset="-120"/>
+              </a:rPr>
+              <a:t>done</a:t>
+            </a:r>
+            <a:endParaRPr lang="en-US" sz="850" dirty="0"/>
+          </a:p>
+        </p:txBody>
+      </p:sp>
+      <p:sp>
+        <p:nvSpPr>
+          <p:cNvPr id="35" name="Shape 33"/>
+          <p:cNvSpPr/>
+          <p:nvPr/>
+        </p:nvSpPr>
+        <p:spPr>
+          <a:xfrm>
+            <a:off x="7296912" y="3849624"/>
+            <a:ext cx="3968496" cy="566928"/>
           </a:xfrm>
           <a:prstGeom prst="roundRect">
             <a:avLst>
-              <a:gd name="adj" fmla="val 50000"/>
+              <a:gd name="adj" fmla="val 8065"/>
             </a:avLst>
           </a:prstGeom>
           <a:solidFill>
-            <a:srgbClr val="FFFFFF"/>
-          </a:solidFill>
-          <a:ln w="9525">
-            <a:solidFill>
-              <a:srgbClr val="9C7C2E"/>
-            </a:solidFill>
-            <a:prstDash val="solid"/>
-          </a:ln>
-        </p:spPr>
-      </p:sp>
-      <p:sp>
-        <p:nvSpPr>
-          <p:cNvPr id="28" name="Shape 26"/>
-          <p:cNvSpPr/>
-          <p:nvPr/>
-        </p:nvSpPr>
-        <p:spPr>
-          <a:xfrm>
-            <a:off x="7534656" y="3968496"/>
-            <a:ext cx="118872" cy="155448"/>
-          </a:xfrm>
-          <a:prstGeom prst="roundRect">
-            <a:avLst>
-              <a:gd name="adj" fmla="val 15385"/>
-            </a:avLst>
-          </a:prstGeom>
-          <a:solidFill>
-            <a:srgbClr val="FFFFFF"/>
-          </a:solidFill>
-          <a:ln w="12700">
-            <a:solidFill>
-              <a:srgbClr val="9C7C2E"/>
-            </a:solidFill>
-            <a:prstDash val="solid"/>
-          </a:ln>
-        </p:spPr>
-      </p:sp>
-      <p:sp>
-        <p:nvSpPr>
-          <p:cNvPr id="29" name="Shape 27"/>
-          <p:cNvSpPr/>
-          <p:nvPr/>
-        </p:nvSpPr>
-        <p:spPr>
-          <a:xfrm>
-            <a:off x="7562088" y="4023360"/>
-            <a:ext cx="64008" cy="0"/>
-          </a:xfrm>
-          <a:prstGeom prst="line">
-            <a:avLst/>
-          </a:prstGeom>
-          <a:noFill/>
-          <a:ln w="9525">
-            <a:solidFill>
-              <a:srgbClr val="9C7C2E"/>
-            </a:solidFill>
-            <a:prstDash val="solid"/>
-          </a:ln>
-        </p:spPr>
-      </p:sp>
-      <p:sp>
-        <p:nvSpPr>
-          <p:cNvPr id="30" name="Shape 28"/>
-          <p:cNvSpPr/>
-          <p:nvPr/>
-        </p:nvSpPr>
-        <p:spPr>
-          <a:xfrm>
-            <a:off x="7562088" y="4059936"/>
-            <a:ext cx="64008" cy="0"/>
-          </a:xfrm>
-          <a:prstGeom prst="line">
-            <a:avLst/>
-          </a:prstGeom>
-          <a:noFill/>
-          <a:ln w="9525">
-            <a:solidFill>
-              <a:srgbClr val="9C7C2E"/>
-            </a:solidFill>
-            <a:prstDash val="solid"/>
-          </a:ln>
-        </p:spPr>
-      </p:sp>
-      <p:sp>
-        <p:nvSpPr>
-          <p:cNvPr id="31" name="Text 29"/>
-          <p:cNvSpPr txBox="1"/>
-          <p:nvPr/>
-        </p:nvSpPr>
-        <p:spPr>
-          <a:xfrm>
-            <a:off x="7717536" y="3904488"/>
-            <a:ext cx="1463040" cy="292608"/>
-          </a:xfrm>
-          <a:prstGeom prst="rect">
-            <a:avLst/>
-          </a:prstGeom>
-          <a:noFill/>
-          <a:ln/>
-        </p:spPr>
-        <p:txBody>
-          <a:bodyPr wrap="square" lIns="0" tIns="0" rIns="0" bIns="0" rtlCol="0" anchor="ctr"/>
-          <a:lstStyle/>
-          <a:p>
-            <a:pPr indent="0" marL="0">
-              <a:buNone/>
-            </a:pPr>
-            <a:r>
-              <a:rPr lang="en-US" sz="750" b="1" dirty="0">
-                <a:solidFill>
-                  <a:srgbClr val="9C7C2E"/>
-                </a:solidFill>
-                <a:latin typeface="Calibri" pitchFamily="34" charset="0"/>
-                <a:ea typeface="Calibri" pitchFamily="34" charset="-122"/>
-                <a:cs typeface="Calibri" pitchFamily="34" charset="-120"/>
-              </a:rPr>
-              <a:t>Roster import guide</a:t>
-            </a:r>
-            <a:endParaRPr lang="en-US" sz="750" dirty="0"/>
-          </a:p>
-        </p:txBody>
-      </p:sp>
-      <p:sp>
-        <p:nvSpPr>
-          <p:cNvPr id="32" name="Shape 30"/>
-          <p:cNvSpPr/>
-          <p:nvPr/>
-        </p:nvSpPr>
-        <p:spPr>
-          <a:xfrm>
-            <a:off x="7296912" y="4590288"/>
-            <a:ext cx="3968496" cy="365760"/>
-          </a:xfrm>
-          <a:prstGeom prst="roundRect">
-            <a:avLst>
-              <a:gd name="adj" fmla="val 50000"/>
-            </a:avLst>
-          </a:prstGeom>
-          <a:solidFill>
-            <a:srgbClr val="FFFFFF"/>
+            <a:srgbClr val="FBFAF6"/>
           </a:solidFill>
           <a:ln w="12700">
             <a:solidFill>
@@ -13361,58 +13479,63 @@
       </p:sp>
       <p:sp>
         <p:nvSpPr>
-          <p:cNvPr id="33" name="Text 31"/>
-          <p:cNvSpPr txBox="1"/>
-          <p:nvPr/>
-        </p:nvSpPr>
-        <p:spPr>
-          <a:xfrm>
-            <a:off x="7443216" y="4590288"/>
-            <a:ext cx="3054096" cy="365760"/>
-          </a:xfrm>
-          <a:prstGeom prst="rect">
-            <a:avLst/>
-          </a:prstGeom>
-          <a:noFill/>
-          <a:ln/>
-        </p:spPr>
-        <p:txBody>
-          <a:bodyPr wrap="square" lIns="0" tIns="0" rIns="0" bIns="0" rtlCol="0" anchor="ctr"/>
-          <a:lstStyle/>
-          <a:p>
-            <a:pPr indent="0" marL="0">
-              <a:buNone/>
-            </a:pPr>
-            <a:r>
-              <a:rPr lang="en-US" sz="850" dirty="0">
-                <a:solidFill>
-                  <a:srgbClr val="7A7266"/>
-                </a:solidFill>
-                <a:latin typeface="Calibri" pitchFamily="34" charset="0"/>
-                <a:ea typeface="Calibri" pitchFamily="34" charset="-122"/>
-                <a:cs typeface="Calibri" pitchFamily="34" charset="-120"/>
-              </a:rPr>
-              <a:t>Ask the Rooted Helper…</a:t>
-            </a:r>
-            <a:endParaRPr lang="en-US" sz="850" dirty="0"/>
-          </a:p>
-        </p:txBody>
-      </p:sp>
-      <p:sp>
-        <p:nvSpPr>
-          <p:cNvPr id="34" name="Shape 32"/>
-          <p:cNvSpPr/>
-          <p:nvPr/>
-        </p:nvSpPr>
-        <p:spPr>
-          <a:xfrm>
-            <a:off x="10927080" y="4636008"/>
-            <a:ext cx="274320" cy="274320"/>
+          <p:cNvPr id="36" name="Shape 34"/>
+          <p:cNvSpPr/>
+          <p:nvPr/>
+        </p:nvSpPr>
+        <p:spPr>
+          <a:xfrm>
+            <a:off x="7443216" y="4082796"/>
+            <a:ext cx="100584" cy="100584"/>
           </a:xfrm>
           <a:prstGeom prst="ellipse">
             <a:avLst/>
           </a:prstGeom>
           <a:solidFill>
+            <a:srgbClr val="B0842F"/>
+          </a:solidFill>
+          <a:ln/>
+        </p:spPr>
+      </p:sp>
+      <p:sp>
+        <p:nvSpPr>
+          <p:cNvPr id="37" name="Shape 35"/>
+          <p:cNvSpPr/>
+          <p:nvPr/>
+        </p:nvSpPr>
+        <p:spPr>
+          <a:xfrm>
+            <a:off x="7680960" y="4091940"/>
+            <a:ext cx="1825508" cy="82296"/>
+          </a:xfrm>
+          <a:prstGeom prst="roundRect">
+            <a:avLst>
+              <a:gd name="adj" fmla="val 50000"/>
+            </a:avLst>
+          </a:prstGeom>
+          <a:solidFill>
+            <a:srgbClr val="E4DCC9"/>
+          </a:solidFill>
+          <a:ln/>
+        </p:spPr>
+      </p:sp>
+      <p:sp>
+        <p:nvSpPr>
+          <p:cNvPr id="38" name="Shape 36"/>
+          <p:cNvSpPr/>
+          <p:nvPr/>
+        </p:nvSpPr>
+        <p:spPr>
+          <a:xfrm>
+            <a:off x="7680960" y="4091940"/>
+            <a:ext cx="839734" cy="82296"/>
+          </a:xfrm>
+          <a:prstGeom prst="roundRect">
+            <a:avLst>
+              <a:gd name="adj" fmla="val 50000"/>
+            </a:avLst>
+          </a:prstGeom>
+          <a:solidFill>
             <a:srgbClr val="9C7C2E"/>
           </a:solidFill>
           <a:ln/>
@@ -13420,94 +13543,26 @@
       </p:sp>
       <p:sp>
         <p:nvSpPr>
-          <p:cNvPr id="35" name="Text 33"/>
-          <p:cNvSpPr txBox="1"/>
-          <p:nvPr/>
-        </p:nvSpPr>
-        <p:spPr>
-          <a:xfrm>
-            <a:off x="10927080" y="4617720"/>
-            <a:ext cx="274320" cy="292608"/>
-          </a:xfrm>
-          <a:prstGeom prst="rect">
-            <a:avLst/>
-          </a:prstGeom>
-          <a:noFill/>
-          <a:ln/>
-        </p:spPr>
-        <p:txBody>
-          <a:bodyPr wrap="square" lIns="0" tIns="0" rIns="0" bIns="0" rtlCol="0" anchor="ctr"/>
-          <a:lstStyle/>
-          <a:p>
-            <a:pPr algn="ctr" indent="0" marL="0">
-              <a:buNone/>
-            </a:pPr>
-            <a:r>
-              <a:rPr lang="en-US" sz="1000" b="1" dirty="0">
-                <a:solidFill>
-                  <a:srgbClr val="FFFFFF"/>
-                </a:solidFill>
-                <a:latin typeface="Calibri" pitchFamily="34" charset="0"/>
-                <a:ea typeface="Calibri" pitchFamily="34" charset="-122"/>
-                <a:cs typeface="Calibri" pitchFamily="34" charset="-120"/>
-              </a:rPr>
-              <a:t>↑</a:t>
-            </a:r>
-            <a:endParaRPr lang="en-US" sz="1000" dirty="0"/>
-          </a:p>
-        </p:txBody>
-      </p:sp>
-    </p:spTree>
-  </p:cSld>
-  <p:clrMapOvr>
-    <a:masterClrMapping/>
-  </p:clrMapOvr>
-</p:sld>
-</file>
-
-<file path=ppt/slides/slide23.xml><?xml version="1.0" encoding="utf-8"?>
-<p:sld xmlns:a="http://schemas.openxmlformats.org/drawingml/2006/main" xmlns:r="http://schemas.openxmlformats.org/officeDocument/2006/relationships" xmlns:p="http://schemas.openxmlformats.org/presentationml/2006/main">
-  <p:cSld name="Slide 23">
-    <p:bg>
-      <p:bgPr>
-        <a:solidFill>
-          <a:srgbClr val="211B12"/>
-        </a:solidFill>
-      </p:bgPr>
-    </p:bg>
-    <p:spTree>
-      <p:nvGrpSpPr>
-        <p:cNvPr id="1" name=""/>
-        <p:cNvGrpSpPr/>
-        <p:nvPr/>
-      </p:nvGrpSpPr>
-      <p:grpSpPr>
-        <a:xfrm>
-          <a:off x="0" y="0"/>
-          <a:ext cx="0" cy="0"/>
-          <a:chOff x="0" y="0"/>
-          <a:chExt cx="0" cy="0"/>
-        </a:xfrm>
-      </p:grpSpPr>
-      <p:sp>
-        <p:nvSpPr>
-          <p:cNvPr id="2" name="Shape 0"/>
-          <p:cNvSpPr/>
-          <p:nvPr/>
-        </p:nvSpPr>
-        <p:spPr>
-          <a:xfrm>
-            <a:off x="9079992" y="-1463040"/>
-            <a:ext cx="4206240" cy="4206240"/>
-          </a:xfrm>
-          <a:prstGeom prst="ellipse">
-            <a:avLst/>
-          </a:prstGeom>
-          <a:ln w="15875">
+          <p:cNvPr id="39" name="Shape 37"/>
+          <p:cNvSpPr/>
+          <p:nvPr/>
+        </p:nvSpPr>
+        <p:spPr>
+          <a:xfrm>
+            <a:off x="10405872" y="3986784"/>
+            <a:ext cx="731520" cy="292608"/>
+          </a:xfrm>
+          <a:prstGeom prst="roundRect">
+            <a:avLst>
+              <a:gd name="adj" fmla="val 50000"/>
+            </a:avLst>
+          </a:prstGeom>
+          <a:solidFill>
+            <a:srgbClr val="FFFFFF"/>
+          </a:solidFill>
+          <a:ln w="12700">
             <a:solidFill>
-              <a:srgbClr val="9C7C2E">
-                <a:alpha val="45000"/>
-              </a:srgbClr>
+              <a:srgbClr val="E4DCC9"/>
             </a:solidFill>
             <a:prstDash val="solid"/>
           </a:ln>
@@ -13515,38 +13570,14 @@
       </p:sp>
       <p:sp>
         <p:nvSpPr>
-          <p:cNvPr id="3" name="Shape 1"/>
-          <p:cNvSpPr/>
-          <p:nvPr/>
-        </p:nvSpPr>
-        <p:spPr>
-          <a:xfrm>
-            <a:off x="10085832" y="4846320"/>
-            <a:ext cx="3108960" cy="3108960"/>
-          </a:xfrm>
-          <a:prstGeom prst="ellipse">
-            <a:avLst/>
-          </a:prstGeom>
-          <a:ln w="12700">
-            <a:solidFill>
-              <a:srgbClr val="9C7C2E">
-                <a:alpha val="30000"/>
-              </a:srgbClr>
-            </a:solidFill>
-            <a:prstDash val="solid"/>
-          </a:ln>
-        </p:spPr>
-      </p:sp>
-      <p:sp>
-        <p:nvSpPr>
-          <p:cNvPr id="4" name="Text 2"/>
-          <p:cNvSpPr txBox="1"/>
-          <p:nvPr/>
-        </p:nvSpPr>
-        <p:spPr>
-          <a:xfrm>
-            <a:off x="822960" y="2194560"/>
-            <a:ext cx="7315200" cy="274320"/>
+          <p:cNvPr id="40" name="Text 38"/>
+          <p:cNvSpPr txBox="1"/>
+          <p:nvPr/>
+        </p:nvSpPr>
+        <p:spPr>
+          <a:xfrm>
+            <a:off x="10405872" y="3977640"/>
+            <a:ext cx="731520" cy="310896"/>
           </a:xfrm>
           <a:prstGeom prst="rect">
             <a:avLst/>
@@ -13558,105 +13589,21 @@
           <a:bodyPr wrap="square" lIns="0" tIns="0" rIns="0" bIns="0" rtlCol="0" anchor="ctr"/>
           <a:lstStyle/>
           <a:p>
-            <a:pPr indent="0" marL="0">
-              <a:buNone/>
-            </a:pPr>
-            <a:r>
-              <a:rPr lang="en-US" sz="1100" b="1" spc="300" kern="0" dirty="0">
-                <a:solidFill>
-                  <a:srgbClr val="C4A24E"/>
-                </a:solidFill>
-                <a:latin typeface="Calibri" pitchFamily="34" charset="0"/>
-                <a:ea typeface="Calibri" pitchFamily="34" charset="-122"/>
-                <a:cs typeface="Calibri" pitchFamily="34" charset="-120"/>
-              </a:rPr>
-              <a:t>PART THREE</a:t>
-            </a:r>
-            <a:endParaRPr lang="en-US" sz="1100" dirty="0"/>
-          </a:p>
-        </p:txBody>
-      </p:sp>
-      <p:sp>
-        <p:nvSpPr>
-          <p:cNvPr id="5" name="Text 3"/>
-          <p:cNvSpPr txBox="1"/>
-          <p:nvPr/>
-        </p:nvSpPr>
-        <p:spPr>
-          <a:xfrm>
-            <a:off x="822960" y="2514600"/>
-            <a:ext cx="9601200" cy="1828800"/>
-          </a:xfrm>
-          <a:prstGeom prst="rect">
-            <a:avLst/>
-          </a:prstGeom>
-          <a:noFill/>
-          <a:ln/>
-        </p:spPr>
-        <p:txBody>
-          <a:bodyPr wrap="square" lIns="0" tIns="0" rIns="0" bIns="0" rtlCol="0" anchor="ctr"/>
-          <a:lstStyle/>
-          <a:p>
-            <a:pPr indent="0" marL="0">
-              <a:lnSpc>
-                <a:spcPct val="98000"/>
-              </a:lnSpc>
-              <a:buNone/>
-            </a:pPr>
-            <a:r>
-              <a:rPr lang="en-US" sz="4000" b="1" dirty="0">
-                <a:solidFill>
-                  <a:srgbClr val="F3ECDD"/>
-                </a:solidFill>
-                <a:latin typeface="Georgia" pitchFamily="34" charset="0"/>
-                <a:ea typeface="Georgia" pitchFamily="34" charset="-122"/>
-                <a:cs typeface="Georgia" pitchFamily="34" charset="-120"/>
-              </a:rPr>
-              <a:t>The optimization track</a:t>
-            </a:r>
-            <a:endParaRPr lang="en-US" sz="4000" dirty="0"/>
-          </a:p>
-        </p:txBody>
-      </p:sp>
-      <p:sp>
-        <p:nvSpPr>
-          <p:cNvPr id="6" name="Text 4"/>
-          <p:cNvSpPr txBox="1"/>
-          <p:nvPr/>
-        </p:nvSpPr>
-        <p:spPr>
-          <a:xfrm>
-            <a:off x="822960" y="4114800"/>
-            <a:ext cx="8686800" cy="1280160"/>
-          </a:xfrm>
-          <a:prstGeom prst="rect">
-            <a:avLst/>
-          </a:prstGeom>
-          <a:noFill/>
-          <a:ln/>
-        </p:spPr>
-        <p:txBody>
-          <a:bodyPr wrap="square" lIns="0" tIns="0" rIns="0" bIns="0" rtlCol="0" anchor="ctr"/>
-          <a:lstStyle/>
-          <a:p>
-            <a:pPr indent="0" marL="0">
-              <a:lnSpc>
-                <a:spcPct val="120000"/>
-              </a:lnSpc>
-              <a:buNone/>
-            </a:pPr>
-            <a:r>
-              <a:rPr lang="en-US" sz="1500" dirty="0">
-                <a:solidFill>
-                  <a:srgbClr val="B7AE9E"/>
-                </a:solidFill>
-                <a:latin typeface="Calibri" pitchFamily="34" charset="0"/>
-                <a:ea typeface="Calibri" pitchFamily="34" charset="-122"/>
-                <a:cs typeface="Calibri" pitchFamily="34" charset="-120"/>
-              </a:rPr>
-              <a:t>Behind the scenes: bringing in the real data, and moving DeepRoots off outdated systems.</a:t>
-            </a:r>
-            <a:endParaRPr lang="en-US" sz="1500" dirty="0"/>
+            <a:pPr algn="ctr" indent="0" marL="0">
+              <a:buNone/>
+            </a:pPr>
+            <a:r>
+              <a:rPr lang="en-US" sz="850" dirty="0">
+                <a:solidFill>
+                  <a:srgbClr val="7A7266"/>
+                </a:solidFill>
+                <a:latin typeface="Calibri" pitchFamily="34" charset="0"/>
+                <a:ea typeface="Calibri" pitchFamily="34" charset="-122"/>
+                <a:cs typeface="Calibri" pitchFamily="34" charset="-120"/>
+              </a:rPr>
+              <a:t>active</a:t>
+            </a:r>
+            <a:endParaRPr lang="en-US" sz="850" dirty="0"/>
           </a:p>
         </p:txBody>
       </p:sp>
@@ -13725,7 +13672,7 @@
                 <a:ea typeface="Calibri" pitchFamily="34" charset="-122"/>
                 <a:cs typeface="Calibri" pitchFamily="34" charset="-120"/>
               </a:rPr>
-              <a:t>BEHIND THE SCENES · THE DATA</a:t>
+              <a:t>BEHIND THE SCENES · ONE PLATFORM</a:t>
             </a:r>
             <a:endParaRPr lang="en-US" sz="1100" dirty="0"/>
           </a:p>
@@ -13825,7 +13772,7 @@
               <a:buNone/>
             </a:pPr>
             <a:r>
-              <a:rPr lang="en-US" sz="3200" b="1" dirty="0">
+              <a:rPr lang="en-US" sz="3000" b="1" dirty="0">
                 <a:solidFill>
                   <a:srgbClr val="1D1A15"/>
                 </a:solidFill>
@@ -13833,9 +13780,9 @@
                 <a:ea typeface="Georgia" pitchFamily="34" charset="-122"/>
                 <a:cs typeface="Georgia" pitchFamily="34" charset="-120"/>
               </a:rPr>
-              <a:t>All your Salesforce data in one place</a:t>
-            </a:r>
-            <a:endParaRPr lang="en-US" sz="3200" dirty="0"/>
+              <a:t>All your tools, working together</a:t>
+            </a:r>
+            <a:endParaRPr lang="en-US" sz="3000" dirty="0"/>
           </a:p>
         </p:txBody>
       </p:sp>
@@ -13875,7 +13822,7 @@
                 <a:ea typeface="Calibri" pitchFamily="34" charset="-122"/>
                 <a:cs typeface="Calibri" pitchFamily="34" charset="-120"/>
               </a:rPr>
-              <a:t>A complete, always-updating copy of your Salesforce records, pulled in safely and kept current so the dashboards run on real numbers.</a:t>
+              <a:t>Today the team juggles many separate tools, moving documents and data around the cloud by hand to keep customers happy. The new platform brings those tools together, so information flows on its own and people spend their time on customers, not on shuffling files between apps.</a:t>
             </a:r>
             <a:endParaRPr lang="en-US" sz="1500" dirty="0"/>
           </a:p>
@@ -13890,7 +13837,7 @@
         <p:spPr>
           <a:xfrm>
             <a:off x="822960" y="3657600"/>
-            <a:ext cx="3008376" cy="384048"/>
+            <a:ext cx="1883664" cy="384048"/>
           </a:xfrm>
           <a:prstGeom prst="roundRect">
             <a:avLst>
@@ -13917,7 +13864,7 @@
         <p:spPr>
           <a:xfrm>
             <a:off x="969264" y="3639312"/>
-            <a:ext cx="2734056" cy="420624"/>
+            <a:ext cx="1609344" cy="420624"/>
           </a:xfrm>
           <a:prstGeom prst="rect">
             <a:avLst/>
@@ -13941,7 +13888,7 @@
                 <a:ea typeface="Calibri" pitchFamily="34" charset="-122"/>
                 <a:cs typeface="Calibri" pitchFamily="34" charset="-120"/>
               </a:rPr>
-              <a:t>A full copy of your Salesforce data</a:t>
+              <a:t>Many tools, one home</a:t>
             </a:r>
             <a:endParaRPr lang="en-US" sz="1050" dirty="0"/>
           </a:p>
@@ -13955,7 +13902,7 @@
         </p:nvSpPr>
         <p:spPr>
           <a:xfrm>
-            <a:off x="3995928" y="3657600"/>
+            <a:off x="2871216" y="3657600"/>
             <a:ext cx="1097280" cy="384048"/>
           </a:xfrm>
           <a:prstGeom prst="roundRect">
@@ -13982,7 +13929,7 @@
         </p:nvSpPr>
         <p:spPr>
           <a:xfrm>
-            <a:off x="4142232" y="3799332"/>
+            <a:off x="3017520" y="3799332"/>
             <a:ext cx="100584" cy="100584"/>
           </a:xfrm>
           <a:prstGeom prst="ellipse">
@@ -14002,7 +13949,7 @@
         </p:nvSpPr>
         <p:spPr>
           <a:xfrm>
-            <a:off x="4306824" y="3639312"/>
+            <a:off x="3182112" y="3639312"/>
             <a:ext cx="822960" cy="420624"/>
           </a:xfrm>
           <a:prstGeom prst="rect">
@@ -14202,7 +14149,7 @@
                 <a:ea typeface="Calibri" pitchFamily="34" charset="-122"/>
                 <a:cs typeface="Calibri" pitchFamily="34" charset="-120"/>
               </a:rPr>
-              <a:t>Salesforce sync</a:t>
+              <a:t>one platform</a:t>
             </a:r>
             <a:endParaRPr lang="en-US" sz="900" dirty="0"/>
           </a:p>
@@ -14239,291 +14186,12 @@
         </p:nvSpPr>
         <p:spPr>
           <a:xfrm>
-            <a:off x="7516368" y="2615184"/>
-            <a:ext cx="3529584" cy="0"/>
-          </a:xfrm>
-          <a:prstGeom prst="line">
-            <a:avLst/>
-          </a:prstGeom>
-          <a:noFill/>
-          <a:ln w="25400">
-            <a:solidFill>
-              <a:srgbClr val="E4DCC9"/>
-            </a:solidFill>
-            <a:prstDash val="solid"/>
-          </a:ln>
-        </p:spPr>
-      </p:sp>
-      <p:sp>
-        <p:nvSpPr>
-          <p:cNvPr id="21" name="Shape 19"/>
-          <p:cNvSpPr/>
-          <p:nvPr/>
-        </p:nvSpPr>
-        <p:spPr>
-          <a:xfrm>
-            <a:off x="7296912" y="2395728"/>
-            <a:ext cx="438912" cy="438912"/>
-          </a:xfrm>
-          <a:prstGeom prst="ellipse">
-            <a:avLst/>
-          </a:prstGeom>
-          <a:solidFill>
-            <a:srgbClr val="9C7C2E"/>
-          </a:solidFill>
-          <a:ln w="25400">
-            <a:solidFill>
-              <a:srgbClr val="9C7C2E"/>
-            </a:solidFill>
-            <a:prstDash val="solid"/>
-          </a:ln>
-        </p:spPr>
-      </p:sp>
-      <p:sp>
-        <p:nvSpPr>
-          <p:cNvPr id="22" name="Text 20"/>
-          <p:cNvSpPr txBox="1"/>
-          <p:nvPr/>
-        </p:nvSpPr>
-        <p:spPr>
-          <a:xfrm>
-            <a:off x="7296912" y="2386584"/>
-            <a:ext cx="438912" cy="438912"/>
-          </a:xfrm>
-          <a:prstGeom prst="rect">
-            <a:avLst/>
-          </a:prstGeom>
-          <a:noFill/>
-          <a:ln/>
-        </p:spPr>
-        <p:txBody>
-          <a:bodyPr wrap="square" lIns="0" tIns="0" rIns="0" bIns="0" rtlCol="0" anchor="ctr"/>
-          <a:lstStyle/>
-          <a:p>
-            <a:pPr algn="ctr" indent="0" marL="0">
-              <a:buNone/>
-            </a:pPr>
-            <a:r>
-              <a:rPr lang="en-US" sz="1100" b="1" dirty="0">
-                <a:solidFill>
-                  <a:srgbClr val="FFFFFF"/>
-                </a:solidFill>
-                <a:latin typeface="Calibri" pitchFamily="34" charset="0"/>
-                <a:ea typeface="Calibri" pitchFamily="34" charset="-122"/>
-                <a:cs typeface="Calibri" pitchFamily="34" charset="-120"/>
-              </a:rPr>
-              <a:t>✓</a:t>
-            </a:r>
-            <a:endParaRPr lang="en-US" sz="1100" dirty="0"/>
-          </a:p>
-        </p:txBody>
-      </p:sp>
-      <p:sp>
-        <p:nvSpPr>
-          <p:cNvPr id="23" name="Shape 21"/>
-          <p:cNvSpPr/>
-          <p:nvPr/>
-        </p:nvSpPr>
-        <p:spPr>
-          <a:xfrm>
-            <a:off x="8473440" y="2395728"/>
-            <a:ext cx="438912" cy="438912"/>
-          </a:xfrm>
-          <a:prstGeom prst="ellipse">
-            <a:avLst/>
-          </a:prstGeom>
-          <a:solidFill>
-            <a:srgbClr val="9C7C2E"/>
-          </a:solidFill>
-          <a:ln w="25400">
-            <a:solidFill>
-              <a:srgbClr val="9C7C2E"/>
-            </a:solidFill>
-            <a:prstDash val="solid"/>
-          </a:ln>
-        </p:spPr>
-      </p:sp>
-      <p:sp>
-        <p:nvSpPr>
-          <p:cNvPr id="24" name="Text 22"/>
-          <p:cNvSpPr txBox="1"/>
-          <p:nvPr/>
-        </p:nvSpPr>
-        <p:spPr>
-          <a:xfrm>
-            <a:off x="8473440" y="2386584"/>
-            <a:ext cx="438912" cy="438912"/>
-          </a:xfrm>
-          <a:prstGeom prst="rect">
-            <a:avLst/>
-          </a:prstGeom>
-          <a:noFill/>
-          <a:ln/>
-        </p:spPr>
-        <p:txBody>
-          <a:bodyPr wrap="square" lIns="0" tIns="0" rIns="0" bIns="0" rtlCol="0" anchor="ctr"/>
-          <a:lstStyle/>
-          <a:p>
-            <a:pPr algn="ctr" indent="0" marL="0">
-              <a:buNone/>
-            </a:pPr>
-            <a:r>
-              <a:rPr lang="en-US" sz="1100" b="1" dirty="0">
-                <a:solidFill>
-                  <a:srgbClr val="FFFFFF"/>
-                </a:solidFill>
-                <a:latin typeface="Calibri" pitchFamily="34" charset="0"/>
-                <a:ea typeface="Calibri" pitchFamily="34" charset="-122"/>
-                <a:cs typeface="Calibri" pitchFamily="34" charset="-120"/>
-              </a:rPr>
-              <a:t>✓</a:t>
-            </a:r>
-            <a:endParaRPr lang="en-US" sz="1100" dirty="0"/>
-          </a:p>
-        </p:txBody>
-      </p:sp>
-      <p:sp>
-        <p:nvSpPr>
-          <p:cNvPr id="25" name="Shape 23"/>
-          <p:cNvSpPr/>
-          <p:nvPr/>
-        </p:nvSpPr>
-        <p:spPr>
-          <a:xfrm>
-            <a:off x="9649968" y="2395728"/>
-            <a:ext cx="438912" cy="438912"/>
-          </a:xfrm>
-          <a:prstGeom prst="ellipse">
-            <a:avLst/>
-          </a:prstGeom>
-          <a:solidFill>
-            <a:srgbClr val="FFFFFF"/>
-          </a:solidFill>
-          <a:ln w="25400">
-            <a:solidFill>
-              <a:srgbClr val="9C7C2E"/>
-            </a:solidFill>
-            <a:prstDash val="solid"/>
-          </a:ln>
-        </p:spPr>
-      </p:sp>
-      <p:sp>
-        <p:nvSpPr>
-          <p:cNvPr id="26" name="Text 24"/>
-          <p:cNvSpPr txBox="1"/>
-          <p:nvPr/>
-        </p:nvSpPr>
-        <p:spPr>
-          <a:xfrm>
-            <a:off x="9649968" y="2386584"/>
-            <a:ext cx="438912" cy="438912"/>
-          </a:xfrm>
-          <a:prstGeom prst="rect">
-            <a:avLst/>
-          </a:prstGeom>
-          <a:noFill/>
-          <a:ln/>
-        </p:spPr>
-        <p:txBody>
-          <a:bodyPr wrap="square" lIns="0" tIns="0" rIns="0" bIns="0" rtlCol="0" anchor="ctr"/>
-          <a:lstStyle/>
-          <a:p>
-            <a:pPr algn="ctr" indent="0" marL="0">
-              <a:buNone/>
-            </a:pPr>
-            <a:r>
-              <a:rPr lang="en-US" sz="1100" b="1" dirty="0">
-                <a:solidFill>
-                  <a:srgbClr val="9C7C2E"/>
-                </a:solidFill>
-                <a:latin typeface="Calibri" pitchFamily="34" charset="0"/>
-                <a:ea typeface="Calibri" pitchFamily="34" charset="-122"/>
-                <a:cs typeface="Calibri" pitchFamily="34" charset="-120"/>
-              </a:rPr>
-              <a:t>3</a:t>
-            </a:r>
-            <a:endParaRPr lang="en-US" sz="1100" dirty="0"/>
-          </a:p>
-        </p:txBody>
-      </p:sp>
-      <p:sp>
-        <p:nvSpPr>
-          <p:cNvPr id="27" name="Shape 25"/>
-          <p:cNvSpPr/>
-          <p:nvPr/>
-        </p:nvSpPr>
-        <p:spPr>
-          <a:xfrm>
-            <a:off x="10826496" y="2395728"/>
-            <a:ext cx="438912" cy="438912"/>
-          </a:xfrm>
-          <a:prstGeom prst="ellipse">
-            <a:avLst/>
-          </a:prstGeom>
-          <a:solidFill>
-            <a:srgbClr val="FFFFFF"/>
-          </a:solidFill>
-          <a:ln w="25400">
-            <a:solidFill>
-              <a:srgbClr val="9C7C2E"/>
-            </a:solidFill>
-            <a:prstDash val="solid"/>
-          </a:ln>
-        </p:spPr>
-      </p:sp>
-      <p:sp>
-        <p:nvSpPr>
-          <p:cNvPr id="28" name="Text 26"/>
-          <p:cNvSpPr txBox="1"/>
-          <p:nvPr/>
-        </p:nvSpPr>
-        <p:spPr>
-          <a:xfrm>
-            <a:off x="10826496" y="2386584"/>
-            <a:ext cx="438912" cy="438912"/>
-          </a:xfrm>
-          <a:prstGeom prst="rect">
-            <a:avLst/>
-          </a:prstGeom>
-          <a:noFill/>
-          <a:ln/>
-        </p:spPr>
-        <p:txBody>
-          <a:bodyPr wrap="square" lIns="0" tIns="0" rIns="0" bIns="0" rtlCol="0" anchor="ctr"/>
-          <a:lstStyle/>
-          <a:p>
-            <a:pPr algn="ctr" indent="0" marL="0">
-              <a:buNone/>
-            </a:pPr>
-            <a:r>
-              <a:rPr lang="en-US" sz="1100" b="1" dirty="0">
-                <a:solidFill>
-                  <a:srgbClr val="9C7C2E"/>
-                </a:solidFill>
-                <a:latin typeface="Calibri" pitchFamily="34" charset="0"/>
-                <a:ea typeface="Calibri" pitchFamily="34" charset="-122"/>
-                <a:cs typeface="Calibri" pitchFamily="34" charset="-120"/>
-              </a:rPr>
-              <a:t>4</a:t>
-            </a:r>
-            <a:endParaRPr lang="en-US" sz="1100" dirty="0"/>
-          </a:p>
-        </p:txBody>
-      </p:sp>
-      <p:sp>
-        <p:nvSpPr>
-          <p:cNvPr id="29" name="Shape 27"/>
-          <p:cNvSpPr/>
-          <p:nvPr/>
-        </p:nvSpPr>
-        <p:spPr>
-          <a:xfrm>
-            <a:off x="7296912" y="3154680"/>
-            <a:ext cx="3968496" cy="566928"/>
+            <a:off x="7296912" y="2258568"/>
+            <a:ext cx="1237488" cy="502920"/>
           </a:xfrm>
           <a:prstGeom prst="roundRect">
             <a:avLst>
-              <a:gd name="adj" fmla="val 8065"/>
+              <a:gd name="adj" fmla="val 10909"/>
             </a:avLst>
           </a:prstGeom>
           <a:solidFill>
@@ -14539,86 +14207,61 @@
       </p:sp>
       <p:sp>
         <p:nvSpPr>
-          <p:cNvPr id="30" name="Shape 28"/>
-          <p:cNvSpPr/>
-          <p:nvPr/>
-        </p:nvSpPr>
-        <p:spPr>
-          <a:xfrm>
-            <a:off x="7443216" y="3387852"/>
-            <a:ext cx="100584" cy="100584"/>
-          </a:xfrm>
-          <a:prstGeom prst="ellipse">
-            <a:avLst/>
-          </a:prstGeom>
-          <a:solidFill>
-            <a:srgbClr val="5B7C46"/>
-          </a:solidFill>
-          <a:ln/>
-        </p:spPr>
-      </p:sp>
-      <p:sp>
-        <p:nvSpPr>
-          <p:cNvPr id="31" name="Shape 29"/>
-          <p:cNvSpPr/>
-          <p:nvPr/>
-        </p:nvSpPr>
-        <p:spPr>
-          <a:xfrm>
-            <a:off x="7680960" y="3396996"/>
-            <a:ext cx="1825508" cy="82296"/>
+          <p:cNvPr id="21" name="Text 19"/>
+          <p:cNvSpPr txBox="1"/>
+          <p:nvPr/>
+        </p:nvSpPr>
+        <p:spPr>
+          <a:xfrm>
+            <a:off x="7333488" y="2258568"/>
+            <a:ext cx="1164336" cy="502920"/>
+          </a:xfrm>
+          <a:prstGeom prst="rect">
+            <a:avLst/>
+          </a:prstGeom>
+          <a:noFill/>
+          <a:ln/>
+        </p:spPr>
+        <p:txBody>
+          <a:bodyPr wrap="square" lIns="0" tIns="0" rIns="0" bIns="0" rtlCol="0" anchor="ctr"/>
+          <a:lstStyle/>
+          <a:p>
+            <a:pPr algn="ctr" indent="0" marL="0">
+              <a:buNone/>
+            </a:pPr>
+            <a:r>
+              <a:rPr lang="en-US" sz="750" dirty="0">
+                <a:solidFill>
+                  <a:srgbClr val="1D1A15"/>
+                </a:solidFill>
+                <a:latin typeface="Calibri" pitchFamily="34" charset="0"/>
+                <a:ea typeface="Calibri" pitchFamily="34" charset="-122"/>
+                <a:cs typeface="Calibri" pitchFamily="34" charset="-120"/>
+              </a:rPr>
+              <a:t>Salesforce</a:t>
+            </a:r>
+            <a:endParaRPr lang="en-US" sz="750" dirty="0"/>
+          </a:p>
+        </p:txBody>
+      </p:sp>
+      <p:sp>
+        <p:nvSpPr>
+          <p:cNvPr id="22" name="Shape 20"/>
+          <p:cNvSpPr/>
+          <p:nvPr/>
+        </p:nvSpPr>
+        <p:spPr>
+          <a:xfrm>
+            <a:off x="8662416" y="2258568"/>
+            <a:ext cx="1237488" cy="502920"/>
           </a:xfrm>
           <a:prstGeom prst="roundRect">
             <a:avLst>
-              <a:gd name="adj" fmla="val 50000"/>
+              <a:gd name="adj" fmla="val 10909"/>
             </a:avLst>
           </a:prstGeom>
           <a:solidFill>
-            <a:srgbClr val="E4DCC9"/>
-          </a:solidFill>
-          <a:ln/>
-        </p:spPr>
-      </p:sp>
-      <p:sp>
-        <p:nvSpPr>
-          <p:cNvPr id="32" name="Shape 30"/>
-          <p:cNvSpPr/>
-          <p:nvPr/>
-        </p:nvSpPr>
-        <p:spPr>
-          <a:xfrm>
-            <a:off x="7680960" y="3396996"/>
-            <a:ext cx="1314366" cy="82296"/>
-          </a:xfrm>
-          <a:prstGeom prst="roundRect">
-            <a:avLst>
-              <a:gd name="adj" fmla="val 50000"/>
-            </a:avLst>
-          </a:prstGeom>
-          <a:solidFill>
-            <a:srgbClr val="9C7C2E"/>
-          </a:solidFill>
-          <a:ln/>
-        </p:spPr>
-      </p:sp>
-      <p:sp>
-        <p:nvSpPr>
-          <p:cNvPr id="33" name="Shape 31"/>
-          <p:cNvSpPr/>
-          <p:nvPr/>
-        </p:nvSpPr>
-        <p:spPr>
-          <a:xfrm>
-            <a:off x="10543032" y="3291840"/>
-            <a:ext cx="594360" cy="292608"/>
-          </a:xfrm>
-          <a:prstGeom prst="roundRect">
-            <a:avLst>
-              <a:gd name="adj" fmla="val 50000"/>
-            </a:avLst>
-          </a:prstGeom>
-          <a:solidFill>
-            <a:srgbClr val="FFFFFF"/>
+            <a:srgbClr val="FBFAF6"/>
           </a:solidFill>
           <a:ln w="12700">
             <a:solidFill>
@@ -14630,14 +14273,14 @@
       </p:sp>
       <p:sp>
         <p:nvSpPr>
-          <p:cNvPr id="34" name="Text 32"/>
-          <p:cNvSpPr txBox="1"/>
-          <p:nvPr/>
-        </p:nvSpPr>
-        <p:spPr>
-          <a:xfrm>
-            <a:off x="10543032" y="3282696"/>
-            <a:ext cx="594360" cy="310896"/>
+          <p:cNvPr id="23" name="Text 21"/>
+          <p:cNvSpPr txBox="1"/>
+          <p:nvPr/>
+        </p:nvSpPr>
+        <p:spPr>
+          <a:xfrm>
+            <a:off x="8698992" y="2258568"/>
+            <a:ext cx="1164336" cy="502920"/>
           </a:xfrm>
           <a:prstGeom prst="rect">
             <a:avLst/>
@@ -14653,34 +14296,34 @@
               <a:buNone/>
             </a:pPr>
             <a:r>
-              <a:rPr lang="en-US" sz="850" dirty="0">
-                <a:solidFill>
-                  <a:srgbClr val="7A7266"/>
-                </a:solidFill>
-                <a:latin typeface="Calibri" pitchFamily="34" charset="0"/>
-                <a:ea typeface="Calibri" pitchFamily="34" charset="-122"/>
-                <a:cs typeface="Calibri" pitchFamily="34" charset="-120"/>
-              </a:rPr>
-              <a:t>done</a:t>
-            </a:r>
-            <a:endParaRPr lang="en-US" sz="850" dirty="0"/>
-          </a:p>
-        </p:txBody>
-      </p:sp>
-      <p:sp>
-        <p:nvSpPr>
-          <p:cNvPr id="35" name="Shape 33"/>
-          <p:cNvSpPr/>
-          <p:nvPr/>
-        </p:nvSpPr>
-        <p:spPr>
-          <a:xfrm>
-            <a:off x="7296912" y="3849624"/>
-            <a:ext cx="3968496" cy="566928"/>
+              <a:rPr lang="en-US" sz="750" dirty="0">
+                <a:solidFill>
+                  <a:srgbClr val="1D1A15"/>
+                </a:solidFill>
+                <a:latin typeface="Calibri" pitchFamily="34" charset="0"/>
+                <a:ea typeface="Calibri" pitchFamily="34" charset="-122"/>
+                <a:cs typeface="Calibri" pitchFamily="34" charset="-120"/>
+              </a:rPr>
+              <a:t>Learning platform</a:t>
+            </a:r>
+            <a:endParaRPr lang="en-US" sz="750" dirty="0"/>
+          </a:p>
+        </p:txBody>
+      </p:sp>
+      <p:sp>
+        <p:nvSpPr>
+          <p:cNvPr id="24" name="Shape 22"/>
+          <p:cNvSpPr/>
+          <p:nvPr/>
+        </p:nvSpPr>
+        <p:spPr>
+          <a:xfrm>
+            <a:off x="10027920" y="2258568"/>
+            <a:ext cx="1237488" cy="502920"/>
           </a:xfrm>
           <a:prstGeom prst="roundRect">
             <a:avLst>
-              <a:gd name="adj" fmla="val 8065"/>
+              <a:gd name="adj" fmla="val 10909"/>
             </a:avLst>
           </a:prstGeom>
           <a:solidFill>
@@ -14696,86 +14339,61 @@
       </p:sp>
       <p:sp>
         <p:nvSpPr>
-          <p:cNvPr id="36" name="Shape 34"/>
-          <p:cNvSpPr/>
-          <p:nvPr/>
-        </p:nvSpPr>
-        <p:spPr>
-          <a:xfrm>
-            <a:off x="7443216" y="4082796"/>
-            <a:ext cx="100584" cy="100584"/>
-          </a:xfrm>
-          <a:prstGeom prst="ellipse">
-            <a:avLst/>
-          </a:prstGeom>
-          <a:solidFill>
-            <a:srgbClr val="B0842F"/>
-          </a:solidFill>
-          <a:ln/>
-        </p:spPr>
-      </p:sp>
-      <p:sp>
-        <p:nvSpPr>
-          <p:cNvPr id="37" name="Shape 35"/>
-          <p:cNvSpPr/>
-          <p:nvPr/>
-        </p:nvSpPr>
-        <p:spPr>
-          <a:xfrm>
-            <a:off x="7680960" y="4091940"/>
-            <a:ext cx="1825508" cy="82296"/>
+          <p:cNvPr id="25" name="Text 23"/>
+          <p:cNvSpPr txBox="1"/>
+          <p:nvPr/>
+        </p:nvSpPr>
+        <p:spPr>
+          <a:xfrm>
+            <a:off x="10064496" y="2258568"/>
+            <a:ext cx="1164336" cy="502920"/>
+          </a:xfrm>
+          <a:prstGeom prst="rect">
+            <a:avLst/>
+          </a:prstGeom>
+          <a:noFill/>
+          <a:ln/>
+        </p:spPr>
+        <p:txBody>
+          <a:bodyPr wrap="square" lIns="0" tIns="0" rIns="0" bIns="0" rtlCol="0" anchor="ctr"/>
+          <a:lstStyle/>
+          <a:p>
+            <a:pPr algn="ctr" indent="0" marL="0">
+              <a:buNone/>
+            </a:pPr>
+            <a:r>
+              <a:rPr lang="en-US" sz="750" dirty="0">
+                <a:solidFill>
+                  <a:srgbClr val="1D1A15"/>
+                </a:solidFill>
+                <a:latin typeface="Calibri" pitchFamily="34" charset="0"/>
+                <a:ea typeface="Calibri" pitchFamily="34" charset="-122"/>
+                <a:cs typeface="Calibri" pitchFamily="34" charset="-120"/>
+              </a:rPr>
+              <a:t>Email</a:t>
+            </a:r>
+            <a:endParaRPr lang="en-US" sz="750" dirty="0"/>
+          </a:p>
+        </p:txBody>
+      </p:sp>
+      <p:sp>
+        <p:nvSpPr>
+          <p:cNvPr id="26" name="Shape 24"/>
+          <p:cNvSpPr/>
+          <p:nvPr/>
+        </p:nvSpPr>
+        <p:spPr>
+          <a:xfrm>
+            <a:off x="7296912" y="2889504"/>
+            <a:ext cx="1237488" cy="502920"/>
           </a:xfrm>
           <a:prstGeom prst="roundRect">
             <a:avLst>
-              <a:gd name="adj" fmla="val 50000"/>
+              <a:gd name="adj" fmla="val 10909"/>
             </a:avLst>
           </a:prstGeom>
           <a:solidFill>
-            <a:srgbClr val="E4DCC9"/>
-          </a:solidFill>
-          <a:ln/>
-        </p:spPr>
-      </p:sp>
-      <p:sp>
-        <p:nvSpPr>
-          <p:cNvPr id="38" name="Shape 36"/>
-          <p:cNvSpPr/>
-          <p:nvPr/>
-        </p:nvSpPr>
-        <p:spPr>
-          <a:xfrm>
-            <a:off x="7680960" y="4091940"/>
-            <a:ext cx="839734" cy="82296"/>
-          </a:xfrm>
-          <a:prstGeom prst="roundRect">
-            <a:avLst>
-              <a:gd name="adj" fmla="val 50000"/>
-            </a:avLst>
-          </a:prstGeom>
-          <a:solidFill>
-            <a:srgbClr val="9C7C2E"/>
-          </a:solidFill>
-          <a:ln/>
-        </p:spPr>
-      </p:sp>
-      <p:sp>
-        <p:nvSpPr>
-          <p:cNvPr id="39" name="Shape 37"/>
-          <p:cNvSpPr/>
-          <p:nvPr/>
-        </p:nvSpPr>
-        <p:spPr>
-          <a:xfrm>
-            <a:off x="10405872" y="3986784"/>
-            <a:ext cx="731520" cy="292608"/>
-          </a:xfrm>
-          <a:prstGeom prst="roundRect">
-            <a:avLst>
-              <a:gd name="adj" fmla="val 50000"/>
-            </a:avLst>
-          </a:prstGeom>
-          <a:solidFill>
-            <a:srgbClr val="FFFFFF"/>
+            <a:srgbClr val="FBFAF6"/>
           </a:solidFill>
           <a:ln w="12700">
             <a:solidFill>
@@ -14787,14 +14405,14 @@
       </p:sp>
       <p:sp>
         <p:nvSpPr>
-          <p:cNvPr id="40" name="Text 38"/>
-          <p:cNvSpPr txBox="1"/>
-          <p:nvPr/>
-        </p:nvSpPr>
-        <p:spPr>
-          <a:xfrm>
-            <a:off x="10405872" y="3977640"/>
-            <a:ext cx="731520" cy="310896"/>
+          <p:cNvPr id="27" name="Text 25"/>
+          <p:cNvSpPr txBox="1"/>
+          <p:nvPr/>
+        </p:nvSpPr>
+        <p:spPr>
+          <a:xfrm>
+            <a:off x="7333488" y="2889504"/>
+            <a:ext cx="1164336" cy="502920"/>
           </a:xfrm>
           <a:prstGeom prst="rect">
             <a:avLst/>
@@ -14810,17 +14428,254 @@
               <a:buNone/>
             </a:pPr>
             <a:r>
-              <a:rPr lang="en-US" sz="850" dirty="0">
-                <a:solidFill>
-                  <a:srgbClr val="7A7266"/>
-                </a:solidFill>
-                <a:latin typeface="Calibri" pitchFamily="34" charset="0"/>
-                <a:ea typeface="Calibri" pitchFamily="34" charset="-122"/>
-                <a:cs typeface="Calibri" pitchFamily="34" charset="-120"/>
-              </a:rPr>
-              <a:t>active</a:t>
-            </a:r>
-            <a:endParaRPr lang="en-US" sz="850" dirty="0"/>
+              <a:rPr lang="en-US" sz="750" dirty="0">
+                <a:solidFill>
+                  <a:srgbClr val="1D1A15"/>
+                </a:solidFill>
+                <a:latin typeface="Calibri" pitchFamily="34" charset="0"/>
+                <a:ea typeface="Calibri" pitchFamily="34" charset="-122"/>
+                <a:cs typeface="Calibri" pitchFamily="34" charset="-120"/>
+              </a:rPr>
+              <a:t>Spreadsheets</a:t>
+            </a:r>
+            <a:endParaRPr lang="en-US" sz="750" dirty="0"/>
+          </a:p>
+        </p:txBody>
+      </p:sp>
+      <p:sp>
+        <p:nvSpPr>
+          <p:cNvPr id="28" name="Shape 26"/>
+          <p:cNvSpPr/>
+          <p:nvPr/>
+        </p:nvSpPr>
+        <p:spPr>
+          <a:xfrm>
+            <a:off x="8662416" y="2889504"/>
+            <a:ext cx="1237488" cy="502920"/>
+          </a:xfrm>
+          <a:prstGeom prst="roundRect">
+            <a:avLst>
+              <a:gd name="adj" fmla="val 10909"/>
+            </a:avLst>
+          </a:prstGeom>
+          <a:solidFill>
+            <a:srgbClr val="FBFAF6"/>
+          </a:solidFill>
+          <a:ln w="12700">
+            <a:solidFill>
+              <a:srgbClr val="E4DCC9"/>
+            </a:solidFill>
+            <a:prstDash val="solid"/>
+          </a:ln>
+        </p:spPr>
+      </p:sp>
+      <p:sp>
+        <p:nvSpPr>
+          <p:cNvPr id="29" name="Text 27"/>
+          <p:cNvSpPr txBox="1"/>
+          <p:nvPr/>
+        </p:nvSpPr>
+        <p:spPr>
+          <a:xfrm>
+            <a:off x="8698992" y="2889504"/>
+            <a:ext cx="1164336" cy="502920"/>
+          </a:xfrm>
+          <a:prstGeom prst="rect">
+            <a:avLst/>
+          </a:prstGeom>
+          <a:noFill/>
+          <a:ln/>
+        </p:spPr>
+        <p:txBody>
+          <a:bodyPr wrap="square" lIns="0" tIns="0" rIns="0" bIns="0" rtlCol="0" anchor="ctr"/>
+          <a:lstStyle/>
+          <a:p>
+            <a:pPr algn="ctr" indent="0" marL="0">
+              <a:buNone/>
+            </a:pPr>
+            <a:r>
+              <a:rPr lang="en-US" sz="750" dirty="0">
+                <a:solidFill>
+                  <a:srgbClr val="1D1A15"/>
+                </a:solidFill>
+                <a:latin typeface="Calibri" pitchFamily="34" charset="0"/>
+                <a:ea typeface="Calibri" pitchFamily="34" charset="-122"/>
+                <a:cs typeface="Calibri" pitchFamily="34" charset="-120"/>
+              </a:rPr>
+              <a:t>Documents</a:t>
+            </a:r>
+            <a:endParaRPr lang="en-US" sz="750" dirty="0"/>
+          </a:p>
+        </p:txBody>
+      </p:sp>
+      <p:sp>
+        <p:nvSpPr>
+          <p:cNvPr id="30" name="Shape 28"/>
+          <p:cNvSpPr/>
+          <p:nvPr/>
+        </p:nvSpPr>
+        <p:spPr>
+          <a:xfrm>
+            <a:off x="10027920" y="2889504"/>
+            <a:ext cx="1237488" cy="502920"/>
+          </a:xfrm>
+          <a:prstGeom prst="roundRect">
+            <a:avLst>
+              <a:gd name="adj" fmla="val 10909"/>
+            </a:avLst>
+          </a:prstGeom>
+          <a:solidFill>
+            <a:srgbClr val="FBFAF6"/>
+          </a:solidFill>
+          <a:ln w="12700">
+            <a:solidFill>
+              <a:srgbClr val="E4DCC9"/>
+            </a:solidFill>
+            <a:prstDash val="solid"/>
+          </a:ln>
+        </p:spPr>
+      </p:sp>
+      <p:sp>
+        <p:nvSpPr>
+          <p:cNvPr id="31" name="Text 29"/>
+          <p:cNvSpPr txBox="1"/>
+          <p:nvPr/>
+        </p:nvSpPr>
+        <p:spPr>
+          <a:xfrm>
+            <a:off x="10064496" y="2889504"/>
+            <a:ext cx="1164336" cy="502920"/>
+          </a:xfrm>
+          <a:prstGeom prst="rect">
+            <a:avLst/>
+          </a:prstGeom>
+          <a:noFill/>
+          <a:ln/>
+        </p:spPr>
+        <p:txBody>
+          <a:bodyPr wrap="square" lIns="0" tIns="0" rIns="0" bIns="0" rtlCol="0" anchor="ctr"/>
+          <a:lstStyle/>
+          <a:p>
+            <a:pPr algn="ctr" indent="0" marL="0">
+              <a:buNone/>
+            </a:pPr>
+            <a:r>
+              <a:rPr lang="en-US" sz="750" dirty="0">
+                <a:solidFill>
+                  <a:srgbClr val="1D1A15"/>
+                </a:solidFill>
+                <a:latin typeface="Calibri" pitchFamily="34" charset="0"/>
+                <a:ea typeface="Calibri" pitchFamily="34" charset="-122"/>
+                <a:cs typeface="Calibri" pitchFamily="34" charset="-120"/>
+              </a:rPr>
+              <a:t>Trello</a:t>
+            </a:r>
+            <a:endParaRPr lang="en-US" sz="750" dirty="0"/>
+          </a:p>
+        </p:txBody>
+      </p:sp>
+      <p:sp>
+        <p:nvSpPr>
+          <p:cNvPr id="32" name="Text 30"/>
+          <p:cNvSpPr txBox="1"/>
+          <p:nvPr/>
+        </p:nvSpPr>
+        <p:spPr>
+          <a:xfrm>
+            <a:off x="7296912" y="3438144"/>
+            <a:ext cx="3968496" cy="274320"/>
+          </a:xfrm>
+          <a:prstGeom prst="rect">
+            <a:avLst/>
+          </a:prstGeom>
+          <a:noFill/>
+          <a:ln/>
+        </p:spPr>
+        <p:txBody>
+          <a:bodyPr wrap="square" lIns="0" tIns="0" rIns="0" bIns="0" rtlCol="0" anchor="ctr"/>
+          <a:lstStyle/>
+          <a:p>
+            <a:pPr algn="ctr" indent="0" marL="0">
+              <a:buNone/>
+            </a:pPr>
+            <a:r>
+              <a:rPr lang="en-US" sz="1500" b="1" dirty="0">
+                <a:solidFill>
+                  <a:srgbClr val="9C7C2E"/>
+                </a:solidFill>
+                <a:latin typeface="Calibri" pitchFamily="34" charset="0"/>
+                <a:ea typeface="Calibri" pitchFamily="34" charset="-122"/>
+                <a:cs typeface="Calibri" pitchFamily="34" charset="-120"/>
+              </a:rPr>
+              <a:t>↓</a:t>
+            </a:r>
+            <a:endParaRPr lang="en-US" sz="1500" dirty="0"/>
+          </a:p>
+        </p:txBody>
+      </p:sp>
+      <p:sp>
+        <p:nvSpPr>
+          <p:cNvPr id="33" name="Shape 31"/>
+          <p:cNvSpPr/>
+          <p:nvPr/>
+        </p:nvSpPr>
+        <p:spPr>
+          <a:xfrm>
+            <a:off x="7296912" y="3803904"/>
+            <a:ext cx="3968496" cy="566928"/>
+          </a:xfrm>
+          <a:prstGeom prst="roundRect">
+            <a:avLst>
+              <a:gd name="adj" fmla="val 16129"/>
+            </a:avLst>
+          </a:prstGeom>
+          <a:solidFill>
+            <a:srgbClr val="F3E7C8"/>
+          </a:solidFill>
+          <a:ln w="12700">
+            <a:solidFill>
+              <a:srgbClr val="9C7C2E"/>
+            </a:solidFill>
+            <a:prstDash val="solid"/>
+          </a:ln>
+        </p:spPr>
+      </p:sp>
+      <p:sp>
+        <p:nvSpPr>
+          <p:cNvPr id="34" name="Text 32"/>
+          <p:cNvSpPr txBox="1"/>
+          <p:nvPr/>
+        </p:nvSpPr>
+        <p:spPr>
+          <a:xfrm>
+            <a:off x="7296912" y="3803904"/>
+            <a:ext cx="3968496" cy="566928"/>
+          </a:xfrm>
+          <a:prstGeom prst="rect">
+            <a:avLst/>
+          </a:prstGeom>
+          <a:noFill/>
+          <a:ln/>
+        </p:spPr>
+        <p:txBody>
+          <a:bodyPr wrap="square" lIns="0" tIns="0" rIns="0" bIns="0" rtlCol="0" anchor="ctr"/>
+          <a:lstStyle/>
+          <a:p>
+            <a:pPr algn="ctr" indent="0" marL="0">
+              <a:buNone/>
+            </a:pPr>
+            <a:r>
+              <a:rPr lang="en-US" sz="1300" b="1" dirty="0">
+                <a:solidFill>
+                  <a:srgbClr val="7A5A12"/>
+                </a:solidFill>
+                <a:latin typeface="Georgia" pitchFamily="34" charset="0"/>
+                <a:ea typeface="Georgia" pitchFamily="34" charset="-122"/>
+                <a:cs typeface="Georgia" pitchFamily="34" charset="-120"/>
+              </a:rPr>
+              <a:t>DeepRoots · one platform</a:t>
+            </a:r>
+            <a:endParaRPr lang="en-US" sz="1300" dirty="0"/>
           </a:p>
         </p:txBody>
       </p:sp>
@@ -14889,7 +14744,7 @@
                 <a:ea typeface="Calibri" pitchFamily="34" charset="-122"/>
                 <a:cs typeface="Calibri" pitchFamily="34" charset="-120"/>
               </a:rPr>
-              <a:t>BEHIND THE SCENES · ONE PLATFORM</a:t>
+              <a:t>BEHIND THE SCENES · FOUNDATION</a:t>
             </a:r>
             <a:endParaRPr lang="en-US" sz="1100" dirty="0"/>
           </a:p>
@@ -14989,7 +14844,7 @@
               <a:buNone/>
             </a:pPr>
             <a:r>
-              <a:rPr lang="en-US" sz="3000" b="1" dirty="0">
+              <a:rPr lang="en-US" sz="3200" b="1" dirty="0">
                 <a:solidFill>
                   <a:srgbClr val="1D1A15"/>
                 </a:solidFill>
@@ -14997,9 +14852,9 @@
                 <a:ea typeface="Georgia" pitchFamily="34" charset="-122"/>
                 <a:cs typeface="Georgia" pitchFamily="34" charset="-120"/>
               </a:rPr>
-              <a:t>All your tools, working together</a:t>
-            </a:r>
-            <a:endParaRPr lang="en-US" sz="3000" dirty="0"/>
+              <a:t>Data foundation &amp; automation</a:t>
+            </a:r>
+            <a:endParaRPr lang="en-US" sz="3200" dirty="0"/>
           </a:p>
         </p:txBody>
       </p:sp>
@@ -15039,7 +14894,7 @@
                 <a:ea typeface="Calibri" pitchFamily="34" charset="-122"/>
                 <a:cs typeface="Calibri" pitchFamily="34" charset="-120"/>
               </a:rPr>
-              <a:t>Today the team juggles many separate tools, moving documents and data around the cloud by hand to keep customers happy. The new platform brings those tools together, so information flows on its own and people spend their time on customers, not on shuffling files between apps.</a:t>
+              <a:t>One secure database under everything, refreshed on a schedule, with a clear “last updated” stamp on every section.</a:t>
             </a:r>
             <a:endParaRPr lang="en-US" sz="1500" dirty="0"/>
           </a:p>
@@ -15047,57 +14902,34 @@
       </p:sp>
       <p:sp>
         <p:nvSpPr>
-          <p:cNvPr id="7" name="Shape 5"/>
-          <p:cNvSpPr/>
+          <p:cNvPr id="7" name="Text 5"/>
+          <p:cNvSpPr txBox="1"/>
           <p:nvPr/>
         </p:nvSpPr>
         <p:spPr>
           <a:xfrm>
             <a:off x="822960" y="3657600"/>
-            <a:ext cx="1883664" cy="384048"/>
-          </a:xfrm>
-          <a:prstGeom prst="roundRect">
-            <a:avLst>
-              <a:gd name="adj" fmla="val 50000"/>
-            </a:avLst>
-          </a:prstGeom>
-          <a:solidFill>
-            <a:srgbClr val="FFFFFF"/>
-          </a:solidFill>
-          <a:ln w="12700">
-            <a:solidFill>
-              <a:srgbClr val="E4DCC9"/>
-            </a:solidFill>
-            <a:prstDash val="solid"/>
-          </a:ln>
-        </p:spPr>
-      </p:sp>
-      <p:sp>
-        <p:nvSpPr>
-          <p:cNvPr id="8" name="Text 6"/>
-          <p:cNvSpPr txBox="1"/>
-          <p:nvPr/>
-        </p:nvSpPr>
-        <p:spPr>
-          <a:xfrm>
-            <a:off x="969264" y="3639312"/>
-            <a:ext cx="1609344" cy="420624"/>
-          </a:xfrm>
-          <a:prstGeom prst="rect">
-            <a:avLst/>
-          </a:prstGeom>
-          <a:noFill/>
-          <a:ln/>
-        </p:spPr>
-        <p:txBody>
-          <a:bodyPr wrap="square" lIns="0" tIns="0" rIns="0" bIns="0" rtlCol="0" anchor="ctr"/>
-          <a:lstStyle/>
-          <a:p>
-            <a:pPr indent="0" marL="0">
-              <a:buNone/>
-            </a:pPr>
-            <a:r>
-              <a:rPr lang="en-US" sz="1050" dirty="0">
+            <a:ext cx="5760720" cy="804672"/>
+          </a:xfrm>
+          <a:prstGeom prst="rect">
+            <a:avLst/>
+          </a:prstGeom>
+          <a:noFill/>
+          <a:ln/>
+        </p:spPr>
+        <p:txBody>
+          <a:bodyPr wrap="square" lIns="0" tIns="0" rIns="0" bIns="0" rtlCol="0" anchor="t"/>
+          <a:lstStyle/>
+          <a:p>
+            <a:pPr marL="177800" indent="-177800">
+              <a:spcAft>
+                <a:spcPts val="800"/>
+              </a:spcAft>
+              <a:buSzPct val="100000"/>
+              <a:buChar char="•"/>
+            </a:pPr>
+            <a:r>
+              <a:rPr lang="en-US" sz="1350" dirty="0">
                 <a:solidFill>
                   <a:srgbClr val="1D1A15"/>
                 </a:solidFill>
@@ -15105,85 +14937,20 @@
                 <a:ea typeface="Calibri" pitchFamily="34" charset="-122"/>
                 <a:cs typeface="Calibri" pitchFamily="34" charset="-120"/>
               </a:rPr>
-              <a:t>Many tools, one home</a:t>
-            </a:r>
-            <a:endParaRPr lang="en-US" sz="1050" dirty="0"/>
-          </a:p>
-        </p:txBody>
-      </p:sp>
-      <p:sp>
-        <p:nvSpPr>
-          <p:cNvPr id="9" name="Shape 7"/>
-          <p:cNvSpPr/>
-          <p:nvPr/>
-        </p:nvSpPr>
-        <p:spPr>
-          <a:xfrm>
-            <a:off x="2871216" y="3657600"/>
-            <a:ext cx="1097280" cy="384048"/>
-          </a:xfrm>
-          <a:prstGeom prst="roundRect">
-            <a:avLst>
-              <a:gd name="adj" fmla="val 50000"/>
-            </a:avLst>
-          </a:prstGeom>
-          <a:solidFill>
-            <a:srgbClr val="FFFFFF"/>
-          </a:solidFill>
-          <a:ln w="12700">
-            <a:solidFill>
-              <a:srgbClr val="E4DCC9"/>
-            </a:solidFill>
-            <a:prstDash val="solid"/>
-          </a:ln>
-        </p:spPr>
-      </p:sp>
-      <p:sp>
-        <p:nvSpPr>
-          <p:cNvPr id="10" name="Shape 8"/>
-          <p:cNvSpPr/>
-          <p:nvPr/>
-        </p:nvSpPr>
-        <p:spPr>
-          <a:xfrm>
-            <a:off x="3017520" y="3799332"/>
-            <a:ext cx="100584" cy="100584"/>
-          </a:xfrm>
-          <a:prstGeom prst="ellipse">
-            <a:avLst/>
-          </a:prstGeom>
-          <a:solidFill>
-            <a:srgbClr val="B0842F"/>
-          </a:solidFill>
-          <a:ln/>
-        </p:spPr>
-      </p:sp>
-      <p:sp>
-        <p:nvSpPr>
-          <p:cNvPr id="11" name="Text 9"/>
-          <p:cNvSpPr txBox="1"/>
-          <p:nvPr/>
-        </p:nvSpPr>
-        <p:spPr>
-          <a:xfrm>
-            <a:off x="3182112" y="3639312"/>
-            <a:ext cx="822960" cy="420624"/>
-          </a:xfrm>
-          <a:prstGeom prst="rect">
-            <a:avLst/>
-          </a:prstGeom>
-          <a:noFill/>
-          <a:ln/>
-        </p:spPr>
-        <p:txBody>
-          <a:bodyPr wrap="square" lIns="0" tIns="0" rIns="0" bIns="0" rtlCol="0" anchor="ctr"/>
-          <a:lstStyle/>
-          <a:p>
-            <a:pPr indent="0" marL="0">
-              <a:buNone/>
-            </a:pPr>
-            <a:r>
-              <a:rPr lang="en-US" sz="1050" dirty="0">
+              <a:t>Real data only, anything illustrative is clearly labeled.</a:t>
+            </a:r>
+            <a:endParaRPr lang="en-US" sz="1350" dirty="0"/>
+          </a:p>
+          <a:p>
+            <a:pPr marL="177800" indent="-177800">
+              <a:spcAft>
+                <a:spcPts val="800"/>
+              </a:spcAft>
+              <a:buSzPct val="100000"/>
+              <a:buChar char="•"/>
+            </a:pPr>
+            <a:r>
+              <a:rPr lang="en-US" sz="1350" dirty="0">
                 <a:solidFill>
                   <a:srgbClr val="1D1A15"/>
                 </a:solidFill>
@@ -15191,15 +14958,15 @@
                 <a:ea typeface="Calibri" pitchFamily="34" charset="-122"/>
                 <a:cs typeface="Calibri" pitchFamily="34" charset="-120"/>
               </a:rPr>
-              <a:t>Planned</a:t>
-            </a:r>
-            <a:endParaRPr lang="en-US" sz="1050" dirty="0"/>
-          </a:p>
-        </p:txBody>
-      </p:sp>
-      <p:sp>
-        <p:nvSpPr>
-          <p:cNvPr id="12" name="Shape 10"/>
+              <a:t>Each person sees only what they should; passwords in a secure vault.</a:t>
+            </a:r>
+            <a:endParaRPr lang="en-US" sz="1350" dirty="0"/>
+          </a:p>
+        </p:txBody>
+      </p:sp>
+      <p:sp>
+        <p:nvSpPr>
+          <p:cNvPr id="8" name="Shape 6"/>
           <p:cNvSpPr/>
           <p:nvPr/>
         </p:nvSpPr>
@@ -15233,7 +15000,7 @@
       </p:sp>
       <p:sp>
         <p:nvSpPr>
-          <p:cNvPr id="13" name="Shape 11"/>
+          <p:cNvPr id="9" name="Shape 7"/>
           <p:cNvSpPr/>
           <p:nvPr/>
         </p:nvSpPr>
@@ -15255,7 +15022,7 @@
       </p:sp>
       <p:sp>
         <p:nvSpPr>
-          <p:cNvPr id="14" name="Shape 12"/>
+          <p:cNvPr id="10" name="Shape 8"/>
           <p:cNvSpPr/>
           <p:nvPr/>
         </p:nvSpPr>
@@ -15275,7 +15042,7 @@
       </p:sp>
       <p:sp>
         <p:nvSpPr>
-          <p:cNvPr id="15" name="Shape 13"/>
+          <p:cNvPr id="11" name="Shape 9"/>
           <p:cNvSpPr/>
           <p:nvPr/>
         </p:nvSpPr>
@@ -15295,7 +15062,7 @@
       </p:sp>
       <p:sp>
         <p:nvSpPr>
-          <p:cNvPr id="16" name="Shape 14"/>
+          <p:cNvPr id="12" name="Shape 10"/>
           <p:cNvSpPr/>
           <p:nvPr/>
         </p:nvSpPr>
@@ -15315,7 +15082,7 @@
       </p:sp>
       <p:sp>
         <p:nvSpPr>
-          <p:cNvPr id="17" name="Shape 15"/>
+          <p:cNvPr id="13" name="Shape 11"/>
           <p:cNvSpPr/>
           <p:nvPr/>
         </p:nvSpPr>
@@ -15335,7 +15102,7 @@
       </p:sp>
       <p:sp>
         <p:nvSpPr>
-          <p:cNvPr id="18" name="Text 16"/>
+          <p:cNvPr id="14" name="Text 12"/>
           <p:cNvSpPr txBox="1"/>
           <p:nvPr/>
         </p:nvSpPr>
@@ -15366,7 +15133,7 @@
                 <a:ea typeface="Calibri" pitchFamily="34" charset="-122"/>
                 <a:cs typeface="Calibri" pitchFamily="34" charset="-120"/>
               </a:rPr>
-              <a:t>one platform</a:t>
+              <a:t>company database</a:t>
             </a:r>
             <a:endParaRPr lang="en-US" sz="900" dirty="0"/>
           </a:p>
@@ -15374,7 +15141,7 @@
       </p:sp>
       <p:sp>
         <p:nvSpPr>
-          <p:cNvPr id="19" name="Shape 17"/>
+          <p:cNvPr id="15" name="Shape 13"/>
           <p:cNvSpPr/>
           <p:nvPr/>
         </p:nvSpPr>
@@ -15397,18 +15164,18 @@
       </p:sp>
       <p:sp>
         <p:nvSpPr>
-          <p:cNvPr id="20" name="Shape 18"/>
-          <p:cNvSpPr/>
-          <p:nvPr/>
-        </p:nvSpPr>
-        <p:spPr>
-          <a:xfrm>
-            <a:off x="7296912" y="2258568"/>
-            <a:ext cx="1237488" cy="502920"/>
+          <p:cNvPr id="16" name="Shape 14"/>
+          <p:cNvSpPr/>
+          <p:nvPr/>
+        </p:nvSpPr>
+        <p:spPr>
+          <a:xfrm>
+            <a:off x="7296912" y="2212848"/>
+            <a:ext cx="1901952" cy="1298448"/>
           </a:xfrm>
           <a:prstGeom prst="roundRect">
             <a:avLst>
-              <a:gd name="adj" fmla="val 10909"/>
+              <a:gd name="adj" fmla="val 4225"/>
             </a:avLst>
           </a:prstGeom>
           <a:solidFill>
@@ -15424,14 +15191,14 @@
       </p:sp>
       <p:sp>
         <p:nvSpPr>
-          <p:cNvPr id="21" name="Text 19"/>
-          <p:cNvSpPr txBox="1"/>
-          <p:nvPr/>
-        </p:nvSpPr>
-        <p:spPr>
-          <a:xfrm>
-            <a:off x="7333488" y="2258568"/>
-            <a:ext cx="1164336" cy="502920"/>
+          <p:cNvPr id="17" name="Text 15"/>
+          <p:cNvSpPr txBox="1"/>
+          <p:nvPr/>
+        </p:nvSpPr>
+        <p:spPr>
+          <a:xfrm>
+            <a:off x="7424928" y="2359152"/>
+            <a:ext cx="1645920" cy="274320"/>
           </a:xfrm>
           <a:prstGeom prst="rect">
             <a:avLst/>
@@ -15443,11 +15210,50 @@
           <a:bodyPr wrap="square" lIns="0" tIns="0" rIns="0" bIns="0" rtlCol="0" anchor="ctr"/>
           <a:lstStyle/>
           <a:p>
-            <a:pPr algn="ctr" indent="0" marL="0">
-              <a:buNone/>
-            </a:pPr>
-            <a:r>
-              <a:rPr lang="en-US" sz="750" dirty="0">
+            <a:pPr indent="0" marL="0">
+              <a:buNone/>
+            </a:pPr>
+            <a:r>
+              <a:rPr lang="en-US" sz="850" b="1" spc="100" kern="0" dirty="0">
+                <a:solidFill>
+                  <a:srgbClr val="7A7266"/>
+                </a:solidFill>
+                <a:latin typeface="Calibri" pitchFamily="34" charset="0"/>
+                <a:ea typeface="Calibri" pitchFamily="34" charset="-122"/>
+                <a:cs typeface="Calibri" pitchFamily="34" charset="-120"/>
+              </a:rPr>
+              <a:t>UPDATES</a:t>
+            </a:r>
+            <a:endParaRPr lang="en-US" sz="850" dirty="0"/>
+          </a:p>
+        </p:txBody>
+      </p:sp>
+      <p:sp>
+        <p:nvSpPr>
+          <p:cNvPr id="18" name="Text 16"/>
+          <p:cNvSpPr txBox="1"/>
+          <p:nvPr/>
+        </p:nvSpPr>
+        <p:spPr>
+          <a:xfrm>
+            <a:off x="7424928" y="2670048"/>
+            <a:ext cx="1645920" cy="457200"/>
+          </a:xfrm>
+          <a:prstGeom prst="rect">
+            <a:avLst/>
+          </a:prstGeom>
+          <a:noFill/>
+          <a:ln/>
+        </p:spPr>
+        <p:txBody>
+          <a:bodyPr wrap="square" lIns="0" tIns="0" rIns="0" bIns="0" rtlCol="0" anchor="ctr"/>
+          <a:lstStyle/>
+          <a:p>
+            <a:pPr indent="0" marL="0">
+              <a:buNone/>
+            </a:pPr>
+            <a:r>
+              <a:rPr lang="en-US" sz="1100" dirty="0">
                 <a:solidFill>
                   <a:srgbClr val="1D1A15"/>
                 </a:solidFill>
@@ -15455,26 +15261,26 @@
                 <a:ea typeface="Calibri" pitchFamily="34" charset="-122"/>
                 <a:cs typeface="Calibri" pitchFamily="34" charset="-120"/>
               </a:rPr>
-              <a:t>Salesforce</a:t>
-            </a:r>
-            <a:endParaRPr lang="en-US" sz="750" dirty="0"/>
-          </a:p>
-        </p:txBody>
-      </p:sp>
-      <p:sp>
-        <p:nvSpPr>
-          <p:cNvPr id="22" name="Shape 20"/>
-          <p:cNvSpPr/>
-          <p:nvPr/>
-        </p:nvSpPr>
-        <p:spPr>
-          <a:xfrm>
-            <a:off x="8662416" y="2258568"/>
-            <a:ext cx="1237488" cy="502920"/>
+              <a:t>on a schedule</a:t>
+            </a:r>
+            <a:endParaRPr lang="en-US" sz="1100" dirty="0"/>
+          </a:p>
+        </p:txBody>
+      </p:sp>
+      <p:sp>
+        <p:nvSpPr>
+          <p:cNvPr id="19" name="Shape 17"/>
+          <p:cNvSpPr/>
+          <p:nvPr/>
+        </p:nvSpPr>
+        <p:spPr>
+          <a:xfrm>
+            <a:off x="9363456" y="2212848"/>
+            <a:ext cx="1901952" cy="1298448"/>
           </a:xfrm>
           <a:prstGeom prst="roundRect">
             <a:avLst>
-              <a:gd name="adj" fmla="val 10909"/>
+              <a:gd name="adj" fmla="val 4225"/>
             </a:avLst>
           </a:prstGeom>
           <a:solidFill>
@@ -15490,14 +15296,14 @@
       </p:sp>
       <p:sp>
         <p:nvSpPr>
-          <p:cNvPr id="23" name="Text 21"/>
-          <p:cNvSpPr txBox="1"/>
-          <p:nvPr/>
-        </p:nvSpPr>
-        <p:spPr>
-          <a:xfrm>
-            <a:off x="8698992" y="2258568"/>
-            <a:ext cx="1164336" cy="502920"/>
+          <p:cNvPr id="20" name="Text 18"/>
+          <p:cNvSpPr txBox="1"/>
+          <p:nvPr/>
+        </p:nvSpPr>
+        <p:spPr>
+          <a:xfrm>
+            <a:off x="9491472" y="2359152"/>
+            <a:ext cx="1645920" cy="274320"/>
           </a:xfrm>
           <a:prstGeom prst="rect">
             <a:avLst/>
@@ -15509,11 +15315,50 @@
           <a:bodyPr wrap="square" lIns="0" tIns="0" rIns="0" bIns="0" rtlCol="0" anchor="ctr"/>
           <a:lstStyle/>
           <a:p>
-            <a:pPr algn="ctr" indent="0" marL="0">
-              <a:buNone/>
-            </a:pPr>
-            <a:r>
-              <a:rPr lang="en-US" sz="750" dirty="0">
+            <a:pPr indent="0" marL="0">
+              <a:buNone/>
+            </a:pPr>
+            <a:r>
+              <a:rPr lang="en-US" sz="850" b="1" spc="100" kern="0" dirty="0">
+                <a:solidFill>
+                  <a:srgbClr val="7A7266"/>
+                </a:solidFill>
+                <a:latin typeface="Calibri" pitchFamily="34" charset="0"/>
+                <a:ea typeface="Calibri" pitchFamily="34" charset="-122"/>
+                <a:cs typeface="Calibri" pitchFamily="34" charset="-120"/>
+              </a:rPr>
+              <a:t>SECURITY</a:t>
+            </a:r>
+            <a:endParaRPr lang="en-US" sz="850" dirty="0"/>
+          </a:p>
+        </p:txBody>
+      </p:sp>
+      <p:sp>
+        <p:nvSpPr>
+          <p:cNvPr id="21" name="Text 19"/>
+          <p:cNvSpPr txBox="1"/>
+          <p:nvPr/>
+        </p:nvSpPr>
+        <p:spPr>
+          <a:xfrm>
+            <a:off x="9491472" y="2670048"/>
+            <a:ext cx="1645920" cy="457200"/>
+          </a:xfrm>
+          <a:prstGeom prst="rect">
+            <a:avLst/>
+          </a:prstGeom>
+          <a:noFill/>
+          <a:ln/>
+        </p:spPr>
+        <p:txBody>
+          <a:bodyPr wrap="square" lIns="0" tIns="0" rIns="0" bIns="0" rtlCol="0" anchor="ctr"/>
+          <a:lstStyle/>
+          <a:p>
+            <a:pPr indent="0" marL="0">
+              <a:buNone/>
+            </a:pPr>
+            <a:r>
+              <a:rPr lang="en-US" sz="1100" dirty="0">
                 <a:solidFill>
                   <a:srgbClr val="1D1A15"/>
                 </a:solidFill>
@@ -15521,26 +15366,26 @@
                 <a:ea typeface="Calibri" pitchFamily="34" charset="-122"/>
                 <a:cs typeface="Calibri" pitchFamily="34" charset="-120"/>
               </a:rPr>
-              <a:t>Learning platform</a:t>
-            </a:r>
-            <a:endParaRPr lang="en-US" sz="750" dirty="0"/>
-          </a:p>
-        </p:txBody>
-      </p:sp>
-      <p:sp>
-        <p:nvSpPr>
-          <p:cNvPr id="24" name="Shape 22"/>
-          <p:cNvSpPr/>
-          <p:nvPr/>
-        </p:nvSpPr>
-        <p:spPr>
-          <a:xfrm>
-            <a:off x="10027920" y="2258568"/>
-            <a:ext cx="1237488" cy="502920"/>
+              <a:t>locked per user</a:t>
+            </a:r>
+            <a:endParaRPr lang="en-US" sz="1100" dirty="0"/>
+          </a:p>
+        </p:txBody>
+      </p:sp>
+      <p:sp>
+        <p:nvSpPr>
+          <p:cNvPr id="22" name="Shape 20"/>
+          <p:cNvSpPr/>
+          <p:nvPr/>
+        </p:nvSpPr>
+        <p:spPr>
+          <a:xfrm>
+            <a:off x="7296912" y="3675888"/>
+            <a:ext cx="1901952" cy="1298448"/>
           </a:xfrm>
           <a:prstGeom prst="roundRect">
             <a:avLst>
-              <a:gd name="adj" fmla="val 10909"/>
+              <a:gd name="adj" fmla="val 4225"/>
             </a:avLst>
           </a:prstGeom>
           <a:solidFill>
@@ -15556,14 +15401,14 @@
       </p:sp>
       <p:sp>
         <p:nvSpPr>
-          <p:cNvPr id="25" name="Text 23"/>
-          <p:cNvSpPr txBox="1"/>
-          <p:nvPr/>
-        </p:nvSpPr>
-        <p:spPr>
-          <a:xfrm>
-            <a:off x="10064496" y="2258568"/>
-            <a:ext cx="1164336" cy="502920"/>
+          <p:cNvPr id="23" name="Text 21"/>
+          <p:cNvSpPr txBox="1"/>
+          <p:nvPr/>
+        </p:nvSpPr>
+        <p:spPr>
+          <a:xfrm>
+            <a:off x="7424928" y="3822192"/>
+            <a:ext cx="1645920" cy="274320"/>
           </a:xfrm>
           <a:prstGeom prst="rect">
             <a:avLst/>
@@ -15575,11 +15420,50 @@
           <a:bodyPr wrap="square" lIns="0" tIns="0" rIns="0" bIns="0" rtlCol="0" anchor="ctr"/>
           <a:lstStyle/>
           <a:p>
-            <a:pPr algn="ctr" indent="0" marL="0">
-              <a:buNone/>
-            </a:pPr>
-            <a:r>
-              <a:rPr lang="en-US" sz="750" dirty="0">
+            <a:pPr indent="0" marL="0">
+              <a:buNone/>
+            </a:pPr>
+            <a:r>
+              <a:rPr lang="en-US" sz="850" b="1" spc="100" kern="0" dirty="0">
+                <a:solidFill>
+                  <a:srgbClr val="7A7266"/>
+                </a:solidFill>
+                <a:latin typeface="Calibri" pitchFamily="34" charset="0"/>
+                <a:ea typeface="Calibri" pitchFamily="34" charset="-122"/>
+                <a:cs typeface="Calibri" pitchFamily="34" charset="-120"/>
+              </a:rPr>
+              <a:t>FRESHNESS</a:t>
+            </a:r>
+            <a:endParaRPr lang="en-US" sz="850" dirty="0"/>
+          </a:p>
+        </p:txBody>
+      </p:sp>
+      <p:sp>
+        <p:nvSpPr>
+          <p:cNvPr id="24" name="Text 22"/>
+          <p:cNvSpPr txBox="1"/>
+          <p:nvPr/>
+        </p:nvSpPr>
+        <p:spPr>
+          <a:xfrm>
+            <a:off x="7424928" y="4133088"/>
+            <a:ext cx="1645920" cy="457200"/>
+          </a:xfrm>
+          <a:prstGeom prst="rect">
+            <a:avLst/>
+          </a:prstGeom>
+          <a:noFill/>
+          <a:ln/>
+        </p:spPr>
+        <p:txBody>
+          <a:bodyPr wrap="square" lIns="0" tIns="0" rIns="0" bIns="0" rtlCol="0" anchor="ctr"/>
+          <a:lstStyle/>
+          <a:p>
+            <a:pPr indent="0" marL="0">
+              <a:buNone/>
+            </a:pPr>
+            <a:r>
+              <a:rPr lang="en-US" sz="1100" dirty="0">
                 <a:solidFill>
                   <a:srgbClr val="1D1A15"/>
                 </a:solidFill>
@@ -15587,26 +15471,26 @@
                 <a:ea typeface="Calibri" pitchFamily="34" charset="-122"/>
                 <a:cs typeface="Calibri" pitchFamily="34" charset="-120"/>
               </a:rPr>
-              <a:t>Email</a:t>
-            </a:r>
-            <a:endParaRPr lang="en-US" sz="750" dirty="0"/>
-          </a:p>
-        </p:txBody>
-      </p:sp>
-      <p:sp>
-        <p:nvSpPr>
-          <p:cNvPr id="26" name="Shape 24"/>
-          <p:cNvSpPr/>
-          <p:nvPr/>
-        </p:nvSpPr>
-        <p:spPr>
-          <a:xfrm>
-            <a:off x="7296912" y="2889504"/>
-            <a:ext cx="1237488" cy="502920"/>
+              <a:t>last-updated stamps</a:t>
+            </a:r>
+            <a:endParaRPr lang="en-US" sz="1100" dirty="0"/>
+          </a:p>
+        </p:txBody>
+      </p:sp>
+      <p:sp>
+        <p:nvSpPr>
+          <p:cNvPr id="25" name="Shape 23"/>
+          <p:cNvSpPr/>
+          <p:nvPr/>
+        </p:nvSpPr>
+        <p:spPr>
+          <a:xfrm>
+            <a:off x="9363456" y="3675888"/>
+            <a:ext cx="1901952" cy="1298448"/>
           </a:xfrm>
           <a:prstGeom prst="roundRect">
             <a:avLst>
-              <a:gd name="adj" fmla="val 10909"/>
+              <a:gd name="adj" fmla="val 4225"/>
             </a:avLst>
           </a:prstGeom>
           <a:solidFill>
@@ -15622,14 +15506,53 @@
       </p:sp>
       <p:sp>
         <p:nvSpPr>
+          <p:cNvPr id="26" name="Text 24"/>
+          <p:cNvSpPr txBox="1"/>
+          <p:nvPr/>
+        </p:nvSpPr>
+        <p:spPr>
+          <a:xfrm>
+            <a:off x="9491472" y="3822192"/>
+            <a:ext cx="1645920" cy="274320"/>
+          </a:xfrm>
+          <a:prstGeom prst="rect">
+            <a:avLst/>
+          </a:prstGeom>
+          <a:noFill/>
+          <a:ln/>
+        </p:spPr>
+        <p:txBody>
+          <a:bodyPr wrap="square" lIns="0" tIns="0" rIns="0" bIns="0" rtlCol="0" anchor="ctr"/>
+          <a:lstStyle/>
+          <a:p>
+            <a:pPr indent="0" marL="0">
+              <a:buNone/>
+            </a:pPr>
+            <a:r>
+              <a:rPr lang="en-US" sz="850" b="1" spc="100" kern="0" dirty="0">
+                <a:solidFill>
+                  <a:srgbClr val="7A7266"/>
+                </a:solidFill>
+                <a:latin typeface="Calibri" pitchFamily="34" charset="0"/>
+                <a:ea typeface="Calibri" pitchFamily="34" charset="-122"/>
+                <a:cs typeface="Calibri" pitchFamily="34" charset="-120"/>
+              </a:rPr>
+              <a:t>SECRETS</a:t>
+            </a:r>
+            <a:endParaRPr lang="en-US" sz="850" dirty="0"/>
+          </a:p>
+        </p:txBody>
+      </p:sp>
+      <p:sp>
+        <p:nvSpPr>
           <p:cNvPr id="27" name="Text 25"/>
           <p:cNvSpPr txBox="1"/>
           <p:nvPr/>
         </p:nvSpPr>
         <p:spPr>
           <a:xfrm>
-            <a:off x="7333488" y="2889504"/>
-            <a:ext cx="1164336" cy="502920"/>
+            <a:off x="9491472" y="4133088"/>
+            <a:ext cx="1645920" cy="457200"/>
           </a:xfrm>
           <a:prstGeom prst="rect">
             <a:avLst/>
@@ -15641,11 +15564,11 @@
           <a:bodyPr wrap="square" lIns="0" tIns="0" rIns="0" bIns="0" rtlCol="0" anchor="ctr"/>
           <a:lstStyle/>
           <a:p>
-            <a:pPr algn="ctr" indent="0" marL="0">
-              <a:buNone/>
-            </a:pPr>
-            <a:r>
-              <a:rPr lang="en-US" sz="750" dirty="0">
+            <a:pPr indent="0" marL="0">
+              <a:buNone/>
+            </a:pPr>
+            <a:r>
+              <a:rPr lang="en-US" sz="1100" dirty="0">
                 <a:solidFill>
                   <a:srgbClr val="1D1A15"/>
                 </a:solidFill>
@@ -15653,246 +15576,9 @@
                 <a:ea typeface="Calibri" pitchFamily="34" charset="-122"/>
                 <a:cs typeface="Calibri" pitchFamily="34" charset="-120"/>
               </a:rPr>
-              <a:t>Spreadsheets</a:t>
-            </a:r>
-            <a:endParaRPr lang="en-US" sz="750" dirty="0"/>
-          </a:p>
-        </p:txBody>
-      </p:sp>
-      <p:sp>
-        <p:nvSpPr>
-          <p:cNvPr id="28" name="Shape 26"/>
-          <p:cNvSpPr/>
-          <p:nvPr/>
-        </p:nvSpPr>
-        <p:spPr>
-          <a:xfrm>
-            <a:off x="8662416" y="2889504"/>
-            <a:ext cx="1237488" cy="502920"/>
-          </a:xfrm>
-          <a:prstGeom prst="roundRect">
-            <a:avLst>
-              <a:gd name="adj" fmla="val 10909"/>
-            </a:avLst>
-          </a:prstGeom>
-          <a:solidFill>
-            <a:srgbClr val="FBFAF6"/>
-          </a:solidFill>
-          <a:ln w="12700">
-            <a:solidFill>
-              <a:srgbClr val="E4DCC9"/>
-            </a:solidFill>
-            <a:prstDash val="solid"/>
-          </a:ln>
-        </p:spPr>
-      </p:sp>
-      <p:sp>
-        <p:nvSpPr>
-          <p:cNvPr id="29" name="Text 27"/>
-          <p:cNvSpPr txBox="1"/>
-          <p:nvPr/>
-        </p:nvSpPr>
-        <p:spPr>
-          <a:xfrm>
-            <a:off x="8698992" y="2889504"/>
-            <a:ext cx="1164336" cy="502920"/>
-          </a:xfrm>
-          <a:prstGeom prst="rect">
-            <a:avLst/>
-          </a:prstGeom>
-          <a:noFill/>
-          <a:ln/>
-        </p:spPr>
-        <p:txBody>
-          <a:bodyPr wrap="square" lIns="0" tIns="0" rIns="0" bIns="0" rtlCol="0" anchor="ctr"/>
-          <a:lstStyle/>
-          <a:p>
-            <a:pPr algn="ctr" indent="0" marL="0">
-              <a:buNone/>
-            </a:pPr>
-            <a:r>
-              <a:rPr lang="en-US" sz="750" dirty="0">
-                <a:solidFill>
-                  <a:srgbClr val="1D1A15"/>
-                </a:solidFill>
-                <a:latin typeface="Calibri" pitchFamily="34" charset="0"/>
-                <a:ea typeface="Calibri" pitchFamily="34" charset="-122"/>
-                <a:cs typeface="Calibri" pitchFamily="34" charset="-120"/>
-              </a:rPr>
-              <a:t>Documents</a:t>
-            </a:r>
-            <a:endParaRPr lang="en-US" sz="750" dirty="0"/>
-          </a:p>
-        </p:txBody>
-      </p:sp>
-      <p:sp>
-        <p:nvSpPr>
-          <p:cNvPr id="30" name="Shape 28"/>
-          <p:cNvSpPr/>
-          <p:nvPr/>
-        </p:nvSpPr>
-        <p:spPr>
-          <a:xfrm>
-            <a:off x="10027920" y="2889504"/>
-            <a:ext cx="1237488" cy="502920"/>
-          </a:xfrm>
-          <a:prstGeom prst="roundRect">
-            <a:avLst>
-              <a:gd name="adj" fmla="val 10909"/>
-            </a:avLst>
-          </a:prstGeom>
-          <a:solidFill>
-            <a:srgbClr val="FBFAF6"/>
-          </a:solidFill>
-          <a:ln w="12700">
-            <a:solidFill>
-              <a:srgbClr val="E4DCC9"/>
-            </a:solidFill>
-            <a:prstDash val="solid"/>
-          </a:ln>
-        </p:spPr>
-      </p:sp>
-      <p:sp>
-        <p:nvSpPr>
-          <p:cNvPr id="31" name="Text 29"/>
-          <p:cNvSpPr txBox="1"/>
-          <p:nvPr/>
-        </p:nvSpPr>
-        <p:spPr>
-          <a:xfrm>
-            <a:off x="10064496" y="2889504"/>
-            <a:ext cx="1164336" cy="502920"/>
-          </a:xfrm>
-          <a:prstGeom prst="rect">
-            <a:avLst/>
-          </a:prstGeom>
-          <a:noFill/>
-          <a:ln/>
-        </p:spPr>
-        <p:txBody>
-          <a:bodyPr wrap="square" lIns="0" tIns="0" rIns="0" bIns="0" rtlCol="0" anchor="ctr"/>
-          <a:lstStyle/>
-          <a:p>
-            <a:pPr algn="ctr" indent="0" marL="0">
-              <a:buNone/>
-            </a:pPr>
-            <a:r>
-              <a:rPr lang="en-US" sz="750" dirty="0">
-                <a:solidFill>
-                  <a:srgbClr val="1D1A15"/>
-                </a:solidFill>
-                <a:latin typeface="Calibri" pitchFamily="34" charset="0"/>
-                <a:ea typeface="Calibri" pitchFamily="34" charset="-122"/>
-                <a:cs typeface="Calibri" pitchFamily="34" charset="-120"/>
-              </a:rPr>
-              <a:t>Trello</a:t>
-            </a:r>
-            <a:endParaRPr lang="en-US" sz="750" dirty="0"/>
-          </a:p>
-        </p:txBody>
-      </p:sp>
-      <p:sp>
-        <p:nvSpPr>
-          <p:cNvPr id="32" name="Text 30"/>
-          <p:cNvSpPr txBox="1"/>
-          <p:nvPr/>
-        </p:nvSpPr>
-        <p:spPr>
-          <a:xfrm>
-            <a:off x="7296912" y="3438144"/>
-            <a:ext cx="3968496" cy="274320"/>
-          </a:xfrm>
-          <a:prstGeom prst="rect">
-            <a:avLst/>
-          </a:prstGeom>
-          <a:noFill/>
-          <a:ln/>
-        </p:spPr>
-        <p:txBody>
-          <a:bodyPr wrap="square" lIns="0" tIns="0" rIns="0" bIns="0" rtlCol="0" anchor="ctr"/>
-          <a:lstStyle/>
-          <a:p>
-            <a:pPr algn="ctr" indent="0" marL="0">
-              <a:buNone/>
-            </a:pPr>
-            <a:r>
-              <a:rPr lang="en-US" sz="1500" b="1" dirty="0">
-                <a:solidFill>
-                  <a:srgbClr val="9C7C2E"/>
-                </a:solidFill>
-                <a:latin typeface="Calibri" pitchFamily="34" charset="0"/>
-                <a:ea typeface="Calibri" pitchFamily="34" charset="-122"/>
-                <a:cs typeface="Calibri" pitchFamily="34" charset="-120"/>
-              </a:rPr>
-              <a:t>↓</a:t>
-            </a:r>
-            <a:endParaRPr lang="en-US" sz="1500" dirty="0"/>
-          </a:p>
-        </p:txBody>
-      </p:sp>
-      <p:sp>
-        <p:nvSpPr>
-          <p:cNvPr id="33" name="Shape 31"/>
-          <p:cNvSpPr/>
-          <p:nvPr/>
-        </p:nvSpPr>
-        <p:spPr>
-          <a:xfrm>
-            <a:off x="7296912" y="3803904"/>
-            <a:ext cx="3968496" cy="566928"/>
-          </a:xfrm>
-          <a:prstGeom prst="roundRect">
-            <a:avLst>
-              <a:gd name="adj" fmla="val 16129"/>
-            </a:avLst>
-          </a:prstGeom>
-          <a:solidFill>
-            <a:srgbClr val="F3E7C8"/>
-          </a:solidFill>
-          <a:ln w="12700">
-            <a:solidFill>
-              <a:srgbClr val="9C7C2E"/>
-            </a:solidFill>
-            <a:prstDash val="solid"/>
-          </a:ln>
-        </p:spPr>
-      </p:sp>
-      <p:sp>
-        <p:nvSpPr>
-          <p:cNvPr id="34" name="Text 32"/>
-          <p:cNvSpPr txBox="1"/>
-          <p:nvPr/>
-        </p:nvSpPr>
-        <p:spPr>
-          <a:xfrm>
-            <a:off x="7296912" y="3803904"/>
-            <a:ext cx="3968496" cy="566928"/>
-          </a:xfrm>
-          <a:prstGeom prst="rect">
-            <a:avLst/>
-          </a:prstGeom>
-          <a:noFill/>
-          <a:ln/>
-        </p:spPr>
-        <p:txBody>
-          <a:bodyPr wrap="square" lIns="0" tIns="0" rIns="0" bIns="0" rtlCol="0" anchor="ctr"/>
-          <a:lstStyle/>
-          <a:p>
-            <a:pPr algn="ctr" indent="0" marL="0">
-              <a:buNone/>
-            </a:pPr>
-            <a:r>
-              <a:rPr lang="en-US" sz="1300" b="1" dirty="0">
-                <a:solidFill>
-                  <a:srgbClr val="7A5A12"/>
-                </a:solidFill>
-                <a:latin typeface="Georgia" pitchFamily="34" charset="0"/>
-                <a:ea typeface="Georgia" pitchFamily="34" charset="-122"/>
-                <a:cs typeface="Georgia" pitchFamily="34" charset="-120"/>
-              </a:rPr>
-              <a:t>DeepRoots · one platform</a:t>
-            </a:r>
-            <a:endParaRPr lang="en-US" sz="1300" dirty="0"/>
+              <a:t>in a secure vault</a:t>
+            </a:r>
+            <a:endParaRPr lang="en-US" sz="1100" dirty="0"/>
           </a:p>
         </p:txBody>
       </p:sp>
@@ -15961,7 +15647,7 @@
                 <a:ea typeface="Calibri" pitchFamily="34" charset="-122"/>
                 <a:cs typeface="Calibri" pitchFamily="34" charset="-120"/>
               </a:rPr>
-              <a:t>BEHIND THE SCENES · FOUNDATION</a:t>
+              <a:t>WHAT WE’D BUILD · ROOTED HELPER</a:t>
             </a:r>
             <a:endParaRPr lang="en-US" sz="1100" dirty="0"/>
           </a:p>
@@ -16027,7 +15713,7 @@
                 <a:ea typeface="Calibri" pitchFamily="34" charset="-122"/>
                 <a:cs typeface="Calibri" pitchFamily="34" charset="-120"/>
               </a:rPr>
-              <a:t>PHASE 3</a:t>
+              <a:t>PHASE 2</a:t>
             </a:r>
             <a:endParaRPr lang="en-US" sz="850" dirty="0"/>
           </a:p>
@@ -16061,7 +15747,7 @@
               <a:buNone/>
             </a:pPr>
             <a:r>
-              <a:rPr lang="en-US" sz="3200" b="1" dirty="0">
+              <a:rPr lang="en-US" sz="2800" b="1" dirty="0">
                 <a:solidFill>
                   <a:srgbClr val="1D1A15"/>
                 </a:solidFill>
@@ -16069,9 +15755,9 @@
                 <a:ea typeface="Georgia" pitchFamily="34" charset="-122"/>
                 <a:cs typeface="Georgia" pitchFamily="34" charset="-120"/>
               </a:rPr>
-              <a:t>Data foundation &amp; automation</a:t>
-            </a:r>
-            <a:endParaRPr lang="en-US" sz="3200" dirty="0"/>
+              <a:t>One helper that knows who you are</a:t>
+            </a:r>
+            <a:endParaRPr lang="en-US" sz="2800" dirty="0"/>
           </a:p>
         </p:txBody>
       </p:sp>
@@ -16111,7 +15797,7 @@
                 <a:ea typeface="Calibri" pitchFamily="34" charset="-122"/>
                 <a:cs typeface="Calibri" pitchFamily="34" charset="-120"/>
               </a:rPr>
-              <a:t>One secure database under everything, refreshed on a schedule, with a clear “last updated” stamp on every section.</a:t>
+              <a:t>One built-in helper for everyone. It knows your role the moment you sign in and answers any question in your world, from first-day setup to daily tasks to finding a lesson. Staff get internal answers; schools and homeschools get theirs, and role-based access means a school never sees internal-only information.</a:t>
             </a:r>
             <a:endParaRPr lang="en-US" sz="1500" dirty="0"/>
           </a:p>
@@ -16154,7 +15840,7 @@
                 <a:ea typeface="Calibri" pitchFamily="34" charset="-122"/>
                 <a:cs typeface="Calibri" pitchFamily="34" charset="-120"/>
               </a:rPr>
-              <a:t>Real data only, anything illustrative is clearly labeled.</a:t>
+              <a:t>Knows your role the moment you sign in</a:t>
             </a:r>
             <a:endParaRPr lang="en-US" sz="1350" dirty="0"/>
           </a:p>
@@ -16175,7 +15861,7 @@
                 <a:ea typeface="Calibri" pitchFamily="34" charset="-122"/>
                 <a:cs typeface="Calibri" pitchFamily="34" charset="-120"/>
               </a:rPr>
-              <a:t>Each person sees only what they should; passwords in a secure vault.</a:t>
+              <a:t>Role-based access keeps internal info internal</a:t>
             </a:r>
             <a:endParaRPr lang="en-US" sz="1350" dirty="0"/>
           </a:p>
@@ -16184,6 +15870,158 @@
       <p:sp>
         <p:nvSpPr>
           <p:cNvPr id="8" name="Shape 6"/>
+          <p:cNvSpPr/>
+          <p:nvPr/>
+        </p:nvSpPr>
+        <p:spPr>
+          <a:xfrm>
+            <a:off x="822960" y="4645152"/>
+            <a:ext cx="2033626" cy="384048"/>
+          </a:xfrm>
+          <a:prstGeom prst="roundRect">
+            <a:avLst>
+              <a:gd name="adj" fmla="val 50000"/>
+            </a:avLst>
+          </a:prstGeom>
+          <a:solidFill>
+            <a:srgbClr val="FFFFFF"/>
+          </a:solidFill>
+          <a:ln w="12700">
+            <a:solidFill>
+              <a:srgbClr val="E4DCC9"/>
+            </a:solidFill>
+            <a:prstDash val="solid"/>
+          </a:ln>
+        </p:spPr>
+      </p:sp>
+      <p:sp>
+        <p:nvSpPr>
+          <p:cNvPr id="9" name="Text 7"/>
+          <p:cNvSpPr txBox="1"/>
+          <p:nvPr/>
+        </p:nvSpPr>
+        <p:spPr>
+          <a:xfrm>
+            <a:off x="969264" y="4626864"/>
+            <a:ext cx="1759306" cy="420624"/>
+          </a:xfrm>
+          <a:prstGeom prst="rect">
+            <a:avLst/>
+          </a:prstGeom>
+          <a:noFill/>
+          <a:ln/>
+        </p:spPr>
+        <p:txBody>
+          <a:bodyPr wrap="square" lIns="0" tIns="0" rIns="0" bIns="0" rtlCol="0" anchor="ctr"/>
+          <a:lstStyle/>
+          <a:p>
+            <a:pPr indent="0" marL="0">
+              <a:buNone/>
+            </a:pPr>
+            <a:r>
+              <a:rPr lang="en-US" sz="1050" dirty="0">
+                <a:solidFill>
+                  <a:srgbClr val="1D1A15"/>
+                </a:solidFill>
+                <a:latin typeface="Calibri" pitchFamily="34" charset="0"/>
+                <a:ea typeface="Calibri" pitchFamily="34" charset="-122"/>
+                <a:cs typeface="Calibri" pitchFamily="34" charset="-120"/>
+              </a:rPr>
+              <a:t>One helper, every role</a:t>
+            </a:r>
+            <a:endParaRPr lang="en-US" sz="1050" dirty="0"/>
+          </a:p>
+        </p:txBody>
+      </p:sp>
+      <p:sp>
+        <p:nvSpPr>
+          <p:cNvPr id="10" name="Shape 8"/>
+          <p:cNvSpPr/>
+          <p:nvPr/>
+        </p:nvSpPr>
+        <p:spPr>
+          <a:xfrm>
+            <a:off x="3021178" y="4645152"/>
+            <a:ext cx="1097280" cy="384048"/>
+          </a:xfrm>
+          <a:prstGeom prst="roundRect">
+            <a:avLst>
+              <a:gd name="adj" fmla="val 50000"/>
+            </a:avLst>
+          </a:prstGeom>
+          <a:solidFill>
+            <a:srgbClr val="FFFFFF"/>
+          </a:solidFill>
+          <a:ln w="12700">
+            <a:solidFill>
+              <a:srgbClr val="E4DCC9"/>
+            </a:solidFill>
+            <a:prstDash val="solid"/>
+          </a:ln>
+        </p:spPr>
+      </p:sp>
+      <p:sp>
+        <p:nvSpPr>
+          <p:cNvPr id="11" name="Shape 9"/>
+          <p:cNvSpPr/>
+          <p:nvPr/>
+        </p:nvSpPr>
+        <p:spPr>
+          <a:xfrm>
+            <a:off x="3167482" y="4786884"/>
+            <a:ext cx="100584" cy="100584"/>
+          </a:xfrm>
+          <a:prstGeom prst="ellipse">
+            <a:avLst/>
+          </a:prstGeom>
+          <a:solidFill>
+            <a:srgbClr val="B0842F"/>
+          </a:solidFill>
+          <a:ln/>
+        </p:spPr>
+      </p:sp>
+      <p:sp>
+        <p:nvSpPr>
+          <p:cNvPr id="12" name="Text 10"/>
+          <p:cNvSpPr txBox="1"/>
+          <p:nvPr/>
+        </p:nvSpPr>
+        <p:spPr>
+          <a:xfrm>
+            <a:off x="3332074" y="4626864"/>
+            <a:ext cx="822960" cy="420624"/>
+          </a:xfrm>
+          <a:prstGeom prst="rect">
+            <a:avLst/>
+          </a:prstGeom>
+          <a:noFill/>
+          <a:ln/>
+        </p:spPr>
+        <p:txBody>
+          <a:bodyPr wrap="square" lIns="0" tIns="0" rIns="0" bIns="0" rtlCol="0" anchor="ctr"/>
+          <a:lstStyle/>
+          <a:p>
+            <a:pPr indent="0" marL="0">
+              <a:buNone/>
+            </a:pPr>
+            <a:r>
+              <a:rPr lang="en-US" sz="1050" dirty="0">
+                <a:solidFill>
+                  <a:srgbClr val="1D1A15"/>
+                </a:solidFill>
+                <a:latin typeface="Calibri" pitchFamily="34" charset="0"/>
+                <a:ea typeface="Calibri" pitchFamily="34" charset="-122"/>
+                <a:cs typeface="Calibri" pitchFamily="34" charset="-120"/>
+              </a:rPr>
+              <a:t>Planned</a:t>
+            </a:r>
+            <a:endParaRPr lang="en-US" sz="1050" dirty="0"/>
+          </a:p>
+        </p:txBody>
+      </p:sp>
+      <p:sp>
+        <p:nvSpPr>
+          <p:cNvPr id="13" name="Shape 11"/>
           <p:cNvSpPr/>
           <p:nvPr/>
         </p:nvSpPr>
@@ -16217,7 +16055,7 @@
       </p:sp>
       <p:sp>
         <p:nvSpPr>
-          <p:cNvPr id="9" name="Shape 7"/>
+          <p:cNvPr id="14" name="Shape 12"/>
           <p:cNvSpPr/>
           <p:nvPr/>
         </p:nvSpPr>
@@ -16239,7 +16077,7 @@
       </p:sp>
       <p:sp>
         <p:nvSpPr>
-          <p:cNvPr id="10" name="Shape 8"/>
+          <p:cNvPr id="15" name="Shape 13"/>
           <p:cNvSpPr/>
           <p:nvPr/>
         </p:nvSpPr>
@@ -16259,7 +16097,7 @@
       </p:sp>
       <p:sp>
         <p:nvSpPr>
-          <p:cNvPr id="11" name="Shape 9"/>
+          <p:cNvPr id="16" name="Shape 14"/>
           <p:cNvSpPr/>
           <p:nvPr/>
         </p:nvSpPr>
@@ -16279,7 +16117,7 @@
       </p:sp>
       <p:sp>
         <p:nvSpPr>
-          <p:cNvPr id="12" name="Shape 10"/>
+          <p:cNvPr id="17" name="Shape 15"/>
           <p:cNvSpPr/>
           <p:nvPr/>
         </p:nvSpPr>
@@ -16299,7 +16137,7 @@
       </p:sp>
       <p:sp>
         <p:nvSpPr>
-          <p:cNvPr id="13" name="Shape 11"/>
+          <p:cNvPr id="18" name="Shape 16"/>
           <p:cNvSpPr/>
           <p:nvPr/>
         </p:nvSpPr>
@@ -16319,7 +16157,7 @@
       </p:sp>
       <p:sp>
         <p:nvSpPr>
-          <p:cNvPr id="14" name="Text 12"/>
+          <p:cNvPr id="19" name="Text 17"/>
           <p:cNvSpPr txBox="1"/>
           <p:nvPr/>
         </p:nvSpPr>
@@ -16341,24 +16179,13 @@
             <a:pPr indent="0" marL="0">
               <a:buNone/>
             </a:pPr>
-            <a:r>
-              <a:rPr lang="en-US" sz="900" dirty="0">
-                <a:solidFill>
-                  <a:srgbClr val="7A7266"/>
-                </a:solidFill>
-                <a:latin typeface="Calibri" pitchFamily="34" charset="0"/>
-                <a:ea typeface="Calibri" pitchFamily="34" charset="-122"/>
-                <a:cs typeface="Calibri" pitchFamily="34" charset="-120"/>
-              </a:rPr>
-              <a:t>company database</a:t>
-            </a:r>
             <a:endParaRPr lang="en-US" sz="900" dirty="0"/>
           </a:p>
         </p:txBody>
       </p:sp>
       <p:sp>
         <p:nvSpPr>
-          <p:cNvPr id="15" name="Shape 13"/>
+          <p:cNvPr id="20" name="Shape 18"/>
           <p:cNvSpPr/>
           <p:nvPr/>
         </p:nvSpPr>
@@ -16381,18 +16208,18 @@
       </p:sp>
       <p:sp>
         <p:nvSpPr>
-          <p:cNvPr id="16" name="Shape 14"/>
+          <p:cNvPr id="21" name="Shape 19"/>
           <p:cNvSpPr/>
           <p:nvPr/>
         </p:nvSpPr>
         <p:spPr>
           <a:xfrm>
             <a:off x="7296912" y="2212848"/>
-            <a:ext cx="1901952" cy="1298448"/>
+            <a:ext cx="3968496" cy="384048"/>
           </a:xfrm>
           <a:prstGeom prst="roundRect">
             <a:avLst>
-              <a:gd name="adj" fmla="val 4225"/>
+              <a:gd name="adj" fmla="val 11905"/>
             </a:avLst>
           </a:prstGeom>
           <a:solidFill>
@@ -16408,96 +16235,123 @@
       </p:sp>
       <p:sp>
         <p:nvSpPr>
-          <p:cNvPr id="17" name="Text 15"/>
-          <p:cNvSpPr txBox="1"/>
-          <p:nvPr/>
-        </p:nvSpPr>
-        <p:spPr>
-          <a:xfrm>
-            <a:off x="7424928" y="2359152"/>
-            <a:ext cx="1645920" cy="274320"/>
-          </a:xfrm>
-          <a:prstGeom prst="rect">
-            <a:avLst/>
-          </a:prstGeom>
-          <a:noFill/>
-          <a:ln/>
-        </p:spPr>
-        <p:txBody>
-          <a:bodyPr wrap="square" lIns="0" tIns="0" rIns="0" bIns="0" rtlCol="0" anchor="ctr"/>
-          <a:lstStyle/>
-          <a:p>
-            <a:pPr indent="0" marL="0">
-              <a:buNone/>
-            </a:pPr>
-            <a:r>
-              <a:rPr lang="en-US" sz="850" b="1" spc="100" kern="0" dirty="0">
-                <a:solidFill>
-                  <a:srgbClr val="7A7266"/>
-                </a:solidFill>
-                <a:latin typeface="Calibri" pitchFamily="34" charset="0"/>
-                <a:ea typeface="Calibri" pitchFamily="34" charset="-122"/>
-                <a:cs typeface="Calibri" pitchFamily="34" charset="-120"/>
-              </a:rPr>
-              <a:t>UPDATES</a:t>
-            </a:r>
-            <a:endParaRPr lang="en-US" sz="850" dirty="0"/>
-          </a:p>
-        </p:txBody>
-      </p:sp>
-      <p:sp>
-        <p:nvSpPr>
-          <p:cNvPr id="18" name="Text 16"/>
-          <p:cNvSpPr txBox="1"/>
-          <p:nvPr/>
-        </p:nvSpPr>
-        <p:spPr>
-          <a:xfrm>
-            <a:off x="7424928" y="2670048"/>
-            <a:ext cx="1645920" cy="457200"/>
-          </a:xfrm>
-          <a:prstGeom prst="rect">
-            <a:avLst/>
-          </a:prstGeom>
-          <a:noFill/>
-          <a:ln/>
-        </p:spPr>
-        <p:txBody>
-          <a:bodyPr wrap="square" lIns="0" tIns="0" rIns="0" bIns="0" rtlCol="0" anchor="ctr"/>
-          <a:lstStyle/>
-          <a:p>
-            <a:pPr indent="0" marL="0">
-              <a:buNone/>
-            </a:pPr>
-            <a:r>
-              <a:rPr lang="en-US" sz="1100" dirty="0">
-                <a:solidFill>
-                  <a:srgbClr val="1D1A15"/>
-                </a:solidFill>
-                <a:latin typeface="Calibri" pitchFamily="34" charset="0"/>
-                <a:ea typeface="Calibri" pitchFamily="34" charset="-122"/>
-                <a:cs typeface="Calibri" pitchFamily="34" charset="-120"/>
-              </a:rPr>
-              <a:t>on a schedule</a:t>
-            </a:r>
-            <a:endParaRPr lang="en-US" sz="1100" dirty="0"/>
-          </a:p>
-        </p:txBody>
-      </p:sp>
-      <p:sp>
-        <p:nvSpPr>
-          <p:cNvPr id="19" name="Shape 17"/>
-          <p:cNvSpPr/>
-          <p:nvPr/>
-        </p:nvSpPr>
-        <p:spPr>
-          <a:xfrm>
-            <a:off x="9363456" y="2212848"/>
-            <a:ext cx="1901952" cy="1298448"/>
+          <p:cNvPr id="22" name="Shape 20"/>
+          <p:cNvSpPr/>
+          <p:nvPr/>
+        </p:nvSpPr>
+        <p:spPr>
+          <a:xfrm>
+            <a:off x="7406640" y="2286000"/>
+            <a:ext cx="1097280" cy="237744"/>
           </a:xfrm>
           <a:prstGeom prst="roundRect">
             <a:avLst>
-              <a:gd name="adj" fmla="val 4225"/>
+              <a:gd name="adj" fmla="val 50000"/>
+            </a:avLst>
+          </a:prstGeom>
+          <a:solidFill>
+            <a:srgbClr val="F3E7C8"/>
+          </a:solidFill>
+          <a:ln w="6350">
+            <a:solidFill>
+              <a:srgbClr val="9C7C2E"/>
+            </a:solidFill>
+            <a:prstDash val="solid"/>
+          </a:ln>
+        </p:spPr>
+      </p:sp>
+      <p:sp>
+        <p:nvSpPr>
+          <p:cNvPr id="23" name="Text 21"/>
+          <p:cNvSpPr txBox="1"/>
+          <p:nvPr/>
+        </p:nvSpPr>
+        <p:spPr>
+          <a:xfrm>
+            <a:off x="7406640" y="2267712"/>
+            <a:ext cx="1097280" cy="274320"/>
+          </a:xfrm>
+          <a:prstGeom prst="rect">
+            <a:avLst/>
+          </a:prstGeom>
+          <a:noFill/>
+          <a:ln/>
+        </p:spPr>
+        <p:txBody>
+          <a:bodyPr wrap="square" lIns="0" tIns="0" rIns="0" bIns="0" rtlCol="0" anchor="ctr"/>
+          <a:lstStyle/>
+          <a:p>
+            <a:pPr algn="ctr" indent="0" marL="0">
+              <a:buNone/>
+            </a:pPr>
+            <a:r>
+              <a:rPr lang="en-US" sz="680" b="1" dirty="0">
+                <a:solidFill>
+                  <a:srgbClr val="7A5A12"/>
+                </a:solidFill>
+                <a:latin typeface="Calibri" pitchFamily="34" charset="0"/>
+                <a:ea typeface="Calibri" pitchFamily="34" charset="-122"/>
+                <a:cs typeface="Calibri" pitchFamily="34" charset="-120"/>
+              </a:rPr>
+              <a:t>Teacher</a:t>
+            </a:r>
+            <a:endParaRPr lang="en-US" sz="680" dirty="0"/>
+          </a:p>
+        </p:txBody>
+      </p:sp>
+      <p:sp>
+        <p:nvSpPr>
+          <p:cNvPr id="24" name="Text 22"/>
+          <p:cNvSpPr txBox="1"/>
+          <p:nvPr/>
+        </p:nvSpPr>
+        <p:spPr>
+          <a:xfrm>
+            <a:off x="8631936" y="2212848"/>
+            <a:ext cx="2505456" cy="384048"/>
+          </a:xfrm>
+          <a:prstGeom prst="rect">
+            <a:avLst/>
+          </a:prstGeom>
+          <a:noFill/>
+          <a:ln/>
+        </p:spPr>
+        <p:txBody>
+          <a:bodyPr wrap="square" lIns="0" tIns="0" rIns="0" bIns="0" rtlCol="0" anchor="ctr"/>
+          <a:lstStyle/>
+          <a:p>
+            <a:pPr indent="0" marL="0">
+              <a:buNone/>
+            </a:pPr>
+            <a:r>
+              <a:rPr lang="en-US" sz="820" dirty="0">
+                <a:solidFill>
+                  <a:srgbClr val="1D1A15"/>
+                </a:solidFill>
+                <a:latin typeface="Calibri" pitchFamily="34" charset="0"/>
+                <a:ea typeface="Calibri" pitchFamily="34" charset="-122"/>
+                <a:cs typeface="Calibri" pitchFamily="34" charset="-120"/>
+              </a:rPr>
+              <a:t>How do I fill out our roster?</a:t>
+            </a:r>
+            <a:endParaRPr lang="en-US" sz="820" dirty="0"/>
+          </a:p>
+        </p:txBody>
+      </p:sp>
+      <p:sp>
+        <p:nvSpPr>
+          <p:cNvPr id="25" name="Shape 23"/>
+          <p:cNvSpPr/>
+          <p:nvPr/>
+        </p:nvSpPr>
+        <p:spPr>
+          <a:xfrm>
+            <a:off x="7296912" y="2688336"/>
+            <a:ext cx="3968496" cy="384048"/>
+          </a:xfrm>
+          <a:prstGeom prst="roundRect">
+            <a:avLst>
+              <a:gd name="adj" fmla="val 11905"/>
             </a:avLst>
           </a:prstGeom>
           <a:solidFill>
@@ -16513,96 +16367,123 @@
       </p:sp>
       <p:sp>
         <p:nvSpPr>
-          <p:cNvPr id="20" name="Text 18"/>
-          <p:cNvSpPr txBox="1"/>
-          <p:nvPr/>
-        </p:nvSpPr>
-        <p:spPr>
-          <a:xfrm>
-            <a:off x="9491472" y="2359152"/>
-            <a:ext cx="1645920" cy="274320"/>
-          </a:xfrm>
-          <a:prstGeom prst="rect">
-            <a:avLst/>
-          </a:prstGeom>
-          <a:noFill/>
-          <a:ln/>
-        </p:spPr>
-        <p:txBody>
-          <a:bodyPr wrap="square" lIns="0" tIns="0" rIns="0" bIns="0" rtlCol="0" anchor="ctr"/>
-          <a:lstStyle/>
-          <a:p>
-            <a:pPr indent="0" marL="0">
-              <a:buNone/>
-            </a:pPr>
-            <a:r>
-              <a:rPr lang="en-US" sz="850" b="1" spc="100" kern="0" dirty="0">
-                <a:solidFill>
-                  <a:srgbClr val="7A7266"/>
-                </a:solidFill>
-                <a:latin typeface="Calibri" pitchFamily="34" charset="0"/>
-                <a:ea typeface="Calibri" pitchFamily="34" charset="-122"/>
-                <a:cs typeface="Calibri" pitchFamily="34" charset="-120"/>
-              </a:rPr>
-              <a:t>SECURITY</a:t>
-            </a:r>
-            <a:endParaRPr lang="en-US" sz="850" dirty="0"/>
-          </a:p>
-        </p:txBody>
-      </p:sp>
-      <p:sp>
-        <p:nvSpPr>
-          <p:cNvPr id="21" name="Text 19"/>
-          <p:cNvSpPr txBox="1"/>
-          <p:nvPr/>
-        </p:nvSpPr>
-        <p:spPr>
-          <a:xfrm>
-            <a:off x="9491472" y="2670048"/>
-            <a:ext cx="1645920" cy="457200"/>
-          </a:xfrm>
-          <a:prstGeom prst="rect">
-            <a:avLst/>
-          </a:prstGeom>
-          <a:noFill/>
-          <a:ln/>
-        </p:spPr>
-        <p:txBody>
-          <a:bodyPr wrap="square" lIns="0" tIns="0" rIns="0" bIns="0" rtlCol="0" anchor="ctr"/>
-          <a:lstStyle/>
-          <a:p>
-            <a:pPr indent="0" marL="0">
-              <a:buNone/>
-            </a:pPr>
-            <a:r>
-              <a:rPr lang="en-US" sz="1100" dirty="0">
-                <a:solidFill>
-                  <a:srgbClr val="1D1A15"/>
-                </a:solidFill>
-                <a:latin typeface="Calibri" pitchFamily="34" charset="0"/>
-                <a:ea typeface="Calibri" pitchFamily="34" charset="-122"/>
-                <a:cs typeface="Calibri" pitchFamily="34" charset="-120"/>
-              </a:rPr>
-              <a:t>locked per user</a:t>
-            </a:r>
-            <a:endParaRPr lang="en-US" sz="1100" dirty="0"/>
-          </a:p>
-        </p:txBody>
-      </p:sp>
-      <p:sp>
-        <p:nvSpPr>
-          <p:cNvPr id="22" name="Shape 20"/>
-          <p:cNvSpPr/>
-          <p:nvPr/>
-        </p:nvSpPr>
-        <p:spPr>
-          <a:xfrm>
-            <a:off x="7296912" y="3675888"/>
-            <a:ext cx="1901952" cy="1298448"/>
+          <p:cNvPr id="26" name="Shape 24"/>
+          <p:cNvSpPr/>
+          <p:nvPr/>
+        </p:nvSpPr>
+        <p:spPr>
+          <a:xfrm>
+            <a:off x="7406640" y="2761488"/>
+            <a:ext cx="1097280" cy="237744"/>
           </a:xfrm>
           <a:prstGeom prst="roundRect">
             <a:avLst>
-              <a:gd name="adj" fmla="val 4225"/>
+              <a:gd name="adj" fmla="val 50000"/>
+            </a:avLst>
+          </a:prstGeom>
+          <a:solidFill>
+            <a:srgbClr val="F3E7C8"/>
+          </a:solidFill>
+          <a:ln w="6350">
+            <a:solidFill>
+              <a:srgbClr val="9C7C2E"/>
+            </a:solidFill>
+            <a:prstDash val="solid"/>
+          </a:ln>
+        </p:spPr>
+      </p:sp>
+      <p:sp>
+        <p:nvSpPr>
+          <p:cNvPr id="27" name="Text 25"/>
+          <p:cNvSpPr txBox="1"/>
+          <p:nvPr/>
+        </p:nvSpPr>
+        <p:spPr>
+          <a:xfrm>
+            <a:off x="7406640" y="2743200"/>
+            <a:ext cx="1097280" cy="274320"/>
+          </a:xfrm>
+          <a:prstGeom prst="rect">
+            <a:avLst/>
+          </a:prstGeom>
+          <a:noFill/>
+          <a:ln/>
+        </p:spPr>
+        <p:txBody>
+          <a:bodyPr wrap="square" lIns="0" tIns="0" rIns="0" bIns="0" rtlCol="0" anchor="ctr"/>
+          <a:lstStyle/>
+          <a:p>
+            <a:pPr algn="ctr" indent="0" marL="0">
+              <a:buNone/>
+            </a:pPr>
+            <a:r>
+              <a:rPr lang="en-US" sz="680" b="1" dirty="0">
+                <a:solidFill>
+                  <a:srgbClr val="7A5A12"/>
+                </a:solidFill>
+                <a:latin typeface="Calibri" pitchFamily="34" charset="0"/>
+                <a:ea typeface="Calibri" pitchFamily="34" charset="-122"/>
+                <a:cs typeface="Calibri" pitchFamily="34" charset="-120"/>
+              </a:rPr>
+              <a:t>Homeschool</a:t>
+            </a:r>
+            <a:endParaRPr lang="en-US" sz="680" dirty="0"/>
+          </a:p>
+        </p:txBody>
+      </p:sp>
+      <p:sp>
+        <p:nvSpPr>
+          <p:cNvPr id="28" name="Text 26"/>
+          <p:cNvSpPr txBox="1"/>
+          <p:nvPr/>
+        </p:nvSpPr>
+        <p:spPr>
+          <a:xfrm>
+            <a:off x="8631936" y="2688336"/>
+            <a:ext cx="2505456" cy="384048"/>
+          </a:xfrm>
+          <a:prstGeom prst="rect">
+            <a:avLst/>
+          </a:prstGeom>
+          <a:noFill/>
+          <a:ln/>
+        </p:spPr>
+        <p:txBody>
+          <a:bodyPr wrap="square" lIns="0" tIns="0" rIns="0" bIns="0" rtlCol="0" anchor="ctr"/>
+          <a:lstStyle/>
+          <a:p>
+            <a:pPr indent="0" marL="0">
+              <a:buNone/>
+            </a:pPr>
+            <a:r>
+              <a:rPr lang="en-US" sz="820" dirty="0">
+                <a:solidFill>
+                  <a:srgbClr val="1D1A15"/>
+                </a:solidFill>
+                <a:latin typeface="Calibri" pitchFamily="34" charset="0"/>
+                <a:ea typeface="Calibri" pitchFamily="34" charset="-122"/>
+                <a:cs typeface="Calibri" pitchFamily="34" charset="-120"/>
+              </a:rPr>
+              <a:t>Reset my child’s password?</a:t>
+            </a:r>
+            <a:endParaRPr lang="en-US" sz="820" dirty="0"/>
+          </a:p>
+        </p:txBody>
+      </p:sp>
+      <p:sp>
+        <p:nvSpPr>
+          <p:cNvPr id="29" name="Shape 27"/>
+          <p:cNvSpPr/>
+          <p:nvPr/>
+        </p:nvSpPr>
+        <p:spPr>
+          <a:xfrm>
+            <a:off x="7296912" y="3163824"/>
+            <a:ext cx="3968496" cy="384048"/>
+          </a:xfrm>
+          <a:prstGeom prst="roundRect">
+            <a:avLst>
+              <a:gd name="adj" fmla="val 11905"/>
             </a:avLst>
           </a:prstGeom>
           <a:solidFill>
@@ -16618,96 +16499,123 @@
       </p:sp>
       <p:sp>
         <p:nvSpPr>
-          <p:cNvPr id="23" name="Text 21"/>
-          <p:cNvSpPr txBox="1"/>
-          <p:nvPr/>
-        </p:nvSpPr>
-        <p:spPr>
-          <a:xfrm>
-            <a:off x="7424928" y="3822192"/>
-            <a:ext cx="1645920" cy="274320"/>
-          </a:xfrm>
-          <a:prstGeom prst="rect">
-            <a:avLst/>
-          </a:prstGeom>
-          <a:noFill/>
-          <a:ln/>
-        </p:spPr>
-        <p:txBody>
-          <a:bodyPr wrap="square" lIns="0" tIns="0" rIns="0" bIns="0" rtlCol="0" anchor="ctr"/>
-          <a:lstStyle/>
-          <a:p>
-            <a:pPr indent="0" marL="0">
-              <a:buNone/>
-            </a:pPr>
-            <a:r>
-              <a:rPr lang="en-US" sz="850" b="1" spc="100" kern="0" dirty="0">
-                <a:solidFill>
-                  <a:srgbClr val="7A7266"/>
-                </a:solidFill>
-                <a:latin typeface="Calibri" pitchFamily="34" charset="0"/>
-                <a:ea typeface="Calibri" pitchFamily="34" charset="-122"/>
-                <a:cs typeface="Calibri" pitchFamily="34" charset="-120"/>
-              </a:rPr>
-              <a:t>FRESHNESS</a:t>
-            </a:r>
-            <a:endParaRPr lang="en-US" sz="850" dirty="0"/>
-          </a:p>
-        </p:txBody>
-      </p:sp>
-      <p:sp>
-        <p:nvSpPr>
-          <p:cNvPr id="24" name="Text 22"/>
-          <p:cNvSpPr txBox="1"/>
-          <p:nvPr/>
-        </p:nvSpPr>
-        <p:spPr>
-          <a:xfrm>
-            <a:off x="7424928" y="4133088"/>
-            <a:ext cx="1645920" cy="457200"/>
-          </a:xfrm>
-          <a:prstGeom prst="rect">
-            <a:avLst/>
-          </a:prstGeom>
-          <a:noFill/>
-          <a:ln/>
-        </p:spPr>
-        <p:txBody>
-          <a:bodyPr wrap="square" lIns="0" tIns="0" rIns="0" bIns="0" rtlCol="0" anchor="ctr"/>
-          <a:lstStyle/>
-          <a:p>
-            <a:pPr indent="0" marL="0">
-              <a:buNone/>
-            </a:pPr>
-            <a:r>
-              <a:rPr lang="en-US" sz="1100" dirty="0">
-                <a:solidFill>
-                  <a:srgbClr val="1D1A15"/>
-                </a:solidFill>
-                <a:latin typeface="Calibri" pitchFamily="34" charset="0"/>
-                <a:ea typeface="Calibri" pitchFamily="34" charset="-122"/>
-                <a:cs typeface="Calibri" pitchFamily="34" charset="-120"/>
-              </a:rPr>
-              <a:t>last-updated stamps</a:t>
-            </a:r>
-            <a:endParaRPr lang="en-US" sz="1100" dirty="0"/>
-          </a:p>
-        </p:txBody>
-      </p:sp>
-      <p:sp>
-        <p:nvSpPr>
-          <p:cNvPr id="25" name="Shape 23"/>
-          <p:cNvSpPr/>
-          <p:nvPr/>
-        </p:nvSpPr>
-        <p:spPr>
-          <a:xfrm>
-            <a:off x="9363456" y="3675888"/>
-            <a:ext cx="1901952" cy="1298448"/>
+          <p:cNvPr id="30" name="Shape 28"/>
+          <p:cNvSpPr/>
+          <p:nvPr/>
+        </p:nvSpPr>
+        <p:spPr>
+          <a:xfrm>
+            <a:off x="7406640" y="3236976"/>
+            <a:ext cx="1097280" cy="237744"/>
           </a:xfrm>
           <a:prstGeom prst="roundRect">
             <a:avLst>
-              <a:gd name="adj" fmla="val 4225"/>
+              <a:gd name="adj" fmla="val 50000"/>
+            </a:avLst>
+          </a:prstGeom>
+          <a:solidFill>
+            <a:srgbClr val="F3E7C8"/>
+          </a:solidFill>
+          <a:ln w="6350">
+            <a:solidFill>
+              <a:srgbClr val="9C7C2E"/>
+            </a:solidFill>
+            <a:prstDash val="solid"/>
+          </a:ln>
+        </p:spPr>
+      </p:sp>
+      <p:sp>
+        <p:nvSpPr>
+          <p:cNvPr id="31" name="Text 29"/>
+          <p:cNvSpPr txBox="1"/>
+          <p:nvPr/>
+        </p:nvSpPr>
+        <p:spPr>
+          <a:xfrm>
+            <a:off x="7406640" y="3218688"/>
+            <a:ext cx="1097280" cy="274320"/>
+          </a:xfrm>
+          <a:prstGeom prst="rect">
+            <a:avLst/>
+          </a:prstGeom>
+          <a:noFill/>
+          <a:ln/>
+        </p:spPr>
+        <p:txBody>
+          <a:bodyPr wrap="square" lIns="0" tIns="0" rIns="0" bIns="0" rtlCol="0" anchor="ctr"/>
+          <a:lstStyle/>
+          <a:p>
+            <a:pPr algn="ctr" indent="0" marL="0">
+              <a:buNone/>
+            </a:pPr>
+            <a:r>
+              <a:rPr lang="en-US" sz="680" b="1" dirty="0">
+                <a:solidFill>
+                  <a:srgbClr val="7A5A12"/>
+                </a:solidFill>
+                <a:latin typeface="Calibri" pitchFamily="34" charset="0"/>
+                <a:ea typeface="Calibri" pitchFamily="34" charset="-122"/>
+                <a:cs typeface="Calibri" pitchFamily="34" charset="-120"/>
+              </a:rPr>
+              <a:t>Head of school</a:t>
+            </a:r>
+            <a:endParaRPr lang="en-US" sz="680" dirty="0"/>
+          </a:p>
+        </p:txBody>
+      </p:sp>
+      <p:sp>
+        <p:nvSpPr>
+          <p:cNvPr id="32" name="Text 30"/>
+          <p:cNvSpPr txBox="1"/>
+          <p:nvPr/>
+        </p:nvSpPr>
+        <p:spPr>
+          <a:xfrm>
+            <a:off x="8631936" y="3163824"/>
+            <a:ext cx="2505456" cy="384048"/>
+          </a:xfrm>
+          <a:prstGeom prst="rect">
+            <a:avLst/>
+          </a:prstGeom>
+          <a:noFill/>
+          <a:ln/>
+        </p:spPr>
+        <p:txBody>
+          <a:bodyPr wrap="square" lIns="0" tIns="0" rIns="0" bIns="0" rtlCol="0" anchor="ctr"/>
+          <a:lstStyle/>
+          <a:p>
+            <a:pPr indent="0" marL="0">
+              <a:buNone/>
+            </a:pPr>
+            <a:r>
+              <a:rPr lang="en-US" sz="820" dirty="0">
+                <a:solidFill>
+                  <a:srgbClr val="1D1A15"/>
+                </a:solidFill>
+                <a:latin typeface="Calibri" pitchFamily="34" charset="0"/>
+                <a:ea typeface="Calibri" pitchFamily="34" charset="-122"/>
+                <a:cs typeface="Calibri" pitchFamily="34" charset="-120"/>
+              </a:rPr>
+              <a:t>Add another teacher?</a:t>
+            </a:r>
+            <a:endParaRPr lang="en-US" sz="820" dirty="0"/>
+          </a:p>
+        </p:txBody>
+      </p:sp>
+      <p:sp>
+        <p:nvSpPr>
+          <p:cNvPr id="33" name="Shape 31"/>
+          <p:cNvSpPr/>
+          <p:nvPr/>
+        </p:nvSpPr>
+        <p:spPr>
+          <a:xfrm>
+            <a:off x="7296912" y="3639312"/>
+            <a:ext cx="3968496" cy="384048"/>
+          </a:xfrm>
+          <a:prstGeom prst="roundRect">
+            <a:avLst>
+              <a:gd name="adj" fmla="val 11905"/>
             </a:avLst>
           </a:prstGeom>
           <a:solidFill>
@@ -16723,14 +16631,41 @@
       </p:sp>
       <p:sp>
         <p:nvSpPr>
-          <p:cNvPr id="26" name="Text 24"/>
-          <p:cNvSpPr txBox="1"/>
-          <p:nvPr/>
-        </p:nvSpPr>
-        <p:spPr>
-          <a:xfrm>
-            <a:off x="9491472" y="3822192"/>
-            <a:ext cx="1645920" cy="274320"/>
+          <p:cNvPr id="34" name="Shape 32"/>
+          <p:cNvSpPr/>
+          <p:nvPr/>
+        </p:nvSpPr>
+        <p:spPr>
+          <a:xfrm>
+            <a:off x="7406640" y="3712464"/>
+            <a:ext cx="1097280" cy="237744"/>
+          </a:xfrm>
+          <a:prstGeom prst="roundRect">
+            <a:avLst>
+              <a:gd name="adj" fmla="val 50000"/>
+            </a:avLst>
+          </a:prstGeom>
+          <a:solidFill>
+            <a:srgbClr val="F3E7C8"/>
+          </a:solidFill>
+          <a:ln w="6350">
+            <a:solidFill>
+              <a:srgbClr val="9C7C2E"/>
+            </a:solidFill>
+            <a:prstDash val="solid"/>
+          </a:ln>
+        </p:spPr>
+      </p:sp>
+      <p:sp>
+        <p:nvSpPr>
+          <p:cNvPr id="35" name="Text 33"/>
+          <p:cNvSpPr txBox="1"/>
+          <p:nvPr/>
+        </p:nvSpPr>
+        <p:spPr>
+          <a:xfrm>
+            <a:off x="7406640" y="3694176"/>
+            <a:ext cx="1097280" cy="274320"/>
           </a:xfrm>
           <a:prstGeom prst="rect">
             <a:avLst/>
@@ -16742,34 +16677,127 @@
           <a:bodyPr wrap="square" lIns="0" tIns="0" rIns="0" bIns="0" rtlCol="0" anchor="ctr"/>
           <a:lstStyle/>
           <a:p>
+            <a:pPr algn="ctr" indent="0" marL="0">
+              <a:buNone/>
+            </a:pPr>
+            <a:r>
+              <a:rPr lang="en-US" sz="680" b="1" dirty="0">
+                <a:solidFill>
+                  <a:srgbClr val="7A5A12"/>
+                </a:solidFill>
+                <a:latin typeface="Calibri" pitchFamily="34" charset="0"/>
+                <a:ea typeface="Calibri" pitchFamily="34" charset="-122"/>
+                <a:cs typeface="Calibri" pitchFamily="34" charset="-120"/>
+              </a:rPr>
+              <a:t>New staff</a:t>
+            </a:r>
+            <a:endParaRPr lang="en-US" sz="680" dirty="0"/>
+          </a:p>
+        </p:txBody>
+      </p:sp>
+      <p:sp>
+        <p:nvSpPr>
+          <p:cNvPr id="36" name="Text 34"/>
+          <p:cNvSpPr txBox="1"/>
+          <p:nvPr/>
+        </p:nvSpPr>
+        <p:spPr>
+          <a:xfrm>
+            <a:off x="8631936" y="3639312"/>
+            <a:ext cx="2505456" cy="384048"/>
+          </a:xfrm>
+          <a:prstGeom prst="rect">
+            <a:avLst/>
+          </a:prstGeom>
+          <a:noFill/>
+          <a:ln/>
+        </p:spPr>
+        <p:txBody>
+          <a:bodyPr wrap="square" lIns="0" tIns="0" rIns="0" bIns="0" rtlCol="0" anchor="ctr"/>
+          <a:lstStyle/>
+          <a:p>
             <a:pPr indent="0" marL="0">
               <a:buNone/>
             </a:pPr>
             <a:r>
-              <a:rPr lang="en-US" sz="850" b="1" spc="100" kern="0" dirty="0">
-                <a:solidFill>
-                  <a:srgbClr val="7A7266"/>
-                </a:solidFill>
-                <a:latin typeface="Calibri" pitchFamily="34" charset="0"/>
-                <a:ea typeface="Calibri" pitchFamily="34" charset="-122"/>
-                <a:cs typeface="Calibri" pitchFamily="34" charset="-120"/>
-              </a:rPr>
-              <a:t>SECRETS</a:t>
-            </a:r>
-            <a:endParaRPr lang="en-US" sz="850" dirty="0"/>
-          </a:p>
-        </p:txBody>
-      </p:sp>
-      <p:sp>
-        <p:nvSpPr>
-          <p:cNvPr id="27" name="Text 25"/>
-          <p:cNvSpPr txBox="1"/>
-          <p:nvPr/>
-        </p:nvSpPr>
-        <p:spPr>
-          <a:xfrm>
-            <a:off x="9491472" y="4133088"/>
-            <a:ext cx="1645920" cy="457200"/>
+              <a:rPr lang="en-US" sz="820" dirty="0">
+                <a:solidFill>
+                  <a:srgbClr val="1D1A15"/>
+                </a:solidFill>
+                <a:latin typeface="Calibri" pitchFamily="34" charset="0"/>
+                <a:ea typeface="Calibri" pitchFamily="34" charset="-122"/>
+                <a:cs typeface="Calibri" pitchFamily="34" charset="-120"/>
+              </a:rPr>
+              <a:t>Where’s the Employee Handbook?</a:t>
+            </a:r>
+            <a:endParaRPr lang="en-US" sz="820" dirty="0"/>
+          </a:p>
+        </p:txBody>
+      </p:sp>
+      <p:sp>
+        <p:nvSpPr>
+          <p:cNvPr id="37" name="Shape 35"/>
+          <p:cNvSpPr/>
+          <p:nvPr/>
+        </p:nvSpPr>
+        <p:spPr>
+          <a:xfrm>
+            <a:off x="7296912" y="4114800"/>
+            <a:ext cx="3968496" cy="384048"/>
+          </a:xfrm>
+          <a:prstGeom prst="roundRect">
+            <a:avLst>
+              <a:gd name="adj" fmla="val 11905"/>
+            </a:avLst>
+          </a:prstGeom>
+          <a:solidFill>
+            <a:srgbClr val="FBFAF6"/>
+          </a:solidFill>
+          <a:ln w="12700">
+            <a:solidFill>
+              <a:srgbClr val="E4DCC9"/>
+            </a:solidFill>
+            <a:prstDash val="solid"/>
+          </a:ln>
+        </p:spPr>
+      </p:sp>
+      <p:sp>
+        <p:nvSpPr>
+          <p:cNvPr id="38" name="Shape 36"/>
+          <p:cNvSpPr/>
+          <p:nvPr/>
+        </p:nvSpPr>
+        <p:spPr>
+          <a:xfrm>
+            <a:off x="7406640" y="4187952"/>
+            <a:ext cx="1097280" cy="237744"/>
+          </a:xfrm>
+          <a:prstGeom prst="roundRect">
+            <a:avLst>
+              <a:gd name="adj" fmla="val 50000"/>
+            </a:avLst>
+          </a:prstGeom>
+          <a:solidFill>
+            <a:srgbClr val="F3E7C8"/>
+          </a:solidFill>
+          <a:ln w="6350">
+            <a:solidFill>
+              <a:srgbClr val="9C7C2E"/>
+            </a:solidFill>
+            <a:prstDash val="solid"/>
+          </a:ln>
+        </p:spPr>
+      </p:sp>
+      <p:sp>
+        <p:nvSpPr>
+          <p:cNvPr id="39" name="Text 37"/>
+          <p:cNvSpPr txBox="1"/>
+          <p:nvPr/>
+        </p:nvSpPr>
+        <p:spPr>
+          <a:xfrm>
+            <a:off x="7406640" y="4169664"/>
+            <a:ext cx="1097280" cy="274320"/>
           </a:xfrm>
           <a:prstGeom prst="rect">
             <a:avLst/>
@@ -16781,11 +16809,50 @@
           <a:bodyPr wrap="square" lIns="0" tIns="0" rIns="0" bIns="0" rtlCol="0" anchor="ctr"/>
           <a:lstStyle/>
           <a:p>
+            <a:pPr algn="ctr" indent="0" marL="0">
+              <a:buNone/>
+            </a:pPr>
+            <a:r>
+              <a:rPr lang="en-US" sz="680" b="1" dirty="0">
+                <a:solidFill>
+                  <a:srgbClr val="7A5A12"/>
+                </a:solidFill>
+                <a:latin typeface="Calibri" pitchFamily="34" charset="0"/>
+                <a:ea typeface="Calibri" pitchFamily="34" charset="-122"/>
+                <a:cs typeface="Calibri" pitchFamily="34" charset="-120"/>
+              </a:rPr>
+              <a:t>Sales</a:t>
+            </a:r>
+            <a:endParaRPr lang="en-US" sz="680" dirty="0"/>
+          </a:p>
+        </p:txBody>
+      </p:sp>
+      <p:sp>
+        <p:nvSpPr>
+          <p:cNvPr id="40" name="Text 38"/>
+          <p:cNvSpPr txBox="1"/>
+          <p:nvPr/>
+        </p:nvSpPr>
+        <p:spPr>
+          <a:xfrm>
+            <a:off x="8631936" y="4114800"/>
+            <a:ext cx="2505456" cy="384048"/>
+          </a:xfrm>
+          <a:prstGeom prst="rect">
+            <a:avLst/>
+          </a:prstGeom>
+          <a:noFill/>
+          <a:ln/>
+        </p:spPr>
+        <p:txBody>
+          <a:bodyPr wrap="square" lIns="0" tIns="0" rIns="0" bIns="0" rtlCol="0" anchor="ctr"/>
+          <a:lstStyle/>
+          <a:p>
             <a:pPr indent="0" marL="0">
               <a:buNone/>
             </a:pPr>
             <a:r>
-              <a:rPr lang="en-US" sz="1100" dirty="0">
+              <a:rPr lang="en-US" sz="820" dirty="0">
                 <a:solidFill>
                   <a:srgbClr val="1D1A15"/>
                 </a:solidFill>
@@ -16793,9 +16860,141 @@
                 <a:ea typeface="Calibri" pitchFamily="34" charset="-122"/>
                 <a:cs typeface="Calibri" pitchFamily="34" charset="-120"/>
               </a:rPr>
-              <a:t>in a secure vault</a:t>
-            </a:r>
-            <a:endParaRPr lang="en-US" sz="1100" dirty="0"/>
+              <a:t>Which schools renew soon?</a:t>
+            </a:r>
+            <a:endParaRPr lang="en-US" sz="820" dirty="0"/>
+          </a:p>
+        </p:txBody>
+      </p:sp>
+      <p:sp>
+        <p:nvSpPr>
+          <p:cNvPr id="41" name="Shape 39"/>
+          <p:cNvSpPr/>
+          <p:nvPr/>
+        </p:nvSpPr>
+        <p:spPr>
+          <a:xfrm>
+            <a:off x="7296912" y="4590288"/>
+            <a:ext cx="3968496" cy="384048"/>
+          </a:xfrm>
+          <a:prstGeom prst="roundRect">
+            <a:avLst>
+              <a:gd name="adj" fmla="val 11905"/>
+            </a:avLst>
+          </a:prstGeom>
+          <a:solidFill>
+            <a:srgbClr val="FBFAF6"/>
+          </a:solidFill>
+          <a:ln w="12700">
+            <a:solidFill>
+              <a:srgbClr val="E4DCC9"/>
+            </a:solidFill>
+            <a:prstDash val="solid"/>
+          </a:ln>
+        </p:spPr>
+      </p:sp>
+      <p:sp>
+        <p:nvSpPr>
+          <p:cNvPr id="42" name="Shape 40"/>
+          <p:cNvSpPr/>
+          <p:nvPr/>
+        </p:nvSpPr>
+        <p:spPr>
+          <a:xfrm>
+            <a:off x="7406640" y="4663440"/>
+            <a:ext cx="1097280" cy="237744"/>
+          </a:xfrm>
+          <a:prstGeom prst="roundRect">
+            <a:avLst>
+              <a:gd name="adj" fmla="val 50000"/>
+            </a:avLst>
+          </a:prstGeom>
+          <a:solidFill>
+            <a:srgbClr val="F3E7C8"/>
+          </a:solidFill>
+          <a:ln w="6350">
+            <a:solidFill>
+              <a:srgbClr val="9C7C2E"/>
+            </a:solidFill>
+            <a:prstDash val="solid"/>
+          </a:ln>
+        </p:spPr>
+      </p:sp>
+      <p:sp>
+        <p:nvSpPr>
+          <p:cNvPr id="43" name="Text 41"/>
+          <p:cNvSpPr txBox="1"/>
+          <p:nvPr/>
+        </p:nvSpPr>
+        <p:spPr>
+          <a:xfrm>
+            <a:off x="7406640" y="4645152"/>
+            <a:ext cx="1097280" cy="274320"/>
+          </a:xfrm>
+          <a:prstGeom prst="rect">
+            <a:avLst/>
+          </a:prstGeom>
+          <a:noFill/>
+          <a:ln/>
+        </p:spPr>
+        <p:txBody>
+          <a:bodyPr wrap="square" lIns="0" tIns="0" rIns="0" bIns="0" rtlCol="0" anchor="ctr"/>
+          <a:lstStyle/>
+          <a:p>
+            <a:pPr algn="ctr" indent="0" marL="0">
+              <a:buNone/>
+            </a:pPr>
+            <a:r>
+              <a:rPr lang="en-US" sz="680" b="1" dirty="0">
+                <a:solidFill>
+                  <a:srgbClr val="7A5A12"/>
+                </a:solidFill>
+                <a:latin typeface="Calibri" pitchFamily="34" charset="0"/>
+                <a:ea typeface="Calibri" pitchFamily="34" charset="-122"/>
+                <a:cs typeface="Calibri" pitchFamily="34" charset="-120"/>
+              </a:rPr>
+              <a:t>Anyone</a:t>
+            </a:r>
+            <a:endParaRPr lang="en-US" sz="680" dirty="0"/>
+          </a:p>
+        </p:txBody>
+      </p:sp>
+      <p:sp>
+        <p:nvSpPr>
+          <p:cNvPr id="44" name="Text 42"/>
+          <p:cNvSpPr txBox="1"/>
+          <p:nvPr/>
+        </p:nvSpPr>
+        <p:spPr>
+          <a:xfrm>
+            <a:off x="8631936" y="4590288"/>
+            <a:ext cx="2505456" cy="384048"/>
+          </a:xfrm>
+          <a:prstGeom prst="rect">
+            <a:avLst/>
+          </a:prstGeom>
+          <a:noFill/>
+          <a:ln/>
+        </p:spPr>
+        <p:txBody>
+          <a:bodyPr wrap="square" lIns="0" tIns="0" rIns="0" bIns="0" rtlCol="0" anchor="ctr"/>
+          <a:lstStyle/>
+          <a:p>
+            <a:pPr indent="0" marL="0">
+              <a:buNone/>
+            </a:pPr>
+            <a:r>
+              <a:rPr lang="en-US" sz="820" dirty="0">
+                <a:solidFill>
+                  <a:srgbClr val="1D1A15"/>
+                </a:solidFill>
+                <a:latin typeface="Calibri" pitchFamily="34" charset="0"/>
+                <a:ea typeface="Calibri" pitchFamily="34" charset="-122"/>
+                <a:cs typeface="Calibri" pitchFamily="34" charset="-120"/>
+              </a:rPr>
+              <a:t>Find this in the curriculum?</a:t>
+            </a:r>
+            <a:endParaRPr lang="en-US" sz="820" dirty="0"/>
           </a:p>
         </p:txBody>
       </p:sp>
@@ -16864,7 +17063,7 @@
                 <a:ea typeface="Calibri" pitchFamily="34" charset="-122"/>
                 <a:cs typeface="Calibri" pitchFamily="34" charset="-120"/>
               </a:rPr>
-              <a:t>WHAT WE’D BUILD · ASSISTANT</a:t>
+              <a:t>THE ROAD AHEAD</a:t>
             </a:r>
             <a:endParaRPr lang="en-US" sz="1100" dirty="0"/>
           </a:p>
@@ -16964,7 +17163,7 @@
               <a:buNone/>
             </a:pPr>
             <a:r>
-              <a:rPr lang="en-US" sz="2800" b="1" dirty="0">
+              <a:rPr lang="en-US" sz="3200" b="1" dirty="0">
                 <a:solidFill>
                   <a:srgbClr val="1D1A15"/>
                 </a:solidFill>
@@ -16972,9 +17171,9 @@
                 <a:ea typeface="Georgia" pitchFamily="34" charset="-122"/>
                 <a:cs typeface="Georgia" pitchFamily="34" charset="-120"/>
               </a:rPr>
-              <a:t>A DeepRoots helper that knows who you are</a:t>
-            </a:r>
-            <a:endParaRPr lang="en-US" sz="2800" dirty="0"/>
+              <a:t>More advanced features, as we go</a:t>
+            </a:r>
+            <a:endParaRPr lang="en-US" sz="3200" dirty="0"/>
           </a:p>
         </p:txBody>
       </p:sp>
@@ -17014,7 +17213,7 @@
                 <a:ea typeface="Calibri" pitchFamily="34" charset="-122"/>
                 <a:cs typeface="Calibri" pitchFamily="34" charset="-120"/>
               </a:rPr>
-              <a:t>A built-in helper that answers questions and guides each person by their role. Sign in as a teacher and it points you to lesson help; as a new employee, straight to the Employee Handbook and where to find things.</a:t>
+              <a:t>This is the foundation. As development continues we’ll layer on deeper capabilities, prioritized with the team.</a:t>
             </a:r>
             <a:endParaRPr lang="en-US" sz="1500" dirty="0"/>
           </a:p>
@@ -17022,99 +17221,14 @@
       </p:sp>
       <p:sp>
         <p:nvSpPr>
-          <p:cNvPr id="7" name="Text 5"/>
-          <p:cNvSpPr txBox="1"/>
+          <p:cNvPr id="7" name="Shape 5"/>
+          <p:cNvSpPr/>
           <p:nvPr/>
         </p:nvSpPr>
         <p:spPr>
           <a:xfrm>
             <a:off x="822960" y="3657600"/>
-            <a:ext cx="5760720" cy="1115568"/>
-          </a:xfrm>
-          <a:prstGeom prst="rect">
-            <a:avLst/>
-          </a:prstGeom>
-          <a:noFill/>
-          <a:ln/>
-        </p:spPr>
-        <p:txBody>
-          <a:bodyPr wrap="square" lIns="0" tIns="0" rIns="0" bIns="0" rtlCol="0" anchor="t"/>
-          <a:lstStyle/>
-          <a:p>
-            <a:pPr marL="177800" indent="-177800">
-              <a:spcAft>
-                <a:spcPts val="800"/>
-              </a:spcAft>
-              <a:buSzPct val="100000"/>
-              <a:buChar char="•"/>
-            </a:pPr>
-            <a:r>
-              <a:rPr lang="en-US" sz="1350" dirty="0">
-                <a:solidFill>
-                  <a:srgbClr val="1D1A15"/>
-                </a:solidFill>
-                <a:latin typeface="Calibri" pitchFamily="34" charset="0"/>
-                <a:ea typeface="Calibri" pitchFamily="34" charset="-122"/>
-                <a:cs typeface="Calibri" pitchFamily="34" charset="-120"/>
-              </a:rPr>
-              <a:t>Teacher: “How do I reset a student login?”</a:t>
-            </a:r>
-            <a:endParaRPr lang="en-US" sz="1350" dirty="0"/>
-          </a:p>
-          <a:p>
-            <a:pPr marL="177800" indent="-177800">
-              <a:spcAft>
-                <a:spcPts val="800"/>
-              </a:spcAft>
-              <a:buSzPct val="100000"/>
-              <a:buChar char="•"/>
-            </a:pPr>
-            <a:r>
-              <a:rPr lang="en-US" sz="1350" dirty="0">
-                <a:solidFill>
-                  <a:srgbClr val="1D1A15"/>
-                </a:solidFill>
-                <a:latin typeface="Calibri" pitchFamily="34" charset="0"/>
-                <a:ea typeface="Calibri" pitchFamily="34" charset="-122"/>
-                <a:cs typeface="Calibri" pitchFamily="34" charset="-120"/>
-              </a:rPr>
-              <a:t>New hire: “Where is the Employee Handbook?”</a:t>
-            </a:r>
-            <a:endParaRPr lang="en-US" sz="1350" dirty="0"/>
-          </a:p>
-          <a:p>
-            <a:pPr marL="177800" indent="-177800">
-              <a:spcAft>
-                <a:spcPts val="800"/>
-              </a:spcAft>
-              <a:buSzPct val="100000"/>
-              <a:buChar char="•"/>
-            </a:pPr>
-            <a:r>
-              <a:rPr lang="en-US" sz="1350" dirty="0">
-                <a:solidFill>
-                  <a:srgbClr val="1D1A15"/>
-                </a:solidFill>
-                <a:latin typeface="Calibri" pitchFamily="34" charset="0"/>
-                <a:ea typeface="Calibri" pitchFamily="34" charset="-122"/>
-                <a:cs typeface="Calibri" pitchFamily="34" charset="-120"/>
-              </a:rPr>
-              <a:t>Sales Ambassador: “Which schools are due to renew?”</a:t>
-            </a:r>
-            <a:endParaRPr lang="en-US" sz="1350" dirty="0"/>
-          </a:p>
-        </p:txBody>
-      </p:sp>
-      <p:sp>
-        <p:nvSpPr>
-          <p:cNvPr id="8" name="Shape 6"/>
-          <p:cNvSpPr/>
-          <p:nvPr/>
-        </p:nvSpPr>
-        <p:spPr>
-          <a:xfrm>
-            <a:off x="822960" y="4956048"/>
-            <a:ext cx="1508760" cy="384048"/>
+            <a:ext cx="2258568" cy="384048"/>
           </a:xfrm>
           <a:prstGeom prst="roundRect">
             <a:avLst>
@@ -17134,14 +17248,14 @@
       </p:sp>
       <p:sp>
         <p:nvSpPr>
-          <p:cNvPr id="9" name="Text 7"/>
-          <p:cNvSpPr txBox="1"/>
-          <p:nvPr/>
-        </p:nvSpPr>
-        <p:spPr>
-          <a:xfrm>
-            <a:off x="969264" y="4937760"/>
-            <a:ext cx="1234440" cy="420624"/>
+          <p:cNvPr id="8" name="Text 6"/>
+          <p:cNvSpPr txBox="1"/>
+          <p:nvPr/>
+        </p:nvSpPr>
+        <p:spPr>
+          <a:xfrm>
+            <a:off x="969264" y="3639312"/>
+            <a:ext cx="1984248" cy="420624"/>
           </a:xfrm>
           <a:prstGeom prst="rect">
             <a:avLst/>
@@ -17165,7 +17279,7 @@
                 <a:ea typeface="Calibri" pitchFamily="34" charset="-122"/>
                 <a:cs typeface="Calibri" pitchFamily="34" charset="-120"/>
               </a:rPr>
-              <a:t>Knows your role</a:t>
+              <a:t>Prioritized with the team</a:t>
             </a:r>
             <a:endParaRPr lang="en-US" sz="1050" dirty="0"/>
           </a:p>
@@ -17173,13 +17287,13 @@
       </p:sp>
       <p:sp>
         <p:nvSpPr>
-          <p:cNvPr id="10" name="Shape 8"/>
-          <p:cNvSpPr/>
-          <p:nvPr/>
-        </p:nvSpPr>
-        <p:spPr>
-          <a:xfrm>
-            <a:off x="2496312" y="4956048"/>
+          <p:cNvPr id="9" name="Shape 7"/>
+          <p:cNvSpPr/>
+          <p:nvPr/>
+        </p:nvSpPr>
+        <p:spPr>
+          <a:xfrm>
+            <a:off x="3246120" y="3657600"/>
             <a:ext cx="1097280" cy="384048"/>
           </a:xfrm>
           <a:prstGeom prst="roundRect">
@@ -17200,13 +17314,13 @@
       </p:sp>
       <p:sp>
         <p:nvSpPr>
-          <p:cNvPr id="11" name="Shape 9"/>
-          <p:cNvSpPr/>
-          <p:nvPr/>
-        </p:nvSpPr>
-        <p:spPr>
-          <a:xfrm>
-            <a:off x="2642616" y="5097780"/>
+          <p:cNvPr id="10" name="Shape 8"/>
+          <p:cNvSpPr/>
+          <p:nvPr/>
+        </p:nvSpPr>
+        <p:spPr>
+          <a:xfrm>
+            <a:off x="3392424" y="3799332"/>
             <a:ext cx="100584" cy="100584"/>
           </a:xfrm>
           <a:prstGeom prst="ellipse">
@@ -17220,13 +17334,13 @@
       </p:sp>
       <p:sp>
         <p:nvSpPr>
-          <p:cNvPr id="12" name="Text 10"/>
-          <p:cNvSpPr txBox="1"/>
-          <p:nvPr/>
-        </p:nvSpPr>
-        <p:spPr>
-          <a:xfrm>
-            <a:off x="2807208" y="4937760"/>
+          <p:cNvPr id="11" name="Text 9"/>
+          <p:cNvSpPr txBox="1"/>
+          <p:nvPr/>
+        </p:nvSpPr>
+        <p:spPr>
+          <a:xfrm>
+            <a:off x="3557016" y="3639312"/>
             <a:ext cx="822960" cy="420624"/>
           </a:xfrm>
           <a:prstGeom prst="rect">
@@ -17259,7 +17373,7 @@
       </p:sp>
       <p:sp>
         <p:nvSpPr>
-          <p:cNvPr id="13" name="Shape 11"/>
+          <p:cNvPr id="12" name="Shape 10"/>
           <p:cNvSpPr/>
           <p:nvPr/>
         </p:nvSpPr>
@@ -17293,7 +17407,7 @@
       </p:sp>
       <p:sp>
         <p:nvSpPr>
-          <p:cNvPr id="14" name="Shape 12"/>
+          <p:cNvPr id="13" name="Shape 11"/>
           <p:cNvSpPr/>
           <p:nvPr/>
         </p:nvSpPr>
@@ -17315,7 +17429,7 @@
       </p:sp>
       <p:sp>
         <p:nvSpPr>
-          <p:cNvPr id="15" name="Shape 13"/>
+          <p:cNvPr id="14" name="Shape 12"/>
           <p:cNvSpPr/>
           <p:nvPr/>
         </p:nvSpPr>
@@ -17335,7 +17449,7 @@
       </p:sp>
       <p:sp>
         <p:nvSpPr>
-          <p:cNvPr id="16" name="Shape 14"/>
+          <p:cNvPr id="15" name="Shape 13"/>
           <p:cNvSpPr/>
           <p:nvPr/>
         </p:nvSpPr>
@@ -17355,7 +17469,7 @@
       </p:sp>
       <p:sp>
         <p:nvSpPr>
-          <p:cNvPr id="17" name="Shape 15"/>
+          <p:cNvPr id="16" name="Shape 14"/>
           <p:cNvSpPr/>
           <p:nvPr/>
         </p:nvSpPr>
@@ -17375,7 +17489,7 @@
       </p:sp>
       <p:sp>
         <p:nvSpPr>
-          <p:cNvPr id="18" name="Shape 16"/>
+          <p:cNvPr id="17" name="Shape 15"/>
           <p:cNvSpPr/>
           <p:nvPr/>
         </p:nvSpPr>
@@ -17395,7 +17509,7 @@
       </p:sp>
       <p:sp>
         <p:nvSpPr>
-          <p:cNvPr id="19" name="Text 17"/>
+          <p:cNvPr id="18" name="Text 16"/>
           <p:cNvSpPr txBox="1"/>
           <p:nvPr/>
         </p:nvSpPr>
@@ -17423,7 +17537,7 @@
       </p:sp>
       <p:sp>
         <p:nvSpPr>
-          <p:cNvPr id="20" name="Shape 18"/>
+          <p:cNvPr id="19" name="Shape 17"/>
           <p:cNvSpPr/>
           <p:nvPr/>
         </p:nvSpPr>
@@ -17446,18 +17560,18 @@
       </p:sp>
       <p:sp>
         <p:nvSpPr>
-          <p:cNvPr id="21" name="Shape 19"/>
+          <p:cNvPr id="20" name="Shape 18"/>
           <p:cNvSpPr/>
           <p:nvPr/>
         </p:nvSpPr>
         <p:spPr>
           <a:xfrm>
             <a:off x="7296912" y="2212848"/>
-            <a:ext cx="3254167" cy="566928"/>
+            <a:ext cx="1911096" cy="368808"/>
           </a:xfrm>
           <a:prstGeom prst="roundRect">
             <a:avLst>
-              <a:gd name="adj" fmla="val 19355"/>
+              <a:gd name="adj" fmla="val 14876"/>
             </a:avLst>
           </a:prstGeom>
           <a:solidFill>
@@ -17473,14 +17587,34 @@
       </p:sp>
       <p:sp>
         <p:nvSpPr>
+          <p:cNvPr id="21" name="Shape 19"/>
+          <p:cNvSpPr/>
+          <p:nvPr/>
+        </p:nvSpPr>
+        <p:spPr>
+          <a:xfrm>
+            <a:off x="7424928" y="2356104"/>
+            <a:ext cx="82296" cy="82296"/>
+          </a:xfrm>
+          <a:prstGeom prst="ellipse">
+            <a:avLst/>
+          </a:prstGeom>
+          <a:solidFill>
+            <a:srgbClr val="9C7C2E"/>
+          </a:solidFill>
+          <a:ln/>
+        </p:spPr>
+      </p:sp>
+      <p:sp>
+        <p:nvSpPr>
           <p:cNvPr id="22" name="Text 20"/>
           <p:cNvSpPr txBox="1"/>
           <p:nvPr/>
         </p:nvSpPr>
         <p:spPr>
           <a:xfrm>
-            <a:off x="7424928" y="2212848"/>
-            <a:ext cx="2998135" cy="566928"/>
+            <a:off x="7589520" y="2212848"/>
+            <a:ext cx="1527048" cy="368808"/>
           </a:xfrm>
           <a:prstGeom prst="rect">
             <a:avLst/>
@@ -17496,7 +17630,7 @@
               <a:buNone/>
             </a:pPr>
             <a:r>
-              <a:rPr lang="en-US" sz="900" dirty="0">
+              <a:rPr lang="en-US" sz="800" dirty="0">
                 <a:solidFill>
                   <a:srgbClr val="1D1A15"/>
                 </a:solidFill>
@@ -17504,9 +17638,9 @@
                 <a:ea typeface="Calibri" pitchFamily="34" charset="-122"/>
                 <a:cs typeface="Calibri" pitchFamily="34" charset="-120"/>
               </a:rPr>
-              <a:t>Hi! I can help. What do you need?</a:t>
-            </a:r>
-            <a:endParaRPr lang="en-US" sz="900" dirty="0"/>
+              <a:t>Automated renewal outreach</a:t>
+            </a:r>
+            <a:endParaRPr lang="en-US" sz="800" dirty="0"/>
           </a:p>
         </p:txBody>
       </p:sp>
@@ -17518,78 +17652,12 @@
         </p:nvSpPr>
         <p:spPr>
           <a:xfrm>
-            <a:off x="8408091" y="2907792"/>
-            <a:ext cx="2857317" cy="457200"/>
+            <a:off x="9354312" y="2212848"/>
+            <a:ext cx="1911096" cy="368808"/>
           </a:xfrm>
           <a:prstGeom prst="roundRect">
             <a:avLst>
-              <a:gd name="adj" fmla="val 24000"/>
-            </a:avLst>
-          </a:prstGeom>
-          <a:solidFill>
-            <a:srgbClr val="F3E7C8"/>
-          </a:solidFill>
-          <a:ln w="9525">
-            <a:solidFill>
-              <a:srgbClr val="9C7C2E"/>
-            </a:solidFill>
-            <a:prstDash val="solid"/>
-          </a:ln>
-        </p:spPr>
-      </p:sp>
-      <p:sp>
-        <p:nvSpPr>
-          <p:cNvPr id="24" name="Text 22"/>
-          <p:cNvSpPr txBox="1"/>
-          <p:nvPr/>
-        </p:nvSpPr>
-        <p:spPr>
-          <a:xfrm>
-            <a:off x="8536107" y="2907792"/>
-            <a:ext cx="2601285" cy="457200"/>
-          </a:xfrm>
-          <a:prstGeom prst="rect">
-            <a:avLst/>
-          </a:prstGeom>
-          <a:noFill/>
-          <a:ln/>
-        </p:spPr>
-        <p:txBody>
-          <a:bodyPr wrap="square" lIns="0" tIns="0" rIns="0" bIns="0" rtlCol="0" anchor="ctr"/>
-          <a:lstStyle/>
-          <a:p>
-            <a:pPr indent="0" marL="0">
-              <a:buNone/>
-            </a:pPr>
-            <a:r>
-              <a:rPr lang="en-US" sz="900" dirty="0">
-                <a:solidFill>
-                  <a:srgbClr val="7A5A12"/>
-                </a:solidFill>
-                <a:latin typeface="Calibri" pitchFamily="34" charset="0"/>
-                <a:ea typeface="Calibri" pitchFamily="34" charset="-122"/>
-                <a:cs typeface="Calibri" pitchFamily="34" charset="-120"/>
-              </a:rPr>
-              <a:t>Where is the Employee Handbook?</a:t>
-            </a:r>
-            <a:endParaRPr lang="en-US" sz="900" dirty="0"/>
-          </a:p>
-        </p:txBody>
-      </p:sp>
-      <p:sp>
-        <p:nvSpPr>
-          <p:cNvPr id="25" name="Shape 23"/>
-          <p:cNvSpPr/>
-          <p:nvPr/>
-        </p:nvSpPr>
-        <p:spPr>
-          <a:xfrm>
-            <a:off x="7296912" y="3493008"/>
-            <a:ext cx="3412907" cy="786384"/>
-          </a:xfrm>
-          <a:prstGeom prst="roundRect">
-            <a:avLst>
-              <a:gd name="adj" fmla="val 13953"/>
+              <a:gd name="adj" fmla="val 14876"/>
             </a:avLst>
           </a:prstGeom>
           <a:solidFill>
@@ -17605,14 +17673,34 @@
       </p:sp>
       <p:sp>
         <p:nvSpPr>
-          <p:cNvPr id="26" name="Text 24"/>
-          <p:cNvSpPr txBox="1"/>
-          <p:nvPr/>
-        </p:nvSpPr>
-        <p:spPr>
-          <a:xfrm>
-            <a:off x="7424928" y="3566160"/>
-            <a:ext cx="3156875" cy="329184"/>
+          <p:cNvPr id="24" name="Shape 22"/>
+          <p:cNvSpPr/>
+          <p:nvPr/>
+        </p:nvSpPr>
+        <p:spPr>
+          <a:xfrm>
+            <a:off x="9482328" y="2356104"/>
+            <a:ext cx="82296" cy="82296"/>
+          </a:xfrm>
+          <a:prstGeom prst="ellipse">
+            <a:avLst/>
+          </a:prstGeom>
+          <a:solidFill>
+            <a:srgbClr val="9C7C2E"/>
+          </a:solidFill>
+          <a:ln/>
+        </p:spPr>
+      </p:sp>
+      <p:sp>
+        <p:nvSpPr>
+          <p:cNvPr id="25" name="Text 23"/>
+          <p:cNvSpPr txBox="1"/>
+          <p:nvPr/>
+        </p:nvSpPr>
+        <p:spPr>
+          <a:xfrm>
+            <a:off x="9646920" y="2212848"/>
+            <a:ext cx="1527048" cy="368808"/>
           </a:xfrm>
           <a:prstGeom prst="rect">
             <a:avLst/>
@@ -17628,7 +17716,7 @@
               <a:buNone/>
             </a:pPr>
             <a:r>
-              <a:rPr lang="en-US" sz="900" dirty="0">
+              <a:rPr lang="en-US" sz="800" dirty="0">
                 <a:solidFill>
                   <a:srgbClr val="1D1A15"/>
                 </a:solidFill>
@@ -17636,169 +17724,30 @@
                 <a:ea typeface="Calibri" pitchFamily="34" charset="-122"/>
                 <a:cs typeface="Calibri" pitchFamily="34" charset="-120"/>
               </a:rPr>
-              <a:t>Here it is, plus your first-week checklist:</a:t>
-            </a:r>
-            <a:endParaRPr lang="en-US" sz="900" dirty="0"/>
-          </a:p>
-        </p:txBody>
-      </p:sp>
-      <p:sp>
-        <p:nvSpPr>
-          <p:cNvPr id="27" name="Shape 25"/>
-          <p:cNvSpPr/>
-          <p:nvPr/>
-        </p:nvSpPr>
-        <p:spPr>
-          <a:xfrm>
-            <a:off x="7424928" y="3913632"/>
-            <a:ext cx="1783080" cy="274320"/>
+              <a:t>Real-time data across every hub</a:t>
+            </a:r>
+            <a:endParaRPr lang="en-US" sz="800" dirty="0"/>
+          </a:p>
+        </p:txBody>
+      </p:sp>
+      <p:sp>
+        <p:nvSpPr>
+          <p:cNvPr id="26" name="Shape 24"/>
+          <p:cNvSpPr/>
+          <p:nvPr/>
+        </p:nvSpPr>
+        <p:spPr>
+          <a:xfrm>
+            <a:off x="7296912" y="2691384"/>
+            <a:ext cx="1911096" cy="368808"/>
           </a:xfrm>
           <a:prstGeom prst="roundRect">
             <a:avLst>
-              <a:gd name="adj" fmla="val 50000"/>
+              <a:gd name="adj" fmla="val 14876"/>
             </a:avLst>
           </a:prstGeom>
           <a:solidFill>
-            <a:srgbClr val="FFFFFF"/>
-          </a:solidFill>
-          <a:ln w="9525">
-            <a:solidFill>
-              <a:srgbClr val="9C7C2E"/>
-            </a:solidFill>
-            <a:prstDash val="solid"/>
-          </a:ln>
-        </p:spPr>
-      </p:sp>
-      <p:sp>
-        <p:nvSpPr>
-          <p:cNvPr id="28" name="Shape 26"/>
-          <p:cNvSpPr/>
-          <p:nvPr/>
-        </p:nvSpPr>
-        <p:spPr>
-          <a:xfrm>
-            <a:off x="7534656" y="3968496"/>
-            <a:ext cx="118872" cy="155448"/>
-          </a:xfrm>
-          <a:prstGeom prst="roundRect">
-            <a:avLst>
-              <a:gd name="adj" fmla="val 15385"/>
-            </a:avLst>
-          </a:prstGeom>
-          <a:solidFill>
-            <a:srgbClr val="FFFFFF"/>
-          </a:solidFill>
-          <a:ln w="12700">
-            <a:solidFill>
-              <a:srgbClr val="9C7C2E"/>
-            </a:solidFill>
-            <a:prstDash val="solid"/>
-          </a:ln>
-        </p:spPr>
-      </p:sp>
-      <p:sp>
-        <p:nvSpPr>
-          <p:cNvPr id="29" name="Shape 27"/>
-          <p:cNvSpPr/>
-          <p:nvPr/>
-        </p:nvSpPr>
-        <p:spPr>
-          <a:xfrm>
-            <a:off x="7562088" y="4023360"/>
-            <a:ext cx="64008" cy="0"/>
-          </a:xfrm>
-          <a:prstGeom prst="line">
-            <a:avLst/>
-          </a:prstGeom>
-          <a:noFill/>
-          <a:ln w="9525">
-            <a:solidFill>
-              <a:srgbClr val="9C7C2E"/>
-            </a:solidFill>
-            <a:prstDash val="solid"/>
-          </a:ln>
-        </p:spPr>
-      </p:sp>
-      <p:sp>
-        <p:nvSpPr>
-          <p:cNvPr id="30" name="Shape 28"/>
-          <p:cNvSpPr/>
-          <p:nvPr/>
-        </p:nvSpPr>
-        <p:spPr>
-          <a:xfrm>
-            <a:off x="7562088" y="4059936"/>
-            <a:ext cx="64008" cy="0"/>
-          </a:xfrm>
-          <a:prstGeom prst="line">
-            <a:avLst/>
-          </a:prstGeom>
-          <a:noFill/>
-          <a:ln w="9525">
-            <a:solidFill>
-              <a:srgbClr val="9C7C2E"/>
-            </a:solidFill>
-            <a:prstDash val="solid"/>
-          </a:ln>
-        </p:spPr>
-      </p:sp>
-      <p:sp>
-        <p:nvSpPr>
-          <p:cNvPr id="31" name="Text 29"/>
-          <p:cNvSpPr txBox="1"/>
-          <p:nvPr/>
-        </p:nvSpPr>
-        <p:spPr>
-          <a:xfrm>
-            <a:off x="7717536" y="3904488"/>
-            <a:ext cx="1463040" cy="292608"/>
-          </a:xfrm>
-          <a:prstGeom prst="rect">
-            <a:avLst/>
-          </a:prstGeom>
-          <a:noFill/>
-          <a:ln/>
-        </p:spPr>
-        <p:txBody>
-          <a:bodyPr wrap="square" lIns="0" tIns="0" rIns="0" bIns="0" rtlCol="0" anchor="ctr"/>
-          <a:lstStyle/>
-          <a:p>
-            <a:pPr indent="0" marL="0">
-              <a:buNone/>
-            </a:pPr>
-            <a:r>
-              <a:rPr lang="en-US" sz="750" b="1" dirty="0">
-                <a:solidFill>
-                  <a:srgbClr val="9C7C2E"/>
-                </a:solidFill>
-                <a:latin typeface="Calibri" pitchFamily="34" charset="0"/>
-                <a:ea typeface="Calibri" pitchFamily="34" charset="-122"/>
-                <a:cs typeface="Calibri" pitchFamily="34" charset="-120"/>
-              </a:rPr>
-              <a:t>Employee Handbook</a:t>
-            </a:r>
-            <a:endParaRPr lang="en-US" sz="750" dirty="0"/>
-          </a:p>
-        </p:txBody>
-      </p:sp>
-      <p:sp>
-        <p:nvSpPr>
-          <p:cNvPr id="32" name="Shape 30"/>
-          <p:cNvSpPr/>
-          <p:nvPr/>
-        </p:nvSpPr>
-        <p:spPr>
-          <a:xfrm>
-            <a:off x="7296912" y="4590288"/>
-            <a:ext cx="3968496" cy="365760"/>
-          </a:xfrm>
-          <a:prstGeom prst="roundRect">
-            <a:avLst>
-              <a:gd name="adj" fmla="val 50000"/>
-            </a:avLst>
-          </a:prstGeom>
-          <a:solidFill>
-            <a:srgbClr val="FFFFFF"/>
+            <a:srgbClr val="FBFAF6"/>
           </a:solidFill>
           <a:ln w="12700">
             <a:solidFill>
@@ -17810,14 +17759,34 @@
       </p:sp>
       <p:sp>
         <p:nvSpPr>
-          <p:cNvPr id="33" name="Text 31"/>
-          <p:cNvSpPr txBox="1"/>
-          <p:nvPr/>
-        </p:nvSpPr>
-        <p:spPr>
-          <a:xfrm>
-            <a:off x="7443216" y="4590288"/>
-            <a:ext cx="3054096" cy="365760"/>
+          <p:cNvPr id="27" name="Shape 25"/>
+          <p:cNvSpPr/>
+          <p:nvPr/>
+        </p:nvSpPr>
+        <p:spPr>
+          <a:xfrm>
+            <a:off x="7424928" y="2834640"/>
+            <a:ext cx="82296" cy="82296"/>
+          </a:xfrm>
+          <a:prstGeom prst="ellipse">
+            <a:avLst/>
+          </a:prstGeom>
+          <a:solidFill>
+            <a:srgbClr val="9C7C2E"/>
+          </a:solidFill>
+          <a:ln/>
+        </p:spPr>
+      </p:sp>
+      <p:sp>
+        <p:nvSpPr>
+          <p:cNvPr id="28" name="Text 26"/>
+          <p:cNvSpPr txBox="1"/>
+          <p:nvPr/>
+        </p:nvSpPr>
+        <p:spPr>
+          <a:xfrm>
+            <a:off x="7589520" y="2691384"/>
+            <a:ext cx="1527048" cy="368808"/>
           </a:xfrm>
           <a:prstGeom prst="rect">
             <a:avLst/>
@@ -17833,30 +17802,57 @@
               <a:buNone/>
             </a:pPr>
             <a:r>
-              <a:rPr lang="en-US" sz="850" dirty="0">
-                <a:solidFill>
-                  <a:srgbClr val="7A7266"/>
-                </a:solidFill>
-                <a:latin typeface="Calibri" pitchFamily="34" charset="0"/>
-                <a:ea typeface="Calibri" pitchFamily="34" charset="-122"/>
-                <a:cs typeface="Calibri" pitchFamily="34" charset="-120"/>
-              </a:rPr>
-              <a:t>Ask DeepRoots…</a:t>
-            </a:r>
-            <a:endParaRPr lang="en-US" sz="850" dirty="0"/>
-          </a:p>
-        </p:txBody>
-      </p:sp>
-      <p:sp>
-        <p:nvSpPr>
-          <p:cNvPr id="34" name="Shape 32"/>
-          <p:cNvSpPr/>
-          <p:nvPr/>
-        </p:nvSpPr>
-        <p:spPr>
-          <a:xfrm>
-            <a:off x="10927080" y="4636008"/>
-            <a:ext cx="274320" cy="274320"/>
+              <a:rPr lang="en-US" sz="800" dirty="0">
+                <a:solidFill>
+                  <a:srgbClr val="1D1A15"/>
+                </a:solidFill>
+                <a:latin typeface="Calibri" pitchFamily="34" charset="0"/>
+                <a:ea typeface="Calibri" pitchFamily="34" charset="-122"/>
+                <a:cs typeface="Calibri" pitchFamily="34" charset="-120"/>
+              </a:rPr>
+              <a:t>Parent engagement portal</a:t>
+            </a:r>
+            <a:endParaRPr lang="en-US" sz="800" dirty="0"/>
+          </a:p>
+        </p:txBody>
+      </p:sp>
+      <p:sp>
+        <p:nvSpPr>
+          <p:cNvPr id="29" name="Shape 27"/>
+          <p:cNvSpPr/>
+          <p:nvPr/>
+        </p:nvSpPr>
+        <p:spPr>
+          <a:xfrm>
+            <a:off x="9354312" y="2691384"/>
+            <a:ext cx="1911096" cy="368808"/>
+          </a:xfrm>
+          <a:prstGeom prst="roundRect">
+            <a:avLst>
+              <a:gd name="adj" fmla="val 14876"/>
+            </a:avLst>
+          </a:prstGeom>
+          <a:solidFill>
+            <a:srgbClr val="FBFAF6"/>
+          </a:solidFill>
+          <a:ln w="12700">
+            <a:solidFill>
+              <a:srgbClr val="E4DCC9"/>
+            </a:solidFill>
+            <a:prstDash val="solid"/>
+          </a:ln>
+        </p:spPr>
+      </p:sp>
+      <p:sp>
+        <p:nvSpPr>
+          <p:cNvPr id="30" name="Shape 28"/>
+          <p:cNvSpPr/>
+          <p:nvPr/>
+        </p:nvSpPr>
+        <p:spPr>
+          <a:xfrm>
+            <a:off x="9482328" y="2834640"/>
+            <a:ext cx="82296" cy="82296"/>
           </a:xfrm>
           <a:prstGeom prst="ellipse">
             <a:avLst/>
@@ -17869,14 +17865,14 @@
       </p:sp>
       <p:sp>
         <p:nvSpPr>
-          <p:cNvPr id="35" name="Text 33"/>
-          <p:cNvSpPr txBox="1"/>
-          <p:nvPr/>
-        </p:nvSpPr>
-        <p:spPr>
-          <a:xfrm>
-            <a:off x="10927080" y="4617720"/>
-            <a:ext cx="274320" cy="292608"/>
+          <p:cNvPr id="31" name="Text 29"/>
+          <p:cNvSpPr txBox="1"/>
+          <p:nvPr/>
+        </p:nvSpPr>
+        <p:spPr>
+          <a:xfrm>
+            <a:off x="9646920" y="2691384"/>
+            <a:ext cx="1527048" cy="368808"/>
           </a:xfrm>
           <a:prstGeom prst="rect">
             <a:avLst/>
@@ -17888,21 +17884,623 @@
           <a:bodyPr wrap="square" lIns="0" tIns="0" rIns="0" bIns="0" rtlCol="0" anchor="ctr"/>
           <a:lstStyle/>
           <a:p>
-            <a:pPr algn="ctr" indent="0" marL="0">
-              <a:buNone/>
-            </a:pPr>
-            <a:r>
-              <a:rPr lang="en-US" sz="1000" b="1" dirty="0">
-                <a:solidFill>
-                  <a:srgbClr val="FFFFFF"/>
-                </a:solidFill>
-                <a:latin typeface="Calibri" pitchFamily="34" charset="0"/>
-                <a:ea typeface="Calibri" pitchFamily="34" charset="-122"/>
-                <a:cs typeface="Calibri" pitchFamily="34" charset="-120"/>
-              </a:rPr>
-              <a:t>↑</a:t>
-            </a:r>
-            <a:endParaRPr lang="en-US" sz="1000" dirty="0"/>
+            <a:pPr indent="0" marL="0">
+              <a:buNone/>
+            </a:pPr>
+            <a:r>
+              <a:rPr lang="en-US" sz="800" dirty="0">
+                <a:solidFill>
+                  <a:srgbClr val="1D1A15"/>
+                </a:solidFill>
+                <a:latin typeface="Calibri" pitchFamily="34" charset="0"/>
+                <a:ea typeface="Calibri" pitchFamily="34" charset="-122"/>
+                <a:cs typeface="Calibri" pitchFamily="34" charset="-120"/>
+              </a:rPr>
+              <a:t>Analytics &amp; forecasting</a:t>
+            </a:r>
+            <a:endParaRPr lang="en-US" sz="800" dirty="0"/>
+          </a:p>
+        </p:txBody>
+      </p:sp>
+      <p:sp>
+        <p:nvSpPr>
+          <p:cNvPr id="32" name="Shape 30"/>
+          <p:cNvSpPr/>
+          <p:nvPr/>
+        </p:nvSpPr>
+        <p:spPr>
+          <a:xfrm>
+            <a:off x="7296912" y="3169920"/>
+            <a:ext cx="1911096" cy="368808"/>
+          </a:xfrm>
+          <a:prstGeom prst="roundRect">
+            <a:avLst>
+              <a:gd name="adj" fmla="val 14876"/>
+            </a:avLst>
+          </a:prstGeom>
+          <a:solidFill>
+            <a:srgbClr val="FBFAF6"/>
+          </a:solidFill>
+          <a:ln w="12700">
+            <a:solidFill>
+              <a:srgbClr val="E4DCC9"/>
+            </a:solidFill>
+            <a:prstDash val="solid"/>
+          </a:ln>
+        </p:spPr>
+      </p:sp>
+      <p:sp>
+        <p:nvSpPr>
+          <p:cNvPr id="33" name="Shape 31"/>
+          <p:cNvSpPr/>
+          <p:nvPr/>
+        </p:nvSpPr>
+        <p:spPr>
+          <a:xfrm>
+            <a:off x="7424928" y="3313176"/>
+            <a:ext cx="82296" cy="82296"/>
+          </a:xfrm>
+          <a:prstGeom prst="ellipse">
+            <a:avLst/>
+          </a:prstGeom>
+          <a:solidFill>
+            <a:srgbClr val="9C7C2E"/>
+          </a:solidFill>
+          <a:ln/>
+        </p:spPr>
+      </p:sp>
+      <p:sp>
+        <p:nvSpPr>
+          <p:cNvPr id="34" name="Text 32"/>
+          <p:cNvSpPr txBox="1"/>
+          <p:nvPr/>
+        </p:nvSpPr>
+        <p:spPr>
+          <a:xfrm>
+            <a:off x="7589520" y="3169920"/>
+            <a:ext cx="1527048" cy="368808"/>
+          </a:xfrm>
+          <a:prstGeom prst="rect">
+            <a:avLst/>
+          </a:prstGeom>
+          <a:noFill/>
+          <a:ln/>
+        </p:spPr>
+        <p:txBody>
+          <a:bodyPr wrap="square" lIns="0" tIns="0" rIns="0" bIns="0" rtlCol="0" anchor="ctr"/>
+          <a:lstStyle/>
+          <a:p>
+            <a:pPr indent="0" marL="0">
+              <a:buNone/>
+            </a:pPr>
+            <a:r>
+              <a:rPr lang="en-US" sz="800" dirty="0">
+                <a:solidFill>
+                  <a:srgbClr val="1D1A15"/>
+                </a:solidFill>
+                <a:latin typeface="Calibri" pitchFamily="34" charset="0"/>
+                <a:ea typeface="Calibri" pitchFamily="34" charset="-122"/>
+                <a:cs typeface="Calibri" pitchFamily="34" charset="-120"/>
+              </a:rPr>
+              <a:t>Handbook &amp; document library</a:t>
+            </a:r>
+            <a:endParaRPr lang="en-US" sz="800" dirty="0"/>
+          </a:p>
+        </p:txBody>
+      </p:sp>
+      <p:sp>
+        <p:nvSpPr>
+          <p:cNvPr id="35" name="Shape 33"/>
+          <p:cNvSpPr/>
+          <p:nvPr/>
+        </p:nvSpPr>
+        <p:spPr>
+          <a:xfrm>
+            <a:off x="9354312" y="3169920"/>
+            <a:ext cx="1911096" cy="368808"/>
+          </a:xfrm>
+          <a:prstGeom prst="roundRect">
+            <a:avLst>
+              <a:gd name="adj" fmla="val 14876"/>
+            </a:avLst>
+          </a:prstGeom>
+          <a:solidFill>
+            <a:srgbClr val="FBFAF6"/>
+          </a:solidFill>
+          <a:ln w="12700">
+            <a:solidFill>
+              <a:srgbClr val="E4DCC9"/>
+            </a:solidFill>
+            <a:prstDash val="solid"/>
+          </a:ln>
+        </p:spPr>
+      </p:sp>
+      <p:sp>
+        <p:nvSpPr>
+          <p:cNvPr id="36" name="Shape 34"/>
+          <p:cNvSpPr/>
+          <p:nvPr/>
+        </p:nvSpPr>
+        <p:spPr>
+          <a:xfrm>
+            <a:off x="9482328" y="3313176"/>
+            <a:ext cx="82296" cy="82296"/>
+          </a:xfrm>
+          <a:prstGeom prst="ellipse">
+            <a:avLst/>
+          </a:prstGeom>
+          <a:solidFill>
+            <a:srgbClr val="9C7C2E"/>
+          </a:solidFill>
+          <a:ln/>
+        </p:spPr>
+      </p:sp>
+      <p:sp>
+        <p:nvSpPr>
+          <p:cNvPr id="37" name="Text 35"/>
+          <p:cNvSpPr txBox="1"/>
+          <p:nvPr/>
+        </p:nvSpPr>
+        <p:spPr>
+          <a:xfrm>
+            <a:off x="9646920" y="3169920"/>
+            <a:ext cx="1527048" cy="368808"/>
+          </a:xfrm>
+          <a:prstGeom prst="rect">
+            <a:avLst/>
+          </a:prstGeom>
+          <a:noFill/>
+          <a:ln/>
+        </p:spPr>
+        <p:txBody>
+          <a:bodyPr wrap="square" lIns="0" tIns="0" rIns="0" bIns="0" rtlCol="0" anchor="ctr"/>
+          <a:lstStyle/>
+          <a:p>
+            <a:pPr indent="0" marL="0">
+              <a:buNone/>
+            </a:pPr>
+            <a:r>
+              <a:rPr lang="en-US" sz="800" dirty="0">
+                <a:solidFill>
+                  <a:srgbClr val="1D1A15"/>
+                </a:solidFill>
+                <a:latin typeface="Calibri" pitchFamily="34" charset="0"/>
+                <a:ea typeface="Calibri" pitchFamily="34" charset="-122"/>
+                <a:cs typeface="Calibri" pitchFamily="34" charset="-120"/>
+              </a:rPr>
+              <a:t>Mobile app for teachers &amp; parents</a:t>
+            </a:r>
+            <a:endParaRPr lang="en-US" sz="800" dirty="0"/>
+          </a:p>
+        </p:txBody>
+      </p:sp>
+      <p:sp>
+        <p:nvSpPr>
+          <p:cNvPr id="38" name="Shape 36"/>
+          <p:cNvSpPr/>
+          <p:nvPr/>
+        </p:nvSpPr>
+        <p:spPr>
+          <a:xfrm>
+            <a:off x="7296912" y="3648456"/>
+            <a:ext cx="1911096" cy="368808"/>
+          </a:xfrm>
+          <a:prstGeom prst="roundRect">
+            <a:avLst>
+              <a:gd name="adj" fmla="val 14876"/>
+            </a:avLst>
+          </a:prstGeom>
+          <a:solidFill>
+            <a:srgbClr val="FBFAF6"/>
+          </a:solidFill>
+          <a:ln w="12700">
+            <a:solidFill>
+              <a:srgbClr val="E4DCC9"/>
+            </a:solidFill>
+            <a:prstDash val="solid"/>
+          </a:ln>
+        </p:spPr>
+      </p:sp>
+      <p:sp>
+        <p:nvSpPr>
+          <p:cNvPr id="39" name="Shape 37"/>
+          <p:cNvSpPr/>
+          <p:nvPr/>
+        </p:nvSpPr>
+        <p:spPr>
+          <a:xfrm>
+            <a:off x="7424928" y="3791712"/>
+            <a:ext cx="82296" cy="82296"/>
+          </a:xfrm>
+          <a:prstGeom prst="ellipse">
+            <a:avLst/>
+          </a:prstGeom>
+          <a:solidFill>
+            <a:srgbClr val="9C7C2E"/>
+          </a:solidFill>
+          <a:ln/>
+        </p:spPr>
+      </p:sp>
+      <p:sp>
+        <p:nvSpPr>
+          <p:cNvPr id="40" name="Text 38"/>
+          <p:cNvSpPr txBox="1"/>
+          <p:nvPr/>
+        </p:nvSpPr>
+        <p:spPr>
+          <a:xfrm>
+            <a:off x="7589520" y="3648456"/>
+            <a:ext cx="1527048" cy="368808"/>
+          </a:xfrm>
+          <a:prstGeom prst="rect">
+            <a:avLst/>
+          </a:prstGeom>
+          <a:noFill/>
+          <a:ln/>
+        </p:spPr>
+        <p:txBody>
+          <a:bodyPr wrap="square" lIns="0" tIns="0" rIns="0" bIns="0" rtlCol="0" anchor="ctr"/>
+          <a:lstStyle/>
+          <a:p>
+            <a:pPr indent="0" marL="0">
+              <a:buNone/>
+            </a:pPr>
+            <a:r>
+              <a:rPr lang="en-US" sz="800" dirty="0">
+                <a:solidFill>
+                  <a:srgbClr val="1D1A15"/>
+                </a:solidFill>
+                <a:latin typeface="Calibri" pitchFamily="34" charset="0"/>
+                <a:ea typeface="Calibri" pitchFamily="34" charset="-122"/>
+                <a:cs typeface="Calibri" pitchFamily="34" charset="-120"/>
+              </a:rPr>
+              <a:t>Single sign-on across tools</a:t>
+            </a:r>
+            <a:endParaRPr lang="en-US" sz="800" dirty="0"/>
+          </a:p>
+        </p:txBody>
+      </p:sp>
+      <p:sp>
+        <p:nvSpPr>
+          <p:cNvPr id="41" name="Shape 39"/>
+          <p:cNvSpPr/>
+          <p:nvPr/>
+        </p:nvSpPr>
+        <p:spPr>
+          <a:xfrm>
+            <a:off x="9354312" y="3648456"/>
+            <a:ext cx="1911096" cy="368808"/>
+          </a:xfrm>
+          <a:prstGeom prst="roundRect">
+            <a:avLst>
+              <a:gd name="adj" fmla="val 14876"/>
+            </a:avLst>
+          </a:prstGeom>
+          <a:solidFill>
+            <a:srgbClr val="FBFAF6"/>
+          </a:solidFill>
+          <a:ln w="12700">
+            <a:solidFill>
+              <a:srgbClr val="E4DCC9"/>
+            </a:solidFill>
+            <a:prstDash val="solid"/>
+          </a:ln>
+        </p:spPr>
+      </p:sp>
+      <p:sp>
+        <p:nvSpPr>
+          <p:cNvPr id="42" name="Shape 40"/>
+          <p:cNvSpPr/>
+          <p:nvPr/>
+        </p:nvSpPr>
+        <p:spPr>
+          <a:xfrm>
+            <a:off x="9482328" y="3791712"/>
+            <a:ext cx="82296" cy="82296"/>
+          </a:xfrm>
+          <a:prstGeom prst="ellipse">
+            <a:avLst/>
+          </a:prstGeom>
+          <a:solidFill>
+            <a:srgbClr val="9C7C2E"/>
+          </a:solidFill>
+          <a:ln/>
+        </p:spPr>
+      </p:sp>
+      <p:sp>
+        <p:nvSpPr>
+          <p:cNvPr id="43" name="Text 41"/>
+          <p:cNvSpPr txBox="1"/>
+          <p:nvPr/>
+        </p:nvSpPr>
+        <p:spPr>
+          <a:xfrm>
+            <a:off x="9646920" y="3648456"/>
+            <a:ext cx="1527048" cy="368808"/>
+          </a:xfrm>
+          <a:prstGeom prst="rect">
+            <a:avLst/>
+          </a:prstGeom>
+          <a:noFill/>
+          <a:ln/>
+        </p:spPr>
+        <p:txBody>
+          <a:bodyPr wrap="square" lIns="0" tIns="0" rIns="0" bIns="0" rtlCol="0" anchor="ctr"/>
+          <a:lstStyle/>
+          <a:p>
+            <a:pPr indent="0" marL="0">
+              <a:buNone/>
+            </a:pPr>
+            <a:r>
+              <a:rPr lang="en-US" sz="800" dirty="0">
+                <a:solidFill>
+                  <a:srgbClr val="1D1A15"/>
+                </a:solidFill>
+                <a:latin typeface="Calibri" pitchFamily="34" charset="0"/>
+                <a:ea typeface="Calibri" pitchFamily="34" charset="-122"/>
+                <a:cs typeface="Calibri" pitchFamily="34" charset="-120"/>
+              </a:rPr>
+              <a:t>Automated emails &amp; reminders</a:t>
+            </a:r>
+            <a:endParaRPr lang="en-US" sz="800" dirty="0"/>
+          </a:p>
+        </p:txBody>
+      </p:sp>
+      <p:sp>
+        <p:nvSpPr>
+          <p:cNvPr id="44" name="Shape 42"/>
+          <p:cNvSpPr/>
+          <p:nvPr/>
+        </p:nvSpPr>
+        <p:spPr>
+          <a:xfrm>
+            <a:off x="7296912" y="4126992"/>
+            <a:ext cx="1911096" cy="368808"/>
+          </a:xfrm>
+          <a:prstGeom prst="roundRect">
+            <a:avLst>
+              <a:gd name="adj" fmla="val 14876"/>
+            </a:avLst>
+          </a:prstGeom>
+          <a:solidFill>
+            <a:srgbClr val="FBFAF6"/>
+          </a:solidFill>
+          <a:ln w="12700">
+            <a:solidFill>
+              <a:srgbClr val="E4DCC9"/>
+            </a:solidFill>
+            <a:prstDash val="solid"/>
+          </a:ln>
+        </p:spPr>
+      </p:sp>
+      <p:sp>
+        <p:nvSpPr>
+          <p:cNvPr id="45" name="Shape 43"/>
+          <p:cNvSpPr/>
+          <p:nvPr/>
+        </p:nvSpPr>
+        <p:spPr>
+          <a:xfrm>
+            <a:off x="7424928" y="4270248"/>
+            <a:ext cx="82296" cy="82296"/>
+          </a:xfrm>
+          <a:prstGeom prst="ellipse">
+            <a:avLst/>
+          </a:prstGeom>
+          <a:solidFill>
+            <a:srgbClr val="9C7C2E"/>
+          </a:solidFill>
+          <a:ln/>
+        </p:spPr>
+      </p:sp>
+      <p:sp>
+        <p:nvSpPr>
+          <p:cNvPr id="46" name="Text 44"/>
+          <p:cNvSpPr txBox="1"/>
+          <p:nvPr/>
+        </p:nvSpPr>
+        <p:spPr>
+          <a:xfrm>
+            <a:off x="7589520" y="4126992"/>
+            <a:ext cx="1527048" cy="368808"/>
+          </a:xfrm>
+          <a:prstGeom prst="rect">
+            <a:avLst/>
+          </a:prstGeom>
+          <a:noFill/>
+          <a:ln/>
+        </p:spPr>
+        <p:txBody>
+          <a:bodyPr wrap="square" lIns="0" tIns="0" rIns="0" bIns="0" rtlCol="0" anchor="ctr"/>
+          <a:lstStyle/>
+          <a:p>
+            <a:pPr indent="0" marL="0">
+              <a:buNone/>
+            </a:pPr>
+            <a:r>
+              <a:rPr lang="en-US" sz="800" dirty="0">
+                <a:solidFill>
+                  <a:srgbClr val="1D1A15"/>
+                </a:solidFill>
+                <a:latin typeface="Calibri" pitchFamily="34" charset="0"/>
+                <a:ea typeface="Calibri" pitchFamily="34" charset="-122"/>
+                <a:cs typeface="Calibri" pitchFamily="34" charset="-120"/>
+              </a:rPr>
+              <a:t>Donor &amp; fundraising tracking</a:t>
+            </a:r>
+            <a:endParaRPr lang="en-US" sz="800" dirty="0"/>
+          </a:p>
+        </p:txBody>
+      </p:sp>
+      <p:sp>
+        <p:nvSpPr>
+          <p:cNvPr id="47" name="Shape 45"/>
+          <p:cNvSpPr/>
+          <p:nvPr/>
+        </p:nvSpPr>
+        <p:spPr>
+          <a:xfrm>
+            <a:off x="9354312" y="4126992"/>
+            <a:ext cx="1911096" cy="368808"/>
+          </a:xfrm>
+          <a:prstGeom prst="roundRect">
+            <a:avLst>
+              <a:gd name="adj" fmla="val 14876"/>
+            </a:avLst>
+          </a:prstGeom>
+          <a:solidFill>
+            <a:srgbClr val="FBFAF6"/>
+          </a:solidFill>
+          <a:ln w="12700">
+            <a:solidFill>
+              <a:srgbClr val="E4DCC9"/>
+            </a:solidFill>
+            <a:prstDash val="solid"/>
+          </a:ln>
+        </p:spPr>
+      </p:sp>
+      <p:sp>
+        <p:nvSpPr>
+          <p:cNvPr id="48" name="Shape 46"/>
+          <p:cNvSpPr/>
+          <p:nvPr/>
+        </p:nvSpPr>
+        <p:spPr>
+          <a:xfrm>
+            <a:off x="9482328" y="4270248"/>
+            <a:ext cx="82296" cy="82296"/>
+          </a:xfrm>
+          <a:prstGeom prst="ellipse">
+            <a:avLst/>
+          </a:prstGeom>
+          <a:solidFill>
+            <a:srgbClr val="9C7C2E"/>
+          </a:solidFill>
+          <a:ln/>
+        </p:spPr>
+      </p:sp>
+      <p:sp>
+        <p:nvSpPr>
+          <p:cNvPr id="49" name="Text 47"/>
+          <p:cNvSpPr txBox="1"/>
+          <p:nvPr/>
+        </p:nvSpPr>
+        <p:spPr>
+          <a:xfrm>
+            <a:off x="9646920" y="4126992"/>
+            <a:ext cx="1527048" cy="368808"/>
+          </a:xfrm>
+          <a:prstGeom prst="rect">
+            <a:avLst/>
+          </a:prstGeom>
+          <a:noFill/>
+          <a:ln/>
+        </p:spPr>
+        <p:txBody>
+          <a:bodyPr wrap="square" lIns="0" tIns="0" rIns="0" bIns="0" rtlCol="0" anchor="ctr"/>
+          <a:lstStyle/>
+          <a:p>
+            <a:pPr indent="0" marL="0">
+              <a:buNone/>
+            </a:pPr>
+            <a:r>
+              <a:rPr lang="en-US" sz="800" dirty="0">
+                <a:solidFill>
+                  <a:srgbClr val="1D1A15"/>
+                </a:solidFill>
+                <a:latin typeface="Calibri" pitchFamily="34" charset="0"/>
+                <a:ea typeface="Calibri" pitchFamily="34" charset="-122"/>
+                <a:cs typeface="Calibri" pitchFamily="34" charset="-120"/>
+              </a:rPr>
+              <a:t>Student progress insights</a:t>
+            </a:r>
+            <a:endParaRPr lang="en-US" sz="800" dirty="0"/>
+          </a:p>
+        </p:txBody>
+      </p:sp>
+      <p:sp>
+        <p:nvSpPr>
+          <p:cNvPr id="50" name="Shape 48"/>
+          <p:cNvSpPr/>
+          <p:nvPr/>
+        </p:nvSpPr>
+        <p:spPr>
+          <a:xfrm>
+            <a:off x="7296912" y="4605528"/>
+            <a:ext cx="1911096" cy="368808"/>
+          </a:xfrm>
+          <a:prstGeom prst="roundRect">
+            <a:avLst>
+              <a:gd name="adj" fmla="val 14876"/>
+            </a:avLst>
+          </a:prstGeom>
+          <a:solidFill>
+            <a:srgbClr val="FBFAF6"/>
+          </a:solidFill>
+          <a:ln w="12700">
+            <a:solidFill>
+              <a:srgbClr val="E4DCC9"/>
+            </a:solidFill>
+            <a:prstDash val="solid"/>
+          </a:ln>
+        </p:spPr>
+      </p:sp>
+      <p:sp>
+        <p:nvSpPr>
+          <p:cNvPr id="51" name="Shape 49"/>
+          <p:cNvSpPr/>
+          <p:nvPr/>
+        </p:nvSpPr>
+        <p:spPr>
+          <a:xfrm>
+            <a:off x="7424928" y="4748784"/>
+            <a:ext cx="82296" cy="82296"/>
+          </a:xfrm>
+          <a:prstGeom prst="ellipse">
+            <a:avLst/>
+          </a:prstGeom>
+          <a:solidFill>
+            <a:srgbClr val="9C7C2E"/>
+          </a:solidFill>
+          <a:ln/>
+        </p:spPr>
+      </p:sp>
+      <p:sp>
+        <p:nvSpPr>
+          <p:cNvPr id="52" name="Text 50"/>
+          <p:cNvSpPr txBox="1"/>
+          <p:nvPr/>
+        </p:nvSpPr>
+        <p:spPr>
+          <a:xfrm>
+            <a:off x="7589520" y="4605528"/>
+            <a:ext cx="1527048" cy="368808"/>
+          </a:xfrm>
+          <a:prstGeom prst="rect">
+            <a:avLst/>
+          </a:prstGeom>
+          <a:noFill/>
+          <a:ln/>
+        </p:spPr>
+        <p:txBody>
+          <a:bodyPr wrap="square" lIns="0" tIns="0" rIns="0" bIns="0" rtlCol="0" anchor="ctr"/>
+          <a:lstStyle/>
+          <a:p>
+            <a:pPr indent="0" marL="0">
+              <a:buNone/>
+            </a:pPr>
+            <a:r>
+              <a:rPr lang="en-US" sz="800" dirty="0">
+                <a:solidFill>
+                  <a:srgbClr val="1D1A15"/>
+                </a:solidFill>
+                <a:latin typeface="Calibri" pitchFamily="34" charset="0"/>
+                <a:ea typeface="Calibri" pitchFamily="34" charset="-122"/>
+                <a:cs typeface="Calibri" pitchFamily="34" charset="-120"/>
+              </a:rPr>
+              <a:t>Spanish support</a:t>
+            </a:r>
+            <a:endParaRPr lang="en-US" sz="800" dirty="0"/>
           </a:p>
         </p:txBody>
       </p:sp>
@@ -17971,7 +18569,7 @@
                 <a:ea typeface="Calibri" pitchFamily="34" charset="-122"/>
                 <a:cs typeface="Calibri" pitchFamily="34" charset="-120"/>
               </a:rPr>
-              <a:t>THE ROAD AHEAD</a:t>
+              <a:t>STATUS &amp; ROADMAP</a:t>
             </a:r>
             <a:endParaRPr lang="en-US" sz="1100" dirty="0"/>
           </a:p>
@@ -17979,73 +18577,7 @@
       </p:sp>
       <p:sp>
         <p:nvSpPr>
-          <p:cNvPr id="3" name="Shape 1"/>
-          <p:cNvSpPr/>
-          <p:nvPr/>
-        </p:nvSpPr>
-        <p:spPr>
-          <a:xfrm>
-            <a:off x="10314432" y="731520"/>
-            <a:ext cx="1051560" cy="310896"/>
-          </a:xfrm>
-          <a:prstGeom prst="roundRect">
-            <a:avLst>
-              <a:gd name="adj" fmla="val 50000"/>
-            </a:avLst>
-          </a:prstGeom>
-          <a:solidFill>
-            <a:srgbClr val="F3E7C8"/>
-          </a:solidFill>
-          <a:ln w="9525">
-            <a:solidFill>
-              <a:srgbClr val="9C7C2E"/>
-            </a:solidFill>
-            <a:prstDash val="solid"/>
-          </a:ln>
-        </p:spPr>
-      </p:sp>
-      <p:sp>
-        <p:nvSpPr>
-          <p:cNvPr id="4" name="Text 2"/>
-          <p:cNvSpPr txBox="1"/>
-          <p:nvPr/>
-        </p:nvSpPr>
-        <p:spPr>
-          <a:xfrm>
-            <a:off x="10314432" y="722376"/>
-            <a:ext cx="1051560" cy="320040"/>
-          </a:xfrm>
-          <a:prstGeom prst="rect">
-            <a:avLst/>
-          </a:prstGeom>
-          <a:noFill/>
-          <a:ln/>
-        </p:spPr>
-        <p:txBody>
-          <a:bodyPr wrap="square" lIns="0" tIns="0" rIns="0" bIns="0" rtlCol="0" anchor="ctr"/>
-          <a:lstStyle/>
-          <a:p>
-            <a:pPr algn="ctr" indent="0" marL="0">
-              <a:buNone/>
-            </a:pPr>
-            <a:r>
-              <a:rPr lang="en-US" sz="850" b="1" spc="100" kern="0" dirty="0">
-                <a:solidFill>
-                  <a:srgbClr val="7A5A12"/>
-                </a:solidFill>
-                <a:latin typeface="Calibri" pitchFamily="34" charset="0"/>
-                <a:ea typeface="Calibri" pitchFamily="34" charset="-122"/>
-                <a:cs typeface="Calibri" pitchFamily="34" charset="-120"/>
-              </a:rPr>
-              <a:t>PHASE 3</a:t>
-            </a:r>
-            <a:endParaRPr lang="en-US" sz="850" dirty="0"/>
-          </a:p>
-        </p:txBody>
-      </p:sp>
-      <p:sp>
-        <p:nvSpPr>
-          <p:cNvPr id="5" name="Text 3"/>
+          <p:cNvPr id="3" name="Text 1"/>
           <p:cNvSpPr txBox="1"/>
           <p:nvPr/>
         </p:nvSpPr>
@@ -18071,7 +18603,7 @@
               <a:buNone/>
             </a:pPr>
             <a:r>
-              <a:rPr lang="en-US" sz="3200" b="1" dirty="0">
+              <a:rPr lang="en-US" sz="3000" b="1" dirty="0">
                 <a:solidFill>
                   <a:srgbClr val="1D1A15"/>
                 </a:solidFill>
@@ -18079,15 +18611,15 @@
                 <a:ea typeface="Georgia" pitchFamily="34" charset="-122"/>
                 <a:cs typeface="Georgia" pitchFamily="34" charset="-120"/>
               </a:rPr>
-              <a:t>More advanced features, as we go</a:t>
-            </a:r>
-            <a:endParaRPr lang="en-US" sz="3200" dirty="0"/>
-          </a:p>
-        </p:txBody>
-      </p:sp>
-      <p:sp>
-        <p:nvSpPr>
-          <p:cNvPr id="6" name="Text 4"/>
+              <a:t>Where it stands and what’s next</a:t>
+            </a:r>
+            <a:endParaRPr lang="en-US" sz="3000" dirty="0"/>
+          </a:p>
+        </p:txBody>
+      </p:sp>
+      <p:sp>
+        <p:nvSpPr>
+          <p:cNvPr id="4" name="Text 2"/>
           <p:cNvSpPr txBox="1"/>
           <p:nvPr/>
         </p:nvSpPr>
@@ -18121,7 +18653,7 @@
                 <a:ea typeface="Calibri" pitchFamily="34" charset="-122"/>
                 <a:cs typeface="Calibri" pitchFamily="34" charset="-120"/>
               </a:rPr>
-              <a:t>This is the foundation. As development continues we’ll layer on deeper capabilities, prioritized with the team.</a:t>
+              <a:t>You can click through every screen, but this is early: what’s live today is mostly mockups, not real data yet. The build ahead is what makes each area real.</a:t>
             </a:r>
             <a:endParaRPr lang="en-US" sz="1500" dirty="0"/>
           </a:p>
@@ -18129,57 +18661,34 @@
       </p:sp>
       <p:sp>
         <p:nvSpPr>
-          <p:cNvPr id="7" name="Shape 5"/>
-          <p:cNvSpPr/>
+          <p:cNvPr id="5" name="Text 3"/>
+          <p:cNvSpPr txBox="1"/>
           <p:nvPr/>
         </p:nvSpPr>
         <p:spPr>
           <a:xfrm>
             <a:off x="822960" y="3657600"/>
-            <a:ext cx="2258568" cy="384048"/>
-          </a:xfrm>
-          <a:prstGeom prst="roundRect">
-            <a:avLst>
-              <a:gd name="adj" fmla="val 50000"/>
-            </a:avLst>
-          </a:prstGeom>
-          <a:solidFill>
-            <a:srgbClr val="FFFFFF"/>
-          </a:solidFill>
-          <a:ln w="12700">
-            <a:solidFill>
-              <a:srgbClr val="E4DCC9"/>
-            </a:solidFill>
-            <a:prstDash val="solid"/>
-          </a:ln>
-        </p:spPr>
-      </p:sp>
-      <p:sp>
-        <p:nvSpPr>
-          <p:cNvPr id="8" name="Text 6"/>
-          <p:cNvSpPr txBox="1"/>
-          <p:nvPr/>
-        </p:nvSpPr>
-        <p:spPr>
-          <a:xfrm>
-            <a:off x="969264" y="3639312"/>
-            <a:ext cx="1984248" cy="420624"/>
-          </a:xfrm>
-          <a:prstGeom prst="rect">
-            <a:avLst/>
-          </a:prstGeom>
-          <a:noFill/>
-          <a:ln/>
-        </p:spPr>
-        <p:txBody>
-          <a:bodyPr wrap="square" lIns="0" tIns="0" rIns="0" bIns="0" rtlCol="0" anchor="ctr"/>
-          <a:lstStyle/>
-          <a:p>
-            <a:pPr indent="0" marL="0">
-              <a:buNone/>
-            </a:pPr>
-            <a:r>
-              <a:rPr lang="en-US" sz="1050" dirty="0">
+            <a:ext cx="5760720" cy="1115568"/>
+          </a:xfrm>
+          <a:prstGeom prst="rect">
+            <a:avLst/>
+          </a:prstGeom>
+          <a:noFill/>
+          <a:ln/>
+        </p:spPr>
+        <p:txBody>
+          <a:bodyPr wrap="square" lIns="0" tIns="0" rIns="0" bIns="0" rtlCol="0" anchor="t"/>
+          <a:lstStyle/>
+          <a:p>
+            <a:pPr marL="177800" indent="-177800">
+              <a:spcAft>
+                <a:spcPts val="800"/>
+              </a:spcAft>
+              <a:buSzPct val="100000"/>
+              <a:buChar char="•"/>
+            </a:pPr>
+            <a:r>
+              <a:rPr lang="en-US" sz="1350" dirty="0">
                 <a:solidFill>
                   <a:srgbClr val="1D1A15"/>
                 </a:solidFill>
@@ -18187,85 +18696,20 @@
                 <a:ea typeface="Calibri" pitchFamily="34" charset="-122"/>
                 <a:cs typeface="Calibri" pitchFamily="34" charset="-120"/>
               </a:rPr>
-              <a:t>Prioritized with the team</a:t>
-            </a:r>
-            <a:endParaRPr lang="en-US" sz="1050" dirty="0"/>
-          </a:p>
-        </p:txBody>
-      </p:sp>
-      <p:sp>
-        <p:nvSpPr>
-          <p:cNvPr id="9" name="Shape 7"/>
-          <p:cNvSpPr/>
-          <p:nvPr/>
-        </p:nvSpPr>
-        <p:spPr>
-          <a:xfrm>
-            <a:off x="3246120" y="3657600"/>
-            <a:ext cx="1097280" cy="384048"/>
-          </a:xfrm>
-          <a:prstGeom prst="roundRect">
-            <a:avLst>
-              <a:gd name="adj" fmla="val 50000"/>
-            </a:avLst>
-          </a:prstGeom>
-          <a:solidFill>
-            <a:srgbClr val="FFFFFF"/>
-          </a:solidFill>
-          <a:ln w="12700">
-            <a:solidFill>
-              <a:srgbClr val="E4DCC9"/>
-            </a:solidFill>
-            <a:prstDash val="solid"/>
-          </a:ln>
-        </p:spPr>
-      </p:sp>
-      <p:sp>
-        <p:nvSpPr>
-          <p:cNvPr id="10" name="Shape 8"/>
-          <p:cNvSpPr/>
-          <p:nvPr/>
-        </p:nvSpPr>
-        <p:spPr>
-          <a:xfrm>
-            <a:off x="3392424" y="3799332"/>
-            <a:ext cx="100584" cy="100584"/>
-          </a:xfrm>
-          <a:prstGeom prst="ellipse">
-            <a:avLst/>
-          </a:prstGeom>
-          <a:solidFill>
-            <a:srgbClr val="B0842F"/>
-          </a:solidFill>
-          <a:ln/>
-        </p:spPr>
-      </p:sp>
-      <p:sp>
-        <p:nvSpPr>
-          <p:cNvPr id="11" name="Text 9"/>
-          <p:cNvSpPr txBox="1"/>
-          <p:nvPr/>
-        </p:nvSpPr>
-        <p:spPr>
-          <a:xfrm>
-            <a:off x="3557016" y="3639312"/>
-            <a:ext cx="822960" cy="420624"/>
-          </a:xfrm>
-          <a:prstGeom prst="rect">
-            <a:avLst/>
-          </a:prstGeom>
-          <a:noFill/>
-          <a:ln/>
-        </p:spPr>
-        <p:txBody>
-          <a:bodyPr wrap="square" lIns="0" tIns="0" rIns="0" bIns="0" rtlCol="0" anchor="ctr"/>
-          <a:lstStyle/>
-          <a:p>
-            <a:pPr indent="0" marL="0">
-              <a:buNone/>
-            </a:pPr>
-            <a:r>
-              <a:rPr lang="en-US" sz="1050" dirty="0">
+              <a:t>Today: mockups and workflow processes documented.</a:t>
+            </a:r>
+            <a:endParaRPr lang="en-US" sz="1350" dirty="0"/>
+          </a:p>
+          <a:p>
+            <a:pPr marL="177800" indent="-177800">
+              <a:spcAft>
+                <a:spcPts val="800"/>
+              </a:spcAft>
+              <a:buSzPct val="100000"/>
+              <a:buChar char="•"/>
+            </a:pPr>
+            <a:r>
+              <a:rPr lang="en-US" sz="1350" dirty="0">
                 <a:solidFill>
                   <a:srgbClr val="1D1A15"/>
                 </a:solidFill>
@@ -18273,15 +18717,36 @@
                 <a:ea typeface="Calibri" pitchFamily="34" charset="-122"/>
                 <a:cs typeface="Calibri" pitchFamily="34" charset="-120"/>
               </a:rPr>
-              <a:t>Planned</a:t>
-            </a:r>
-            <a:endParaRPr lang="en-US" sz="1050" dirty="0"/>
-          </a:p>
-        </p:txBody>
-      </p:sp>
-      <p:sp>
-        <p:nvSpPr>
-          <p:cNvPr id="12" name="Shape 10"/>
+              <a:t>Next: connect the real data sources, aiming for an end-of-March go-live.</a:t>
+            </a:r>
+            <a:endParaRPr lang="en-US" sz="1350" dirty="0"/>
+          </a:p>
+          <a:p>
+            <a:pPr marL="177800" indent="-177800">
+              <a:spcAft>
+                <a:spcPts val="800"/>
+              </a:spcAft>
+              <a:buSzPct val="100000"/>
+              <a:buChar char="•"/>
+            </a:pPr>
+            <a:r>
+              <a:rPr lang="en-US" sz="1350" dirty="0">
+                <a:solidFill>
+                  <a:srgbClr val="1D1A15"/>
+                </a:solidFill>
+                <a:latin typeface="Calibri" pitchFamily="34" charset="0"/>
+                <a:ea typeface="Calibri" pitchFamily="34" charset="-122"/>
+                <a:cs typeface="Calibri" pitchFamily="34" charset="-120"/>
+              </a:rPr>
+              <a:t>Roadmap: Pre-K → finish 8th grade → churches → self-taught path.</a:t>
+            </a:r>
+            <a:endParaRPr lang="en-US" sz="1350" dirty="0"/>
+          </a:p>
+        </p:txBody>
+      </p:sp>
+      <p:sp>
+        <p:nvSpPr>
+          <p:cNvPr id="6" name="Shape 4"/>
           <p:cNvSpPr/>
           <p:nvPr/>
         </p:nvSpPr>
@@ -18315,7 +18780,7 @@
       </p:sp>
       <p:sp>
         <p:nvSpPr>
-          <p:cNvPr id="13" name="Shape 11"/>
+          <p:cNvPr id="7" name="Shape 5"/>
           <p:cNvSpPr/>
           <p:nvPr/>
         </p:nvSpPr>
@@ -18337,7 +18802,7 @@
       </p:sp>
       <p:sp>
         <p:nvSpPr>
-          <p:cNvPr id="14" name="Shape 12"/>
+          <p:cNvPr id="8" name="Shape 6"/>
           <p:cNvSpPr/>
           <p:nvPr/>
         </p:nvSpPr>
@@ -18357,7 +18822,7 @@
       </p:sp>
       <p:sp>
         <p:nvSpPr>
-          <p:cNvPr id="15" name="Shape 13"/>
+          <p:cNvPr id="9" name="Shape 7"/>
           <p:cNvSpPr/>
           <p:nvPr/>
         </p:nvSpPr>
@@ -18377,7 +18842,7 @@
       </p:sp>
       <p:sp>
         <p:nvSpPr>
-          <p:cNvPr id="16" name="Shape 14"/>
+          <p:cNvPr id="10" name="Shape 8"/>
           <p:cNvSpPr/>
           <p:nvPr/>
         </p:nvSpPr>
@@ -18397,7 +18862,7 @@
       </p:sp>
       <p:sp>
         <p:nvSpPr>
-          <p:cNvPr id="17" name="Shape 15"/>
+          <p:cNvPr id="11" name="Shape 9"/>
           <p:cNvSpPr/>
           <p:nvPr/>
         </p:nvSpPr>
@@ -18417,7 +18882,7 @@
       </p:sp>
       <p:sp>
         <p:nvSpPr>
-          <p:cNvPr id="18" name="Text 16"/>
+          <p:cNvPr id="12" name="Text 10"/>
           <p:cNvSpPr txBox="1"/>
           <p:nvPr/>
         </p:nvSpPr>
@@ -18439,13 +18904,24 @@
             <a:pPr indent="0" marL="0">
               <a:buNone/>
             </a:pPr>
+            <a:r>
+              <a:rPr lang="en-US" sz="900" dirty="0">
+                <a:solidFill>
+                  <a:srgbClr val="7A7266"/>
+                </a:solidFill>
+                <a:latin typeface="Calibri" pitchFamily="34" charset="0"/>
+                <a:ea typeface="Calibri" pitchFamily="34" charset="-122"/>
+                <a:cs typeface="Calibri" pitchFamily="34" charset="-120"/>
+              </a:rPr>
+              <a:t>roadmap</a:t>
+            </a:r>
             <a:endParaRPr lang="en-US" sz="900" dirty="0"/>
           </a:p>
         </p:txBody>
       </p:sp>
       <p:sp>
         <p:nvSpPr>
-          <p:cNvPr id="19" name="Shape 17"/>
+          <p:cNvPr id="13" name="Shape 11"/>
           <p:cNvSpPr/>
           <p:nvPr/>
         </p:nvSpPr>
@@ -18468,18 +18944,233 @@
       </p:sp>
       <p:sp>
         <p:nvSpPr>
-          <p:cNvPr id="20" name="Shape 18"/>
-          <p:cNvSpPr/>
-          <p:nvPr/>
-        </p:nvSpPr>
-        <p:spPr>
-          <a:xfrm>
-            <a:off x="7296912" y="2212848"/>
-            <a:ext cx="1911096" cy="368808"/>
+          <p:cNvPr id="14" name="Shape 12"/>
+          <p:cNvSpPr/>
+          <p:nvPr/>
+        </p:nvSpPr>
+        <p:spPr>
+          <a:xfrm>
+            <a:off x="7516368" y="2615184"/>
+            <a:ext cx="3529584" cy="0"/>
+          </a:xfrm>
+          <a:prstGeom prst="line">
+            <a:avLst/>
+          </a:prstGeom>
+          <a:noFill/>
+          <a:ln w="25400">
+            <a:solidFill>
+              <a:srgbClr val="E4DCC9"/>
+            </a:solidFill>
+            <a:prstDash val="solid"/>
+          </a:ln>
+        </p:spPr>
+      </p:sp>
+      <p:sp>
+        <p:nvSpPr>
+          <p:cNvPr id="15" name="Shape 13"/>
+          <p:cNvSpPr/>
+          <p:nvPr/>
+        </p:nvSpPr>
+        <p:spPr>
+          <a:xfrm>
+            <a:off x="7296912" y="2395728"/>
+            <a:ext cx="438912" cy="438912"/>
+          </a:xfrm>
+          <a:prstGeom prst="ellipse">
+            <a:avLst/>
+          </a:prstGeom>
+          <a:solidFill>
+            <a:srgbClr val="FFFFFF"/>
+          </a:solidFill>
+          <a:ln w="25400">
+            <a:solidFill>
+              <a:srgbClr val="9C7C2E"/>
+            </a:solidFill>
+            <a:prstDash val="solid"/>
+          </a:ln>
+        </p:spPr>
+      </p:sp>
+      <p:sp>
+        <p:nvSpPr>
+          <p:cNvPr id="16" name="Text 14"/>
+          <p:cNvSpPr txBox="1"/>
+          <p:nvPr/>
+        </p:nvSpPr>
+        <p:spPr>
+          <a:xfrm>
+            <a:off x="7296912" y="2386584"/>
+            <a:ext cx="438912" cy="438912"/>
+          </a:xfrm>
+          <a:prstGeom prst="rect">
+            <a:avLst/>
+          </a:prstGeom>
+          <a:noFill/>
+          <a:ln/>
+        </p:spPr>
+        <p:txBody>
+          <a:bodyPr wrap="square" lIns="0" tIns="0" rIns="0" bIns="0" rtlCol="0" anchor="ctr"/>
+          <a:lstStyle/>
+          <a:p>
+            <a:pPr algn="ctr" indent="0" marL="0">
+              <a:buNone/>
+            </a:pPr>
+            <a:r>
+              <a:rPr lang="en-US" sz="1100" b="1" dirty="0">
+                <a:solidFill>
+                  <a:srgbClr val="9C7C2E"/>
+                </a:solidFill>
+                <a:latin typeface="Calibri" pitchFamily="34" charset="0"/>
+                <a:ea typeface="Calibri" pitchFamily="34" charset="-122"/>
+                <a:cs typeface="Calibri" pitchFamily="34" charset="-120"/>
+              </a:rPr>
+              <a:t>1</a:t>
+            </a:r>
+            <a:endParaRPr lang="en-US" sz="1100" dirty="0"/>
+          </a:p>
+        </p:txBody>
+      </p:sp>
+      <p:sp>
+        <p:nvSpPr>
+          <p:cNvPr id="17" name="Shape 15"/>
+          <p:cNvSpPr/>
+          <p:nvPr/>
+        </p:nvSpPr>
+        <p:spPr>
+          <a:xfrm>
+            <a:off x="9061704" y="2395728"/>
+            <a:ext cx="438912" cy="438912"/>
+          </a:xfrm>
+          <a:prstGeom prst="ellipse">
+            <a:avLst/>
+          </a:prstGeom>
+          <a:solidFill>
+            <a:srgbClr val="FFFFFF"/>
+          </a:solidFill>
+          <a:ln w="25400">
+            <a:solidFill>
+              <a:srgbClr val="9C7C2E"/>
+            </a:solidFill>
+            <a:prstDash val="solid"/>
+          </a:ln>
+        </p:spPr>
+      </p:sp>
+      <p:sp>
+        <p:nvSpPr>
+          <p:cNvPr id="18" name="Text 16"/>
+          <p:cNvSpPr txBox="1"/>
+          <p:nvPr/>
+        </p:nvSpPr>
+        <p:spPr>
+          <a:xfrm>
+            <a:off x="9061704" y="2386584"/>
+            <a:ext cx="438912" cy="438912"/>
+          </a:xfrm>
+          <a:prstGeom prst="rect">
+            <a:avLst/>
+          </a:prstGeom>
+          <a:noFill/>
+          <a:ln/>
+        </p:spPr>
+        <p:txBody>
+          <a:bodyPr wrap="square" lIns="0" tIns="0" rIns="0" bIns="0" rtlCol="0" anchor="ctr"/>
+          <a:lstStyle/>
+          <a:p>
+            <a:pPr algn="ctr" indent="0" marL="0">
+              <a:buNone/>
+            </a:pPr>
+            <a:r>
+              <a:rPr lang="en-US" sz="1100" b="1" dirty="0">
+                <a:solidFill>
+                  <a:srgbClr val="9C7C2E"/>
+                </a:solidFill>
+                <a:latin typeface="Calibri" pitchFamily="34" charset="0"/>
+                <a:ea typeface="Calibri" pitchFamily="34" charset="-122"/>
+                <a:cs typeface="Calibri" pitchFamily="34" charset="-120"/>
+              </a:rPr>
+              <a:t>2</a:t>
+            </a:r>
+            <a:endParaRPr lang="en-US" sz="1100" dirty="0"/>
+          </a:p>
+        </p:txBody>
+      </p:sp>
+      <p:sp>
+        <p:nvSpPr>
+          <p:cNvPr id="19" name="Shape 17"/>
+          <p:cNvSpPr/>
+          <p:nvPr/>
+        </p:nvSpPr>
+        <p:spPr>
+          <a:xfrm>
+            <a:off x="10826496" y="2395728"/>
+            <a:ext cx="438912" cy="438912"/>
+          </a:xfrm>
+          <a:prstGeom prst="ellipse">
+            <a:avLst/>
+          </a:prstGeom>
+          <a:solidFill>
+            <a:srgbClr val="FFFFFF"/>
+          </a:solidFill>
+          <a:ln w="25400">
+            <a:solidFill>
+              <a:srgbClr val="9C7C2E"/>
+            </a:solidFill>
+            <a:prstDash val="solid"/>
+          </a:ln>
+        </p:spPr>
+      </p:sp>
+      <p:sp>
+        <p:nvSpPr>
+          <p:cNvPr id="20" name="Text 18"/>
+          <p:cNvSpPr txBox="1"/>
+          <p:nvPr/>
+        </p:nvSpPr>
+        <p:spPr>
+          <a:xfrm>
+            <a:off x="10826496" y="2386584"/>
+            <a:ext cx="438912" cy="438912"/>
+          </a:xfrm>
+          <a:prstGeom prst="rect">
+            <a:avLst/>
+          </a:prstGeom>
+          <a:noFill/>
+          <a:ln/>
+        </p:spPr>
+        <p:txBody>
+          <a:bodyPr wrap="square" lIns="0" tIns="0" rIns="0" bIns="0" rtlCol="0" anchor="ctr"/>
+          <a:lstStyle/>
+          <a:p>
+            <a:pPr algn="ctr" indent="0" marL="0">
+              <a:buNone/>
+            </a:pPr>
+            <a:r>
+              <a:rPr lang="en-US" sz="1100" b="1" dirty="0">
+                <a:solidFill>
+                  <a:srgbClr val="9C7C2E"/>
+                </a:solidFill>
+                <a:latin typeface="Calibri" pitchFamily="34" charset="0"/>
+                <a:ea typeface="Calibri" pitchFamily="34" charset="-122"/>
+                <a:cs typeface="Calibri" pitchFamily="34" charset="-120"/>
+              </a:rPr>
+              <a:t>3</a:t>
+            </a:r>
+            <a:endParaRPr lang="en-US" sz="1100" dirty="0"/>
+          </a:p>
+        </p:txBody>
+      </p:sp>
+      <p:sp>
+        <p:nvSpPr>
+          <p:cNvPr id="21" name="Shape 19"/>
+          <p:cNvSpPr/>
+          <p:nvPr/>
+        </p:nvSpPr>
+        <p:spPr>
+          <a:xfrm>
+            <a:off x="7296912" y="3154680"/>
+            <a:ext cx="3968496" cy="566928"/>
           </a:xfrm>
           <a:prstGeom prst="roundRect">
             <a:avLst>
-              <a:gd name="adj" fmla="val 14876"/>
+              <a:gd name="adj" fmla="val 8065"/>
             </a:avLst>
           </a:prstGeom>
           <a:solidFill>
@@ -18495,62 +19186,23 @@
       </p:sp>
       <p:sp>
         <p:nvSpPr>
-          <p:cNvPr id="21" name="Shape 19"/>
-          <p:cNvSpPr/>
-          <p:nvPr/>
-        </p:nvSpPr>
-        <p:spPr>
-          <a:xfrm>
-            <a:off x="7424928" y="2356104"/>
-            <a:ext cx="82296" cy="82296"/>
+          <p:cNvPr id="22" name="Shape 20"/>
+          <p:cNvSpPr/>
+          <p:nvPr/>
+        </p:nvSpPr>
+        <p:spPr>
+          <a:xfrm>
+            <a:off x="7443216" y="3387852"/>
+            <a:ext cx="100584" cy="100584"/>
           </a:xfrm>
           <a:prstGeom prst="ellipse">
             <a:avLst/>
           </a:prstGeom>
           <a:solidFill>
-            <a:srgbClr val="9C7C2E"/>
-          </a:solidFill>
-          <a:ln/>
-        </p:spPr>
-      </p:sp>
-      <p:sp>
-        <p:nvSpPr>
-          <p:cNvPr id="22" name="Text 20"/>
-          <p:cNvSpPr txBox="1"/>
-          <p:nvPr/>
-        </p:nvSpPr>
-        <p:spPr>
-          <a:xfrm>
-            <a:off x="7589520" y="2212848"/>
-            <a:ext cx="1527048" cy="368808"/>
-          </a:xfrm>
-          <a:prstGeom prst="rect">
-            <a:avLst/>
-          </a:prstGeom>
-          <a:noFill/>
-          <a:ln/>
-        </p:spPr>
-        <p:txBody>
-          <a:bodyPr wrap="square" lIns="0" tIns="0" rIns="0" bIns="0" rtlCol="0" anchor="ctr"/>
-          <a:lstStyle/>
-          <a:p>
-            <a:pPr indent="0" marL="0">
-              <a:buNone/>
-            </a:pPr>
-            <a:r>
-              <a:rPr lang="en-US" sz="800" dirty="0">
-                <a:solidFill>
-                  <a:srgbClr val="1D1A15"/>
-                </a:solidFill>
-                <a:latin typeface="Calibri" pitchFamily="34" charset="0"/>
-                <a:ea typeface="Calibri" pitchFamily="34" charset="-122"/>
-                <a:cs typeface="Calibri" pitchFamily="34" charset="-120"/>
-              </a:rPr>
-              <a:t>Automated renewal outreach</a:t>
-            </a:r>
-            <a:endParaRPr lang="en-US" sz="800" dirty="0"/>
-          </a:p>
-        </p:txBody>
+            <a:srgbClr val="B0842F"/>
+          </a:solidFill>
+          <a:ln/>
+        </p:spPr>
       </p:sp>
       <p:sp>
         <p:nvSpPr>
@@ -18560,16 +19212,60 @@
         </p:nvSpPr>
         <p:spPr>
           <a:xfrm>
-            <a:off x="9354312" y="2212848"/>
-            <a:ext cx="1911096" cy="368808"/>
+            <a:off x="7680960" y="3396996"/>
+            <a:ext cx="1825508" cy="82296"/>
           </a:xfrm>
           <a:prstGeom prst="roundRect">
             <a:avLst>
-              <a:gd name="adj" fmla="val 14876"/>
+              <a:gd name="adj" fmla="val 50000"/>
             </a:avLst>
           </a:prstGeom>
           <a:solidFill>
-            <a:srgbClr val="FBFAF6"/>
+            <a:srgbClr val="E4DCC9"/>
+          </a:solidFill>
+          <a:ln/>
+        </p:spPr>
+      </p:sp>
+      <p:sp>
+        <p:nvSpPr>
+          <p:cNvPr id="24" name="Shape 22"/>
+          <p:cNvSpPr/>
+          <p:nvPr/>
+        </p:nvSpPr>
+        <p:spPr>
+          <a:xfrm>
+            <a:off x="7680960" y="3396996"/>
+            <a:ext cx="1314366" cy="82296"/>
+          </a:xfrm>
+          <a:prstGeom prst="roundRect">
+            <a:avLst>
+              <a:gd name="adj" fmla="val 50000"/>
+            </a:avLst>
+          </a:prstGeom>
+          <a:solidFill>
+            <a:srgbClr val="9C7C2E"/>
+          </a:solidFill>
+          <a:ln/>
+        </p:spPr>
+      </p:sp>
+      <p:sp>
+        <p:nvSpPr>
+          <p:cNvPr id="25" name="Shape 23"/>
+          <p:cNvSpPr/>
+          <p:nvPr/>
+        </p:nvSpPr>
+        <p:spPr>
+          <a:xfrm>
+            <a:off x="10062972" y="3291840"/>
+            <a:ext cx="1074420" cy="292608"/>
+          </a:xfrm>
+          <a:prstGeom prst="roundRect">
+            <a:avLst>
+              <a:gd name="adj" fmla="val 50000"/>
+            </a:avLst>
+          </a:prstGeom>
+          <a:solidFill>
+            <a:srgbClr val="FFFFFF"/>
           </a:solidFill>
           <a:ln w="12700">
             <a:solidFill>
@@ -18581,34 +19277,14 @@
       </p:sp>
       <p:sp>
         <p:nvSpPr>
-          <p:cNvPr id="24" name="Shape 22"/>
-          <p:cNvSpPr/>
-          <p:nvPr/>
-        </p:nvSpPr>
-        <p:spPr>
-          <a:xfrm>
-            <a:off x="9482328" y="2356104"/>
-            <a:ext cx="82296" cy="82296"/>
-          </a:xfrm>
-          <a:prstGeom prst="ellipse">
-            <a:avLst/>
-          </a:prstGeom>
-          <a:solidFill>
-            <a:srgbClr val="9C7C2E"/>
-          </a:solidFill>
-          <a:ln/>
-        </p:spPr>
-      </p:sp>
-      <p:sp>
-        <p:nvSpPr>
-          <p:cNvPr id="25" name="Text 23"/>
-          <p:cNvSpPr txBox="1"/>
-          <p:nvPr/>
-        </p:nvSpPr>
-        <p:spPr>
-          <a:xfrm>
-            <a:off x="9646920" y="2212848"/>
-            <a:ext cx="1527048" cy="368808"/>
+          <p:cNvPr id="26" name="Text 24"/>
+          <p:cNvSpPr txBox="1"/>
+          <p:nvPr/>
+        </p:nvSpPr>
+        <p:spPr>
+          <a:xfrm>
+            <a:off x="10062972" y="3282696"/>
+            <a:ext cx="1074420" cy="310896"/>
           </a:xfrm>
           <a:prstGeom prst="rect">
             <a:avLst/>
@@ -18620,38 +19296,38 @@
           <a:bodyPr wrap="square" lIns="0" tIns="0" rIns="0" bIns="0" rtlCol="0" anchor="ctr"/>
           <a:lstStyle/>
           <a:p>
-            <a:pPr indent="0" marL="0">
-              <a:buNone/>
-            </a:pPr>
-            <a:r>
-              <a:rPr lang="en-US" sz="800" dirty="0">
-                <a:solidFill>
-                  <a:srgbClr val="1D1A15"/>
-                </a:solidFill>
-                <a:latin typeface="Calibri" pitchFamily="34" charset="0"/>
-                <a:ea typeface="Calibri" pitchFamily="34" charset="-122"/>
-                <a:cs typeface="Calibri" pitchFamily="34" charset="-120"/>
-              </a:rPr>
-              <a:t>Real-time data across every hub</a:t>
-            </a:r>
-            <a:endParaRPr lang="en-US" sz="800" dirty="0"/>
-          </a:p>
-        </p:txBody>
-      </p:sp>
-      <p:sp>
-        <p:nvSpPr>
-          <p:cNvPr id="26" name="Shape 24"/>
-          <p:cNvSpPr/>
-          <p:nvPr/>
-        </p:nvSpPr>
-        <p:spPr>
-          <a:xfrm>
-            <a:off x="7296912" y="2691384"/>
-            <a:ext cx="1911096" cy="368808"/>
+            <a:pPr algn="ctr" indent="0" marL="0">
+              <a:buNone/>
+            </a:pPr>
+            <a:r>
+              <a:rPr lang="en-US" sz="850" dirty="0">
+                <a:solidFill>
+                  <a:srgbClr val="7A7266"/>
+                </a:solidFill>
+                <a:latin typeface="Calibri" pitchFamily="34" charset="0"/>
+                <a:ea typeface="Calibri" pitchFamily="34" charset="-122"/>
+                <a:cs typeface="Calibri" pitchFamily="34" charset="-120"/>
+              </a:rPr>
+              <a:t>in progress</a:t>
+            </a:r>
+            <a:endParaRPr lang="en-US" sz="850" dirty="0"/>
+          </a:p>
+        </p:txBody>
+      </p:sp>
+      <p:sp>
+        <p:nvSpPr>
+          <p:cNvPr id="27" name="Shape 25"/>
+          <p:cNvSpPr/>
+          <p:nvPr/>
+        </p:nvSpPr>
+        <p:spPr>
+          <a:xfrm>
+            <a:off x="7296912" y="3849624"/>
+            <a:ext cx="3968496" cy="566928"/>
           </a:xfrm>
           <a:prstGeom prst="roundRect">
             <a:avLst>
-              <a:gd name="adj" fmla="val 14876"/>
+              <a:gd name="adj" fmla="val 8065"/>
             </a:avLst>
           </a:prstGeom>
           <a:solidFill>
@@ -18667,62 +19343,23 @@
       </p:sp>
       <p:sp>
         <p:nvSpPr>
-          <p:cNvPr id="27" name="Shape 25"/>
-          <p:cNvSpPr/>
-          <p:nvPr/>
-        </p:nvSpPr>
-        <p:spPr>
-          <a:xfrm>
-            <a:off x="7424928" y="2834640"/>
-            <a:ext cx="82296" cy="82296"/>
+          <p:cNvPr id="28" name="Shape 26"/>
+          <p:cNvSpPr/>
+          <p:nvPr/>
+        </p:nvSpPr>
+        <p:spPr>
+          <a:xfrm>
+            <a:off x="7443216" y="4082796"/>
+            <a:ext cx="100584" cy="100584"/>
           </a:xfrm>
           <a:prstGeom prst="ellipse">
             <a:avLst/>
           </a:prstGeom>
           <a:solidFill>
-            <a:srgbClr val="9C7C2E"/>
-          </a:solidFill>
-          <a:ln/>
-        </p:spPr>
-      </p:sp>
-      <p:sp>
-        <p:nvSpPr>
-          <p:cNvPr id="28" name="Text 26"/>
-          <p:cNvSpPr txBox="1"/>
-          <p:nvPr/>
-        </p:nvSpPr>
-        <p:spPr>
-          <a:xfrm>
-            <a:off x="7589520" y="2691384"/>
-            <a:ext cx="1527048" cy="368808"/>
-          </a:xfrm>
-          <a:prstGeom prst="rect">
-            <a:avLst/>
-          </a:prstGeom>
-          <a:noFill/>
-          <a:ln/>
-        </p:spPr>
-        <p:txBody>
-          <a:bodyPr wrap="square" lIns="0" tIns="0" rIns="0" bIns="0" rtlCol="0" anchor="ctr"/>
-          <a:lstStyle/>
-          <a:p>
-            <a:pPr indent="0" marL="0">
-              <a:buNone/>
-            </a:pPr>
-            <a:r>
-              <a:rPr lang="en-US" sz="800" dirty="0">
-                <a:solidFill>
-                  <a:srgbClr val="1D1A15"/>
-                </a:solidFill>
-                <a:latin typeface="Calibri" pitchFamily="34" charset="0"/>
-                <a:ea typeface="Calibri" pitchFamily="34" charset="-122"/>
-                <a:cs typeface="Calibri" pitchFamily="34" charset="-120"/>
-              </a:rPr>
-              <a:t>Parent engagement portal</a:t>
-            </a:r>
-            <a:endParaRPr lang="en-US" sz="800" dirty="0"/>
-          </a:p>
-        </p:txBody>
+            <a:srgbClr val="A4442F"/>
+          </a:solidFill>
+          <a:ln/>
+        </p:spPr>
       </p:sp>
       <p:sp>
         <p:nvSpPr>
@@ -18732,16 +19369,60 @@
         </p:nvSpPr>
         <p:spPr>
           <a:xfrm>
-            <a:off x="9354312" y="2691384"/>
-            <a:ext cx="1911096" cy="368808"/>
+            <a:off x="7680960" y="4091940"/>
+            <a:ext cx="1825508" cy="82296"/>
           </a:xfrm>
           <a:prstGeom prst="roundRect">
             <a:avLst>
-              <a:gd name="adj" fmla="val 14876"/>
+              <a:gd name="adj" fmla="val 50000"/>
             </a:avLst>
           </a:prstGeom>
           <a:solidFill>
-            <a:srgbClr val="FBFAF6"/>
+            <a:srgbClr val="E4DCC9"/>
+          </a:solidFill>
+          <a:ln/>
+        </p:spPr>
+      </p:sp>
+      <p:sp>
+        <p:nvSpPr>
+          <p:cNvPr id="30" name="Shape 28"/>
+          <p:cNvSpPr/>
+          <p:nvPr/>
+        </p:nvSpPr>
+        <p:spPr>
+          <a:xfrm>
+            <a:off x="7680960" y="4091940"/>
+            <a:ext cx="839734" cy="82296"/>
+          </a:xfrm>
+          <a:prstGeom prst="roundRect">
+            <a:avLst>
+              <a:gd name="adj" fmla="val 50000"/>
+            </a:avLst>
+          </a:prstGeom>
+          <a:solidFill>
+            <a:srgbClr val="9C7C2E"/>
+          </a:solidFill>
+          <a:ln/>
+        </p:spPr>
+      </p:sp>
+      <p:sp>
+        <p:nvSpPr>
+          <p:cNvPr id="31" name="Shape 29"/>
+          <p:cNvSpPr/>
+          <p:nvPr/>
+        </p:nvSpPr>
+        <p:spPr>
+          <a:xfrm>
+            <a:off x="9994392" y="3986784"/>
+            <a:ext cx="1143000" cy="292608"/>
+          </a:xfrm>
+          <a:prstGeom prst="roundRect">
+            <a:avLst>
+              <a:gd name="adj" fmla="val 50000"/>
+            </a:avLst>
+          </a:prstGeom>
+          <a:solidFill>
+            <a:srgbClr val="FFFFFF"/>
           </a:solidFill>
           <a:ln w="12700">
             <a:solidFill>
@@ -18753,34 +19434,14 @@
       </p:sp>
       <p:sp>
         <p:nvSpPr>
-          <p:cNvPr id="30" name="Shape 28"/>
-          <p:cNvSpPr/>
-          <p:nvPr/>
-        </p:nvSpPr>
-        <p:spPr>
-          <a:xfrm>
-            <a:off x="9482328" y="2834640"/>
-            <a:ext cx="82296" cy="82296"/>
-          </a:xfrm>
-          <a:prstGeom prst="ellipse">
-            <a:avLst/>
-          </a:prstGeom>
-          <a:solidFill>
-            <a:srgbClr val="9C7C2E"/>
-          </a:solidFill>
-          <a:ln/>
-        </p:spPr>
-      </p:sp>
-      <p:sp>
-        <p:nvSpPr>
-          <p:cNvPr id="31" name="Text 29"/>
-          <p:cNvSpPr txBox="1"/>
-          <p:nvPr/>
-        </p:nvSpPr>
-        <p:spPr>
-          <a:xfrm>
-            <a:off x="9646920" y="2691384"/>
-            <a:ext cx="1527048" cy="368808"/>
+          <p:cNvPr id="32" name="Text 30"/>
+          <p:cNvSpPr txBox="1"/>
+          <p:nvPr/>
+        </p:nvSpPr>
+        <p:spPr>
+          <a:xfrm>
+            <a:off x="9994392" y="3977640"/>
+            <a:ext cx="1143000" cy="310896"/>
           </a:xfrm>
           <a:prstGeom prst="rect">
             <a:avLst/>
@@ -18792,623 +19453,21 @@
           <a:bodyPr wrap="square" lIns="0" tIns="0" rIns="0" bIns="0" rtlCol="0" anchor="ctr"/>
           <a:lstStyle/>
           <a:p>
-            <a:pPr indent="0" marL="0">
-              <a:buNone/>
-            </a:pPr>
-            <a:r>
-              <a:rPr lang="en-US" sz="800" dirty="0">
-                <a:solidFill>
-                  <a:srgbClr val="1D1A15"/>
-                </a:solidFill>
-                <a:latin typeface="Calibri" pitchFamily="34" charset="0"/>
-                <a:ea typeface="Calibri" pitchFamily="34" charset="-122"/>
-                <a:cs typeface="Calibri" pitchFamily="34" charset="-120"/>
-              </a:rPr>
-              <a:t>Analytics &amp; forecasting</a:t>
-            </a:r>
-            <a:endParaRPr lang="en-US" sz="800" dirty="0"/>
-          </a:p>
-        </p:txBody>
-      </p:sp>
-      <p:sp>
-        <p:nvSpPr>
-          <p:cNvPr id="32" name="Shape 30"/>
-          <p:cNvSpPr/>
-          <p:nvPr/>
-        </p:nvSpPr>
-        <p:spPr>
-          <a:xfrm>
-            <a:off x="7296912" y="3169920"/>
-            <a:ext cx="1911096" cy="368808"/>
-          </a:xfrm>
-          <a:prstGeom prst="roundRect">
-            <a:avLst>
-              <a:gd name="adj" fmla="val 14876"/>
-            </a:avLst>
-          </a:prstGeom>
-          <a:solidFill>
-            <a:srgbClr val="FBFAF6"/>
-          </a:solidFill>
-          <a:ln w="12700">
-            <a:solidFill>
-              <a:srgbClr val="E4DCC9"/>
-            </a:solidFill>
-            <a:prstDash val="solid"/>
-          </a:ln>
-        </p:spPr>
-      </p:sp>
-      <p:sp>
-        <p:nvSpPr>
-          <p:cNvPr id="33" name="Shape 31"/>
-          <p:cNvSpPr/>
-          <p:nvPr/>
-        </p:nvSpPr>
-        <p:spPr>
-          <a:xfrm>
-            <a:off x="7424928" y="3313176"/>
-            <a:ext cx="82296" cy="82296"/>
-          </a:xfrm>
-          <a:prstGeom prst="ellipse">
-            <a:avLst/>
-          </a:prstGeom>
-          <a:solidFill>
-            <a:srgbClr val="9C7C2E"/>
-          </a:solidFill>
-          <a:ln/>
-        </p:spPr>
-      </p:sp>
-      <p:sp>
-        <p:nvSpPr>
-          <p:cNvPr id="34" name="Text 32"/>
-          <p:cNvSpPr txBox="1"/>
-          <p:nvPr/>
-        </p:nvSpPr>
-        <p:spPr>
-          <a:xfrm>
-            <a:off x="7589520" y="3169920"/>
-            <a:ext cx="1527048" cy="368808"/>
-          </a:xfrm>
-          <a:prstGeom prst="rect">
-            <a:avLst/>
-          </a:prstGeom>
-          <a:noFill/>
-          <a:ln/>
-        </p:spPr>
-        <p:txBody>
-          <a:bodyPr wrap="square" lIns="0" tIns="0" rIns="0" bIns="0" rtlCol="0" anchor="ctr"/>
-          <a:lstStyle/>
-          <a:p>
-            <a:pPr indent="0" marL="0">
-              <a:buNone/>
-            </a:pPr>
-            <a:r>
-              <a:rPr lang="en-US" sz="800" dirty="0">
-                <a:solidFill>
-                  <a:srgbClr val="1D1A15"/>
-                </a:solidFill>
-                <a:latin typeface="Calibri" pitchFamily="34" charset="0"/>
-                <a:ea typeface="Calibri" pitchFamily="34" charset="-122"/>
-                <a:cs typeface="Calibri" pitchFamily="34" charset="-120"/>
-              </a:rPr>
-              <a:t>Handbook &amp; document library</a:t>
-            </a:r>
-            <a:endParaRPr lang="en-US" sz="800" dirty="0"/>
-          </a:p>
-        </p:txBody>
-      </p:sp>
-      <p:sp>
-        <p:nvSpPr>
-          <p:cNvPr id="35" name="Shape 33"/>
-          <p:cNvSpPr/>
-          <p:nvPr/>
-        </p:nvSpPr>
-        <p:spPr>
-          <a:xfrm>
-            <a:off x="9354312" y="3169920"/>
-            <a:ext cx="1911096" cy="368808"/>
-          </a:xfrm>
-          <a:prstGeom prst="roundRect">
-            <a:avLst>
-              <a:gd name="adj" fmla="val 14876"/>
-            </a:avLst>
-          </a:prstGeom>
-          <a:solidFill>
-            <a:srgbClr val="FBFAF6"/>
-          </a:solidFill>
-          <a:ln w="12700">
-            <a:solidFill>
-              <a:srgbClr val="E4DCC9"/>
-            </a:solidFill>
-            <a:prstDash val="solid"/>
-          </a:ln>
-        </p:spPr>
-      </p:sp>
-      <p:sp>
-        <p:nvSpPr>
-          <p:cNvPr id="36" name="Shape 34"/>
-          <p:cNvSpPr/>
-          <p:nvPr/>
-        </p:nvSpPr>
-        <p:spPr>
-          <a:xfrm>
-            <a:off x="9482328" y="3313176"/>
-            <a:ext cx="82296" cy="82296"/>
-          </a:xfrm>
-          <a:prstGeom prst="ellipse">
-            <a:avLst/>
-          </a:prstGeom>
-          <a:solidFill>
-            <a:srgbClr val="9C7C2E"/>
-          </a:solidFill>
-          <a:ln/>
-        </p:spPr>
-      </p:sp>
-      <p:sp>
-        <p:nvSpPr>
-          <p:cNvPr id="37" name="Text 35"/>
-          <p:cNvSpPr txBox="1"/>
-          <p:nvPr/>
-        </p:nvSpPr>
-        <p:spPr>
-          <a:xfrm>
-            <a:off x="9646920" y="3169920"/>
-            <a:ext cx="1527048" cy="368808"/>
-          </a:xfrm>
-          <a:prstGeom prst="rect">
-            <a:avLst/>
-          </a:prstGeom>
-          <a:noFill/>
-          <a:ln/>
-        </p:spPr>
-        <p:txBody>
-          <a:bodyPr wrap="square" lIns="0" tIns="0" rIns="0" bIns="0" rtlCol="0" anchor="ctr"/>
-          <a:lstStyle/>
-          <a:p>
-            <a:pPr indent="0" marL="0">
-              <a:buNone/>
-            </a:pPr>
-            <a:r>
-              <a:rPr lang="en-US" sz="800" dirty="0">
-                <a:solidFill>
-                  <a:srgbClr val="1D1A15"/>
-                </a:solidFill>
-                <a:latin typeface="Calibri" pitchFamily="34" charset="0"/>
-                <a:ea typeface="Calibri" pitchFamily="34" charset="-122"/>
-                <a:cs typeface="Calibri" pitchFamily="34" charset="-120"/>
-              </a:rPr>
-              <a:t>Mobile app for teachers &amp; parents</a:t>
-            </a:r>
-            <a:endParaRPr lang="en-US" sz="800" dirty="0"/>
-          </a:p>
-        </p:txBody>
-      </p:sp>
-      <p:sp>
-        <p:nvSpPr>
-          <p:cNvPr id="38" name="Shape 36"/>
-          <p:cNvSpPr/>
-          <p:nvPr/>
-        </p:nvSpPr>
-        <p:spPr>
-          <a:xfrm>
-            <a:off x="7296912" y="3648456"/>
-            <a:ext cx="1911096" cy="368808"/>
-          </a:xfrm>
-          <a:prstGeom prst="roundRect">
-            <a:avLst>
-              <a:gd name="adj" fmla="val 14876"/>
-            </a:avLst>
-          </a:prstGeom>
-          <a:solidFill>
-            <a:srgbClr val="FBFAF6"/>
-          </a:solidFill>
-          <a:ln w="12700">
-            <a:solidFill>
-              <a:srgbClr val="E4DCC9"/>
-            </a:solidFill>
-            <a:prstDash val="solid"/>
-          </a:ln>
-        </p:spPr>
-      </p:sp>
-      <p:sp>
-        <p:nvSpPr>
-          <p:cNvPr id="39" name="Shape 37"/>
-          <p:cNvSpPr/>
-          <p:nvPr/>
-        </p:nvSpPr>
-        <p:spPr>
-          <a:xfrm>
-            <a:off x="7424928" y="3791712"/>
-            <a:ext cx="82296" cy="82296"/>
-          </a:xfrm>
-          <a:prstGeom prst="ellipse">
-            <a:avLst/>
-          </a:prstGeom>
-          <a:solidFill>
-            <a:srgbClr val="9C7C2E"/>
-          </a:solidFill>
-          <a:ln/>
-        </p:spPr>
-      </p:sp>
-      <p:sp>
-        <p:nvSpPr>
-          <p:cNvPr id="40" name="Text 38"/>
-          <p:cNvSpPr txBox="1"/>
-          <p:nvPr/>
-        </p:nvSpPr>
-        <p:spPr>
-          <a:xfrm>
-            <a:off x="7589520" y="3648456"/>
-            <a:ext cx="1527048" cy="368808"/>
-          </a:xfrm>
-          <a:prstGeom prst="rect">
-            <a:avLst/>
-          </a:prstGeom>
-          <a:noFill/>
-          <a:ln/>
-        </p:spPr>
-        <p:txBody>
-          <a:bodyPr wrap="square" lIns="0" tIns="0" rIns="0" bIns="0" rtlCol="0" anchor="ctr"/>
-          <a:lstStyle/>
-          <a:p>
-            <a:pPr indent="0" marL="0">
-              <a:buNone/>
-            </a:pPr>
-            <a:r>
-              <a:rPr lang="en-US" sz="800" dirty="0">
-                <a:solidFill>
-                  <a:srgbClr val="1D1A15"/>
-                </a:solidFill>
-                <a:latin typeface="Calibri" pitchFamily="34" charset="0"/>
-                <a:ea typeface="Calibri" pitchFamily="34" charset="-122"/>
-                <a:cs typeface="Calibri" pitchFamily="34" charset="-120"/>
-              </a:rPr>
-              <a:t>Single sign-on across tools</a:t>
-            </a:r>
-            <a:endParaRPr lang="en-US" sz="800" dirty="0"/>
-          </a:p>
-        </p:txBody>
-      </p:sp>
-      <p:sp>
-        <p:nvSpPr>
-          <p:cNvPr id="41" name="Shape 39"/>
-          <p:cNvSpPr/>
-          <p:nvPr/>
-        </p:nvSpPr>
-        <p:spPr>
-          <a:xfrm>
-            <a:off x="9354312" y="3648456"/>
-            <a:ext cx="1911096" cy="368808"/>
-          </a:xfrm>
-          <a:prstGeom prst="roundRect">
-            <a:avLst>
-              <a:gd name="adj" fmla="val 14876"/>
-            </a:avLst>
-          </a:prstGeom>
-          <a:solidFill>
-            <a:srgbClr val="FBFAF6"/>
-          </a:solidFill>
-          <a:ln w="12700">
-            <a:solidFill>
-              <a:srgbClr val="E4DCC9"/>
-            </a:solidFill>
-            <a:prstDash val="solid"/>
-          </a:ln>
-        </p:spPr>
-      </p:sp>
-      <p:sp>
-        <p:nvSpPr>
-          <p:cNvPr id="42" name="Shape 40"/>
-          <p:cNvSpPr/>
-          <p:nvPr/>
-        </p:nvSpPr>
-        <p:spPr>
-          <a:xfrm>
-            <a:off x="9482328" y="3791712"/>
-            <a:ext cx="82296" cy="82296"/>
-          </a:xfrm>
-          <a:prstGeom prst="ellipse">
-            <a:avLst/>
-          </a:prstGeom>
-          <a:solidFill>
-            <a:srgbClr val="9C7C2E"/>
-          </a:solidFill>
-          <a:ln/>
-        </p:spPr>
-      </p:sp>
-      <p:sp>
-        <p:nvSpPr>
-          <p:cNvPr id="43" name="Text 41"/>
-          <p:cNvSpPr txBox="1"/>
-          <p:nvPr/>
-        </p:nvSpPr>
-        <p:spPr>
-          <a:xfrm>
-            <a:off x="9646920" y="3648456"/>
-            <a:ext cx="1527048" cy="368808"/>
-          </a:xfrm>
-          <a:prstGeom prst="rect">
-            <a:avLst/>
-          </a:prstGeom>
-          <a:noFill/>
-          <a:ln/>
-        </p:spPr>
-        <p:txBody>
-          <a:bodyPr wrap="square" lIns="0" tIns="0" rIns="0" bIns="0" rtlCol="0" anchor="ctr"/>
-          <a:lstStyle/>
-          <a:p>
-            <a:pPr indent="0" marL="0">
-              <a:buNone/>
-            </a:pPr>
-            <a:r>
-              <a:rPr lang="en-US" sz="800" dirty="0">
-                <a:solidFill>
-                  <a:srgbClr val="1D1A15"/>
-                </a:solidFill>
-                <a:latin typeface="Calibri" pitchFamily="34" charset="0"/>
-                <a:ea typeface="Calibri" pitchFamily="34" charset="-122"/>
-                <a:cs typeface="Calibri" pitchFamily="34" charset="-120"/>
-              </a:rPr>
-              <a:t>Automated emails &amp; reminders</a:t>
-            </a:r>
-            <a:endParaRPr lang="en-US" sz="800" dirty="0"/>
-          </a:p>
-        </p:txBody>
-      </p:sp>
-      <p:sp>
-        <p:nvSpPr>
-          <p:cNvPr id="44" name="Shape 42"/>
-          <p:cNvSpPr/>
-          <p:nvPr/>
-        </p:nvSpPr>
-        <p:spPr>
-          <a:xfrm>
-            <a:off x="7296912" y="4126992"/>
-            <a:ext cx="1911096" cy="368808"/>
-          </a:xfrm>
-          <a:prstGeom prst="roundRect">
-            <a:avLst>
-              <a:gd name="adj" fmla="val 14876"/>
-            </a:avLst>
-          </a:prstGeom>
-          <a:solidFill>
-            <a:srgbClr val="FBFAF6"/>
-          </a:solidFill>
-          <a:ln w="12700">
-            <a:solidFill>
-              <a:srgbClr val="E4DCC9"/>
-            </a:solidFill>
-            <a:prstDash val="solid"/>
-          </a:ln>
-        </p:spPr>
-      </p:sp>
-      <p:sp>
-        <p:nvSpPr>
-          <p:cNvPr id="45" name="Shape 43"/>
-          <p:cNvSpPr/>
-          <p:nvPr/>
-        </p:nvSpPr>
-        <p:spPr>
-          <a:xfrm>
-            <a:off x="7424928" y="4270248"/>
-            <a:ext cx="82296" cy="82296"/>
-          </a:xfrm>
-          <a:prstGeom prst="ellipse">
-            <a:avLst/>
-          </a:prstGeom>
-          <a:solidFill>
-            <a:srgbClr val="9C7C2E"/>
-          </a:solidFill>
-          <a:ln/>
-        </p:spPr>
-      </p:sp>
-      <p:sp>
-        <p:nvSpPr>
-          <p:cNvPr id="46" name="Text 44"/>
-          <p:cNvSpPr txBox="1"/>
-          <p:nvPr/>
-        </p:nvSpPr>
-        <p:spPr>
-          <a:xfrm>
-            <a:off x="7589520" y="4126992"/>
-            <a:ext cx="1527048" cy="368808"/>
-          </a:xfrm>
-          <a:prstGeom prst="rect">
-            <a:avLst/>
-          </a:prstGeom>
-          <a:noFill/>
-          <a:ln/>
-        </p:spPr>
-        <p:txBody>
-          <a:bodyPr wrap="square" lIns="0" tIns="0" rIns="0" bIns="0" rtlCol="0" anchor="ctr"/>
-          <a:lstStyle/>
-          <a:p>
-            <a:pPr indent="0" marL="0">
-              <a:buNone/>
-            </a:pPr>
-            <a:r>
-              <a:rPr lang="en-US" sz="800" dirty="0">
-                <a:solidFill>
-                  <a:srgbClr val="1D1A15"/>
-                </a:solidFill>
-                <a:latin typeface="Calibri" pitchFamily="34" charset="0"/>
-                <a:ea typeface="Calibri" pitchFamily="34" charset="-122"/>
-                <a:cs typeface="Calibri" pitchFamily="34" charset="-120"/>
-              </a:rPr>
-              <a:t>Donor &amp; fundraising tracking</a:t>
-            </a:r>
-            <a:endParaRPr lang="en-US" sz="800" dirty="0"/>
-          </a:p>
-        </p:txBody>
-      </p:sp>
-      <p:sp>
-        <p:nvSpPr>
-          <p:cNvPr id="47" name="Shape 45"/>
-          <p:cNvSpPr/>
-          <p:nvPr/>
-        </p:nvSpPr>
-        <p:spPr>
-          <a:xfrm>
-            <a:off x="9354312" y="4126992"/>
-            <a:ext cx="1911096" cy="368808"/>
-          </a:xfrm>
-          <a:prstGeom prst="roundRect">
-            <a:avLst>
-              <a:gd name="adj" fmla="val 14876"/>
-            </a:avLst>
-          </a:prstGeom>
-          <a:solidFill>
-            <a:srgbClr val="FBFAF6"/>
-          </a:solidFill>
-          <a:ln w="12700">
-            <a:solidFill>
-              <a:srgbClr val="E4DCC9"/>
-            </a:solidFill>
-            <a:prstDash val="solid"/>
-          </a:ln>
-        </p:spPr>
-      </p:sp>
-      <p:sp>
-        <p:nvSpPr>
-          <p:cNvPr id="48" name="Shape 46"/>
-          <p:cNvSpPr/>
-          <p:nvPr/>
-        </p:nvSpPr>
-        <p:spPr>
-          <a:xfrm>
-            <a:off x="9482328" y="4270248"/>
-            <a:ext cx="82296" cy="82296"/>
-          </a:xfrm>
-          <a:prstGeom prst="ellipse">
-            <a:avLst/>
-          </a:prstGeom>
-          <a:solidFill>
-            <a:srgbClr val="9C7C2E"/>
-          </a:solidFill>
-          <a:ln/>
-        </p:spPr>
-      </p:sp>
-      <p:sp>
-        <p:nvSpPr>
-          <p:cNvPr id="49" name="Text 47"/>
-          <p:cNvSpPr txBox="1"/>
-          <p:nvPr/>
-        </p:nvSpPr>
-        <p:spPr>
-          <a:xfrm>
-            <a:off x="9646920" y="4126992"/>
-            <a:ext cx="1527048" cy="368808"/>
-          </a:xfrm>
-          <a:prstGeom prst="rect">
-            <a:avLst/>
-          </a:prstGeom>
-          <a:noFill/>
-          <a:ln/>
-        </p:spPr>
-        <p:txBody>
-          <a:bodyPr wrap="square" lIns="0" tIns="0" rIns="0" bIns="0" rtlCol="0" anchor="ctr"/>
-          <a:lstStyle/>
-          <a:p>
-            <a:pPr indent="0" marL="0">
-              <a:buNone/>
-            </a:pPr>
-            <a:r>
-              <a:rPr lang="en-US" sz="800" dirty="0">
-                <a:solidFill>
-                  <a:srgbClr val="1D1A15"/>
-                </a:solidFill>
-                <a:latin typeface="Calibri" pitchFamily="34" charset="0"/>
-                <a:ea typeface="Calibri" pitchFamily="34" charset="-122"/>
-                <a:cs typeface="Calibri" pitchFamily="34" charset="-120"/>
-              </a:rPr>
-              <a:t>Student progress insights</a:t>
-            </a:r>
-            <a:endParaRPr lang="en-US" sz="800" dirty="0"/>
-          </a:p>
-        </p:txBody>
-      </p:sp>
-      <p:sp>
-        <p:nvSpPr>
-          <p:cNvPr id="50" name="Shape 48"/>
-          <p:cNvSpPr/>
-          <p:nvPr/>
-        </p:nvSpPr>
-        <p:spPr>
-          <a:xfrm>
-            <a:off x="7296912" y="4605528"/>
-            <a:ext cx="1911096" cy="368808"/>
-          </a:xfrm>
-          <a:prstGeom prst="roundRect">
-            <a:avLst>
-              <a:gd name="adj" fmla="val 14876"/>
-            </a:avLst>
-          </a:prstGeom>
-          <a:solidFill>
-            <a:srgbClr val="FBFAF6"/>
-          </a:solidFill>
-          <a:ln w="12700">
-            <a:solidFill>
-              <a:srgbClr val="E4DCC9"/>
-            </a:solidFill>
-            <a:prstDash val="solid"/>
-          </a:ln>
-        </p:spPr>
-      </p:sp>
-      <p:sp>
-        <p:nvSpPr>
-          <p:cNvPr id="51" name="Shape 49"/>
-          <p:cNvSpPr/>
-          <p:nvPr/>
-        </p:nvSpPr>
-        <p:spPr>
-          <a:xfrm>
-            <a:off x="7424928" y="4748784"/>
-            <a:ext cx="82296" cy="82296"/>
-          </a:xfrm>
-          <a:prstGeom prst="ellipse">
-            <a:avLst/>
-          </a:prstGeom>
-          <a:solidFill>
-            <a:srgbClr val="9C7C2E"/>
-          </a:solidFill>
-          <a:ln/>
-        </p:spPr>
-      </p:sp>
-      <p:sp>
-        <p:nvSpPr>
-          <p:cNvPr id="52" name="Text 50"/>
-          <p:cNvSpPr txBox="1"/>
-          <p:nvPr/>
-        </p:nvSpPr>
-        <p:spPr>
-          <a:xfrm>
-            <a:off x="7589520" y="4605528"/>
-            <a:ext cx="1527048" cy="368808"/>
-          </a:xfrm>
-          <a:prstGeom prst="rect">
-            <a:avLst/>
-          </a:prstGeom>
-          <a:noFill/>
-          <a:ln/>
-        </p:spPr>
-        <p:txBody>
-          <a:bodyPr wrap="square" lIns="0" tIns="0" rIns="0" bIns="0" rtlCol="0" anchor="ctr"/>
-          <a:lstStyle/>
-          <a:p>
-            <a:pPr indent="0" marL="0">
-              <a:buNone/>
-            </a:pPr>
-            <a:r>
-              <a:rPr lang="en-US" sz="800" dirty="0">
-                <a:solidFill>
-                  <a:srgbClr val="1D1A15"/>
-                </a:solidFill>
-                <a:latin typeface="Calibri" pitchFamily="34" charset="0"/>
-                <a:ea typeface="Calibri" pitchFamily="34" charset="-122"/>
-                <a:cs typeface="Calibri" pitchFamily="34" charset="-120"/>
-              </a:rPr>
-              <a:t>Spanish support</a:t>
-            </a:r>
-            <a:endParaRPr lang="en-US" sz="800" dirty="0"/>
+            <a:pPr algn="ctr" indent="0" marL="0">
+              <a:buNone/>
+            </a:pPr>
+            <a:r>
+              <a:rPr lang="en-US" sz="850" dirty="0">
+                <a:solidFill>
+                  <a:srgbClr val="7A7266"/>
+                </a:solidFill>
+                <a:latin typeface="Calibri" pitchFamily="34" charset="0"/>
+                <a:ea typeface="Calibri" pitchFamily="34" charset="-122"/>
+                <a:cs typeface="Calibri" pitchFamily="34" charset="-120"/>
+              </a:rPr>
+              <a:t>mockups only</a:t>
+            </a:r>
+            <a:endParaRPr lang="en-US" sz="850" dirty="0"/>
           </a:p>
         </p:txBody>
       </p:sp>
@@ -19426,7 +19485,7 @@
     <p:bg>
       <p:bgPr>
         <a:solidFill>
-          <a:srgbClr val="FBFAF6"/>
+          <a:srgbClr val="211B12"/>
         </a:solidFill>
       </p:bgPr>
     </p:bg>
@@ -19446,13 +19505,61 @@
       </p:grpSpPr>
       <p:sp>
         <p:nvSpPr>
-          <p:cNvPr id="2" name="Text 0"/>
-          <p:cNvSpPr txBox="1"/>
-          <p:nvPr/>
-        </p:nvSpPr>
-        <p:spPr>
-          <a:xfrm>
-            <a:off x="822960" y="777240"/>
+          <p:cNvPr id="2" name="Shape 0"/>
+          <p:cNvSpPr/>
+          <p:nvPr/>
+        </p:nvSpPr>
+        <p:spPr>
+          <a:xfrm>
+            <a:off x="9079992" y="-1463040"/>
+            <a:ext cx="4206240" cy="4206240"/>
+          </a:xfrm>
+          <a:prstGeom prst="ellipse">
+            <a:avLst/>
+          </a:prstGeom>
+          <a:ln w="15875">
+            <a:solidFill>
+              <a:srgbClr val="9C7C2E">
+                <a:alpha val="45000"/>
+              </a:srgbClr>
+            </a:solidFill>
+            <a:prstDash val="solid"/>
+          </a:ln>
+        </p:spPr>
+      </p:sp>
+      <p:sp>
+        <p:nvSpPr>
+          <p:cNvPr id="3" name="Shape 1"/>
+          <p:cNvSpPr/>
+          <p:nvPr/>
+        </p:nvSpPr>
+        <p:spPr>
+          <a:xfrm>
+            <a:off x="10085832" y="4846320"/>
+            <a:ext cx="3108960" cy="3108960"/>
+          </a:xfrm>
+          <a:prstGeom prst="ellipse">
+            <a:avLst/>
+          </a:prstGeom>
+          <a:ln w="12700">
+            <a:solidFill>
+              <a:srgbClr val="9C7C2E">
+                <a:alpha val="30000"/>
+              </a:srgbClr>
+            </a:solidFill>
+            <a:prstDash val="solid"/>
+          </a:ln>
+        </p:spPr>
+      </p:sp>
+      <p:sp>
+        <p:nvSpPr>
+          <p:cNvPr id="4" name="Text 2"/>
+          <p:cNvSpPr txBox="1"/>
+          <p:nvPr/>
+        </p:nvSpPr>
+        <p:spPr>
+          <a:xfrm>
+            <a:off x="822960" y="2194560"/>
             <a:ext cx="7315200" cy="274320"/>
           </a:xfrm>
           <a:prstGeom prst="rect">
@@ -19471,13 +19578,13 @@
             <a:r>
               <a:rPr lang="en-US" sz="1100" b="1" spc="300" kern="0" dirty="0">
                 <a:solidFill>
-                  <a:srgbClr val="9C7C2E"/>
-                </a:solidFill>
-                <a:latin typeface="Calibri" pitchFamily="34" charset="0"/>
-                <a:ea typeface="Calibri" pitchFamily="34" charset="-122"/>
-                <a:cs typeface="Calibri" pitchFamily="34" charset="-120"/>
-              </a:rPr>
-              <a:t>STATUS &amp; ROADMAP</a:t>
+                  <a:srgbClr val="C4A24E"/>
+                </a:solidFill>
+                <a:latin typeface="Calibri" pitchFamily="34" charset="0"/>
+                <a:ea typeface="Calibri" pitchFamily="34" charset="-122"/>
+                <a:cs typeface="Calibri" pitchFamily="34" charset="-120"/>
+              </a:rPr>
+              <a:t>DEEPROOTS · PORTAL &amp; OPTIMIZATION</a:t>
             </a:r>
             <a:endParaRPr lang="en-US" sz="1100" dirty="0"/>
           </a:p>
@@ -19485,23 +19592,23 @@
       </p:sp>
       <p:sp>
         <p:nvSpPr>
-          <p:cNvPr id="3" name="Text 1"/>
-          <p:cNvSpPr txBox="1"/>
-          <p:nvPr/>
-        </p:nvSpPr>
-        <p:spPr>
-          <a:xfrm>
-            <a:off x="822960" y="1097280"/>
-            <a:ext cx="5760720" cy="1371600"/>
-          </a:xfrm>
-          <a:prstGeom prst="rect">
-            <a:avLst/>
-          </a:prstGeom>
-          <a:noFill/>
-          <a:ln/>
-        </p:spPr>
-        <p:txBody>
-          <a:bodyPr wrap="square" lIns="0" tIns="0" rIns="0" bIns="0" rtlCol="0" anchor="t"/>
+          <p:cNvPr id="5" name="Text 3"/>
+          <p:cNvSpPr txBox="1"/>
+          <p:nvPr/>
+        </p:nvSpPr>
+        <p:spPr>
+          <a:xfrm>
+            <a:off x="822960" y="2514600"/>
+            <a:ext cx="9601200" cy="1828800"/>
+          </a:xfrm>
+          <a:prstGeom prst="rect">
+            <a:avLst/>
+          </a:prstGeom>
+          <a:noFill/>
+          <a:ln/>
+        </p:spPr>
+        <p:txBody>
+          <a:bodyPr wrap="square" lIns="0" tIns="0" rIns="0" bIns="0" rtlCol="0" anchor="ctr"/>
           <a:lstStyle/>
           <a:p>
             <a:pPr indent="0" marL="0">
@@ -19511,57 +19618,57 @@
               <a:buNone/>
             </a:pPr>
             <a:r>
-              <a:rPr lang="en-US" sz="3000" b="1" dirty="0">
-                <a:solidFill>
-                  <a:srgbClr val="1D1A15"/>
+              <a:rPr lang="en-US" sz="4000" b="1" dirty="0">
+                <a:solidFill>
+                  <a:srgbClr val="F3ECDD"/>
                 </a:solidFill>
                 <a:latin typeface="Georgia" pitchFamily="34" charset="0"/>
                 <a:ea typeface="Georgia" pitchFamily="34" charset="-122"/>
                 <a:cs typeface="Georgia" pitchFamily="34" charset="-120"/>
               </a:rPr>
-              <a:t>Where it stands and what’s next</a:t>
-            </a:r>
-            <a:endParaRPr lang="en-US" sz="3000" dirty="0"/>
-          </a:p>
-        </p:txBody>
-      </p:sp>
-      <p:sp>
-        <p:nvSpPr>
-          <p:cNvPr id="4" name="Text 2"/>
-          <p:cNvSpPr txBox="1"/>
-          <p:nvPr/>
-        </p:nvSpPr>
-        <p:spPr>
-          <a:xfrm>
-            <a:off x="822960" y="2286000"/>
-            <a:ext cx="5760720" cy="1371600"/>
-          </a:xfrm>
-          <a:prstGeom prst="rect">
-            <a:avLst/>
-          </a:prstGeom>
-          <a:noFill/>
-          <a:ln/>
-        </p:spPr>
-        <p:txBody>
-          <a:bodyPr wrap="square" lIns="0" tIns="0" rIns="0" bIns="0" rtlCol="0" anchor="t"/>
+              <a:t>What we’d build</a:t>
+            </a:r>
+            <a:endParaRPr lang="en-US" sz="4000" dirty="0"/>
+          </a:p>
+        </p:txBody>
+      </p:sp>
+      <p:sp>
+        <p:nvSpPr>
+          <p:cNvPr id="6" name="Text 4"/>
+          <p:cNvSpPr txBox="1"/>
+          <p:nvPr/>
+        </p:nvSpPr>
+        <p:spPr>
+          <a:xfrm>
+            <a:off x="822960" y="4114800"/>
+            <a:ext cx="8686800" cy="1280160"/>
+          </a:xfrm>
+          <a:prstGeom prst="rect">
+            <a:avLst/>
+          </a:prstGeom>
+          <a:noFill/>
+          <a:ln/>
+        </p:spPr>
+        <p:txBody>
+          <a:bodyPr wrap="square" lIns="0" tIns="0" rIns="0" bIns="0" rtlCol="0" anchor="ctr"/>
           <a:lstStyle/>
           <a:p>
             <a:pPr indent="0" marL="0">
               <a:lnSpc>
-                <a:spcPct val="115000"/>
+                <a:spcPct val="120000"/>
               </a:lnSpc>
               <a:buNone/>
             </a:pPr>
             <a:r>
               <a:rPr lang="en-US" sz="1500" dirty="0">
                 <a:solidFill>
-                  <a:srgbClr val="7A7266"/>
-                </a:solidFill>
-                <a:latin typeface="Calibri" pitchFamily="34" charset="0"/>
-                <a:ea typeface="Calibri" pitchFamily="34" charset="-122"/>
-                <a:cs typeface="Calibri" pitchFamily="34" charset="-120"/>
-              </a:rPr>
-              <a:t>You can click through every screen, but this is early: what’s live today is mostly mockups, not real data yet. The build ahead is what makes each area real.</a:t>
+                  <a:srgbClr val="B7AE9E"/>
+                </a:solidFill>
+                <a:latin typeface="Calibri" pitchFamily="34" charset="0"/>
+                <a:ea typeface="Calibri" pitchFamily="34" charset="-122"/>
+                <a:cs typeface="Calibri" pitchFamily="34" charset="-120"/>
+              </a:rPr>
+              <a:t>One operating picture: public site, staff portal, and School Portal over a modern data backbone. The system we’d build for DeepRoots, honest by design.</a:t>
             </a:r>
             <a:endParaRPr lang="en-US" sz="1500" dirty="0"/>
           </a:p>
@@ -19569,559 +19676,14 @@
       </p:sp>
       <p:sp>
         <p:nvSpPr>
-          <p:cNvPr id="5" name="Text 3"/>
-          <p:cNvSpPr txBox="1"/>
-          <p:nvPr/>
-        </p:nvSpPr>
-        <p:spPr>
-          <a:xfrm>
-            <a:off x="822960" y="3657600"/>
-            <a:ext cx="5760720" cy="1115568"/>
-          </a:xfrm>
-          <a:prstGeom prst="rect">
-            <a:avLst/>
-          </a:prstGeom>
-          <a:noFill/>
-          <a:ln/>
-        </p:spPr>
-        <p:txBody>
-          <a:bodyPr wrap="square" lIns="0" tIns="0" rIns="0" bIns="0" rtlCol="0" anchor="t"/>
-          <a:lstStyle/>
-          <a:p>
-            <a:pPr marL="177800" indent="-177800">
-              <a:spcAft>
-                <a:spcPts val="800"/>
-              </a:spcAft>
-              <a:buSzPct val="100000"/>
-              <a:buChar char="•"/>
-            </a:pPr>
-            <a:r>
-              <a:rPr lang="en-US" sz="1350" dirty="0">
-                <a:solidFill>
-                  <a:srgbClr val="1D1A15"/>
-                </a:solidFill>
-                <a:latin typeface="Calibri" pitchFamily="34" charset="0"/>
-                <a:ea typeface="Calibri" pitchFamily="34" charset="-122"/>
-                <a:cs typeface="Calibri" pitchFamily="34" charset="-120"/>
-              </a:rPr>
-              <a:t>Today: mockups and workflow processes documented.</a:t>
-            </a:r>
-            <a:endParaRPr lang="en-US" sz="1350" dirty="0"/>
-          </a:p>
-          <a:p>
-            <a:pPr marL="177800" indent="-177800">
-              <a:spcAft>
-                <a:spcPts val="800"/>
-              </a:spcAft>
-              <a:buSzPct val="100000"/>
-              <a:buChar char="•"/>
-            </a:pPr>
-            <a:r>
-              <a:rPr lang="en-US" sz="1350" dirty="0">
-                <a:solidFill>
-                  <a:srgbClr val="1D1A15"/>
-                </a:solidFill>
-                <a:latin typeface="Calibri" pitchFamily="34" charset="0"/>
-                <a:ea typeface="Calibri" pitchFamily="34" charset="-122"/>
-                <a:cs typeface="Calibri" pitchFamily="34" charset="-120"/>
-              </a:rPr>
-              <a:t>Next: connect the real data sources, aiming for an end-of-March go-live.</a:t>
-            </a:r>
-            <a:endParaRPr lang="en-US" sz="1350" dirty="0"/>
-          </a:p>
-          <a:p>
-            <a:pPr marL="177800" indent="-177800">
-              <a:spcAft>
-                <a:spcPts val="800"/>
-              </a:spcAft>
-              <a:buSzPct val="100000"/>
-              <a:buChar char="•"/>
-            </a:pPr>
-            <a:r>
-              <a:rPr lang="en-US" sz="1350" dirty="0">
-                <a:solidFill>
-                  <a:srgbClr val="1D1A15"/>
-                </a:solidFill>
-                <a:latin typeface="Calibri" pitchFamily="34" charset="0"/>
-                <a:ea typeface="Calibri" pitchFamily="34" charset="-122"/>
-                <a:cs typeface="Calibri" pitchFamily="34" charset="-120"/>
-              </a:rPr>
-              <a:t>Roadmap: Pre-K → finish 8th grade → churches → self-taught path.</a:t>
-            </a:r>
-            <a:endParaRPr lang="en-US" sz="1350" dirty="0"/>
-          </a:p>
-        </p:txBody>
-      </p:sp>
-      <p:sp>
-        <p:nvSpPr>
-          <p:cNvPr id="6" name="Shape 4"/>
-          <p:cNvSpPr/>
-          <p:nvPr/>
-        </p:nvSpPr>
-        <p:spPr>
-          <a:xfrm>
-            <a:off x="7040880" y="1645920"/>
-            <a:ext cx="4480560" cy="3566160"/>
-          </a:xfrm>
-          <a:prstGeom prst="roundRect">
-            <a:avLst>
-              <a:gd name="adj" fmla="val 3077"/>
-            </a:avLst>
-          </a:prstGeom>
-          <a:solidFill>
-            <a:srgbClr val="FFFFFF"/>
-          </a:solidFill>
-          <a:ln w="12700">
-            <a:solidFill>
-              <a:srgbClr val="E4DCC9"/>
-            </a:solidFill>
-            <a:prstDash val="solid"/>
-          </a:ln>
-          <a:effectLst>
-            <a:outerShdw sx="100000" sy="100000" kx="0" ky="0" algn="bl" rotWithShape="0" blurRad="127000" dist="38100" dir="5400000">
-              <a:srgbClr val="6B6252">
-                <a:alpha val="35000"/>
-              </a:srgbClr>
-            </a:outerShdw>
-          </a:effectLst>
-        </p:spPr>
-      </p:sp>
-      <p:sp>
-        <p:nvSpPr>
           <p:cNvPr id="7" name="Shape 5"/>
           <p:cNvSpPr/>
           <p:nvPr/>
         </p:nvSpPr>
         <p:spPr>
           <a:xfrm>
-            <a:off x="7040880" y="1645920"/>
-            <a:ext cx="4480560" cy="384048"/>
-          </a:xfrm>
-          <a:prstGeom prst="roundRect">
-            <a:avLst>
-              <a:gd name="adj" fmla="val 28571"/>
-            </a:avLst>
-          </a:prstGeom>
-          <a:solidFill>
-            <a:srgbClr val="FBFAF6"/>
-          </a:solidFill>
-          <a:ln/>
-        </p:spPr>
-      </p:sp>
-      <p:sp>
-        <p:nvSpPr>
-          <p:cNvPr id="8" name="Shape 6"/>
-          <p:cNvSpPr/>
-          <p:nvPr/>
-        </p:nvSpPr>
-        <p:spPr>
-          <a:xfrm>
-            <a:off x="7040880" y="1901952"/>
-            <a:ext cx="4480560" cy="128016"/>
-          </a:xfrm>
-          <a:prstGeom prst="rect">
-            <a:avLst/>
-          </a:prstGeom>
-          <a:solidFill>
-            <a:srgbClr val="FBFAF6"/>
-          </a:solidFill>
-          <a:ln/>
-        </p:spPr>
-      </p:sp>
-      <p:sp>
-        <p:nvSpPr>
-          <p:cNvPr id="9" name="Shape 7"/>
-          <p:cNvSpPr/>
-          <p:nvPr/>
-        </p:nvSpPr>
-        <p:spPr>
-          <a:xfrm>
-            <a:off x="7205472" y="1783080"/>
-            <a:ext cx="100584" cy="100584"/>
-          </a:xfrm>
-          <a:prstGeom prst="ellipse">
-            <a:avLst/>
-          </a:prstGeom>
-          <a:solidFill>
-            <a:srgbClr val="C9BFA9"/>
-          </a:solidFill>
-          <a:ln/>
-        </p:spPr>
-      </p:sp>
-      <p:sp>
-        <p:nvSpPr>
-          <p:cNvPr id="10" name="Shape 8"/>
-          <p:cNvSpPr/>
-          <p:nvPr/>
-        </p:nvSpPr>
-        <p:spPr>
-          <a:xfrm>
-            <a:off x="7388352" y="1783080"/>
-            <a:ext cx="100584" cy="100584"/>
-          </a:xfrm>
-          <a:prstGeom prst="ellipse">
-            <a:avLst/>
-          </a:prstGeom>
-          <a:solidFill>
-            <a:srgbClr val="C9BFA9"/>
-          </a:solidFill>
-          <a:ln/>
-        </p:spPr>
-      </p:sp>
-      <p:sp>
-        <p:nvSpPr>
-          <p:cNvPr id="11" name="Shape 9"/>
-          <p:cNvSpPr/>
-          <p:nvPr/>
-        </p:nvSpPr>
-        <p:spPr>
-          <a:xfrm>
-            <a:off x="7571232" y="1783080"/>
-            <a:ext cx="100584" cy="100584"/>
-          </a:xfrm>
-          <a:prstGeom prst="ellipse">
-            <a:avLst/>
-          </a:prstGeom>
-          <a:solidFill>
-            <a:srgbClr val="C9BFA9"/>
-          </a:solidFill>
-          <a:ln/>
-        </p:spPr>
-      </p:sp>
-      <p:sp>
-        <p:nvSpPr>
-          <p:cNvPr id="12" name="Text 10"/>
-          <p:cNvSpPr txBox="1"/>
-          <p:nvPr/>
-        </p:nvSpPr>
-        <p:spPr>
-          <a:xfrm>
-            <a:off x="7818120" y="1673352"/>
-            <a:ext cx="3566160" cy="329184"/>
-          </a:xfrm>
-          <a:prstGeom prst="rect">
-            <a:avLst/>
-          </a:prstGeom>
-          <a:noFill/>
-          <a:ln/>
-        </p:spPr>
-        <p:txBody>
-          <a:bodyPr wrap="square" lIns="0" tIns="0" rIns="0" bIns="0" rtlCol="0" anchor="ctr"/>
-          <a:lstStyle/>
-          <a:p>
-            <a:pPr indent="0" marL="0">
-              <a:buNone/>
-            </a:pPr>
-            <a:r>
-              <a:rPr lang="en-US" sz="900" dirty="0">
-                <a:solidFill>
-                  <a:srgbClr val="7A7266"/>
-                </a:solidFill>
-                <a:latin typeface="Calibri" pitchFamily="34" charset="0"/>
-                <a:ea typeface="Calibri" pitchFamily="34" charset="-122"/>
-                <a:cs typeface="Calibri" pitchFamily="34" charset="-120"/>
-              </a:rPr>
-              <a:t>roadmap</a:t>
-            </a:r>
-            <a:endParaRPr lang="en-US" sz="900" dirty="0"/>
-          </a:p>
-        </p:txBody>
-      </p:sp>
-      <p:sp>
-        <p:nvSpPr>
-          <p:cNvPr id="13" name="Shape 11"/>
-          <p:cNvSpPr/>
-          <p:nvPr/>
-        </p:nvSpPr>
-        <p:spPr>
-          <a:xfrm>
-            <a:off x="7040880" y="2029968"/>
-            <a:ext cx="4480560" cy="0"/>
-          </a:xfrm>
-          <a:prstGeom prst="line">
-            <a:avLst/>
-          </a:prstGeom>
-          <a:noFill/>
-          <a:ln w="12700">
-            <a:solidFill>
-              <a:srgbClr val="E4DCC9"/>
-            </a:solidFill>
-            <a:prstDash val="solid"/>
-          </a:ln>
-        </p:spPr>
-      </p:sp>
-      <p:sp>
-        <p:nvSpPr>
-          <p:cNvPr id="14" name="Shape 12"/>
-          <p:cNvSpPr/>
-          <p:nvPr/>
-        </p:nvSpPr>
-        <p:spPr>
-          <a:xfrm>
-            <a:off x="7516368" y="2615184"/>
-            <a:ext cx="3529584" cy="0"/>
-          </a:xfrm>
-          <a:prstGeom prst="line">
-            <a:avLst/>
-          </a:prstGeom>
-          <a:noFill/>
-          <a:ln w="25400">
-            <a:solidFill>
-              <a:srgbClr val="E4DCC9"/>
-            </a:solidFill>
-            <a:prstDash val="solid"/>
-          </a:ln>
-        </p:spPr>
-      </p:sp>
-      <p:sp>
-        <p:nvSpPr>
-          <p:cNvPr id="15" name="Shape 13"/>
-          <p:cNvSpPr/>
-          <p:nvPr/>
-        </p:nvSpPr>
-        <p:spPr>
-          <a:xfrm>
-            <a:off x="7296912" y="2395728"/>
-            <a:ext cx="438912" cy="438912"/>
-          </a:xfrm>
-          <a:prstGeom prst="ellipse">
-            <a:avLst/>
-          </a:prstGeom>
-          <a:solidFill>
-            <a:srgbClr val="FFFFFF"/>
-          </a:solidFill>
-          <a:ln w="25400">
-            <a:solidFill>
-              <a:srgbClr val="9C7C2E"/>
-            </a:solidFill>
-            <a:prstDash val="solid"/>
-          </a:ln>
-        </p:spPr>
-      </p:sp>
-      <p:sp>
-        <p:nvSpPr>
-          <p:cNvPr id="16" name="Text 14"/>
-          <p:cNvSpPr txBox="1"/>
-          <p:nvPr/>
-        </p:nvSpPr>
-        <p:spPr>
-          <a:xfrm>
-            <a:off x="7296912" y="2386584"/>
-            <a:ext cx="438912" cy="438912"/>
-          </a:xfrm>
-          <a:prstGeom prst="rect">
-            <a:avLst/>
-          </a:prstGeom>
-          <a:noFill/>
-          <a:ln/>
-        </p:spPr>
-        <p:txBody>
-          <a:bodyPr wrap="square" lIns="0" tIns="0" rIns="0" bIns="0" rtlCol="0" anchor="ctr"/>
-          <a:lstStyle/>
-          <a:p>
-            <a:pPr algn="ctr" indent="0" marL="0">
-              <a:buNone/>
-            </a:pPr>
-            <a:r>
-              <a:rPr lang="en-US" sz="1100" b="1" dirty="0">
-                <a:solidFill>
-                  <a:srgbClr val="9C7C2E"/>
-                </a:solidFill>
-                <a:latin typeface="Calibri" pitchFamily="34" charset="0"/>
-                <a:ea typeface="Calibri" pitchFamily="34" charset="-122"/>
-                <a:cs typeface="Calibri" pitchFamily="34" charset="-120"/>
-              </a:rPr>
-              <a:t>1</a:t>
-            </a:r>
-            <a:endParaRPr lang="en-US" sz="1100" dirty="0"/>
-          </a:p>
-        </p:txBody>
-      </p:sp>
-      <p:sp>
-        <p:nvSpPr>
-          <p:cNvPr id="17" name="Shape 15"/>
-          <p:cNvSpPr/>
-          <p:nvPr/>
-        </p:nvSpPr>
-        <p:spPr>
-          <a:xfrm>
-            <a:off x="9061704" y="2395728"/>
-            <a:ext cx="438912" cy="438912"/>
-          </a:xfrm>
-          <a:prstGeom prst="ellipse">
-            <a:avLst/>
-          </a:prstGeom>
-          <a:solidFill>
-            <a:srgbClr val="FFFFFF"/>
-          </a:solidFill>
-          <a:ln w="25400">
-            <a:solidFill>
-              <a:srgbClr val="9C7C2E"/>
-            </a:solidFill>
-            <a:prstDash val="solid"/>
-          </a:ln>
-        </p:spPr>
-      </p:sp>
-      <p:sp>
-        <p:nvSpPr>
-          <p:cNvPr id="18" name="Text 16"/>
-          <p:cNvSpPr txBox="1"/>
-          <p:nvPr/>
-        </p:nvSpPr>
-        <p:spPr>
-          <a:xfrm>
-            <a:off x="9061704" y="2386584"/>
-            <a:ext cx="438912" cy="438912"/>
-          </a:xfrm>
-          <a:prstGeom prst="rect">
-            <a:avLst/>
-          </a:prstGeom>
-          <a:noFill/>
-          <a:ln/>
-        </p:spPr>
-        <p:txBody>
-          <a:bodyPr wrap="square" lIns="0" tIns="0" rIns="0" bIns="0" rtlCol="0" anchor="ctr"/>
-          <a:lstStyle/>
-          <a:p>
-            <a:pPr algn="ctr" indent="0" marL="0">
-              <a:buNone/>
-            </a:pPr>
-            <a:r>
-              <a:rPr lang="en-US" sz="1100" b="1" dirty="0">
-                <a:solidFill>
-                  <a:srgbClr val="9C7C2E"/>
-                </a:solidFill>
-                <a:latin typeface="Calibri" pitchFamily="34" charset="0"/>
-                <a:ea typeface="Calibri" pitchFamily="34" charset="-122"/>
-                <a:cs typeface="Calibri" pitchFamily="34" charset="-120"/>
-              </a:rPr>
-              <a:t>2</a:t>
-            </a:r>
-            <a:endParaRPr lang="en-US" sz="1100" dirty="0"/>
-          </a:p>
-        </p:txBody>
-      </p:sp>
-      <p:sp>
-        <p:nvSpPr>
-          <p:cNvPr id="19" name="Shape 17"/>
-          <p:cNvSpPr/>
-          <p:nvPr/>
-        </p:nvSpPr>
-        <p:spPr>
-          <a:xfrm>
-            <a:off x="10826496" y="2395728"/>
-            <a:ext cx="438912" cy="438912"/>
-          </a:xfrm>
-          <a:prstGeom prst="ellipse">
-            <a:avLst/>
-          </a:prstGeom>
-          <a:solidFill>
-            <a:srgbClr val="FFFFFF"/>
-          </a:solidFill>
-          <a:ln w="25400">
-            <a:solidFill>
-              <a:srgbClr val="9C7C2E"/>
-            </a:solidFill>
-            <a:prstDash val="solid"/>
-          </a:ln>
-        </p:spPr>
-      </p:sp>
-      <p:sp>
-        <p:nvSpPr>
-          <p:cNvPr id="20" name="Text 18"/>
-          <p:cNvSpPr txBox="1"/>
-          <p:nvPr/>
-        </p:nvSpPr>
-        <p:spPr>
-          <a:xfrm>
-            <a:off x="10826496" y="2386584"/>
-            <a:ext cx="438912" cy="438912"/>
-          </a:xfrm>
-          <a:prstGeom prst="rect">
-            <a:avLst/>
-          </a:prstGeom>
-          <a:noFill/>
-          <a:ln/>
-        </p:spPr>
-        <p:txBody>
-          <a:bodyPr wrap="square" lIns="0" tIns="0" rIns="0" bIns="0" rtlCol="0" anchor="ctr"/>
-          <a:lstStyle/>
-          <a:p>
-            <a:pPr algn="ctr" indent="0" marL="0">
-              <a:buNone/>
-            </a:pPr>
-            <a:r>
-              <a:rPr lang="en-US" sz="1100" b="1" dirty="0">
-                <a:solidFill>
-                  <a:srgbClr val="9C7C2E"/>
-                </a:solidFill>
-                <a:latin typeface="Calibri" pitchFamily="34" charset="0"/>
-                <a:ea typeface="Calibri" pitchFamily="34" charset="-122"/>
-                <a:cs typeface="Calibri" pitchFamily="34" charset="-120"/>
-              </a:rPr>
-              <a:t>3</a:t>
-            </a:r>
-            <a:endParaRPr lang="en-US" sz="1100" dirty="0"/>
-          </a:p>
-        </p:txBody>
-      </p:sp>
-      <p:sp>
-        <p:nvSpPr>
-          <p:cNvPr id="21" name="Shape 19"/>
-          <p:cNvSpPr/>
-          <p:nvPr/>
-        </p:nvSpPr>
-        <p:spPr>
-          <a:xfrm>
-            <a:off x="7296912" y="3154680"/>
-            <a:ext cx="3968496" cy="566928"/>
-          </a:xfrm>
-          <a:prstGeom prst="roundRect">
-            <a:avLst>
-              <a:gd name="adj" fmla="val 8065"/>
-            </a:avLst>
-          </a:prstGeom>
-          <a:solidFill>
-            <a:srgbClr val="FBFAF6"/>
-          </a:solidFill>
-          <a:ln w="12700">
-            <a:solidFill>
-              <a:srgbClr val="E4DCC9"/>
-            </a:solidFill>
-            <a:prstDash val="solid"/>
-          </a:ln>
-        </p:spPr>
-      </p:sp>
-      <p:sp>
-        <p:nvSpPr>
-          <p:cNvPr id="22" name="Shape 20"/>
-          <p:cNvSpPr/>
-          <p:nvPr/>
-        </p:nvSpPr>
-        <p:spPr>
-          <a:xfrm>
-            <a:off x="7443216" y="3387852"/>
-            <a:ext cx="100584" cy="100584"/>
-          </a:xfrm>
-          <a:prstGeom prst="ellipse">
-            <a:avLst/>
-          </a:prstGeom>
-          <a:solidFill>
-            <a:srgbClr val="B0842F"/>
-          </a:solidFill>
-          <a:ln/>
-        </p:spPr>
-      </p:sp>
-      <p:sp>
-        <p:nvSpPr>
-          <p:cNvPr id="23" name="Shape 21"/>
-          <p:cNvSpPr/>
-          <p:nvPr/>
-        </p:nvSpPr>
-        <p:spPr>
-          <a:xfrm>
-            <a:off x="7680960" y="3396996"/>
-            <a:ext cx="1825508" cy="82296"/>
+            <a:off x="822960" y="5120640"/>
+            <a:ext cx="3291840" cy="512064"/>
           </a:xfrm>
           <a:prstGeom prst="roundRect">
             <a:avLst>
@@ -20129,28 +19691,6 @@
             </a:avLst>
           </a:prstGeom>
           <a:solidFill>
-            <a:srgbClr val="E4DCC9"/>
-          </a:solidFill>
-          <a:ln/>
-        </p:spPr>
-      </p:sp>
-      <p:sp>
-        <p:nvSpPr>
-          <p:cNvPr id="24" name="Shape 22"/>
-          <p:cNvSpPr/>
-          <p:nvPr/>
-        </p:nvSpPr>
-        <p:spPr>
-          <a:xfrm>
-            <a:off x="7680960" y="3396996"/>
-            <a:ext cx="1314366" cy="82296"/>
-          </a:xfrm>
-          <a:prstGeom prst="roundRect">
-            <a:avLst>
-              <a:gd name="adj" fmla="val 50000"/>
-            </a:avLst>
-          </a:prstGeom>
-          <a:solidFill>
             <a:srgbClr val="9C7C2E"/>
           </a:solidFill>
           <a:ln/>
@@ -20158,41 +19698,14 @@
       </p:sp>
       <p:sp>
         <p:nvSpPr>
-          <p:cNvPr id="25" name="Shape 23"/>
-          <p:cNvSpPr/>
-          <p:nvPr/>
-        </p:nvSpPr>
-        <p:spPr>
-          <a:xfrm>
-            <a:off x="10062972" y="3291840"/>
-            <a:ext cx="1074420" cy="292608"/>
-          </a:xfrm>
-          <a:prstGeom prst="roundRect">
-            <a:avLst>
-              <a:gd name="adj" fmla="val 50000"/>
-            </a:avLst>
-          </a:prstGeom>
-          <a:solidFill>
-            <a:srgbClr val="FFFFFF"/>
-          </a:solidFill>
-          <a:ln w="12700">
-            <a:solidFill>
-              <a:srgbClr val="E4DCC9"/>
-            </a:solidFill>
-            <a:prstDash val="solid"/>
-          </a:ln>
-        </p:spPr>
-      </p:sp>
-      <p:sp>
-        <p:nvSpPr>
-          <p:cNvPr id="26" name="Text 24"/>
-          <p:cNvSpPr txBox="1"/>
-          <p:nvPr/>
-        </p:nvSpPr>
-        <p:spPr>
-          <a:xfrm>
-            <a:off x="10062972" y="3282696"/>
-            <a:ext cx="1074420" cy="310896"/>
+          <p:cNvPr id="8" name="Text 6"/>
+          <p:cNvSpPr txBox="1"/>
+          <p:nvPr/>
+        </p:nvSpPr>
+        <p:spPr>
+          <a:xfrm>
+            <a:off x="822960" y="5111496"/>
+            <a:ext cx="3291840" cy="530352"/>
           </a:xfrm>
           <a:prstGeom prst="rect">
             <a:avLst/>
@@ -20208,148 +19721,30 @@
               <a:buNone/>
             </a:pPr>
             <a:r>
-              <a:rPr lang="en-US" sz="850" dirty="0">
-                <a:solidFill>
-                  <a:srgbClr val="7A7266"/>
-                </a:solidFill>
-                <a:latin typeface="Calibri" pitchFamily="34" charset="0"/>
-                <a:ea typeface="Calibri" pitchFamily="34" charset="-122"/>
-                <a:cs typeface="Calibri" pitchFamily="34" charset="-120"/>
-              </a:rPr>
-              <a:t>in progress</a:t>
-            </a:r>
-            <a:endParaRPr lang="en-US" sz="850" dirty="0"/>
-          </a:p>
-        </p:txBody>
-      </p:sp>
-      <p:sp>
-        <p:nvSpPr>
-          <p:cNvPr id="27" name="Shape 25"/>
-          <p:cNvSpPr/>
-          <p:nvPr/>
-        </p:nvSpPr>
-        <p:spPr>
-          <a:xfrm>
-            <a:off x="7296912" y="3849624"/>
-            <a:ext cx="3968496" cy="566928"/>
-          </a:xfrm>
-          <a:prstGeom prst="roundRect">
-            <a:avLst>
-              <a:gd name="adj" fmla="val 8065"/>
-            </a:avLst>
-          </a:prstGeom>
-          <a:solidFill>
-            <a:srgbClr val="FBFAF6"/>
-          </a:solidFill>
-          <a:ln w="12700">
-            <a:solidFill>
-              <a:srgbClr val="E4DCC9"/>
-            </a:solidFill>
-            <a:prstDash val="solid"/>
-          </a:ln>
-        </p:spPr>
-      </p:sp>
-      <p:sp>
-        <p:nvSpPr>
-          <p:cNvPr id="28" name="Shape 26"/>
-          <p:cNvSpPr/>
-          <p:nvPr/>
-        </p:nvSpPr>
-        <p:spPr>
-          <a:xfrm>
-            <a:off x="7443216" y="4082796"/>
-            <a:ext cx="100584" cy="100584"/>
-          </a:xfrm>
-          <a:prstGeom prst="ellipse">
-            <a:avLst/>
-          </a:prstGeom>
-          <a:solidFill>
-            <a:srgbClr val="A4442F"/>
-          </a:solidFill>
-          <a:ln/>
-        </p:spPr>
-      </p:sp>
-      <p:sp>
-        <p:nvSpPr>
-          <p:cNvPr id="29" name="Shape 27"/>
-          <p:cNvSpPr/>
-          <p:nvPr/>
-        </p:nvSpPr>
-        <p:spPr>
-          <a:xfrm>
-            <a:off x="7680960" y="4091940"/>
-            <a:ext cx="1825508" cy="82296"/>
-          </a:xfrm>
-          <a:prstGeom prst="roundRect">
-            <a:avLst>
-              <a:gd name="adj" fmla="val 50000"/>
-            </a:avLst>
-          </a:prstGeom>
-          <a:solidFill>
-            <a:srgbClr val="E4DCC9"/>
-          </a:solidFill>
-          <a:ln/>
-        </p:spPr>
-      </p:sp>
-      <p:sp>
-        <p:nvSpPr>
-          <p:cNvPr id="30" name="Shape 28"/>
-          <p:cNvSpPr/>
-          <p:nvPr/>
-        </p:nvSpPr>
-        <p:spPr>
-          <a:xfrm>
-            <a:off x="7680960" y="4091940"/>
-            <a:ext cx="839734" cy="82296"/>
-          </a:xfrm>
-          <a:prstGeom prst="roundRect">
-            <a:avLst>
-              <a:gd name="adj" fmla="val 50000"/>
-            </a:avLst>
-          </a:prstGeom>
-          <a:solidFill>
-            <a:srgbClr val="9C7C2E"/>
-          </a:solidFill>
-          <a:ln/>
-        </p:spPr>
-      </p:sp>
-      <p:sp>
-        <p:nvSpPr>
-          <p:cNvPr id="31" name="Shape 29"/>
-          <p:cNvSpPr/>
-          <p:nvPr/>
-        </p:nvSpPr>
-        <p:spPr>
-          <a:xfrm>
-            <a:off x="9994392" y="3986784"/>
-            <a:ext cx="1143000" cy="292608"/>
-          </a:xfrm>
-          <a:prstGeom prst="roundRect">
-            <a:avLst>
-              <a:gd name="adj" fmla="val 50000"/>
-            </a:avLst>
-          </a:prstGeom>
-          <a:solidFill>
-            <a:srgbClr val="FFFFFF"/>
-          </a:solidFill>
-          <a:ln w="12700">
-            <a:solidFill>
-              <a:srgbClr val="E4DCC9"/>
-            </a:solidFill>
-            <a:prstDash val="solid"/>
-          </a:ln>
-        </p:spPr>
-      </p:sp>
-      <p:sp>
-        <p:nvSpPr>
-          <p:cNvPr id="32" name="Text 30"/>
-          <p:cNvSpPr txBox="1"/>
-          <p:nvPr/>
-        </p:nvSpPr>
-        <p:spPr>
-          <a:xfrm>
-            <a:off x="9994392" y="3977640"/>
-            <a:ext cx="1143000" cy="310896"/>
+              <a:rPr lang="en-US" sz="1200" b="1" dirty="0">
+                <a:solidFill>
+                  <a:srgbClr val="FFFFFF"/>
+                </a:solidFill>
+                <a:latin typeface="Calibri" pitchFamily="34" charset="0"/>
+                <a:ea typeface="Calibri" pitchFamily="34" charset="-122"/>
+                <a:cs typeface="Calibri" pitchFamily="34" charset="-120"/>
+              </a:rPr>
+              <a:t>Approve Phase 1 to begin</a:t>
+            </a:r>
+            <a:endParaRPr lang="en-US" sz="1200" dirty="0"/>
+          </a:p>
+        </p:txBody>
+      </p:sp>
+      <p:sp>
+        <p:nvSpPr>
+          <p:cNvPr id="9" name="Text 7"/>
+          <p:cNvSpPr txBox="1"/>
+          <p:nvPr/>
+        </p:nvSpPr>
+        <p:spPr>
+          <a:xfrm>
+            <a:off x="822960" y="5806440"/>
+            <a:ext cx="8686800" cy="365760"/>
           </a:xfrm>
           <a:prstGeom prst="rect">
             <a:avLst/>
@@ -20361,21 +19756,21 @@
           <a:bodyPr wrap="square" lIns="0" tIns="0" rIns="0" bIns="0" rtlCol="0" anchor="ctr"/>
           <a:lstStyle/>
           <a:p>
-            <a:pPr algn="ctr" indent="0" marL="0">
-              <a:buNone/>
-            </a:pPr>
-            <a:r>
-              <a:rPr lang="en-US" sz="850" dirty="0">
-                <a:solidFill>
-                  <a:srgbClr val="7A7266"/>
-                </a:solidFill>
-                <a:latin typeface="Calibri" pitchFamily="34" charset="0"/>
-                <a:ea typeface="Calibri" pitchFamily="34" charset="-122"/>
-                <a:cs typeface="Calibri" pitchFamily="34" charset="-120"/>
-              </a:rPr>
-              <a:t>mockups only</a:t>
-            </a:r>
-            <a:endParaRPr lang="en-US" sz="850" dirty="0"/>
+            <a:pPr indent="0" marL="0">
+              <a:buNone/>
+            </a:pPr>
+            <a:r>
+              <a:rPr lang="en-US" sz="1100" dirty="0">
+                <a:solidFill>
+                  <a:srgbClr val="B7AE9E"/>
+                </a:solidFill>
+                <a:latin typeface="Calibri" pitchFamily="34" charset="0"/>
+                <a:ea typeface="Calibri" pitchFamily="34" charset="-122"/>
+                <a:cs typeface="Calibri" pitchFamily="34" charset="-120"/>
+              </a:rPr>
+              <a:t>Targeting an end-of-March go-live   ·   tdwinkler@deeprootsbible.com</a:t>
+            </a:r>
+            <a:endParaRPr lang="en-US" sz="1100" dirty="0"/>
           </a:p>
         </p:txBody>
       </p:sp>
@@ -21174,309 +20569,6 @@
               <a:t>The data behind it all: Salesforce, the learning platform, and one secure database</a:t>
             </a:r>
             <a:endParaRPr lang="en-US" sz="850" dirty="0"/>
-          </a:p>
-        </p:txBody>
-      </p:sp>
-    </p:spTree>
-  </p:cSld>
-  <p:clrMapOvr>
-    <a:masterClrMapping/>
-  </p:clrMapOvr>
-</p:sld>
-</file>
-
-<file path=ppt/slides/slide30.xml><?xml version="1.0" encoding="utf-8"?>
-<p:sld xmlns:a="http://schemas.openxmlformats.org/drawingml/2006/main" xmlns:r="http://schemas.openxmlformats.org/officeDocument/2006/relationships" xmlns:p="http://schemas.openxmlformats.org/presentationml/2006/main">
-  <p:cSld name="Slide 30">
-    <p:bg>
-      <p:bgPr>
-        <a:solidFill>
-          <a:srgbClr val="211B12"/>
-        </a:solidFill>
-      </p:bgPr>
-    </p:bg>
-    <p:spTree>
-      <p:nvGrpSpPr>
-        <p:cNvPr id="1" name=""/>
-        <p:cNvGrpSpPr/>
-        <p:nvPr/>
-      </p:nvGrpSpPr>
-      <p:grpSpPr>
-        <a:xfrm>
-          <a:off x="0" y="0"/>
-          <a:ext cx="0" cy="0"/>
-          <a:chOff x="0" y="0"/>
-          <a:chExt cx="0" cy="0"/>
-        </a:xfrm>
-      </p:grpSpPr>
-      <p:sp>
-        <p:nvSpPr>
-          <p:cNvPr id="2" name="Shape 0"/>
-          <p:cNvSpPr/>
-          <p:nvPr/>
-        </p:nvSpPr>
-        <p:spPr>
-          <a:xfrm>
-            <a:off x="9079992" y="-1463040"/>
-            <a:ext cx="4206240" cy="4206240"/>
-          </a:xfrm>
-          <a:prstGeom prst="ellipse">
-            <a:avLst/>
-          </a:prstGeom>
-          <a:ln w="15875">
-            <a:solidFill>
-              <a:srgbClr val="9C7C2E">
-                <a:alpha val="45000"/>
-              </a:srgbClr>
-            </a:solidFill>
-            <a:prstDash val="solid"/>
-          </a:ln>
-        </p:spPr>
-      </p:sp>
-      <p:sp>
-        <p:nvSpPr>
-          <p:cNvPr id="3" name="Shape 1"/>
-          <p:cNvSpPr/>
-          <p:nvPr/>
-        </p:nvSpPr>
-        <p:spPr>
-          <a:xfrm>
-            <a:off x="10085832" y="4846320"/>
-            <a:ext cx="3108960" cy="3108960"/>
-          </a:xfrm>
-          <a:prstGeom prst="ellipse">
-            <a:avLst/>
-          </a:prstGeom>
-          <a:ln w="12700">
-            <a:solidFill>
-              <a:srgbClr val="9C7C2E">
-                <a:alpha val="30000"/>
-              </a:srgbClr>
-            </a:solidFill>
-            <a:prstDash val="solid"/>
-          </a:ln>
-        </p:spPr>
-      </p:sp>
-      <p:sp>
-        <p:nvSpPr>
-          <p:cNvPr id="4" name="Text 2"/>
-          <p:cNvSpPr txBox="1"/>
-          <p:nvPr/>
-        </p:nvSpPr>
-        <p:spPr>
-          <a:xfrm>
-            <a:off x="822960" y="2194560"/>
-            <a:ext cx="7315200" cy="274320"/>
-          </a:xfrm>
-          <a:prstGeom prst="rect">
-            <a:avLst/>
-          </a:prstGeom>
-          <a:noFill/>
-          <a:ln/>
-        </p:spPr>
-        <p:txBody>
-          <a:bodyPr wrap="square" lIns="0" tIns="0" rIns="0" bIns="0" rtlCol="0" anchor="ctr"/>
-          <a:lstStyle/>
-          <a:p>
-            <a:pPr indent="0" marL="0">
-              <a:buNone/>
-            </a:pPr>
-            <a:r>
-              <a:rPr lang="en-US" sz="1100" b="1" spc="300" kern="0" dirty="0">
-                <a:solidFill>
-                  <a:srgbClr val="C4A24E"/>
-                </a:solidFill>
-                <a:latin typeface="Calibri" pitchFamily="34" charset="0"/>
-                <a:ea typeface="Calibri" pitchFamily="34" charset="-122"/>
-                <a:cs typeface="Calibri" pitchFamily="34" charset="-120"/>
-              </a:rPr>
-              <a:t>DEEPROOTS · PORTAL &amp; OPTIMIZATION</a:t>
-            </a:r>
-            <a:endParaRPr lang="en-US" sz="1100" dirty="0"/>
-          </a:p>
-        </p:txBody>
-      </p:sp>
-      <p:sp>
-        <p:nvSpPr>
-          <p:cNvPr id="5" name="Text 3"/>
-          <p:cNvSpPr txBox="1"/>
-          <p:nvPr/>
-        </p:nvSpPr>
-        <p:spPr>
-          <a:xfrm>
-            <a:off x="822960" y="2514600"/>
-            <a:ext cx="9601200" cy="1828800"/>
-          </a:xfrm>
-          <a:prstGeom prst="rect">
-            <a:avLst/>
-          </a:prstGeom>
-          <a:noFill/>
-          <a:ln/>
-        </p:spPr>
-        <p:txBody>
-          <a:bodyPr wrap="square" lIns="0" tIns="0" rIns="0" bIns="0" rtlCol="0" anchor="ctr"/>
-          <a:lstStyle/>
-          <a:p>
-            <a:pPr indent="0" marL="0">
-              <a:lnSpc>
-                <a:spcPct val="98000"/>
-              </a:lnSpc>
-              <a:buNone/>
-            </a:pPr>
-            <a:r>
-              <a:rPr lang="en-US" sz="4000" b="1" dirty="0">
-                <a:solidFill>
-                  <a:srgbClr val="F3ECDD"/>
-                </a:solidFill>
-                <a:latin typeface="Georgia" pitchFamily="34" charset="0"/>
-                <a:ea typeface="Georgia" pitchFamily="34" charset="-122"/>
-                <a:cs typeface="Georgia" pitchFamily="34" charset="-120"/>
-              </a:rPr>
-              <a:t>What we’d build</a:t>
-            </a:r>
-            <a:endParaRPr lang="en-US" sz="4000" dirty="0"/>
-          </a:p>
-        </p:txBody>
-      </p:sp>
-      <p:sp>
-        <p:nvSpPr>
-          <p:cNvPr id="6" name="Text 4"/>
-          <p:cNvSpPr txBox="1"/>
-          <p:nvPr/>
-        </p:nvSpPr>
-        <p:spPr>
-          <a:xfrm>
-            <a:off x="822960" y="4114800"/>
-            <a:ext cx="8686800" cy="1280160"/>
-          </a:xfrm>
-          <a:prstGeom prst="rect">
-            <a:avLst/>
-          </a:prstGeom>
-          <a:noFill/>
-          <a:ln/>
-        </p:spPr>
-        <p:txBody>
-          <a:bodyPr wrap="square" lIns="0" tIns="0" rIns="0" bIns="0" rtlCol="0" anchor="ctr"/>
-          <a:lstStyle/>
-          <a:p>
-            <a:pPr indent="0" marL="0">
-              <a:lnSpc>
-                <a:spcPct val="120000"/>
-              </a:lnSpc>
-              <a:buNone/>
-            </a:pPr>
-            <a:r>
-              <a:rPr lang="en-US" sz="1500" dirty="0">
-                <a:solidFill>
-                  <a:srgbClr val="B7AE9E"/>
-                </a:solidFill>
-                <a:latin typeface="Calibri" pitchFamily="34" charset="0"/>
-                <a:ea typeface="Calibri" pitchFamily="34" charset="-122"/>
-                <a:cs typeface="Calibri" pitchFamily="34" charset="-120"/>
-              </a:rPr>
-              <a:t>One operating picture: public site, staff portal, and School Portal over a modern data backbone. The system we’d build for DeepRoots, honest by design.</a:t>
-            </a:r>
-            <a:endParaRPr lang="en-US" sz="1500" dirty="0"/>
-          </a:p>
-        </p:txBody>
-      </p:sp>
-      <p:sp>
-        <p:nvSpPr>
-          <p:cNvPr id="7" name="Shape 5"/>
-          <p:cNvSpPr/>
-          <p:nvPr/>
-        </p:nvSpPr>
-        <p:spPr>
-          <a:xfrm>
-            <a:off x="822960" y="5120640"/>
-            <a:ext cx="3291840" cy="512064"/>
-          </a:xfrm>
-          <a:prstGeom prst="roundRect">
-            <a:avLst>
-              <a:gd name="adj" fmla="val 50000"/>
-            </a:avLst>
-          </a:prstGeom>
-          <a:solidFill>
-            <a:srgbClr val="9C7C2E"/>
-          </a:solidFill>
-          <a:ln/>
-        </p:spPr>
-      </p:sp>
-      <p:sp>
-        <p:nvSpPr>
-          <p:cNvPr id="8" name="Text 6"/>
-          <p:cNvSpPr txBox="1"/>
-          <p:nvPr/>
-        </p:nvSpPr>
-        <p:spPr>
-          <a:xfrm>
-            <a:off x="822960" y="5111496"/>
-            <a:ext cx="3291840" cy="530352"/>
-          </a:xfrm>
-          <a:prstGeom prst="rect">
-            <a:avLst/>
-          </a:prstGeom>
-          <a:noFill/>
-          <a:ln/>
-        </p:spPr>
-        <p:txBody>
-          <a:bodyPr wrap="square" lIns="0" tIns="0" rIns="0" bIns="0" rtlCol="0" anchor="ctr"/>
-          <a:lstStyle/>
-          <a:p>
-            <a:pPr algn="ctr" indent="0" marL="0">
-              <a:buNone/>
-            </a:pPr>
-            <a:r>
-              <a:rPr lang="en-US" sz="1200" b="1" dirty="0">
-                <a:solidFill>
-                  <a:srgbClr val="FFFFFF"/>
-                </a:solidFill>
-                <a:latin typeface="Calibri" pitchFamily="34" charset="0"/>
-                <a:ea typeface="Calibri" pitchFamily="34" charset="-122"/>
-                <a:cs typeface="Calibri" pitchFamily="34" charset="-120"/>
-              </a:rPr>
-              <a:t>Approve Phase 1 to begin</a:t>
-            </a:r>
-            <a:endParaRPr lang="en-US" sz="1200" dirty="0"/>
-          </a:p>
-        </p:txBody>
-      </p:sp>
-      <p:sp>
-        <p:nvSpPr>
-          <p:cNvPr id="9" name="Text 7"/>
-          <p:cNvSpPr txBox="1"/>
-          <p:nvPr/>
-        </p:nvSpPr>
-        <p:spPr>
-          <a:xfrm>
-            <a:off x="822960" y="5806440"/>
-            <a:ext cx="8686800" cy="365760"/>
-          </a:xfrm>
-          <a:prstGeom prst="rect">
-            <a:avLst/>
-          </a:prstGeom>
-          <a:noFill/>
-          <a:ln/>
-        </p:spPr>
-        <p:txBody>
-          <a:bodyPr wrap="square" lIns="0" tIns="0" rIns="0" bIns="0" rtlCol="0" anchor="ctr"/>
-          <a:lstStyle/>
-          <a:p>
-            <a:pPr indent="0" marL="0">
-              <a:buNone/>
-            </a:pPr>
-            <a:r>
-              <a:rPr lang="en-US" sz="1100" dirty="0">
-                <a:solidFill>
-                  <a:srgbClr val="B7AE9E"/>
-                </a:solidFill>
-                <a:latin typeface="Calibri" pitchFamily="34" charset="0"/>
-                <a:ea typeface="Calibri" pitchFamily="34" charset="-122"/>
-                <a:cs typeface="Calibri" pitchFamily="34" charset="-120"/>
-              </a:rPr>
-              <a:t>Targeting an end-of-March go-live   ·   tdwinkler@deeprootsbible.com</a:t>
-            </a:r>
-            <a:endParaRPr lang="en-US" sz="1100" dirty="0"/>
           </a:p>
         </p:txBody>
       </p:sp>
